--- a/material/5_AI/13_딥러닝모델개요.pptx
+++ b/material/5_AI/13_딥러닝모델개요.pptx
@@ -6,56 +6,59 @@
     <p:sldMasterId id="2147483664" r:id="rId2"/>
   </p:sldMasterIdLst>
   <p:notesMasterIdLst>
-    <p:notesMasterId r:id="rId17"/>
+    <p:notesMasterId r:id="rId20"/>
   </p:notesMasterIdLst>
   <p:sldIdLst>
     <p:sldId id="1038" r:id="rId3"/>
     <p:sldId id="635" r:id="rId4"/>
-    <p:sldId id="709" r:id="rId5"/>
-    <p:sldId id="644" r:id="rId6"/>
-    <p:sldId id="1005" r:id="rId7"/>
-    <p:sldId id="1006" r:id="rId8"/>
-    <p:sldId id="649" r:id="rId9"/>
-    <p:sldId id="1007" r:id="rId10"/>
-    <p:sldId id="1009" r:id="rId11"/>
-    <p:sldId id="721" r:id="rId12"/>
-    <p:sldId id="720" r:id="rId13"/>
-    <p:sldId id="718" r:id="rId14"/>
-    <p:sldId id="719" r:id="rId15"/>
-    <p:sldId id="750" r:id="rId16"/>
+    <p:sldId id="1039" r:id="rId5"/>
+    <p:sldId id="709" r:id="rId6"/>
+    <p:sldId id="644" r:id="rId7"/>
+    <p:sldId id="1005" r:id="rId8"/>
+    <p:sldId id="1040" r:id="rId9"/>
+    <p:sldId id="1006" r:id="rId10"/>
+    <p:sldId id="649" r:id="rId11"/>
+    <p:sldId id="1007" r:id="rId12"/>
+    <p:sldId id="1009" r:id="rId13"/>
+    <p:sldId id="721" r:id="rId14"/>
+    <p:sldId id="720" r:id="rId15"/>
+    <p:sldId id="718" r:id="rId16"/>
+    <p:sldId id="1041" r:id="rId17"/>
+    <p:sldId id="719" r:id="rId18"/>
+    <p:sldId id="750" r:id="rId19"/>
   </p:sldIdLst>
   <p:sldSz cx="12192000" cy="6858000"/>
   <p:notesSz cx="6858000" cy="9144000"/>
   <p:embeddedFontLst>
     <p:embeddedFont>
       <p:font typeface="G마켓 산스 TTF Bold" panose="02000000000000000000" pitchFamily="2" charset="-127"/>
-      <p:bold r:id="rId18"/>
+      <p:bold r:id="rId21"/>
     </p:embeddedFont>
     <p:embeddedFont>
       <p:font typeface="G마켓 산스 TTF Medium" panose="02000000000000000000" pitchFamily="2" charset="-127"/>
-      <p:regular r:id="rId19"/>
+      <p:regular r:id="rId22"/>
     </p:embeddedFont>
     <p:embeddedFont>
       <p:font typeface="Pretendard Black" panose="02000A03000000020004" pitchFamily="50" charset="-127"/>
-      <p:bold r:id="rId20"/>
+      <p:bold r:id="rId23"/>
     </p:embeddedFont>
     <p:embeddedFont>
       <p:font typeface="Pretendard Light" panose="02000403000000020004" pitchFamily="50" charset="-127"/>
-      <p:regular r:id="rId21"/>
+      <p:regular r:id="rId24"/>
     </p:embeddedFont>
     <p:embeddedFont>
       <p:font typeface="Pretendard Medium" panose="02000603000000020004" pitchFamily="50" charset="-127"/>
-      <p:regular r:id="rId22"/>
+      <p:regular r:id="rId25"/>
     </p:embeddedFont>
     <p:embeddedFont>
       <p:font typeface="맑은 고딕" panose="020B0503020000020004" pitchFamily="50" charset="-127"/>
-      <p:regular r:id="rId23"/>
-      <p:bold r:id="rId24"/>
+      <p:regular r:id="rId26"/>
+      <p:bold r:id="rId27"/>
     </p:embeddedFont>
     <p:embeddedFont>
       <p:font typeface="메이플스토리" panose="02000300000000000000" pitchFamily="2" charset="-127"/>
-      <p:regular r:id="rId25"/>
-      <p:bold r:id="rId26"/>
+      <p:regular r:id="rId28"/>
+      <p:bold r:id="rId29"/>
     </p:embeddedFont>
   </p:embeddedFontLst>
   <p:defaultTextStyle>
@@ -257,7 +260,7 @@
           <a:p>
             <a:fld id="{2EF3F159-7250-4DD4-91C2-13B35D56E1AF}" type="datetimeFigureOut">
               <a:rPr lang="ko-KR" altLang="en-US" smtClean="0"/>
-              <a:t>2026-02-19</a:t>
+              <a:t>2026-02-20</a:t>
             </a:fld>
             <a:endParaRPr lang="ko-KR" altLang="en-US"/>
           </a:p>
@@ -625,6 +628,441 @@
 </p:notes>
 </file>
 
+<file path=ppt/notesSlides/notesSlide10.xml><?xml version="1.0" encoding="utf-8"?>
+<p:notes xmlns:a="http://schemas.openxmlformats.org/drawingml/2006/main" xmlns:r="http://schemas.openxmlformats.org/officeDocument/2006/relationships" xmlns:p="http://schemas.openxmlformats.org/presentationml/2006/main">
+  <p:cSld>
+    <p:spTree>
+      <p:nvGrpSpPr>
+        <p:cNvPr id="1" name=""/>
+        <p:cNvGrpSpPr/>
+        <p:nvPr/>
+      </p:nvGrpSpPr>
+      <p:grpSpPr>
+        <a:xfrm>
+          <a:off x="0" y="0"/>
+          <a:ext cx="0" cy="0"/>
+          <a:chOff x="0" y="0"/>
+          <a:chExt cx="0" cy="0"/>
+        </a:xfrm>
+      </p:grpSpPr>
+      <p:sp>
+        <p:nvSpPr>
+          <p:cNvPr id="2" name="슬라이드 이미지 개체 틀 1"/>
+          <p:cNvSpPr>
+            <a:spLocks noGrp="1" noRot="1" noChangeAspect="1"/>
+          </p:cNvSpPr>
+          <p:nvPr>
+            <p:ph type="sldImg"/>
+          </p:nvPr>
+        </p:nvSpPr>
+        <p:spPr/>
+      </p:sp>
+      <p:sp>
+        <p:nvSpPr>
+          <p:cNvPr id="3" name="슬라이드 노트 개체 틀 2"/>
+          <p:cNvSpPr>
+            <a:spLocks noGrp="1"/>
+          </p:cNvSpPr>
+          <p:nvPr>
+            <p:ph type="body" idx="1"/>
+          </p:nvPr>
+        </p:nvSpPr>
+        <p:spPr/>
+        <p:txBody>
+          <a:bodyPr/>
+          <a:lstStyle/>
+          <a:p>
+            <a:r>
+              <a:rPr lang="en-US" altLang="ko-KR" dirty="0"/>
+              <a:t>Attention </a:t>
+            </a:r>
+            <a:r>
+              <a:rPr lang="ko-KR" altLang="en-US" dirty="0"/>
+              <a:t>개념 설명</a:t>
+            </a:r>
+          </a:p>
+          <a:p>
+            <a:r>
+              <a:rPr lang="ko-KR" altLang="en-US" dirty="0"/>
+              <a:t>입력 간의 관계를 동시에 계산합니다</a:t>
+            </a:r>
+            <a:r>
+              <a:rPr lang="en-US" altLang="ko-KR" dirty="0"/>
+              <a:t>.</a:t>
+            </a:r>
+            <a:endParaRPr lang="ko-KR" altLang="en-US" dirty="0"/>
+          </a:p>
+        </p:txBody>
+      </p:sp>
+      <p:sp>
+        <p:nvSpPr>
+          <p:cNvPr id="4" name="슬라이드 번호 개체 틀 3"/>
+          <p:cNvSpPr>
+            <a:spLocks noGrp="1"/>
+          </p:cNvSpPr>
+          <p:nvPr>
+            <p:ph type="sldNum" sz="quarter" idx="5"/>
+          </p:nvPr>
+        </p:nvSpPr>
+        <p:spPr/>
+        <p:txBody>
+          <a:bodyPr/>
+          <a:lstStyle/>
+          <a:p>
+            <a:fld id="{C09E5BFC-1559-42F1-8940-AB342D56BF02}" type="slidenum">
+              <a:rPr lang="ko-KR" altLang="en-US" smtClean="0"/>
+              <a:t>11</a:t>
+            </a:fld>
+            <a:endParaRPr lang="ko-KR" altLang="en-US"/>
+          </a:p>
+        </p:txBody>
+      </p:sp>
+    </p:spTree>
+    <p:extLst>
+      <p:ext uri="{BB962C8B-B14F-4D97-AF65-F5344CB8AC3E}">
+        <p14:creationId xmlns:p14="http://schemas.microsoft.com/office/powerpoint/2010/main" val="4185749958"/>
+      </p:ext>
+    </p:extLst>
+  </p:cSld>
+  <p:clrMapOvr>
+    <a:masterClrMapping/>
+  </p:clrMapOvr>
+</p:notes>
+</file>
+
+<file path=ppt/notesSlides/notesSlide11.xml><?xml version="1.0" encoding="utf-8"?>
+<p:notes xmlns:a="http://schemas.openxmlformats.org/drawingml/2006/main" xmlns:r="http://schemas.openxmlformats.org/officeDocument/2006/relationships" xmlns:p="http://schemas.openxmlformats.org/presentationml/2006/main">
+  <p:cSld>
+    <p:spTree>
+      <p:nvGrpSpPr>
+        <p:cNvPr id="1" name=""/>
+        <p:cNvGrpSpPr/>
+        <p:nvPr/>
+      </p:nvGrpSpPr>
+      <p:grpSpPr>
+        <a:xfrm>
+          <a:off x="0" y="0"/>
+          <a:ext cx="0" cy="0"/>
+          <a:chOff x="0" y="0"/>
+          <a:chExt cx="0" cy="0"/>
+        </a:xfrm>
+      </p:grpSpPr>
+      <p:sp>
+        <p:nvSpPr>
+          <p:cNvPr id="2" name="슬라이드 이미지 개체 틀 1"/>
+          <p:cNvSpPr>
+            <a:spLocks noGrp="1" noRot="1" noChangeAspect="1"/>
+          </p:cNvSpPr>
+          <p:nvPr>
+            <p:ph type="sldImg"/>
+          </p:nvPr>
+        </p:nvSpPr>
+        <p:spPr/>
+      </p:sp>
+      <p:sp>
+        <p:nvSpPr>
+          <p:cNvPr id="3" name="슬라이드 노트 개체 틀 2"/>
+          <p:cNvSpPr>
+            <a:spLocks noGrp="1"/>
+          </p:cNvSpPr>
+          <p:nvPr>
+            <p:ph type="body" idx="1"/>
+          </p:nvPr>
+        </p:nvSpPr>
+        <p:spPr/>
+        <p:txBody>
+          <a:bodyPr/>
+          <a:lstStyle/>
+          <a:p>
+            <a:endParaRPr lang="en-US" altLang="ko-KR" dirty="0"/>
+          </a:p>
+          <a:p>
+            <a:r>
+              <a:rPr lang="en-US" altLang="ko-KR" dirty="0"/>
+              <a:t>RNN </a:t>
+            </a:r>
+            <a:r>
+              <a:rPr lang="ko-KR" altLang="en-US" dirty="0"/>
+              <a:t>한계 해결</a:t>
+            </a:r>
+          </a:p>
+          <a:p>
+            <a:r>
+              <a:rPr lang="ko-KR" altLang="en-US" dirty="0"/>
+              <a:t>병렬 처리 가능</a:t>
+            </a:r>
+            <a:br>
+              <a:rPr lang="ko-KR" altLang="en-US" dirty="0"/>
+            </a:br>
+            <a:r>
+              <a:rPr lang="ko-KR" altLang="en-US" dirty="0"/>
+              <a:t>장기 의존성 문제 해결</a:t>
+            </a:r>
+          </a:p>
+        </p:txBody>
+      </p:sp>
+      <p:sp>
+        <p:nvSpPr>
+          <p:cNvPr id="4" name="슬라이드 번호 개체 틀 3"/>
+          <p:cNvSpPr>
+            <a:spLocks noGrp="1"/>
+          </p:cNvSpPr>
+          <p:nvPr>
+            <p:ph type="sldNum" sz="quarter" idx="5"/>
+          </p:nvPr>
+        </p:nvSpPr>
+        <p:spPr/>
+        <p:txBody>
+          <a:bodyPr/>
+          <a:lstStyle/>
+          <a:p>
+            <a:fld id="{C09E5BFC-1559-42F1-8940-AB342D56BF02}" type="slidenum">
+              <a:rPr lang="ko-KR" altLang="en-US" smtClean="0"/>
+              <a:t>12</a:t>
+            </a:fld>
+            <a:endParaRPr lang="ko-KR" altLang="en-US"/>
+          </a:p>
+        </p:txBody>
+      </p:sp>
+    </p:spTree>
+    <p:extLst>
+      <p:ext uri="{BB962C8B-B14F-4D97-AF65-F5344CB8AC3E}">
+        <p14:creationId xmlns:p14="http://schemas.microsoft.com/office/powerpoint/2010/main" val="4191504104"/>
+      </p:ext>
+    </p:extLst>
+  </p:cSld>
+  <p:clrMapOvr>
+    <a:masterClrMapping/>
+  </p:clrMapOvr>
+</p:notes>
+</file>
+
+<file path=ppt/notesSlides/notesSlide12.xml><?xml version="1.0" encoding="utf-8"?>
+<p:notes xmlns:a="http://schemas.openxmlformats.org/drawingml/2006/main" xmlns:r="http://schemas.openxmlformats.org/officeDocument/2006/relationships" xmlns:p="http://schemas.openxmlformats.org/presentationml/2006/main">
+  <p:cSld>
+    <p:spTree>
+      <p:nvGrpSpPr>
+        <p:cNvPr id="1" name=""/>
+        <p:cNvGrpSpPr/>
+        <p:nvPr/>
+      </p:nvGrpSpPr>
+      <p:grpSpPr>
+        <a:xfrm>
+          <a:off x="0" y="0"/>
+          <a:ext cx="0" cy="0"/>
+          <a:chOff x="0" y="0"/>
+          <a:chExt cx="0" cy="0"/>
+        </a:xfrm>
+      </p:grpSpPr>
+      <p:sp>
+        <p:nvSpPr>
+          <p:cNvPr id="2" name="슬라이드 이미지 개체 틀 1"/>
+          <p:cNvSpPr>
+            <a:spLocks noGrp="1" noRot="1" noChangeAspect="1"/>
+          </p:cNvSpPr>
+          <p:nvPr>
+            <p:ph type="sldImg"/>
+          </p:nvPr>
+        </p:nvSpPr>
+        <p:spPr/>
+      </p:sp>
+      <p:sp>
+        <p:nvSpPr>
+          <p:cNvPr id="3" name="슬라이드 노트 개체 틀 2"/>
+          <p:cNvSpPr>
+            <a:spLocks noGrp="1"/>
+          </p:cNvSpPr>
+          <p:nvPr>
+            <p:ph type="body" idx="1"/>
+          </p:nvPr>
+        </p:nvSpPr>
+        <p:spPr/>
+        <p:txBody>
+          <a:bodyPr/>
+          <a:lstStyle/>
+          <a:p>
+            <a:endParaRPr lang="ko-KR" altLang="en-US" dirty="0"/>
+          </a:p>
+          <a:p>
+            <a:r>
+              <a:rPr lang="ko-KR" altLang="en-US" dirty="0"/>
+              <a:t>현재 표준 구조</a:t>
+            </a:r>
+          </a:p>
+          <a:p>
+            <a:r>
+              <a:rPr lang="en-US" altLang="ko-KR" dirty="0"/>
+              <a:t>BERT, GPT </a:t>
+            </a:r>
+            <a:r>
+              <a:rPr lang="ko-KR" altLang="en-US" dirty="0"/>
+              <a:t>등 대형 모델 기반 구조</a:t>
+            </a:r>
+            <a:br>
+              <a:rPr lang="ko-KR" altLang="en-US" dirty="0"/>
+            </a:br>
+            <a:r>
+              <a:rPr lang="ko-KR" altLang="en-US" dirty="0"/>
+              <a:t>자연어뿐 아니라 이미지</a:t>
+            </a:r>
+            <a:r>
+              <a:rPr lang="en-US" altLang="ko-KR" dirty="0"/>
+              <a:t>, </a:t>
+            </a:r>
+            <a:r>
+              <a:rPr lang="ko-KR" altLang="en-US"/>
+              <a:t>음성 등 확장</a:t>
+            </a:r>
+          </a:p>
+          <a:p>
+            <a:endParaRPr lang="ko-KR" altLang="en-US"/>
+          </a:p>
+        </p:txBody>
+      </p:sp>
+      <p:sp>
+        <p:nvSpPr>
+          <p:cNvPr id="4" name="슬라이드 번호 개체 틀 3"/>
+          <p:cNvSpPr>
+            <a:spLocks noGrp="1"/>
+          </p:cNvSpPr>
+          <p:nvPr>
+            <p:ph type="sldNum" sz="quarter" idx="5"/>
+          </p:nvPr>
+        </p:nvSpPr>
+        <p:spPr/>
+        <p:txBody>
+          <a:bodyPr/>
+          <a:lstStyle/>
+          <a:p>
+            <a:fld id="{C09E5BFC-1559-42F1-8940-AB342D56BF02}" type="slidenum">
+              <a:rPr lang="ko-KR" altLang="en-US" smtClean="0"/>
+              <a:t>14</a:t>
+            </a:fld>
+            <a:endParaRPr lang="ko-KR" altLang="en-US"/>
+          </a:p>
+        </p:txBody>
+      </p:sp>
+    </p:spTree>
+    <p:extLst>
+      <p:ext uri="{BB962C8B-B14F-4D97-AF65-F5344CB8AC3E}">
+        <p14:creationId xmlns:p14="http://schemas.microsoft.com/office/powerpoint/2010/main" val="80057948"/>
+      </p:ext>
+    </p:extLst>
+  </p:cSld>
+  <p:clrMapOvr>
+    <a:masterClrMapping/>
+  </p:clrMapOvr>
+</p:notes>
+</file>
+
+<file path=ppt/notesSlides/notesSlide13.xml><?xml version="1.0" encoding="utf-8"?>
+<p:notes xmlns:a="http://schemas.openxmlformats.org/drawingml/2006/main" xmlns:r="http://schemas.openxmlformats.org/officeDocument/2006/relationships" xmlns:p="http://schemas.openxmlformats.org/presentationml/2006/main">
+  <p:cSld>
+    <p:spTree>
+      <p:nvGrpSpPr>
+        <p:cNvPr id="1" name="">
+          <a:extLst>
+            <a:ext uri="{FF2B5EF4-FFF2-40B4-BE49-F238E27FC236}">
+              <a16:creationId xmlns:a16="http://schemas.microsoft.com/office/drawing/2014/main" id="{A9D2EE83-52CB-E118-49CB-3EBDD6EF25B9}"/>
+            </a:ext>
+          </a:extLst>
+        </p:cNvPr>
+        <p:cNvGrpSpPr/>
+        <p:nvPr/>
+      </p:nvGrpSpPr>
+      <p:grpSpPr>
+        <a:xfrm>
+          <a:off x="0" y="0"/>
+          <a:ext cx="0" cy="0"/>
+          <a:chOff x="0" y="0"/>
+          <a:chExt cx="0" cy="0"/>
+        </a:xfrm>
+      </p:grpSpPr>
+      <p:sp>
+        <p:nvSpPr>
+          <p:cNvPr id="2" name="슬라이드 이미지 개체 틀 1">
+            <a:extLst>
+              <a:ext uri="{FF2B5EF4-FFF2-40B4-BE49-F238E27FC236}">
+                <a16:creationId xmlns:a16="http://schemas.microsoft.com/office/drawing/2014/main" id="{30F83B01-3943-C359-9322-8EB719FB824B}"/>
+              </a:ext>
+            </a:extLst>
+          </p:cNvPr>
+          <p:cNvSpPr>
+            <a:spLocks noGrp="1" noRot="1" noChangeAspect="1"/>
+          </p:cNvSpPr>
+          <p:nvPr>
+            <p:ph type="sldImg"/>
+          </p:nvPr>
+        </p:nvSpPr>
+        <p:spPr/>
+      </p:sp>
+      <p:sp>
+        <p:nvSpPr>
+          <p:cNvPr id="3" name="슬라이드 노트 개체 틀 2">
+            <a:extLst>
+              <a:ext uri="{FF2B5EF4-FFF2-40B4-BE49-F238E27FC236}">
+                <a16:creationId xmlns:a16="http://schemas.microsoft.com/office/drawing/2014/main" id="{F2F259CF-8156-0FB2-87BB-C2421F329EA1}"/>
+              </a:ext>
+            </a:extLst>
+          </p:cNvPr>
+          <p:cNvSpPr>
+            <a:spLocks noGrp="1"/>
+          </p:cNvSpPr>
+          <p:nvPr>
+            <p:ph type="body" idx="1"/>
+          </p:nvPr>
+        </p:nvSpPr>
+        <p:spPr/>
+        <p:txBody>
+          <a:bodyPr/>
+          <a:lstStyle/>
+          <a:p>
+            <a:endParaRPr lang="ko-KR" altLang="en-US" dirty="0"/>
+          </a:p>
+        </p:txBody>
+      </p:sp>
+      <p:sp>
+        <p:nvSpPr>
+          <p:cNvPr id="4" name="슬라이드 번호 개체 틀 3">
+            <a:extLst>
+              <a:ext uri="{FF2B5EF4-FFF2-40B4-BE49-F238E27FC236}">
+                <a16:creationId xmlns:a16="http://schemas.microsoft.com/office/drawing/2014/main" id="{5301DD34-5BFE-877A-E657-9B3A6B1B5CDD}"/>
+              </a:ext>
+            </a:extLst>
+          </p:cNvPr>
+          <p:cNvSpPr>
+            <a:spLocks noGrp="1"/>
+          </p:cNvSpPr>
+          <p:nvPr>
+            <p:ph type="sldNum" sz="quarter" idx="10"/>
+          </p:nvPr>
+        </p:nvSpPr>
+        <p:spPr/>
+        <p:txBody>
+          <a:bodyPr/>
+          <a:lstStyle/>
+          <a:p>
+            <a:fld id="{A0085365-8376-4996-BDD6-F39608FADAF3}" type="slidenum">
+              <a:rPr lang="ko-KR" altLang="en-US" smtClean="0"/>
+              <a:t>17</a:t>
+            </a:fld>
+            <a:endParaRPr lang="ko-KR" altLang="en-US"/>
+          </a:p>
+        </p:txBody>
+      </p:sp>
+    </p:spTree>
+    <p:extLst>
+      <p:ext uri="{BB962C8B-B14F-4D97-AF65-F5344CB8AC3E}">
+        <p14:creationId xmlns:p14="http://schemas.microsoft.com/office/powerpoint/2010/main" val="2391645545"/>
+      </p:ext>
+    </p:extLst>
+  </p:cSld>
+  <p:clrMapOvr>
+    <a:masterClrMapping/>
+  </p:clrMapOvr>
+</p:notes>
+</file>
+
 <file path=ppt/notesSlides/notesSlide2.xml><?xml version="1.0" encoding="utf-8"?>
 <p:notes xmlns:a="http://schemas.openxmlformats.org/drawingml/2006/main" xmlns:r="http://schemas.openxmlformats.org/officeDocument/2006/relationships" xmlns:p="http://schemas.openxmlformats.org/presentationml/2006/main">
   <p:cSld>
@@ -669,6 +1107,44 @@
           <a:bodyPr/>
           <a:lstStyle/>
           <a:p>
+            <a:r>
+              <a:rPr lang="ko-KR" altLang="en-US" dirty="0"/>
+              <a:t>오늘은 프로젝트에 들어가기 전 마지막 정리 시간입니다</a:t>
+            </a:r>
+            <a:r>
+              <a:rPr lang="en-US" altLang="ko-KR" dirty="0"/>
+              <a:t>.</a:t>
+            </a:r>
+            <a:br>
+              <a:rPr lang="en-US" altLang="ko-KR" dirty="0"/>
+            </a:br>
+            <a:r>
+              <a:rPr lang="ko-KR" altLang="en-US" dirty="0"/>
+              <a:t>우리가 지금까지 구현했던 모델들이 딥러닝 구조 안에서 어디에 위치하는지 정리해보겠습니다</a:t>
+            </a:r>
+            <a:r>
+              <a:rPr lang="en-US" altLang="ko-KR" dirty="0"/>
+              <a:t>.</a:t>
+            </a:r>
+            <a:br>
+              <a:rPr lang="en-US" altLang="ko-KR" dirty="0"/>
+            </a:br>
+            <a:r>
+              <a:rPr lang="ko-KR" altLang="en-US" dirty="0"/>
+              <a:t>새로운 걸 배우는 시간이 아니라</a:t>
+            </a:r>
+            <a:r>
+              <a:rPr lang="en-US" altLang="ko-KR" dirty="0"/>
+              <a:t>, </a:t>
+            </a:r>
+            <a:r>
+              <a:rPr lang="ko-KR" altLang="en-US" dirty="0"/>
+              <a:t>구조를 정리하는 시간입니다</a:t>
+            </a:r>
+            <a:r>
+              <a:rPr lang="en-US" altLang="ko-KR" dirty="0"/>
+              <a:t>.</a:t>
+            </a:r>
             <a:endParaRPr lang="ko-KR" altLang="en-US" dirty="0"/>
           </a:p>
         </p:txBody>
@@ -690,7 +1166,7 @@
           <a:p>
             <a:fld id="{C09E5BFC-1559-42F1-8940-AB342D56BF02}" type="slidenum">
               <a:rPr lang="ko-KR" altLang="en-US" smtClean="0"/>
-              <a:t>5</a:t>
+              <a:t>2</a:t>
             </a:fld>
             <a:endParaRPr lang="ko-KR" altLang="en-US"/>
           </a:p>
@@ -699,7 +1175,7 @@
     </p:spTree>
     <p:extLst>
       <p:ext uri="{BB962C8B-B14F-4D97-AF65-F5344CB8AC3E}">
-        <p14:creationId xmlns:p14="http://schemas.microsoft.com/office/powerpoint/2010/main" val="1607966170"/>
+        <p14:creationId xmlns:p14="http://schemas.microsoft.com/office/powerpoint/2010/main" val="2913744851"/>
       </p:ext>
     </p:extLst>
   </p:cSld>
@@ -753,6 +1229,92 @@
           <a:bodyPr/>
           <a:lstStyle/>
           <a:p>
+            <a:r>
+              <a:rPr lang="ko-KR" altLang="en-US" dirty="0"/>
+              <a:t>우리가 만들었던 선형 회귀를 떠올려봅시다</a:t>
+            </a:r>
+            <a:r>
+              <a:rPr lang="en-US" altLang="ko-KR" dirty="0"/>
+              <a:t>.</a:t>
+            </a:r>
+            <a:br>
+              <a:rPr lang="en-US" altLang="ko-KR" dirty="0"/>
+            </a:br>
+            <a:r>
+              <a:rPr lang="ko-KR" altLang="en-US" dirty="0"/>
+              <a:t>입력을 받아 가중합을 계산하고 출력했습니다</a:t>
+            </a:r>
+            <a:r>
+              <a:rPr lang="en-US" altLang="ko-KR" dirty="0"/>
+              <a:t>.</a:t>
+            </a:r>
+          </a:p>
+          <a:p>
+            <a:r>
+              <a:rPr lang="ko-KR" altLang="en-US" dirty="0"/>
+              <a:t>로지스틱 회귀는 여기에 </a:t>
+            </a:r>
+            <a:r>
+              <a:rPr lang="ko-KR" altLang="en-US" dirty="0" err="1"/>
+              <a:t>시그모이드</a:t>
+            </a:r>
+            <a:r>
+              <a:rPr lang="ko-KR" altLang="en-US" dirty="0"/>
+              <a:t> 활성화가 추가된 구조였습니다</a:t>
+            </a:r>
+            <a:r>
+              <a:rPr lang="en-US" altLang="ko-KR" dirty="0"/>
+              <a:t>.</a:t>
+            </a:r>
+          </a:p>
+          <a:p>
+            <a:r>
+              <a:rPr lang="ko-KR" altLang="en-US" dirty="0"/>
+              <a:t>이 구조는 사실 “단일 </a:t>
+            </a:r>
+            <a:r>
+              <a:rPr lang="ko-KR" altLang="en-US" dirty="0" err="1"/>
+              <a:t>뉴런”입니다</a:t>
+            </a:r>
+            <a:r>
+              <a:rPr lang="en-US" altLang="ko-KR" dirty="0"/>
+              <a:t>.</a:t>
+            </a:r>
+            <a:br>
+              <a:rPr lang="en-US" altLang="ko-KR" dirty="0"/>
+            </a:br>
+            <a:r>
+              <a:rPr lang="ko-KR" altLang="en-US" dirty="0"/>
+              <a:t>즉</a:t>
+            </a:r>
+            <a:r>
+              <a:rPr lang="en-US" altLang="ko-KR" dirty="0"/>
+              <a:t>, </a:t>
+            </a:r>
+            <a:r>
+              <a:rPr lang="ko-KR" altLang="en-US" dirty="0"/>
+              <a:t>우리는 이미 단층 신경망을 구현했던 것입니다</a:t>
+            </a:r>
+            <a:r>
+              <a:rPr lang="en-US" altLang="ko-KR" dirty="0"/>
+              <a:t>.</a:t>
+            </a:r>
+          </a:p>
+          <a:p>
+            <a:r>
+              <a:rPr lang="ko-KR" altLang="en-US" dirty="0" err="1"/>
+              <a:t>딥러닝은</a:t>
+            </a:r>
+            <a:r>
+              <a:rPr lang="ko-KR" altLang="en-US" dirty="0"/>
+              <a:t> 여기서 출발합니다</a:t>
+            </a:r>
+            <a:r>
+              <a:rPr lang="en-US" altLang="ko-KR" dirty="0"/>
+              <a:t>.</a:t>
+            </a:r>
+          </a:p>
+          <a:p>
             <a:endParaRPr lang="ko-KR" altLang="en-US" dirty="0"/>
           </a:p>
         </p:txBody>
@@ -774,7 +1336,7 @@
           <a:p>
             <a:fld id="{C09E5BFC-1559-42F1-8940-AB342D56BF02}" type="slidenum">
               <a:rPr lang="ko-KR" altLang="en-US" smtClean="0"/>
-              <a:t>6</a:t>
+              <a:t>3</a:t>
             </a:fld>
             <a:endParaRPr lang="ko-KR" altLang="en-US"/>
           </a:p>
@@ -783,7 +1345,7 @@
     </p:spTree>
     <p:extLst>
       <p:ext uri="{BB962C8B-B14F-4D97-AF65-F5344CB8AC3E}">
-        <p14:creationId xmlns:p14="http://schemas.microsoft.com/office/powerpoint/2010/main" val="1607966170"/>
+        <p14:creationId xmlns:p14="http://schemas.microsoft.com/office/powerpoint/2010/main" val="1056214239"/>
       </p:ext>
     </p:extLst>
   </p:cSld>
@@ -798,13 +1360,7 @@
   <p:cSld>
     <p:spTree>
       <p:nvGrpSpPr>
-        <p:cNvPr id="1" name="">
-          <a:extLst>
-            <a:ext uri="{FF2B5EF4-FFF2-40B4-BE49-F238E27FC236}">
-              <a16:creationId xmlns:a16="http://schemas.microsoft.com/office/drawing/2014/main" id="{A9D2EE83-52CB-E118-49CB-3EBDD6EF25B9}"/>
-            </a:ext>
-          </a:extLst>
-        </p:cNvPr>
+        <p:cNvPr id="1" name=""/>
         <p:cNvGrpSpPr/>
         <p:nvPr/>
       </p:nvGrpSpPr>
@@ -818,13 +1374,7 @@
       </p:grpSpPr>
       <p:sp>
         <p:nvSpPr>
-          <p:cNvPr id="2" name="슬라이드 이미지 개체 틀 1">
-            <a:extLst>
-              <a:ext uri="{FF2B5EF4-FFF2-40B4-BE49-F238E27FC236}">
-                <a16:creationId xmlns:a16="http://schemas.microsoft.com/office/drawing/2014/main" id="{30F83B01-3943-C359-9322-8EB719FB824B}"/>
-              </a:ext>
-            </a:extLst>
-          </p:cNvPr>
+          <p:cNvPr id="2" name="슬라이드 이미지 개체 틀 1"/>
           <p:cNvSpPr>
             <a:spLocks noGrp="1" noRot="1" noChangeAspect="1"/>
           </p:cNvSpPr>
@@ -836,13 +1386,7 @@
       </p:sp>
       <p:sp>
         <p:nvSpPr>
-          <p:cNvPr id="3" name="슬라이드 노트 개체 틀 2">
-            <a:extLst>
-              <a:ext uri="{FF2B5EF4-FFF2-40B4-BE49-F238E27FC236}">
-                <a16:creationId xmlns:a16="http://schemas.microsoft.com/office/drawing/2014/main" id="{F2F259CF-8156-0FB2-87BB-C2421F329EA1}"/>
-              </a:ext>
-            </a:extLst>
-          </p:cNvPr>
+          <p:cNvPr id="3" name="슬라이드 노트 개체 틀 2"/>
           <p:cNvSpPr>
             <a:spLocks noGrp="1"/>
           </p:cNvSpPr>
@@ -855,24 +1399,109 @@
           <a:bodyPr/>
           <a:lstStyle/>
           <a:p>
+            <a:r>
+              <a:rPr lang="ko-KR" altLang="en-US" dirty="0" err="1"/>
+              <a:t>딥러닝은</a:t>
+            </a:r>
+            <a:r>
+              <a:rPr lang="ko-KR" altLang="en-US" dirty="0"/>
+              <a:t> 이 단일 뉴런을 여러 층으로 쌓은 구조입니다</a:t>
+            </a:r>
+            <a:r>
+              <a:rPr lang="en-US" altLang="ko-KR" dirty="0"/>
+              <a:t>.</a:t>
+            </a:r>
+          </a:p>
+          <a:p>
+            <a:r>
+              <a:rPr lang="ko-KR" altLang="en-US" dirty="0"/>
+              <a:t>은닉층이 추가되면서 표현력이 크게 증가합니다</a:t>
+            </a:r>
+            <a:r>
+              <a:rPr lang="en-US" altLang="ko-KR" dirty="0"/>
+              <a:t>.</a:t>
+            </a:r>
+          </a:p>
+          <a:p>
+            <a:r>
+              <a:rPr lang="ko-KR" altLang="en-US" dirty="0"/>
+              <a:t>그리고 학습 방식은 우리가 이미 배운 것과 동일합니다</a:t>
+            </a:r>
+            <a:r>
+              <a:rPr lang="en-US" altLang="ko-KR" dirty="0"/>
+              <a:t>.</a:t>
+            </a:r>
+            <a:br>
+              <a:rPr lang="en-US" altLang="ko-KR" dirty="0"/>
+            </a:br>
+            <a:r>
+              <a:rPr lang="ko-KR" altLang="en-US" dirty="0"/>
+              <a:t>손실 함수 → </a:t>
+            </a:r>
+            <a:r>
+              <a:rPr lang="ko-KR" altLang="en-US" dirty="0" err="1"/>
+              <a:t>역전파</a:t>
+            </a:r>
+            <a:r>
+              <a:rPr lang="ko-KR" altLang="en-US" dirty="0"/>
+              <a:t> → </a:t>
+            </a:r>
+            <a:r>
+              <a:rPr lang="ko-KR" altLang="en-US" dirty="0" err="1"/>
+              <a:t>경사하강법</a:t>
+            </a:r>
             <a:endParaRPr lang="ko-KR" altLang="en-US" dirty="0"/>
           </a:p>
-        </p:txBody>
-      </p:sp>
-      <p:sp>
-        <p:nvSpPr>
-          <p:cNvPr id="4" name="슬라이드 번호 개체 틀 3">
-            <a:extLst>
-              <a:ext uri="{FF2B5EF4-FFF2-40B4-BE49-F238E27FC236}">
-                <a16:creationId xmlns:a16="http://schemas.microsoft.com/office/drawing/2014/main" id="{5301DD34-5BFE-877A-E657-9B3A6B1B5CDD}"/>
-              </a:ext>
-            </a:extLst>
-          </p:cNvPr>
-          <p:cNvSpPr>
-            <a:spLocks noGrp="1"/>
-          </p:cNvSpPr>
-          <p:nvPr>
-            <p:ph type="sldNum" sz="quarter" idx="10"/>
+          <a:p>
+            <a:r>
+              <a:rPr lang="ko-KR" altLang="en-US" dirty="0"/>
+              <a:t>즉</a:t>
+            </a:r>
+            <a:r>
+              <a:rPr lang="en-US" altLang="ko-KR" dirty="0"/>
+              <a:t>, </a:t>
+            </a:r>
+            <a:r>
+              <a:rPr lang="ko-KR" altLang="en-US" dirty="0"/>
+              <a:t>원리는 바뀌지 않았습니다</a:t>
+            </a:r>
+            <a:r>
+              <a:rPr lang="en-US" altLang="ko-KR" dirty="0"/>
+              <a:t>.</a:t>
+            </a:r>
+            <a:br>
+              <a:rPr lang="en-US" altLang="ko-KR" dirty="0"/>
+            </a:br>
+            <a:r>
+              <a:rPr lang="ko-KR" altLang="en-US" dirty="0"/>
+              <a:t>구조만 </a:t>
+            </a:r>
+            <a:r>
+              <a:rPr lang="ko-KR" altLang="en-US" dirty="0" err="1"/>
+              <a:t>깊어졌을</a:t>
+            </a:r>
+            <a:r>
+              <a:rPr lang="ko-KR" altLang="en-US" dirty="0"/>
+              <a:t> 뿐입니다</a:t>
+            </a:r>
+            <a:r>
+              <a:rPr lang="en-US" altLang="ko-KR" dirty="0"/>
+              <a:t>.</a:t>
+            </a:r>
+          </a:p>
+          <a:p>
+            <a:endParaRPr lang="ko-KR" altLang="en-US" dirty="0"/>
+          </a:p>
+        </p:txBody>
+      </p:sp>
+      <p:sp>
+        <p:nvSpPr>
+          <p:cNvPr id="4" name="슬라이드 번호 개체 틀 3"/>
+          <p:cNvSpPr>
+            <a:spLocks noGrp="1"/>
+          </p:cNvSpPr>
+          <p:nvPr>
+            <p:ph type="sldNum" sz="quarter" idx="5"/>
           </p:nvPr>
         </p:nvSpPr>
         <p:spPr/>
@@ -880,9 +1509,9 @@
           <a:bodyPr/>
           <a:lstStyle/>
           <a:p>
-            <a:fld id="{A0085365-8376-4996-BDD6-F39608FADAF3}" type="slidenum">
+            <a:fld id="{C09E5BFC-1559-42F1-8940-AB342D56BF02}" type="slidenum">
               <a:rPr lang="ko-KR" altLang="en-US" smtClean="0"/>
-              <a:t>14</a:t>
+              <a:t>4</a:t>
             </a:fld>
             <a:endParaRPr lang="ko-KR" altLang="en-US"/>
           </a:p>
@@ -891,7 +1520,870 @@
     </p:spTree>
     <p:extLst>
       <p:ext uri="{BB962C8B-B14F-4D97-AF65-F5344CB8AC3E}">
-        <p14:creationId xmlns:p14="http://schemas.microsoft.com/office/powerpoint/2010/main" val="2391645545"/>
+        <p14:creationId xmlns:p14="http://schemas.microsoft.com/office/powerpoint/2010/main" val="2029933859"/>
+      </p:ext>
+    </p:extLst>
+  </p:cSld>
+  <p:clrMapOvr>
+    <a:masterClrMapping/>
+  </p:clrMapOvr>
+</p:notes>
+</file>
+
+<file path=ppt/notesSlides/notesSlide5.xml><?xml version="1.0" encoding="utf-8"?>
+<p:notes xmlns:a="http://schemas.openxmlformats.org/drawingml/2006/main" xmlns:r="http://schemas.openxmlformats.org/officeDocument/2006/relationships" xmlns:p="http://schemas.openxmlformats.org/presentationml/2006/main">
+  <p:cSld>
+    <p:spTree>
+      <p:nvGrpSpPr>
+        <p:cNvPr id="1" name=""/>
+        <p:cNvGrpSpPr/>
+        <p:nvPr/>
+      </p:nvGrpSpPr>
+      <p:grpSpPr>
+        <a:xfrm>
+          <a:off x="0" y="0"/>
+          <a:ext cx="0" cy="0"/>
+          <a:chOff x="0" y="0"/>
+          <a:chExt cx="0" cy="0"/>
+        </a:xfrm>
+      </p:grpSpPr>
+      <p:sp>
+        <p:nvSpPr>
+          <p:cNvPr id="2" name="슬라이드 이미지 개체 틀 1"/>
+          <p:cNvSpPr>
+            <a:spLocks noGrp="1" noRot="1" noChangeAspect="1"/>
+          </p:cNvSpPr>
+          <p:nvPr>
+            <p:ph type="sldImg"/>
+          </p:nvPr>
+        </p:nvSpPr>
+        <p:spPr/>
+      </p:sp>
+      <p:sp>
+        <p:nvSpPr>
+          <p:cNvPr id="3" name="슬라이드 노트 개체 틀 2"/>
+          <p:cNvSpPr>
+            <a:spLocks noGrp="1"/>
+          </p:cNvSpPr>
+          <p:nvPr>
+            <p:ph type="body" idx="1"/>
+          </p:nvPr>
+        </p:nvSpPr>
+        <p:spPr/>
+        <p:txBody>
+          <a:bodyPr/>
+          <a:lstStyle/>
+          <a:p>
+            <a:r>
+              <a:rPr lang="ko-KR" altLang="en-US" dirty="0"/>
+              <a:t>층이 많아질수록 파라미터 수가 증가합니다</a:t>
+            </a:r>
+            <a:r>
+              <a:rPr lang="en-US" altLang="ko-KR" dirty="0"/>
+              <a:t>.</a:t>
+            </a:r>
+          </a:p>
+          <a:p>
+            <a:r>
+              <a:rPr lang="ko-KR" altLang="en-US" dirty="0"/>
+              <a:t>그래서 더 많은 데이터와 </a:t>
+            </a:r>
+            <a:r>
+              <a:rPr lang="ko-KR" altLang="en-US" dirty="0" err="1"/>
+              <a:t>연산량이</a:t>
+            </a:r>
+            <a:r>
+              <a:rPr lang="ko-KR" altLang="en-US" dirty="0"/>
+              <a:t> 필요합니다</a:t>
+            </a:r>
+            <a:r>
+              <a:rPr lang="en-US" altLang="ko-KR" dirty="0"/>
+              <a:t>.</a:t>
+            </a:r>
+          </a:p>
+          <a:p>
+            <a:r>
+              <a:rPr lang="ko-KR" altLang="en-US" dirty="0"/>
+              <a:t>대신 </a:t>
+            </a:r>
+            <a:r>
+              <a:rPr lang="en-US" altLang="ko-KR" dirty="0"/>
+              <a:t>end-to-end </a:t>
+            </a:r>
+            <a:r>
+              <a:rPr lang="ko-KR" altLang="en-US" dirty="0"/>
+              <a:t>학습이 가능합니다</a:t>
+            </a:r>
+            <a:r>
+              <a:rPr lang="en-US" altLang="ko-KR" dirty="0"/>
+              <a:t>.</a:t>
+            </a:r>
+          </a:p>
+          <a:p>
+            <a:r>
+              <a:rPr lang="ko-KR" altLang="en-US" dirty="0"/>
+              <a:t>우리가 특징을 설계하지 않아도</a:t>
+            </a:r>
+            <a:r>
+              <a:rPr lang="en-US" altLang="ko-KR" dirty="0"/>
+              <a:t>, </a:t>
+            </a:r>
+            <a:r>
+              <a:rPr lang="ko-KR" altLang="en-US" dirty="0"/>
+              <a:t>모델이 스스로 특징을 학습합니다</a:t>
+            </a:r>
+            <a:r>
+              <a:rPr lang="en-US" altLang="ko-KR" dirty="0"/>
+              <a:t>.</a:t>
+            </a:r>
+          </a:p>
+          <a:p>
+            <a:endParaRPr lang="ko-KR" altLang="en-US" dirty="0"/>
+          </a:p>
+        </p:txBody>
+      </p:sp>
+      <p:sp>
+        <p:nvSpPr>
+          <p:cNvPr id="4" name="슬라이드 번호 개체 틀 3"/>
+          <p:cNvSpPr>
+            <a:spLocks noGrp="1"/>
+          </p:cNvSpPr>
+          <p:nvPr>
+            <p:ph type="sldNum" sz="quarter" idx="5"/>
+          </p:nvPr>
+        </p:nvSpPr>
+        <p:spPr/>
+        <p:txBody>
+          <a:bodyPr/>
+          <a:lstStyle/>
+          <a:p>
+            <a:fld id="{C09E5BFC-1559-42F1-8940-AB342D56BF02}" type="slidenum">
+              <a:rPr lang="ko-KR" altLang="en-US" smtClean="0"/>
+              <a:t>5</a:t>
+            </a:fld>
+            <a:endParaRPr lang="ko-KR" altLang="en-US"/>
+          </a:p>
+        </p:txBody>
+      </p:sp>
+    </p:spTree>
+    <p:extLst>
+      <p:ext uri="{BB962C8B-B14F-4D97-AF65-F5344CB8AC3E}">
+        <p14:creationId xmlns:p14="http://schemas.microsoft.com/office/powerpoint/2010/main" val="2073139555"/>
+      </p:ext>
+    </p:extLst>
+  </p:cSld>
+  <p:clrMapOvr>
+    <a:masterClrMapping/>
+  </p:clrMapOvr>
+</p:notes>
+</file>
+
+<file path=ppt/notesSlides/notesSlide6.xml><?xml version="1.0" encoding="utf-8"?>
+<p:notes xmlns:a="http://schemas.openxmlformats.org/drawingml/2006/main" xmlns:r="http://schemas.openxmlformats.org/officeDocument/2006/relationships" xmlns:p="http://schemas.openxmlformats.org/presentationml/2006/main">
+  <p:cSld>
+    <p:spTree>
+      <p:nvGrpSpPr>
+        <p:cNvPr id="1" name=""/>
+        <p:cNvGrpSpPr/>
+        <p:nvPr/>
+      </p:nvGrpSpPr>
+      <p:grpSpPr>
+        <a:xfrm>
+          <a:off x="0" y="0"/>
+          <a:ext cx="0" cy="0"/>
+          <a:chOff x="0" y="0"/>
+          <a:chExt cx="0" cy="0"/>
+        </a:xfrm>
+      </p:grpSpPr>
+      <p:sp>
+        <p:nvSpPr>
+          <p:cNvPr id="2" name="슬라이드 이미지 개체 틀 1"/>
+          <p:cNvSpPr>
+            <a:spLocks noGrp="1" noRot="1" noChangeAspect="1"/>
+          </p:cNvSpPr>
+          <p:nvPr>
+            <p:ph type="sldImg"/>
+          </p:nvPr>
+        </p:nvSpPr>
+        <p:spPr/>
+      </p:sp>
+      <p:sp>
+        <p:nvSpPr>
+          <p:cNvPr id="3" name="슬라이드 노트 개체 틀 2"/>
+          <p:cNvSpPr>
+            <a:spLocks noGrp="1"/>
+          </p:cNvSpPr>
+          <p:nvPr>
+            <p:ph type="body" idx="1"/>
+          </p:nvPr>
+        </p:nvSpPr>
+        <p:spPr/>
+        <p:txBody>
+          <a:bodyPr/>
+          <a:lstStyle/>
+          <a:p>
+            <a:r>
+              <a:rPr lang="ko-KR" altLang="en-US" dirty="0"/>
+              <a:t>선형 회귀 </a:t>
+            </a:r>
+            <a:r>
+              <a:rPr lang="en-US" altLang="ko-KR" dirty="0"/>
+              <a:t>1</a:t>
+            </a:r>
+            <a:r>
+              <a:rPr lang="ko-KR" altLang="en-US" dirty="0"/>
+              <a:t>개 </a:t>
+            </a:r>
+            <a:r>
+              <a:rPr lang="en-US" altLang="ko-KR" dirty="0"/>
+              <a:t>-&gt; </a:t>
+            </a:r>
+            <a:r>
+              <a:rPr lang="ko-KR" altLang="en-US" dirty="0"/>
+              <a:t>뉴런 </a:t>
+            </a:r>
+            <a:r>
+              <a:rPr lang="en-US" altLang="ko-KR" dirty="0"/>
+              <a:t>1</a:t>
+            </a:r>
+            <a:r>
+              <a:rPr lang="ko-KR" altLang="en-US" dirty="0"/>
+              <a:t>개</a:t>
+            </a:r>
+            <a:endParaRPr lang="en-US" altLang="ko-KR" dirty="0"/>
+          </a:p>
+          <a:p>
+            <a:r>
+              <a:rPr lang="ko-KR" altLang="en-US" dirty="0"/>
+              <a:t>여러 개 쌓으면 </a:t>
+            </a:r>
+            <a:r>
+              <a:rPr lang="en-US" altLang="ko-KR" dirty="0"/>
+              <a:t>FNN</a:t>
+            </a:r>
+          </a:p>
+          <a:p>
+            <a:endParaRPr lang="en-US" altLang="ko-KR" dirty="0"/>
+          </a:p>
+          <a:p>
+            <a:endParaRPr lang="en-US" altLang="ko-KR" dirty="0"/>
+          </a:p>
+          <a:p>
+            <a:r>
+              <a:rPr lang="ko-KR" altLang="en-US" dirty="0"/>
+              <a:t>이것이 가장 기본적인 다층 구조</a:t>
+            </a:r>
+            <a:r>
+              <a:rPr lang="en-US" altLang="ko-KR" dirty="0"/>
+              <a:t>, FNN</a:t>
+            </a:r>
+            <a:r>
+              <a:rPr lang="ko-KR" altLang="en-US" dirty="0"/>
+              <a:t>입니다</a:t>
+            </a:r>
+            <a:r>
+              <a:rPr lang="en-US" altLang="ko-KR" dirty="0"/>
+              <a:t>.</a:t>
+            </a:r>
+          </a:p>
+          <a:p>
+            <a:r>
+              <a:rPr lang="ko-KR" altLang="en-US" dirty="0"/>
+              <a:t>우리가 만든 단일 뉴런을 여러 개 쌓은 형태라고 보면 됩니다</a:t>
+            </a:r>
+            <a:r>
+              <a:rPr lang="en-US" altLang="ko-KR" dirty="0"/>
+              <a:t>.</a:t>
+            </a:r>
+          </a:p>
+          <a:p>
+            <a:r>
+              <a:rPr lang="ko-KR" altLang="en-US" dirty="0"/>
+              <a:t>일반적인 분류와 회귀 문제에 사용됩니다</a:t>
+            </a:r>
+            <a:r>
+              <a:rPr lang="en-US" altLang="ko-KR" dirty="0"/>
+              <a:t>.</a:t>
+            </a:r>
+          </a:p>
+          <a:p>
+            <a:r>
+              <a:rPr lang="ko-KR" altLang="en-US" dirty="0"/>
+              <a:t>하지만 한계가 있습니다</a:t>
+            </a:r>
+            <a:r>
+              <a:rPr lang="en-US" altLang="ko-KR" dirty="0"/>
+              <a:t>.</a:t>
+            </a:r>
+          </a:p>
+          <a:p>
+            <a:endParaRPr lang="ko-KR" altLang="en-US" dirty="0"/>
+          </a:p>
+        </p:txBody>
+      </p:sp>
+      <p:sp>
+        <p:nvSpPr>
+          <p:cNvPr id="4" name="슬라이드 번호 개체 틀 3"/>
+          <p:cNvSpPr>
+            <a:spLocks noGrp="1"/>
+          </p:cNvSpPr>
+          <p:nvPr>
+            <p:ph type="sldNum" sz="quarter" idx="5"/>
+          </p:nvPr>
+        </p:nvSpPr>
+        <p:spPr/>
+        <p:txBody>
+          <a:bodyPr/>
+          <a:lstStyle/>
+          <a:p>
+            <a:fld id="{C09E5BFC-1559-42F1-8940-AB342D56BF02}" type="slidenum">
+              <a:rPr lang="ko-KR" altLang="en-US" smtClean="0"/>
+              <a:t>6</a:t>
+            </a:fld>
+            <a:endParaRPr lang="ko-KR" altLang="en-US"/>
+          </a:p>
+        </p:txBody>
+      </p:sp>
+    </p:spTree>
+    <p:extLst>
+      <p:ext uri="{BB962C8B-B14F-4D97-AF65-F5344CB8AC3E}">
+        <p14:creationId xmlns:p14="http://schemas.microsoft.com/office/powerpoint/2010/main" val="1607966170"/>
+      </p:ext>
+    </p:extLst>
+  </p:cSld>
+  <p:clrMapOvr>
+    <a:masterClrMapping/>
+  </p:clrMapOvr>
+</p:notes>
+</file>
+
+<file path=ppt/notesSlides/notesSlide7.xml><?xml version="1.0" encoding="utf-8"?>
+<p:notes xmlns:a="http://schemas.openxmlformats.org/drawingml/2006/main" xmlns:r="http://schemas.openxmlformats.org/officeDocument/2006/relationships" xmlns:p="http://schemas.openxmlformats.org/presentationml/2006/main">
+  <p:cSld>
+    <p:spTree>
+      <p:nvGrpSpPr>
+        <p:cNvPr id="1" name=""/>
+        <p:cNvGrpSpPr/>
+        <p:nvPr/>
+      </p:nvGrpSpPr>
+      <p:grpSpPr>
+        <a:xfrm>
+          <a:off x="0" y="0"/>
+          <a:ext cx="0" cy="0"/>
+          <a:chOff x="0" y="0"/>
+          <a:chExt cx="0" cy="0"/>
+        </a:xfrm>
+      </p:grpSpPr>
+      <p:sp>
+        <p:nvSpPr>
+          <p:cNvPr id="2" name="슬라이드 이미지 개체 틀 1"/>
+          <p:cNvSpPr>
+            <a:spLocks noGrp="1" noRot="1" noChangeAspect="1"/>
+          </p:cNvSpPr>
+          <p:nvPr>
+            <p:ph type="sldImg"/>
+          </p:nvPr>
+        </p:nvSpPr>
+        <p:spPr/>
+      </p:sp>
+      <p:sp>
+        <p:nvSpPr>
+          <p:cNvPr id="3" name="슬라이드 노트 개체 틀 2"/>
+          <p:cNvSpPr>
+            <a:spLocks noGrp="1"/>
+          </p:cNvSpPr>
+          <p:nvPr>
+            <p:ph type="body" idx="1"/>
+          </p:nvPr>
+        </p:nvSpPr>
+        <p:spPr/>
+        <p:txBody>
+          <a:bodyPr/>
+          <a:lstStyle/>
+          <a:p>
+            <a:r>
+              <a:rPr lang="ko-KR" altLang="en-US" dirty="0"/>
+              <a:t>모델은 데이터 구조의 한계를 해결하기 위해 발전해왔습니다</a:t>
+            </a:r>
+            <a:r>
+              <a:rPr lang="en-US" altLang="ko-KR" dirty="0"/>
+              <a:t>.</a:t>
+            </a:r>
+          </a:p>
+          <a:p>
+            <a:r>
+              <a:rPr lang="en-US" altLang="ko-KR" dirty="0"/>
+              <a:t>FNN</a:t>
+            </a:r>
+            <a:r>
+              <a:rPr lang="ko-KR" altLang="en-US" dirty="0"/>
+              <a:t>은 공간 구조를 잘 반영하지 못합니다</a:t>
+            </a:r>
+            <a:r>
+              <a:rPr lang="en-US" altLang="ko-KR" dirty="0"/>
+              <a:t>.</a:t>
+            </a:r>
+            <a:br>
+              <a:rPr lang="en-US" altLang="ko-KR" dirty="0"/>
+            </a:br>
+            <a:r>
+              <a:rPr lang="ko-KR" altLang="en-US" dirty="0"/>
+              <a:t>그래서 </a:t>
+            </a:r>
+            <a:r>
+              <a:rPr lang="en-US" altLang="ko-KR" dirty="0"/>
+              <a:t>CNN</a:t>
+            </a:r>
+            <a:r>
+              <a:rPr lang="ko-KR" altLang="en-US" dirty="0"/>
+              <a:t>이 등장합니다</a:t>
+            </a:r>
+            <a:r>
+              <a:rPr lang="en-US" altLang="ko-KR" dirty="0"/>
+              <a:t>.</a:t>
+            </a:r>
+          </a:p>
+          <a:p>
+            <a:r>
+              <a:rPr lang="ko-KR" altLang="en-US" dirty="0"/>
+              <a:t>순차 데이터를 잘 처리하지 못합니다</a:t>
+            </a:r>
+            <a:r>
+              <a:rPr lang="en-US" altLang="ko-KR" dirty="0"/>
+              <a:t>.</a:t>
+            </a:r>
+            <a:br>
+              <a:rPr lang="en-US" altLang="ko-KR" dirty="0"/>
+            </a:br>
+            <a:r>
+              <a:rPr lang="ko-KR" altLang="en-US" dirty="0"/>
+              <a:t>그래서 </a:t>
+            </a:r>
+            <a:r>
+              <a:rPr lang="en-US" altLang="ko-KR" dirty="0"/>
+              <a:t>RNN</a:t>
+            </a:r>
+            <a:r>
+              <a:rPr lang="ko-KR" altLang="en-US" dirty="0"/>
+              <a:t>이 등장합니다</a:t>
+            </a:r>
+            <a:r>
+              <a:rPr lang="en-US" altLang="ko-KR" dirty="0"/>
+              <a:t>.</a:t>
+            </a:r>
+          </a:p>
+          <a:p>
+            <a:r>
+              <a:rPr lang="en-US" altLang="ko-KR" dirty="0"/>
+              <a:t>RNN</a:t>
+            </a:r>
+            <a:r>
+              <a:rPr lang="ko-KR" altLang="en-US" dirty="0"/>
+              <a:t>은 장기 의존성 문제가 있습니다</a:t>
+            </a:r>
+            <a:r>
+              <a:rPr lang="en-US" altLang="ko-KR" dirty="0"/>
+              <a:t>. (</a:t>
+            </a:r>
+            <a:r>
+              <a:rPr lang="ko-KR" altLang="en-US" dirty="0"/>
+              <a:t>학습 내용이나 시퀀스의 앞 부분을 잊어버리는 현상</a:t>
+            </a:r>
+            <a:r>
+              <a:rPr lang="en-US" altLang="ko-KR" dirty="0"/>
+              <a:t>)</a:t>
+            </a:r>
+            <a:br>
+              <a:rPr lang="en-US" altLang="ko-KR" dirty="0"/>
+            </a:br>
+            <a:r>
+              <a:rPr lang="ko-KR" altLang="en-US" dirty="0"/>
+              <a:t>그래서 </a:t>
+            </a:r>
+            <a:r>
+              <a:rPr lang="en-US" altLang="ko-KR" dirty="0"/>
+              <a:t>Transformer</a:t>
+            </a:r>
+            <a:r>
+              <a:rPr lang="ko-KR" altLang="en-US" dirty="0"/>
+              <a:t>가 등장합니다</a:t>
+            </a:r>
+            <a:r>
+              <a:rPr lang="en-US" altLang="ko-KR" dirty="0"/>
+              <a:t>.</a:t>
+            </a:r>
+          </a:p>
+          <a:p>
+            <a:r>
+              <a:rPr lang="ko-KR" altLang="en-US" dirty="0"/>
+              <a:t>이 흐름이 딥러닝 모델의 진화입니다</a:t>
+            </a:r>
+            <a:r>
+              <a:rPr lang="en-US" altLang="ko-KR" dirty="0"/>
+              <a:t>.</a:t>
+            </a:r>
+          </a:p>
+          <a:p>
+            <a:endParaRPr lang="ko-KR" altLang="en-US" dirty="0"/>
+          </a:p>
+        </p:txBody>
+      </p:sp>
+      <p:sp>
+        <p:nvSpPr>
+          <p:cNvPr id="4" name="슬라이드 번호 개체 틀 3"/>
+          <p:cNvSpPr>
+            <a:spLocks noGrp="1"/>
+          </p:cNvSpPr>
+          <p:nvPr>
+            <p:ph type="sldNum" sz="quarter" idx="5"/>
+          </p:nvPr>
+        </p:nvSpPr>
+        <p:spPr/>
+        <p:txBody>
+          <a:bodyPr/>
+          <a:lstStyle/>
+          <a:p>
+            <a:fld id="{C09E5BFC-1559-42F1-8940-AB342D56BF02}" type="slidenum">
+              <a:rPr lang="ko-KR" altLang="en-US" smtClean="0"/>
+              <a:t>7</a:t>
+            </a:fld>
+            <a:endParaRPr lang="ko-KR" altLang="en-US"/>
+          </a:p>
+        </p:txBody>
+      </p:sp>
+    </p:spTree>
+    <p:extLst>
+      <p:ext uri="{BB962C8B-B14F-4D97-AF65-F5344CB8AC3E}">
+        <p14:creationId xmlns:p14="http://schemas.microsoft.com/office/powerpoint/2010/main" val="1129632206"/>
+      </p:ext>
+    </p:extLst>
+  </p:cSld>
+  <p:clrMapOvr>
+    <a:masterClrMapping/>
+  </p:clrMapOvr>
+</p:notes>
+</file>
+
+<file path=ppt/notesSlides/notesSlide8.xml><?xml version="1.0" encoding="utf-8"?>
+<p:notes xmlns:a="http://schemas.openxmlformats.org/drawingml/2006/main" xmlns:r="http://schemas.openxmlformats.org/officeDocument/2006/relationships" xmlns:p="http://schemas.openxmlformats.org/presentationml/2006/main">
+  <p:cSld>
+    <p:spTree>
+      <p:nvGrpSpPr>
+        <p:cNvPr id="1" name=""/>
+        <p:cNvGrpSpPr/>
+        <p:nvPr/>
+      </p:nvGrpSpPr>
+      <p:grpSpPr>
+        <a:xfrm>
+          <a:off x="0" y="0"/>
+          <a:ext cx="0" cy="0"/>
+          <a:chOff x="0" y="0"/>
+          <a:chExt cx="0" cy="0"/>
+        </a:xfrm>
+      </p:grpSpPr>
+      <p:sp>
+        <p:nvSpPr>
+          <p:cNvPr id="2" name="슬라이드 이미지 개체 틀 1"/>
+          <p:cNvSpPr>
+            <a:spLocks noGrp="1" noRot="1" noChangeAspect="1"/>
+          </p:cNvSpPr>
+          <p:nvPr>
+            <p:ph type="sldImg"/>
+          </p:nvPr>
+        </p:nvSpPr>
+        <p:spPr/>
+      </p:sp>
+      <p:sp>
+        <p:nvSpPr>
+          <p:cNvPr id="3" name="슬라이드 노트 개체 틀 2"/>
+          <p:cNvSpPr>
+            <a:spLocks noGrp="1"/>
+          </p:cNvSpPr>
+          <p:nvPr>
+            <p:ph type="body" idx="1"/>
+          </p:nvPr>
+        </p:nvSpPr>
+        <p:spPr/>
+        <p:txBody>
+          <a:bodyPr/>
+          <a:lstStyle/>
+          <a:p>
+            <a:r>
+              <a:rPr lang="en-US" altLang="ko-KR" dirty="0"/>
+              <a:t>FNN</a:t>
+            </a:r>
+            <a:r>
+              <a:rPr lang="ko-KR" altLang="en-US" dirty="0"/>
+              <a:t>이 공간 구조를 못 다뤄서 등장</a:t>
+            </a:r>
+            <a:endParaRPr lang="en-US" altLang="ko-KR" dirty="0"/>
+          </a:p>
+          <a:p>
+            <a:endParaRPr lang="en-US" altLang="ko-KR" dirty="0"/>
+          </a:p>
+          <a:p>
+            <a:r>
+              <a:rPr lang="en-US" altLang="ko-KR" dirty="0"/>
+              <a:t>CNN</a:t>
+            </a:r>
+            <a:r>
+              <a:rPr lang="ko-KR" altLang="en-US" dirty="0"/>
+              <a:t>은 이미지처럼 공간 구조가 중요한 데이터에서 등장했습니다</a:t>
+            </a:r>
+            <a:r>
+              <a:rPr lang="en-US" altLang="ko-KR" dirty="0"/>
+              <a:t>.</a:t>
+            </a:r>
+          </a:p>
+          <a:p>
+            <a:r>
+              <a:rPr lang="ko-KR" altLang="en-US" dirty="0"/>
+              <a:t>필터를 사용해 지역적 특징을 추출합니다</a:t>
+            </a:r>
+            <a:r>
+              <a:rPr lang="en-US" altLang="ko-KR" dirty="0"/>
+              <a:t>.</a:t>
+            </a:r>
+          </a:p>
+          <a:p>
+            <a:r>
+              <a:rPr lang="ko-KR" altLang="en-US" dirty="0"/>
+              <a:t>파라미터를 공유하기 때문에 </a:t>
+            </a:r>
+            <a:r>
+              <a:rPr lang="en-US" altLang="ko-KR" dirty="0"/>
+              <a:t>FNN</a:t>
+            </a:r>
+            <a:r>
+              <a:rPr lang="ko-KR" altLang="en-US" dirty="0"/>
+              <a:t>보다 효율적입니다</a:t>
+            </a:r>
+            <a:r>
+              <a:rPr lang="en-US" altLang="ko-KR" dirty="0"/>
+              <a:t>.</a:t>
+            </a:r>
+          </a:p>
+          <a:p>
+            <a:r>
+              <a:rPr lang="ko-KR" altLang="en-US" dirty="0"/>
+              <a:t>이미지 분류</a:t>
+            </a:r>
+            <a:r>
+              <a:rPr lang="en-US" altLang="ko-KR" dirty="0"/>
+              <a:t>, </a:t>
+            </a:r>
+            <a:r>
+              <a:rPr lang="ko-KR" altLang="en-US" dirty="0"/>
+              <a:t>객체 탐지 등에 사용됩니다</a:t>
+            </a:r>
+            <a:r>
+              <a:rPr lang="en-US" altLang="ko-KR" dirty="0"/>
+              <a:t>.</a:t>
+            </a:r>
+          </a:p>
+          <a:p>
+            <a:endParaRPr lang="ko-KR" altLang="en-US" dirty="0"/>
+          </a:p>
+        </p:txBody>
+      </p:sp>
+      <p:sp>
+        <p:nvSpPr>
+          <p:cNvPr id="4" name="슬라이드 번호 개체 틀 3"/>
+          <p:cNvSpPr>
+            <a:spLocks noGrp="1"/>
+          </p:cNvSpPr>
+          <p:nvPr>
+            <p:ph type="sldNum" sz="quarter" idx="5"/>
+          </p:nvPr>
+        </p:nvSpPr>
+        <p:spPr/>
+        <p:txBody>
+          <a:bodyPr/>
+          <a:lstStyle/>
+          <a:p>
+            <a:fld id="{C09E5BFC-1559-42F1-8940-AB342D56BF02}" type="slidenum">
+              <a:rPr lang="ko-KR" altLang="en-US" smtClean="0"/>
+              <a:t>8</a:t>
+            </a:fld>
+            <a:endParaRPr lang="ko-KR" altLang="en-US"/>
+          </a:p>
+        </p:txBody>
+      </p:sp>
+    </p:spTree>
+    <p:extLst>
+      <p:ext uri="{BB962C8B-B14F-4D97-AF65-F5344CB8AC3E}">
+        <p14:creationId xmlns:p14="http://schemas.microsoft.com/office/powerpoint/2010/main" val="1607966170"/>
+      </p:ext>
+    </p:extLst>
+  </p:cSld>
+  <p:clrMapOvr>
+    <a:masterClrMapping/>
+  </p:clrMapOvr>
+</p:notes>
+</file>
+
+<file path=ppt/notesSlides/notesSlide9.xml><?xml version="1.0" encoding="utf-8"?>
+<p:notes xmlns:a="http://schemas.openxmlformats.org/drawingml/2006/main" xmlns:r="http://schemas.openxmlformats.org/officeDocument/2006/relationships" xmlns:p="http://schemas.openxmlformats.org/presentationml/2006/main">
+  <p:cSld>
+    <p:spTree>
+      <p:nvGrpSpPr>
+        <p:cNvPr id="1" name=""/>
+        <p:cNvGrpSpPr/>
+        <p:nvPr/>
+      </p:nvGrpSpPr>
+      <p:grpSpPr>
+        <a:xfrm>
+          <a:off x="0" y="0"/>
+          <a:ext cx="0" cy="0"/>
+          <a:chOff x="0" y="0"/>
+          <a:chExt cx="0" cy="0"/>
+        </a:xfrm>
+      </p:grpSpPr>
+      <p:sp>
+        <p:nvSpPr>
+          <p:cNvPr id="2" name="슬라이드 이미지 개체 틀 1"/>
+          <p:cNvSpPr>
+            <a:spLocks noGrp="1" noRot="1" noChangeAspect="1"/>
+          </p:cNvSpPr>
+          <p:nvPr>
+            <p:ph type="sldImg"/>
+          </p:nvPr>
+        </p:nvSpPr>
+        <p:spPr/>
+      </p:sp>
+      <p:sp>
+        <p:nvSpPr>
+          <p:cNvPr id="3" name="슬라이드 노트 개체 틀 2"/>
+          <p:cNvSpPr>
+            <a:spLocks noGrp="1"/>
+          </p:cNvSpPr>
+          <p:nvPr>
+            <p:ph type="body" idx="1"/>
+          </p:nvPr>
+        </p:nvSpPr>
+        <p:spPr/>
+        <p:txBody>
+          <a:bodyPr/>
+          <a:lstStyle/>
+          <a:p>
+            <a:r>
+              <a:rPr lang="en-US" altLang="ko-KR" dirty="0"/>
+              <a:t>CNN</a:t>
+            </a:r>
+            <a:r>
+              <a:rPr lang="ko-KR" altLang="en-US" dirty="0"/>
+              <a:t>은 순서를 기억하지 못한다</a:t>
+            </a:r>
+            <a:endParaRPr lang="en-US" altLang="ko-KR" dirty="0"/>
+          </a:p>
+          <a:p>
+            <a:r>
+              <a:rPr lang="ko-KR" altLang="en-US" dirty="0"/>
+              <a:t>그래서 등장한 구조 </a:t>
+            </a:r>
+            <a:r>
+              <a:rPr lang="en-US" altLang="ko-KR" dirty="0"/>
+              <a:t>RNN</a:t>
+            </a:r>
+          </a:p>
+          <a:p>
+            <a:endParaRPr lang="en-US" altLang="ko-KR" dirty="0"/>
+          </a:p>
+          <a:p>
+            <a:endParaRPr lang="en-US" altLang="ko-KR" dirty="0"/>
+          </a:p>
+          <a:p>
+            <a:r>
+              <a:rPr lang="en-US" altLang="ko-KR" dirty="0"/>
+              <a:t>RNN</a:t>
+            </a:r>
+            <a:r>
+              <a:rPr lang="ko-KR" altLang="en-US" dirty="0"/>
+              <a:t>은 순차 데이터를 처리하기 위해 등장했습니다</a:t>
+            </a:r>
+            <a:r>
+              <a:rPr lang="en-US" altLang="ko-KR" dirty="0"/>
+              <a:t>.</a:t>
+            </a:r>
+          </a:p>
+          <a:p>
+            <a:r>
+              <a:rPr lang="ko-KR" altLang="en-US" dirty="0"/>
+              <a:t>이전 정보를 기억하며 다음 입력에 반영합니다</a:t>
+            </a:r>
+            <a:r>
+              <a:rPr lang="en-US" altLang="ko-KR" dirty="0"/>
+              <a:t>.</a:t>
+            </a:r>
+          </a:p>
+          <a:p>
+            <a:r>
+              <a:rPr lang="ko-KR" altLang="en-US" dirty="0"/>
+              <a:t>감정 분석</a:t>
+            </a:r>
+            <a:r>
+              <a:rPr lang="en-US" altLang="ko-KR" dirty="0"/>
+              <a:t>, </a:t>
+            </a:r>
+            <a:r>
+              <a:rPr lang="ko-KR" altLang="en-US" dirty="0"/>
+              <a:t>번역</a:t>
+            </a:r>
+            <a:r>
+              <a:rPr lang="en-US" altLang="ko-KR" dirty="0"/>
+              <a:t>, </a:t>
+            </a:r>
+            <a:r>
+              <a:rPr lang="ko-KR" altLang="en-US" dirty="0"/>
+              <a:t>시계열 예측 등에 사용됩니다</a:t>
+            </a:r>
+            <a:r>
+              <a:rPr lang="en-US" altLang="ko-KR" dirty="0"/>
+              <a:t>.</a:t>
+            </a:r>
+          </a:p>
+          <a:p>
+            <a:r>
+              <a:rPr lang="ko-KR" altLang="en-US" dirty="0"/>
+              <a:t>하지만 입력이 길어질수록 앞 정보가 사라지는 장기 의존성 문제가 있습니다</a:t>
+            </a:r>
+            <a:r>
+              <a:rPr lang="en-US" altLang="ko-KR" dirty="0"/>
+              <a:t>.</a:t>
+            </a:r>
+          </a:p>
+          <a:p>
+            <a:endParaRPr lang="ko-KR" altLang="en-US" dirty="0"/>
+          </a:p>
+        </p:txBody>
+      </p:sp>
+      <p:sp>
+        <p:nvSpPr>
+          <p:cNvPr id="4" name="슬라이드 번호 개체 틀 3"/>
+          <p:cNvSpPr>
+            <a:spLocks noGrp="1"/>
+          </p:cNvSpPr>
+          <p:nvPr>
+            <p:ph type="sldNum" sz="quarter" idx="5"/>
+          </p:nvPr>
+        </p:nvSpPr>
+        <p:spPr/>
+        <p:txBody>
+          <a:bodyPr/>
+          <a:lstStyle/>
+          <a:p>
+            <a:fld id="{C09E5BFC-1559-42F1-8940-AB342D56BF02}" type="slidenum">
+              <a:rPr lang="ko-KR" altLang="en-US" smtClean="0"/>
+              <a:t>9</a:t>
+            </a:fld>
+            <a:endParaRPr lang="ko-KR" altLang="en-US"/>
+          </a:p>
+        </p:txBody>
+      </p:sp>
+    </p:spTree>
+    <p:extLst>
+      <p:ext uri="{BB962C8B-B14F-4D97-AF65-F5344CB8AC3E}">
+        <p14:creationId xmlns:p14="http://schemas.microsoft.com/office/powerpoint/2010/main" val="3533963443"/>
       </p:ext>
     </p:extLst>
   </p:cSld>
@@ -1048,7 +2540,7 @@
           <a:p>
             <a:fld id="{442BEE3F-2E9A-4FD8-8B8A-8619F3E161C0}" type="datetime1">
               <a:rPr lang="ko-KR" altLang="en-US" smtClean="0"/>
-              <a:t>2026-02-19</a:t>
+              <a:t>2026-02-20</a:t>
             </a:fld>
             <a:endParaRPr lang="ko-KR" altLang="en-US"/>
           </a:p>
@@ -1335,7 +2827,7 @@
           <a:p>
             <a:fld id="{0F78D9C4-20C1-4B15-A116-16DC77AD9A1E}" type="datetime1">
               <a:rPr lang="ko-KR" altLang="en-US" smtClean="0"/>
-              <a:t>2026-02-19</a:t>
+              <a:t>2026-02-20</a:t>
             </a:fld>
             <a:endParaRPr lang="ko-KR" altLang="en-US"/>
           </a:p>
@@ -1511,7 +3003,7 @@
             <a:fld id="{7F5E23C3-0E3D-4E4E-8486-D7FB4C073DC1}" type="datetime1">
               <a:rPr lang="ko-KR" altLang="en-US" smtClean="0"/>
               <a:pPr/>
-              <a:t>2026-02-19</a:t>
+              <a:t>2026-02-20</a:t>
             </a:fld>
             <a:endParaRPr lang="ko-KR" altLang="en-US" dirty="0"/>
           </a:p>
@@ -1733,7 +3225,7 @@
           <a:p>
             <a:fld id="{442BEE3F-2E9A-4FD8-8B8A-8619F3E161C0}" type="datetime1">
               <a:rPr lang="ko-KR" altLang="en-US" smtClean="0"/>
-              <a:t>2026-02-19</a:t>
+              <a:t>2026-02-20</a:t>
             </a:fld>
             <a:endParaRPr lang="ko-KR" altLang="en-US"/>
           </a:p>
@@ -2020,7 +3512,7 @@
           <a:p>
             <a:fld id="{0F78D9C4-20C1-4B15-A116-16DC77AD9A1E}" type="datetime1">
               <a:rPr lang="ko-KR" altLang="en-US" smtClean="0"/>
-              <a:t>2026-02-19</a:t>
+              <a:t>2026-02-20</a:t>
             </a:fld>
             <a:endParaRPr lang="ko-KR" altLang="en-US"/>
           </a:p>
@@ -2196,7 +3688,7 @@
             <a:fld id="{7F5E23C3-0E3D-4E4E-8486-D7FB4C073DC1}" type="datetime1">
               <a:rPr lang="ko-KR" altLang="en-US" smtClean="0"/>
               <a:pPr/>
-              <a:t>2026-02-19</a:t>
+              <a:t>2026-02-20</a:t>
             </a:fld>
             <a:endParaRPr lang="ko-KR" altLang="en-US" dirty="0"/>
           </a:p>
@@ -2528,7 +4020,7 @@
             <a:fld id="{7F5E23C3-0E3D-4E4E-8486-D7FB4C073DC1}" type="datetime1">
               <a:rPr lang="ko-KR" altLang="en-US" smtClean="0"/>
               <a:pPr/>
-              <a:t>2026-02-19</a:t>
+              <a:t>2026-02-20</a:t>
             </a:fld>
             <a:endParaRPr lang="ko-KR" altLang="en-US" dirty="0"/>
           </a:p>
@@ -3306,7 +4798,7 @@
             <a:fld id="{7F5E23C3-0E3D-4E4E-8486-D7FB4C073DC1}" type="datetime1">
               <a:rPr lang="ko-KR" altLang="en-US" smtClean="0"/>
               <a:pPr/>
-              <a:t>2026-02-19</a:t>
+              <a:t>2026-02-20</a:t>
             </a:fld>
             <a:endParaRPr lang="ko-KR" altLang="en-US" dirty="0"/>
           </a:p>
@@ -4299,17 +5791,10 @@
           <a:lstStyle/>
           <a:p>
             <a:r>
-              <a:rPr lang="ko-KR" altLang="en-US" b="1" dirty="0"/>
-              <a:t>트랜스포머</a:t>
-            </a:r>
-            <a:r>
               <a:rPr lang="en-US" altLang="ko-KR" b="1" dirty="0"/>
-              <a:t>(Transformer)</a:t>
-            </a:r>
-            <a:r>
-              <a:rPr lang="ko-KR" altLang="en-US" b="1" dirty="0"/>
-              <a:t> </a:t>
-            </a:r>
+              <a:t>RNN(Recurrent Neural Network)</a:t>
+            </a:r>
+            <a:endParaRPr lang="ko-KR" altLang="en-US" b="1" dirty="0"/>
           </a:p>
         </p:txBody>
       </p:sp>
@@ -4331,8 +5816,8 @@
         </p:nvSpPr>
         <p:spPr>
           <a:xfrm>
-            <a:off x="251788" y="1145407"/>
-            <a:ext cx="11458937" cy="5248857"/>
+            <a:off x="251788" y="1234121"/>
+            <a:ext cx="5513745" cy="4389757"/>
           </a:xfrm>
         </p:spPr>
         <p:txBody>
@@ -4348,68 +5833,68 @@
               <a:buNone/>
             </a:pPr>
             <a:r>
-              <a:rPr lang="ko-KR" altLang="en-US" sz="2400" b="1" dirty="0"/>
-              <a:t>💡 </a:t>
-            </a:r>
-            <a:r>
-              <a:rPr lang="ko-KR" altLang="en-US" sz="2400" b="1" dirty="0" err="1"/>
-              <a:t>어텐션</a:t>
-            </a:r>
-            <a:r>
-              <a:rPr lang="ko-KR" altLang="en-US" sz="2400" b="1" dirty="0"/>
-              <a:t> 메커니즘</a:t>
-            </a:r>
-            <a:endParaRPr lang="en-US" altLang="ko-KR" sz="2400" b="1" dirty="0"/>
+              <a:rPr lang="ko-KR" altLang="en-US" sz="2400" dirty="0"/>
+              <a:t>✅ 활용</a:t>
+            </a:r>
+            <a:endParaRPr lang="en-US" altLang="ko-KR" sz="2400" dirty="0"/>
           </a:p>
           <a:p>
             <a:pPr lvl="1">
               <a:lnSpc>
                 <a:spcPct val="150000"/>
               </a:lnSpc>
-              <a:buFont typeface="Wingdings" panose="05000000000000000000" pitchFamily="2" charset="2"/>
-              <a:buChar char="§"/>
             </a:pPr>
             <a:r>
               <a:rPr lang="ko-KR" altLang="en-US" sz="2000" dirty="0"/>
-              <a:t>입력 요소들 중 중요한 부분에 더 큰 가중치를 부여해 정보를 선택적으로 집중하는 기법</a:t>
-            </a:r>
-            <a:endParaRPr lang="en-US" altLang="ko-KR" sz="2000" b="1" dirty="0"/>
+              <a:t>자연어 처리</a:t>
+            </a:r>
+            <a:r>
+              <a:rPr lang="en-US" altLang="ko-KR" sz="2000" dirty="0"/>
+              <a:t>, </a:t>
+            </a:r>
+            <a:r>
+              <a:rPr lang="ko-KR" altLang="en-US" sz="2000" dirty="0"/>
+              <a:t>신호 분류</a:t>
+            </a:r>
+            <a:r>
+              <a:rPr lang="en-US" altLang="ko-KR" sz="2000" dirty="0"/>
+              <a:t>, </a:t>
+            </a:r>
+            <a:r>
+              <a:rPr lang="ko-KR" altLang="en-US" sz="2000" dirty="0"/>
+              <a:t>비디오 분석등에 사용</a:t>
+            </a:r>
+            <a:endParaRPr lang="en-US" altLang="ko-KR" sz="2000" dirty="0"/>
           </a:p>
           <a:p>
             <a:pPr lvl="1">
               <a:lnSpc>
                 <a:spcPct val="150000"/>
               </a:lnSpc>
-              <a:buFont typeface="Wingdings" panose="05000000000000000000" pitchFamily="2" charset="2"/>
-              <a:buChar char="§"/>
             </a:pPr>
             <a:r>
               <a:rPr lang="ko-KR" altLang="en-US" sz="2000" dirty="0"/>
-              <a:t>트랜스포머는 </a:t>
-            </a:r>
-            <a:r>
-              <a:rPr lang="ko-KR" altLang="en-US" sz="2000" b="1" dirty="0" err="1"/>
-              <a:t>어텐션</a:t>
-            </a:r>
-            <a:r>
-              <a:rPr lang="ko-KR" altLang="en-US" sz="2000" b="1" dirty="0"/>
-              <a:t> 메커니즘</a:t>
+              <a:t>일대다 </a:t>
+            </a:r>
+            <a:r>
+              <a:rPr lang="en-US" altLang="ko-KR" sz="2000" dirty="0"/>
+              <a:t>: image</a:t>
             </a:r>
             <a:r>
               <a:rPr lang="ko-KR" altLang="en-US" sz="2000" dirty="0"/>
-              <a:t>을 </a:t>
-            </a:r>
-            <a:r>
-              <a:rPr lang="ko-KR" altLang="en-US" sz="2000" b="1" dirty="0"/>
-              <a:t>기반으로 설계</a:t>
+              <a:t> </a:t>
+            </a:r>
+            <a:r>
+              <a:rPr lang="en-US" altLang="ko-KR" sz="2000" dirty="0"/>
+              <a:t>to</a:t>
             </a:r>
             <a:r>
               <a:rPr lang="ko-KR" altLang="en-US" sz="2000" dirty="0"/>
-              <a:t>된 모델</a:t>
+              <a:t> </a:t>
             </a:r>
             <a:r>
               <a:rPr lang="en-US" altLang="ko-KR" sz="2000" dirty="0"/>
-              <a:t>.</a:t>
+              <a:t>text</a:t>
             </a:r>
           </a:p>
           <a:p>
@@ -4417,34 +5902,56 @@
               <a:lnSpc>
                 <a:spcPct val="150000"/>
               </a:lnSpc>
-              <a:buFont typeface="Wingdings" panose="05000000000000000000" pitchFamily="2" charset="2"/>
-              <a:buChar char="§"/>
             </a:pPr>
             <a:r>
               <a:rPr lang="ko-KR" altLang="en-US" sz="2000" dirty="0"/>
-              <a:t>자연어 처리</a:t>
+              <a:t>다대일 </a:t>
             </a:r>
             <a:r>
               <a:rPr lang="en-US" altLang="ko-KR" sz="2000" dirty="0"/>
-              <a:t>(NLP)</a:t>
+              <a:t>: </a:t>
             </a:r>
             <a:r>
               <a:rPr lang="ko-KR" altLang="en-US" sz="2000" dirty="0"/>
-              <a:t>와 컴퓨터 비전</a:t>
+              <a:t>문장 감정 분류</a:t>
             </a:r>
             <a:r>
               <a:rPr lang="en-US" altLang="ko-KR" sz="2000" dirty="0"/>
-              <a:t>(CV) </a:t>
+              <a:t>, </a:t>
             </a:r>
             <a:r>
               <a:rPr lang="ko-KR" altLang="en-US" sz="2000" dirty="0"/>
-              <a:t>등 다양한 분야에서 사용</a:t>
+              <a:t>스팸 메일 분류</a:t>
+            </a:r>
+            <a:endParaRPr lang="en-US" altLang="ko-KR" sz="2000" dirty="0"/>
+          </a:p>
+          <a:p>
+            <a:pPr lvl="1">
+              <a:lnSpc>
+                <a:spcPct val="150000"/>
+              </a:lnSpc>
+            </a:pPr>
+            <a:r>
+              <a:rPr lang="ko-KR" altLang="en-US" sz="2000" dirty="0"/>
+              <a:t>다대다 </a:t>
             </a:r>
             <a:r>
               <a:rPr lang="en-US" altLang="ko-KR" sz="2000" dirty="0"/>
-              <a:t>.</a:t>
-            </a:r>
-            <a:endParaRPr lang="en-US" altLang="ko-KR" sz="2400" dirty="0"/>
+              <a:t>: </a:t>
+            </a:r>
+            <a:r>
+              <a:rPr lang="ko-KR" altLang="en-US" sz="2000" dirty="0" err="1"/>
+              <a:t>챗봇</a:t>
+            </a:r>
+            <a:r>
+              <a:rPr lang="en-US" altLang="ko-KR" sz="2000" dirty="0"/>
+              <a:t>, </a:t>
+            </a:r>
+            <a:r>
+              <a:rPr lang="ko-KR" altLang="en-US" sz="2000" dirty="0"/>
+              <a:t>번역기</a:t>
+            </a:r>
+            <a:endParaRPr lang="en-US" altLang="ko-KR" sz="2000" dirty="0"/>
           </a:p>
           <a:p>
             <a:pPr marL="0" indent="0">
@@ -4454,593 +5961,10 @@
               <a:buNone/>
             </a:pPr>
             <a:r>
-              <a:rPr lang="ko-KR" altLang="en-US" sz="2400" b="1" dirty="0"/>
-              <a:t>✅ </a:t>
-            </a:r>
-            <a:r>
-              <a:rPr lang="ko-KR" altLang="en-US" sz="2400" b="1" dirty="0" err="1"/>
-              <a:t>어텐션이</a:t>
-            </a:r>
-            <a:r>
-              <a:rPr lang="ko-KR" altLang="en-US" sz="2400" b="1" dirty="0"/>
-              <a:t> 트랜스포머의 핵심인 이유</a:t>
-            </a:r>
-          </a:p>
-          <a:p>
-            <a:pPr lvl="1">
-              <a:lnSpc>
-                <a:spcPct val="150000"/>
-              </a:lnSpc>
-              <a:buFont typeface="Wingdings" panose="05000000000000000000" pitchFamily="2" charset="2"/>
-              <a:buChar char="§"/>
-            </a:pPr>
-            <a:r>
-              <a:rPr lang="en-US" altLang="ko-KR" sz="2000" b="1" dirty="0"/>
-              <a:t>RNN/CNN</a:t>
-            </a:r>
-            <a:r>
-              <a:rPr lang="ko-KR" altLang="en-US" sz="2000" b="1" dirty="0"/>
-              <a:t>의 한계 극복</a:t>
-            </a:r>
-            <a:endParaRPr lang="ko-KR" altLang="en-US" sz="2000" dirty="0"/>
-          </a:p>
-          <a:p>
-            <a:pPr lvl="2">
-              <a:lnSpc>
-                <a:spcPct val="150000"/>
-              </a:lnSpc>
-            </a:pPr>
-            <a:r>
-              <a:rPr lang="en-US" altLang="ko-KR" sz="1800" dirty="0"/>
-              <a:t>RNN</a:t>
-            </a:r>
-            <a:r>
-              <a:rPr lang="ko-KR" altLang="en-US" sz="1800" dirty="0"/>
-              <a:t>의 느린 학습과 장기 의존성 문제 해결</a:t>
-            </a:r>
-            <a:r>
-              <a:rPr lang="en-US" altLang="ko-KR" sz="1800" dirty="0"/>
-              <a:t>, CNN</a:t>
-            </a:r>
-            <a:r>
-              <a:rPr lang="ko-KR" altLang="en-US" sz="1800" dirty="0"/>
-              <a:t>의 국소적 한계를 넘어 전역 문맥 학습 가능</a:t>
-            </a:r>
-            <a:r>
-              <a:rPr lang="en-US" altLang="ko-KR" sz="1800" dirty="0"/>
-              <a:t>.</a:t>
-            </a:r>
-          </a:p>
-          <a:p>
-            <a:pPr lvl="1">
-              <a:lnSpc>
-                <a:spcPct val="150000"/>
-              </a:lnSpc>
-              <a:buFont typeface="Wingdings" panose="05000000000000000000" pitchFamily="2" charset="2"/>
-              <a:buChar char="§"/>
-            </a:pPr>
-            <a:r>
-              <a:rPr lang="en-US" altLang="ko-KR" sz="2000" b="1" dirty="0"/>
-              <a:t>Self-Attention</a:t>
-            </a:r>
-            <a:r>
-              <a:rPr lang="ko-KR" altLang="en-US" sz="2000" b="1" dirty="0"/>
-              <a:t>의 역할</a:t>
-            </a:r>
-            <a:endParaRPr lang="ko-KR" altLang="en-US" sz="2000" dirty="0"/>
-          </a:p>
-          <a:p>
-            <a:pPr lvl="2">
-              <a:lnSpc>
-                <a:spcPct val="150000"/>
-              </a:lnSpc>
-            </a:pPr>
-            <a:r>
-              <a:rPr lang="ko-KR" altLang="en-US" sz="1800" dirty="0"/>
-              <a:t>입력 데이터 간의 관계를 한 번에 계산</a:t>
-            </a:r>
-            <a:r>
-              <a:rPr lang="en-US" altLang="ko-KR" sz="1800" dirty="0"/>
-              <a:t>, </a:t>
-            </a:r>
-            <a:r>
-              <a:rPr lang="ko-KR" altLang="en-US" sz="1800" dirty="0"/>
-              <a:t>문맥 정보를 정확히 이해</a:t>
-            </a:r>
-            <a:r>
-              <a:rPr lang="en-US" altLang="ko-KR" sz="1800" dirty="0"/>
-              <a:t>.</a:t>
-            </a:r>
-          </a:p>
-          <a:p>
-            <a:pPr>
-              <a:lnSpc>
-                <a:spcPct val="150000"/>
-              </a:lnSpc>
-            </a:pPr>
+              <a:rPr lang="ko-KR" altLang="en-US" sz="2400" dirty="0"/>
+              <a:t>📌 한계 </a:t>
+            </a:r>
             <a:endParaRPr lang="en-US" altLang="ko-KR" sz="2400" dirty="0"/>
-          </a:p>
-        </p:txBody>
-      </p:sp>
-      <p:sp>
-        <p:nvSpPr>
-          <p:cNvPr id="4" name="날짜 개체 틀 3">
-            <a:extLst>
-              <a:ext uri="{FF2B5EF4-FFF2-40B4-BE49-F238E27FC236}">
-                <a16:creationId xmlns:a16="http://schemas.microsoft.com/office/drawing/2014/main" id="{B436F977-2F80-A369-4870-4CFEEDC26E7F}"/>
-              </a:ext>
-            </a:extLst>
-          </p:cNvPr>
-          <p:cNvSpPr>
-            <a:spLocks noGrp="1"/>
-          </p:cNvSpPr>
-          <p:nvPr>
-            <p:ph type="dt" sz="half" idx="10"/>
-          </p:nvPr>
-        </p:nvSpPr>
-        <p:spPr/>
-        <p:txBody>
-          <a:bodyPr/>
-          <a:lstStyle/>
-          <a:p>
-            <a:fld id="{0F78D9C4-20C1-4B15-A116-16DC77AD9A1E}" type="datetime1">
-              <a:rPr lang="ko-KR" altLang="en-US" smtClean="0"/>
-              <a:t>2026-02-19</a:t>
-            </a:fld>
-            <a:endParaRPr lang="ko-KR" altLang="en-US"/>
-          </a:p>
-        </p:txBody>
-      </p:sp>
-      <p:sp>
-        <p:nvSpPr>
-          <p:cNvPr id="5" name="슬라이드 번호 개체 틀 4">
-            <a:extLst>
-              <a:ext uri="{FF2B5EF4-FFF2-40B4-BE49-F238E27FC236}">
-                <a16:creationId xmlns:a16="http://schemas.microsoft.com/office/drawing/2014/main" id="{58AE5165-246F-D448-ADAB-3B880493009B}"/>
-              </a:ext>
-            </a:extLst>
-          </p:cNvPr>
-          <p:cNvSpPr>
-            <a:spLocks noGrp="1"/>
-          </p:cNvSpPr>
-          <p:nvPr>
-            <p:ph type="sldNum" sz="quarter" idx="12"/>
-          </p:nvPr>
-        </p:nvSpPr>
-        <p:spPr/>
-        <p:txBody>
-          <a:bodyPr/>
-          <a:lstStyle/>
-          <a:p>
-            <a:fld id="{083A2CE0-18CD-4102-B738-4ACFF9E68BA4}" type="slidenum">
-              <a:rPr lang="ko-KR" altLang="en-US" smtClean="0"/>
-              <a:t>10</a:t>
-            </a:fld>
-            <a:endParaRPr lang="ko-KR" altLang="en-US"/>
-          </a:p>
-        </p:txBody>
-      </p:sp>
-    </p:spTree>
-    <p:extLst>
-      <p:ext uri="{BB962C8B-B14F-4D97-AF65-F5344CB8AC3E}">
-        <p14:creationId xmlns:p14="http://schemas.microsoft.com/office/powerpoint/2010/main" val="2564618452"/>
-      </p:ext>
-    </p:extLst>
-  </p:cSld>
-  <p:clrMapOvr>
-    <a:masterClrMapping/>
-  </p:clrMapOvr>
-</p:sld>
-</file>
-
-<file path=ppt/slides/slide11.xml><?xml version="1.0" encoding="utf-8"?>
-<p:sld xmlns:a="http://schemas.openxmlformats.org/drawingml/2006/main" xmlns:r="http://schemas.openxmlformats.org/officeDocument/2006/relationships" xmlns:p="http://schemas.openxmlformats.org/presentationml/2006/main">
-  <p:cSld>
-    <p:spTree>
-      <p:nvGrpSpPr>
-        <p:cNvPr id="1" name=""/>
-        <p:cNvGrpSpPr/>
-        <p:nvPr/>
-      </p:nvGrpSpPr>
-      <p:grpSpPr>
-        <a:xfrm>
-          <a:off x="0" y="0"/>
-          <a:ext cx="0" cy="0"/>
-          <a:chOff x="0" y="0"/>
-          <a:chExt cx="0" cy="0"/>
-        </a:xfrm>
-      </p:grpSpPr>
-      <p:sp>
-        <p:nvSpPr>
-          <p:cNvPr id="2" name="제목 1">
-            <a:extLst>
-              <a:ext uri="{FF2B5EF4-FFF2-40B4-BE49-F238E27FC236}">
-                <a16:creationId xmlns:a16="http://schemas.microsoft.com/office/drawing/2014/main" id="{29017EEA-1700-68A7-6D01-92F3863263E2}"/>
-              </a:ext>
-            </a:extLst>
-          </p:cNvPr>
-          <p:cNvSpPr>
-            <a:spLocks noGrp="1"/>
-          </p:cNvSpPr>
-          <p:nvPr>
-            <p:ph type="title"/>
-          </p:nvPr>
-        </p:nvSpPr>
-        <p:spPr/>
-        <p:txBody>
-          <a:bodyPr>
-            <a:normAutofit/>
-          </a:bodyPr>
-          <a:lstStyle/>
-          <a:p>
-            <a:r>
-              <a:rPr lang="ko-KR" altLang="en-US" b="1" dirty="0"/>
-              <a:t>트랜스포머</a:t>
-            </a:r>
-            <a:r>
-              <a:rPr lang="en-US" altLang="ko-KR" b="1" dirty="0"/>
-              <a:t>(Transformer)</a:t>
-            </a:r>
-            <a:r>
-              <a:rPr lang="ko-KR" altLang="en-US" b="1" dirty="0"/>
-              <a:t> </a:t>
-            </a:r>
-          </a:p>
-        </p:txBody>
-      </p:sp>
-      <p:sp>
-        <p:nvSpPr>
-          <p:cNvPr id="3" name="내용 개체 틀 2">
-            <a:extLst>
-              <a:ext uri="{FF2B5EF4-FFF2-40B4-BE49-F238E27FC236}">
-                <a16:creationId xmlns:a16="http://schemas.microsoft.com/office/drawing/2014/main" id="{7427EE51-6539-C4E3-E901-BA804AE94D29}"/>
-              </a:ext>
-            </a:extLst>
-          </p:cNvPr>
-          <p:cNvSpPr>
-            <a:spLocks noGrp="1"/>
-          </p:cNvSpPr>
-          <p:nvPr>
-            <p:ph idx="1"/>
-          </p:nvPr>
-        </p:nvSpPr>
-        <p:spPr>
-          <a:xfrm>
-            <a:off x="251788" y="1145407"/>
-            <a:ext cx="11458937" cy="5248857"/>
-          </a:xfrm>
-        </p:spPr>
-        <p:txBody>
-          <a:bodyPr>
-            <a:noAutofit/>
-          </a:bodyPr>
-          <a:lstStyle/>
-          <a:p>
-            <a:pPr marL="0" indent="0">
-              <a:lnSpc>
-                <a:spcPct val="150000"/>
-              </a:lnSpc>
-              <a:buNone/>
-            </a:pPr>
-            <a:r>
-              <a:rPr lang="ko-KR" altLang="en-US" sz="2400" b="1" dirty="0"/>
-              <a:t>✅ 작동 원리</a:t>
-            </a:r>
-          </a:p>
-          <a:p>
-            <a:pPr lvl="1">
-              <a:lnSpc>
-                <a:spcPct val="150000"/>
-              </a:lnSpc>
-              <a:buFont typeface="Wingdings" pitchFamily="2" charset="2"/>
-              <a:buChar char="§"/>
-            </a:pPr>
-            <a:r>
-              <a:rPr lang="ko-KR" altLang="en-US" sz="2000" b="1" dirty="0"/>
-              <a:t>관련성 계산</a:t>
-            </a:r>
-          </a:p>
-          <a:p>
-            <a:pPr lvl="2">
-              <a:lnSpc>
-                <a:spcPct val="150000"/>
-              </a:lnSpc>
-            </a:pPr>
-            <a:r>
-              <a:rPr lang="ko-KR" altLang="en-US" sz="1800" dirty="0"/>
-              <a:t>입력 데이터</a:t>
-            </a:r>
-            <a:r>
-              <a:rPr lang="en-US" altLang="ko-KR" sz="1800" dirty="0"/>
-              <a:t>(</a:t>
-            </a:r>
-            <a:r>
-              <a:rPr lang="ko-KR" altLang="en-US" sz="1800" dirty="0"/>
-              <a:t>예</a:t>
-            </a:r>
-            <a:r>
-              <a:rPr lang="en-US" altLang="ko-KR" sz="1800" dirty="0"/>
-              <a:t>: </a:t>
-            </a:r>
-            <a:r>
-              <a:rPr lang="ko-KR" altLang="en-US" sz="1800" dirty="0"/>
-              <a:t>단어</a:t>
-            </a:r>
-            <a:r>
-              <a:rPr lang="en-US" altLang="ko-KR" sz="1800" dirty="0"/>
-              <a:t>) </a:t>
-            </a:r>
-            <a:r>
-              <a:rPr lang="ko-KR" altLang="en-US" sz="1800" dirty="0"/>
-              <a:t>간의 관계를 점수로 매김</a:t>
-            </a:r>
-            <a:r>
-              <a:rPr lang="en-US" altLang="ko-KR" sz="1800" dirty="0"/>
-              <a:t>.</a:t>
-            </a:r>
-          </a:p>
-          <a:p>
-            <a:pPr lvl="2">
-              <a:lnSpc>
-                <a:spcPct val="150000"/>
-              </a:lnSpc>
-            </a:pPr>
-            <a:r>
-              <a:rPr lang="ko-KR" altLang="en-US" sz="1800" dirty="0"/>
-              <a:t>예</a:t>
-            </a:r>
-            <a:r>
-              <a:rPr lang="en-US" altLang="ko-KR" sz="1800" dirty="0"/>
-              <a:t>: "</a:t>
-            </a:r>
-            <a:r>
-              <a:rPr lang="ko-KR" altLang="en-US" sz="1800" dirty="0"/>
-              <a:t>고양이</a:t>
-            </a:r>
-            <a:r>
-              <a:rPr lang="en-US" altLang="ko-KR" sz="1800" dirty="0"/>
-              <a:t>" ↔ "</a:t>
-            </a:r>
-            <a:r>
-              <a:rPr lang="ko-KR" altLang="en-US" sz="1800" dirty="0"/>
-              <a:t>올라갔다</a:t>
-            </a:r>
-            <a:r>
-              <a:rPr lang="en-US" altLang="ko-KR" sz="1800" dirty="0"/>
-              <a:t>"</a:t>
-            </a:r>
-            <a:r>
-              <a:rPr lang="ko-KR" altLang="en-US" sz="1800" dirty="0"/>
-              <a:t>는 관련성 높음</a:t>
-            </a:r>
-            <a:r>
-              <a:rPr lang="en-US" altLang="ko-KR" sz="1800" dirty="0"/>
-              <a:t>.</a:t>
-            </a:r>
-          </a:p>
-          <a:p>
-            <a:pPr lvl="1">
-              <a:lnSpc>
-                <a:spcPct val="150000"/>
-              </a:lnSpc>
-              <a:buFont typeface="Wingdings" pitchFamily="2" charset="2"/>
-              <a:buChar char="§"/>
-            </a:pPr>
-            <a:r>
-              <a:rPr lang="ko-KR" altLang="en-US" sz="2000" b="1" dirty="0"/>
-              <a:t>가중치 부여</a:t>
-            </a:r>
-          </a:p>
-          <a:p>
-            <a:pPr lvl="2">
-              <a:lnSpc>
-                <a:spcPct val="150000"/>
-              </a:lnSpc>
-            </a:pPr>
-            <a:r>
-              <a:rPr lang="ko-KR" altLang="en-US" sz="1800" dirty="0"/>
-              <a:t>점수를 기반으로 각 단어의 중요도를 결정</a:t>
-            </a:r>
-            <a:r>
-              <a:rPr lang="en-US" altLang="ko-KR" sz="1800" dirty="0"/>
-              <a:t>.</a:t>
-            </a:r>
-          </a:p>
-          <a:p>
-            <a:pPr lvl="1">
-              <a:lnSpc>
-                <a:spcPct val="150000"/>
-              </a:lnSpc>
-              <a:buFont typeface="Wingdings" pitchFamily="2" charset="2"/>
-              <a:buChar char="§"/>
-            </a:pPr>
-            <a:r>
-              <a:rPr lang="ko-KR" altLang="en-US" sz="2000" b="1" dirty="0"/>
-              <a:t>정보 재조합</a:t>
-            </a:r>
-          </a:p>
-          <a:p>
-            <a:pPr lvl="2">
-              <a:lnSpc>
-                <a:spcPct val="150000"/>
-              </a:lnSpc>
-            </a:pPr>
-            <a:r>
-              <a:rPr lang="ko-KR" altLang="en-US" sz="1800" dirty="0"/>
-              <a:t>중요한 데이터에 더 집중해 전체 문맥 이해</a:t>
-            </a:r>
-            <a:r>
-              <a:rPr lang="en-US" altLang="ko-KR" sz="1800" dirty="0"/>
-              <a:t>.</a:t>
-            </a:r>
-            <a:endParaRPr lang="en-US" altLang="ko-KR" sz="1400" dirty="0"/>
-          </a:p>
-        </p:txBody>
-      </p:sp>
-      <p:sp>
-        <p:nvSpPr>
-          <p:cNvPr id="4" name="날짜 개체 틀 3">
-            <a:extLst>
-              <a:ext uri="{FF2B5EF4-FFF2-40B4-BE49-F238E27FC236}">
-                <a16:creationId xmlns:a16="http://schemas.microsoft.com/office/drawing/2014/main" id="{B436F977-2F80-A369-4870-4CFEEDC26E7F}"/>
-              </a:ext>
-            </a:extLst>
-          </p:cNvPr>
-          <p:cNvSpPr>
-            <a:spLocks noGrp="1"/>
-          </p:cNvSpPr>
-          <p:nvPr>
-            <p:ph type="dt" sz="half" idx="10"/>
-          </p:nvPr>
-        </p:nvSpPr>
-        <p:spPr/>
-        <p:txBody>
-          <a:bodyPr/>
-          <a:lstStyle/>
-          <a:p>
-            <a:fld id="{0F78D9C4-20C1-4B15-A116-16DC77AD9A1E}" type="datetime1">
-              <a:rPr lang="ko-KR" altLang="en-US" smtClean="0"/>
-              <a:t>2026-02-19</a:t>
-            </a:fld>
-            <a:endParaRPr lang="ko-KR" altLang="en-US"/>
-          </a:p>
-        </p:txBody>
-      </p:sp>
-      <p:sp>
-        <p:nvSpPr>
-          <p:cNvPr id="5" name="슬라이드 번호 개체 틀 4">
-            <a:extLst>
-              <a:ext uri="{FF2B5EF4-FFF2-40B4-BE49-F238E27FC236}">
-                <a16:creationId xmlns:a16="http://schemas.microsoft.com/office/drawing/2014/main" id="{58AE5165-246F-D448-ADAB-3B880493009B}"/>
-              </a:ext>
-            </a:extLst>
-          </p:cNvPr>
-          <p:cNvSpPr>
-            <a:spLocks noGrp="1"/>
-          </p:cNvSpPr>
-          <p:nvPr>
-            <p:ph type="sldNum" sz="quarter" idx="12"/>
-          </p:nvPr>
-        </p:nvSpPr>
-        <p:spPr/>
-        <p:txBody>
-          <a:bodyPr/>
-          <a:lstStyle/>
-          <a:p>
-            <a:fld id="{083A2CE0-18CD-4102-B738-4ACFF9E68BA4}" type="slidenum">
-              <a:rPr lang="ko-KR" altLang="en-US" smtClean="0"/>
-              <a:t>11</a:t>
-            </a:fld>
-            <a:endParaRPr lang="ko-KR" altLang="en-US"/>
-          </a:p>
-        </p:txBody>
-      </p:sp>
-    </p:spTree>
-    <p:extLst>
-      <p:ext uri="{BB962C8B-B14F-4D97-AF65-F5344CB8AC3E}">
-        <p14:creationId xmlns:p14="http://schemas.microsoft.com/office/powerpoint/2010/main" val="832573128"/>
-      </p:ext>
-    </p:extLst>
-  </p:cSld>
-  <p:clrMapOvr>
-    <a:masterClrMapping/>
-  </p:clrMapOvr>
-</p:sld>
-</file>
-
-<file path=ppt/slides/slide12.xml><?xml version="1.0" encoding="utf-8"?>
-<p:sld xmlns:a="http://schemas.openxmlformats.org/drawingml/2006/main" xmlns:r="http://schemas.openxmlformats.org/officeDocument/2006/relationships" xmlns:p="http://schemas.openxmlformats.org/presentationml/2006/main">
-  <p:cSld>
-    <p:spTree>
-      <p:nvGrpSpPr>
-        <p:cNvPr id="1" name=""/>
-        <p:cNvGrpSpPr/>
-        <p:nvPr/>
-      </p:nvGrpSpPr>
-      <p:grpSpPr>
-        <a:xfrm>
-          <a:off x="0" y="0"/>
-          <a:ext cx="0" cy="0"/>
-          <a:chOff x="0" y="0"/>
-          <a:chExt cx="0" cy="0"/>
-        </a:xfrm>
-      </p:grpSpPr>
-      <p:sp>
-        <p:nvSpPr>
-          <p:cNvPr id="2" name="제목 1">
-            <a:extLst>
-              <a:ext uri="{FF2B5EF4-FFF2-40B4-BE49-F238E27FC236}">
-                <a16:creationId xmlns:a16="http://schemas.microsoft.com/office/drawing/2014/main" id="{29017EEA-1700-68A7-6D01-92F3863263E2}"/>
-              </a:ext>
-            </a:extLst>
-          </p:cNvPr>
-          <p:cNvSpPr>
-            <a:spLocks noGrp="1"/>
-          </p:cNvSpPr>
-          <p:nvPr>
-            <p:ph type="title"/>
-          </p:nvPr>
-        </p:nvSpPr>
-        <p:spPr/>
-        <p:txBody>
-          <a:bodyPr>
-            <a:normAutofit/>
-          </a:bodyPr>
-          <a:lstStyle/>
-          <a:p>
-            <a:r>
-              <a:rPr lang="ko-KR" altLang="en-US" b="1" dirty="0"/>
-              <a:t>트랜스포머</a:t>
-            </a:r>
-            <a:r>
-              <a:rPr lang="en-US" altLang="ko-KR" b="1" dirty="0"/>
-              <a:t>(Transformer)</a:t>
-            </a:r>
-            <a:r>
-              <a:rPr lang="ko-KR" altLang="en-US" b="1" dirty="0"/>
-              <a:t> </a:t>
-            </a:r>
-          </a:p>
-        </p:txBody>
-      </p:sp>
-      <p:sp>
-        <p:nvSpPr>
-          <p:cNvPr id="3" name="내용 개체 틀 2">
-            <a:extLst>
-              <a:ext uri="{FF2B5EF4-FFF2-40B4-BE49-F238E27FC236}">
-                <a16:creationId xmlns:a16="http://schemas.microsoft.com/office/drawing/2014/main" id="{7427EE51-6539-C4E3-E901-BA804AE94D29}"/>
-              </a:ext>
-            </a:extLst>
-          </p:cNvPr>
-          <p:cNvSpPr>
-            <a:spLocks noGrp="1"/>
-          </p:cNvSpPr>
-          <p:nvPr>
-            <p:ph idx="1"/>
-          </p:nvPr>
-        </p:nvSpPr>
-        <p:spPr>
-          <a:xfrm>
-            <a:off x="238991" y="1145407"/>
-            <a:ext cx="11551534" cy="3095965"/>
-          </a:xfrm>
-        </p:spPr>
-        <p:txBody>
-          <a:bodyPr>
-            <a:noAutofit/>
-          </a:bodyPr>
-          <a:lstStyle/>
-          <a:p>
-            <a:pPr marL="0" indent="0">
-              <a:lnSpc>
-                <a:spcPct val="150000"/>
-              </a:lnSpc>
-              <a:buNone/>
-            </a:pPr>
-            <a:r>
-              <a:rPr lang="ko-KR" altLang="en-US" sz="2400" b="1" dirty="0"/>
-              <a:t>📌 특징</a:t>
-            </a:r>
           </a:p>
           <a:p>
             <a:pPr lvl="1">
@@ -5050,82 +5974,21 @@
             </a:pPr>
             <a:r>
               <a:rPr lang="ko-KR" altLang="en-US" sz="2000" dirty="0"/>
-              <a:t>병렬 처리 가능</a:t>
+              <a:t>길어질수록 앞의 정보가 뒤로 충분히 전달되지 못함</a:t>
             </a:r>
             <a:r>
               <a:rPr lang="en-US" altLang="ko-KR" sz="2000" dirty="0"/>
-              <a:t>: GPU </a:t>
+              <a:t>(</a:t>
             </a:r>
             <a:r>
               <a:rPr lang="ko-KR" altLang="en-US" sz="2000" dirty="0"/>
-              <a:t>활용 효율성 극대화</a:t>
+              <a:t>장기 의존성 문제</a:t>
             </a:r>
             <a:r>
               <a:rPr lang="en-US" altLang="ko-KR" sz="2000" dirty="0"/>
-              <a:t>.</a:t>
-            </a:r>
-          </a:p>
-          <a:p>
-            <a:pPr lvl="1">
-              <a:lnSpc>
-                <a:spcPct val="150000"/>
-              </a:lnSpc>
-            </a:pPr>
-            <a:r>
-              <a:rPr lang="ko-KR" altLang="en-US" sz="2000" dirty="0" err="1"/>
-              <a:t>확장성</a:t>
-            </a:r>
-            <a:r>
-              <a:rPr lang="en-US" altLang="ko-KR" sz="2000" dirty="0"/>
-              <a:t>: </a:t>
-            </a:r>
-            <a:r>
-              <a:rPr lang="ko-KR" altLang="en-US" sz="2000" dirty="0"/>
-              <a:t>매우 큰 모델로 확장 가능 </a:t>
-            </a:r>
-            <a:r>
-              <a:rPr lang="en-US" altLang="ko-KR" sz="2000" dirty="0"/>
-              <a:t>(BERT, GPT </a:t>
-            </a:r>
-            <a:r>
-              <a:rPr lang="ko-KR" altLang="en-US" sz="2000" dirty="0"/>
-              <a:t>등</a:t>
-            </a:r>
-            <a:r>
-              <a:rPr lang="en-US" altLang="ko-KR" sz="2000" dirty="0"/>
-              <a:t>).</a:t>
-            </a:r>
-          </a:p>
-          <a:p>
-            <a:pPr lvl="1">
-              <a:lnSpc>
-                <a:spcPct val="150000"/>
-              </a:lnSpc>
-            </a:pPr>
-            <a:r>
-              <a:rPr lang="ko-KR" altLang="en-US" sz="2000" dirty="0" err="1"/>
-              <a:t>범용성</a:t>
-            </a:r>
-            <a:r>
-              <a:rPr lang="en-US" altLang="ko-KR" sz="2000" dirty="0"/>
-              <a:t>: </a:t>
-            </a:r>
-            <a:r>
-              <a:rPr lang="ko-KR" altLang="en-US" sz="2000" dirty="0"/>
-              <a:t>언어뿐 아니라 이미지</a:t>
-            </a:r>
-            <a:r>
-              <a:rPr lang="en-US" altLang="ko-KR" sz="2000" dirty="0"/>
-              <a:t>, </a:t>
-            </a:r>
-            <a:r>
-              <a:rPr lang="ko-KR" altLang="en-US" sz="2000" dirty="0"/>
-              <a:t>음성 등 다양한 분야에 활용</a:t>
-            </a:r>
-            <a:r>
-              <a:rPr lang="en-US" altLang="ko-KR" sz="2000" dirty="0"/>
-              <a:t>.</a:t>
-            </a:r>
+              <a:t>)</a:t>
+            </a:r>
+            <a:endParaRPr lang="ko-KR" altLang="en-US" sz="2000" dirty="0"/>
           </a:p>
         </p:txBody>
       </p:sp>
@@ -5152,7 +6015,7 @@
           <a:p>
             <a:fld id="{0F78D9C4-20C1-4B15-A116-16DC77AD9A1E}" type="datetime1">
               <a:rPr lang="ko-KR" altLang="en-US" smtClean="0"/>
-              <a:t>2026-02-19</a:t>
+              <a:t>2026-02-20</a:t>
             </a:fld>
             <a:endParaRPr lang="ko-KR" altLang="en-US"/>
           </a:p>
@@ -5181,2535 +6044,7 @@
           <a:p>
             <a:fld id="{083A2CE0-18CD-4102-B738-4ACFF9E68BA4}" type="slidenum">
               <a:rPr lang="ko-KR" altLang="en-US" smtClean="0"/>
-              <a:t>12</a:t>
-            </a:fld>
-            <a:endParaRPr lang="ko-KR" altLang="en-US"/>
-          </a:p>
-        </p:txBody>
-      </p:sp>
-    </p:spTree>
-    <p:extLst>
-      <p:ext uri="{BB962C8B-B14F-4D97-AF65-F5344CB8AC3E}">
-        <p14:creationId xmlns:p14="http://schemas.microsoft.com/office/powerpoint/2010/main" val="40459043"/>
-      </p:ext>
-    </p:extLst>
-  </p:cSld>
-  <p:clrMapOvr>
-    <a:masterClrMapping/>
-  </p:clrMapOvr>
-</p:sld>
-</file>
-
-<file path=ppt/slides/slide13.xml><?xml version="1.0" encoding="utf-8"?>
-<p:sld xmlns:a="http://schemas.openxmlformats.org/drawingml/2006/main" xmlns:r="http://schemas.openxmlformats.org/officeDocument/2006/relationships" xmlns:p="http://schemas.openxmlformats.org/presentationml/2006/main">
-  <p:cSld>
-    <p:spTree>
-      <p:nvGrpSpPr>
-        <p:cNvPr id="1" name=""/>
-        <p:cNvGrpSpPr/>
-        <p:nvPr/>
-      </p:nvGrpSpPr>
-      <p:grpSpPr>
-        <a:xfrm>
-          <a:off x="0" y="0"/>
-          <a:ext cx="0" cy="0"/>
-          <a:chOff x="0" y="0"/>
-          <a:chExt cx="0" cy="0"/>
-        </a:xfrm>
-      </p:grpSpPr>
-      <p:sp>
-        <p:nvSpPr>
-          <p:cNvPr id="2" name="제목 1">
-            <a:extLst>
-              <a:ext uri="{FF2B5EF4-FFF2-40B4-BE49-F238E27FC236}">
-                <a16:creationId xmlns:a16="http://schemas.microsoft.com/office/drawing/2014/main" id="{29017EEA-1700-68A7-6D01-92F3863263E2}"/>
-              </a:ext>
-            </a:extLst>
-          </p:cNvPr>
-          <p:cNvSpPr>
-            <a:spLocks noGrp="1"/>
-          </p:cNvSpPr>
-          <p:nvPr>
-            <p:ph type="title"/>
-          </p:nvPr>
-        </p:nvSpPr>
-        <p:spPr/>
-        <p:txBody>
-          <a:bodyPr>
-            <a:normAutofit/>
-          </a:bodyPr>
-          <a:lstStyle/>
-          <a:p>
-            <a:r>
-              <a:rPr lang="ko-KR" altLang="en-US" b="1" dirty="0"/>
-              <a:t>트랜스포머</a:t>
-            </a:r>
-            <a:r>
-              <a:rPr lang="en-US" altLang="ko-KR" b="1" dirty="0"/>
-              <a:t>(Transformer)</a:t>
-            </a:r>
-            <a:r>
-              <a:rPr lang="ko-KR" altLang="en-US" b="1" dirty="0"/>
-              <a:t> </a:t>
-            </a:r>
-          </a:p>
-        </p:txBody>
-      </p:sp>
-      <p:sp>
-        <p:nvSpPr>
-          <p:cNvPr id="3" name="내용 개체 틀 2">
-            <a:extLst>
-              <a:ext uri="{FF2B5EF4-FFF2-40B4-BE49-F238E27FC236}">
-                <a16:creationId xmlns:a16="http://schemas.microsoft.com/office/drawing/2014/main" id="{7427EE51-6539-C4E3-E901-BA804AE94D29}"/>
-              </a:ext>
-            </a:extLst>
-          </p:cNvPr>
-          <p:cNvSpPr>
-            <a:spLocks noGrp="1"/>
-          </p:cNvSpPr>
-          <p:nvPr>
-            <p:ph idx="1"/>
-          </p:nvPr>
-        </p:nvSpPr>
-        <p:spPr>
-          <a:xfrm>
-            <a:off x="238991" y="1145407"/>
-            <a:ext cx="11551534" cy="3095965"/>
-          </a:xfrm>
-        </p:spPr>
-        <p:txBody>
-          <a:bodyPr>
-            <a:noAutofit/>
-          </a:bodyPr>
-          <a:lstStyle/>
-          <a:p>
-            <a:pPr marL="0" indent="0">
-              <a:lnSpc>
-                <a:spcPct val="150000"/>
-              </a:lnSpc>
-              <a:buNone/>
-            </a:pPr>
-            <a:r>
-              <a:rPr lang="ko-KR" altLang="en-US" sz="2400" b="1" dirty="0"/>
-              <a:t>✅ 활용</a:t>
-            </a:r>
-          </a:p>
-          <a:p>
-            <a:pPr lvl="1">
-              <a:lnSpc>
-                <a:spcPct val="150000"/>
-              </a:lnSpc>
-            </a:pPr>
-            <a:r>
-              <a:rPr lang="ko-KR" altLang="en-US" sz="2000" dirty="0"/>
-              <a:t>자연어 처리</a:t>
-            </a:r>
-            <a:r>
-              <a:rPr lang="en-US" altLang="ko-KR" sz="2000" dirty="0"/>
-              <a:t>: </a:t>
-            </a:r>
-            <a:r>
-              <a:rPr lang="ko-KR" altLang="en-US" sz="2000" dirty="0"/>
-              <a:t>번역</a:t>
-            </a:r>
-            <a:r>
-              <a:rPr lang="en-US" altLang="ko-KR" sz="2000" dirty="0"/>
-              <a:t>, </a:t>
-            </a:r>
-            <a:r>
-              <a:rPr lang="ko-KR" altLang="en-US" sz="2000" dirty="0"/>
-              <a:t>요약</a:t>
-            </a:r>
-            <a:r>
-              <a:rPr lang="en-US" altLang="ko-KR" sz="2000" dirty="0"/>
-              <a:t>, </a:t>
-            </a:r>
-            <a:r>
-              <a:rPr lang="ko-KR" altLang="en-US" sz="2000" dirty="0"/>
-              <a:t>질문 응답 </a:t>
-            </a:r>
-            <a:r>
-              <a:rPr lang="en-US" altLang="ko-KR" sz="2000" dirty="0"/>
-              <a:t>(</a:t>
-            </a:r>
-            <a:r>
-              <a:rPr lang="ko-KR" altLang="en-US" sz="2000" dirty="0"/>
-              <a:t>예</a:t>
-            </a:r>
-            <a:r>
-              <a:rPr lang="en-US" altLang="ko-KR" sz="2000" dirty="0"/>
-              <a:t>: </a:t>
-            </a:r>
-            <a:r>
-              <a:rPr lang="en-US" altLang="ko-KR" sz="2000" dirty="0" err="1"/>
-              <a:t>ChatGPT</a:t>
-            </a:r>
-            <a:r>
-              <a:rPr lang="en-US" altLang="ko-KR" sz="2000" dirty="0"/>
-              <a:t>, BERT)</a:t>
-            </a:r>
-          </a:p>
-          <a:p>
-            <a:pPr lvl="1">
-              <a:lnSpc>
-                <a:spcPct val="150000"/>
-              </a:lnSpc>
-            </a:pPr>
-            <a:r>
-              <a:rPr lang="ko-KR" altLang="en-US" sz="2000" dirty="0"/>
-              <a:t>컴퓨터 비전</a:t>
-            </a:r>
-            <a:r>
-              <a:rPr lang="en-US" altLang="ko-KR" sz="2000" dirty="0"/>
-              <a:t>: </a:t>
-            </a:r>
-            <a:r>
-              <a:rPr lang="ko-KR" altLang="en-US" sz="2000" dirty="0"/>
-              <a:t>이미지 분류</a:t>
-            </a:r>
-            <a:r>
-              <a:rPr lang="en-US" altLang="ko-KR" sz="2000" dirty="0"/>
-              <a:t>, </a:t>
-            </a:r>
-            <a:r>
-              <a:rPr lang="ko-KR" altLang="en-US" sz="2000" dirty="0"/>
-              <a:t>생성 </a:t>
-            </a:r>
-            <a:r>
-              <a:rPr lang="en-US" altLang="ko-KR" sz="2000" dirty="0"/>
-              <a:t>(</a:t>
-            </a:r>
-            <a:r>
-              <a:rPr lang="ko-KR" altLang="en-US" sz="2000" dirty="0"/>
-              <a:t>예</a:t>
-            </a:r>
-            <a:r>
-              <a:rPr lang="en-US" altLang="ko-KR" sz="2000" dirty="0"/>
-              <a:t>: Vision Transformer, DALL-E)</a:t>
-            </a:r>
-          </a:p>
-          <a:p>
-            <a:pPr marL="457200" lvl="1" indent="0">
-              <a:lnSpc>
-                <a:spcPct val="150000"/>
-              </a:lnSpc>
-              <a:buNone/>
-            </a:pPr>
-            <a:r>
-              <a:rPr lang="ko-KR" altLang="en-US" sz="2000" b="1" dirty="0">
-                <a:solidFill>
-                  <a:srgbClr val="FF3399"/>
-                </a:solidFill>
-              </a:rPr>
-              <a:t>→ 표준으로 자리 잡음</a:t>
-            </a:r>
-            <a:endParaRPr lang="en-US" altLang="ko-KR" sz="2000" b="1" dirty="0">
-              <a:solidFill>
-                <a:srgbClr val="FF3399"/>
-              </a:solidFill>
-            </a:endParaRPr>
-          </a:p>
-        </p:txBody>
-      </p:sp>
-      <p:sp>
-        <p:nvSpPr>
-          <p:cNvPr id="4" name="날짜 개체 틀 3">
-            <a:extLst>
-              <a:ext uri="{FF2B5EF4-FFF2-40B4-BE49-F238E27FC236}">
-                <a16:creationId xmlns:a16="http://schemas.microsoft.com/office/drawing/2014/main" id="{B436F977-2F80-A369-4870-4CFEEDC26E7F}"/>
-              </a:ext>
-            </a:extLst>
-          </p:cNvPr>
-          <p:cNvSpPr>
-            <a:spLocks noGrp="1"/>
-          </p:cNvSpPr>
-          <p:nvPr>
-            <p:ph type="dt" sz="half" idx="10"/>
-          </p:nvPr>
-        </p:nvSpPr>
-        <p:spPr/>
-        <p:txBody>
-          <a:bodyPr/>
-          <a:lstStyle/>
-          <a:p>
-            <a:fld id="{0F78D9C4-20C1-4B15-A116-16DC77AD9A1E}" type="datetime1">
-              <a:rPr lang="ko-KR" altLang="en-US" smtClean="0"/>
-              <a:t>2026-02-19</a:t>
-            </a:fld>
-            <a:endParaRPr lang="ko-KR" altLang="en-US"/>
-          </a:p>
-        </p:txBody>
-      </p:sp>
-      <p:sp>
-        <p:nvSpPr>
-          <p:cNvPr id="5" name="슬라이드 번호 개체 틀 4">
-            <a:extLst>
-              <a:ext uri="{FF2B5EF4-FFF2-40B4-BE49-F238E27FC236}">
-                <a16:creationId xmlns:a16="http://schemas.microsoft.com/office/drawing/2014/main" id="{58AE5165-246F-D448-ADAB-3B880493009B}"/>
-              </a:ext>
-            </a:extLst>
-          </p:cNvPr>
-          <p:cNvSpPr>
-            <a:spLocks noGrp="1"/>
-          </p:cNvSpPr>
-          <p:nvPr>
-            <p:ph type="sldNum" sz="quarter" idx="12"/>
-          </p:nvPr>
-        </p:nvSpPr>
-        <p:spPr/>
-        <p:txBody>
-          <a:bodyPr/>
-          <a:lstStyle/>
-          <a:p>
-            <a:fld id="{083A2CE0-18CD-4102-B738-4ACFF9E68BA4}" type="slidenum">
-              <a:rPr lang="ko-KR" altLang="en-US" smtClean="0"/>
-              <a:t>13</a:t>
-            </a:fld>
-            <a:endParaRPr lang="ko-KR" altLang="en-US"/>
-          </a:p>
-        </p:txBody>
-      </p:sp>
-    </p:spTree>
-    <p:extLst>
-      <p:ext uri="{BB962C8B-B14F-4D97-AF65-F5344CB8AC3E}">
-        <p14:creationId xmlns:p14="http://schemas.microsoft.com/office/powerpoint/2010/main" val="1400025861"/>
-      </p:ext>
-    </p:extLst>
-  </p:cSld>
-  <p:clrMapOvr>
-    <a:masterClrMapping/>
-  </p:clrMapOvr>
-</p:sld>
-</file>
-
-<file path=ppt/slides/slide14.xml><?xml version="1.0" encoding="utf-8"?>
-<p:sld xmlns:a="http://schemas.openxmlformats.org/drawingml/2006/main" xmlns:r="http://schemas.openxmlformats.org/officeDocument/2006/relationships" xmlns:p="http://schemas.openxmlformats.org/presentationml/2006/main">
-  <p:cSld>
-    <p:bg>
-      <p:bgRef idx="1001">
-        <a:schemeClr val="bg1"/>
-      </p:bgRef>
-    </p:bg>
-    <p:spTree>
-      <p:nvGrpSpPr>
-        <p:cNvPr id="1" name="">
-          <a:extLst>
-            <a:ext uri="{FF2B5EF4-FFF2-40B4-BE49-F238E27FC236}">
-              <a16:creationId xmlns:a16="http://schemas.microsoft.com/office/drawing/2014/main" id="{B7171936-481C-71EB-7D96-6C9DFC6F979D}"/>
-            </a:ext>
-          </a:extLst>
-        </p:cNvPr>
-        <p:cNvGrpSpPr/>
-        <p:nvPr/>
-      </p:nvGrpSpPr>
-      <p:grpSpPr>
-        <a:xfrm>
-          <a:off x="0" y="0"/>
-          <a:ext cx="0" cy="0"/>
-          <a:chOff x="0" y="0"/>
-          <a:chExt cx="0" cy="0"/>
-        </a:xfrm>
-      </p:grpSpPr>
-      <p:sp>
-        <p:nvSpPr>
-          <p:cNvPr id="4" name="제목 1">
-            <a:extLst>
-              <a:ext uri="{FF2B5EF4-FFF2-40B4-BE49-F238E27FC236}">
-                <a16:creationId xmlns:a16="http://schemas.microsoft.com/office/drawing/2014/main" id="{100005ED-53E3-BFC8-AFAA-7BAFFA3752AB}"/>
-              </a:ext>
-            </a:extLst>
-          </p:cNvPr>
-          <p:cNvSpPr txBox="1">
-            <a:spLocks/>
-          </p:cNvSpPr>
-          <p:nvPr/>
-        </p:nvSpPr>
-        <p:spPr>
-          <a:xfrm>
-            <a:off x="1524000" y="2555530"/>
-            <a:ext cx="9144000" cy="1116107"/>
-          </a:xfrm>
-          <a:prstGeom prst="rect">
-            <a:avLst/>
-          </a:prstGeom>
-        </p:spPr>
-        <p:txBody>
-          <a:bodyPr vert="horz" lIns="91440" tIns="45720" rIns="91440" bIns="45720" rtlCol="0" anchor="b">
-            <a:normAutofit/>
-          </a:bodyPr>
-          <a:lstStyle>
-            <a:lvl1pPr algn="ctr" defTabSz="914400" rtl="0" eaLnBrk="1" latinLnBrk="1" hangingPunct="1">
-              <a:lnSpc>
-                <a:spcPct val="90000"/>
-              </a:lnSpc>
-              <a:spcBef>
-                <a:spcPct val="0"/>
-              </a:spcBef>
-              <a:buNone/>
-              <a:defRPr sz="6000" kern="1200">
-                <a:solidFill>
-                  <a:schemeClr val="tx1"/>
-                </a:solidFill>
-                <a:latin typeface="+mj-lt"/>
-                <a:ea typeface="+mj-ea"/>
-                <a:cs typeface="+mj-cs"/>
-              </a:defRPr>
-            </a:lvl1pPr>
-          </a:lstStyle>
-          <a:p>
-            <a:r>
-              <a:rPr lang="ko-KR" altLang="en-US" dirty="0">
-                <a:solidFill>
-                  <a:schemeClr val="accent2"/>
-                </a:solidFill>
-                <a:latin typeface="G마켓 산스 TTF Bold" panose="02000000000000000000" pitchFamily="2" charset="-127"/>
-                <a:ea typeface="G마켓 산스 TTF Bold" panose="02000000000000000000" pitchFamily="2" charset="-127"/>
-              </a:rPr>
-              <a:t>감사합니다</a:t>
-            </a:r>
-          </a:p>
-        </p:txBody>
-      </p:sp>
-    </p:spTree>
-    <p:extLst>
-      <p:ext uri="{BB962C8B-B14F-4D97-AF65-F5344CB8AC3E}">
-        <p14:creationId xmlns:p14="http://schemas.microsoft.com/office/powerpoint/2010/main" val="1364201993"/>
-      </p:ext>
-    </p:extLst>
-  </p:cSld>
-  <p:clrMapOvr>
-    <a:overrideClrMapping bg1="lt1" tx1="dk1" bg2="lt2" tx2="dk2" accent1="accent1" accent2="accent2" accent3="accent3" accent4="accent4" accent5="accent5" accent6="accent6" hlink="hlink" folHlink="folHlink"/>
-  </p:clrMapOvr>
-</p:sld>
-</file>
-
-<file path=ppt/slides/slide2.xml><?xml version="1.0" encoding="utf-8"?>
-<p:sld xmlns:a="http://schemas.openxmlformats.org/drawingml/2006/main" xmlns:r="http://schemas.openxmlformats.org/officeDocument/2006/relationships" xmlns:p="http://schemas.openxmlformats.org/presentationml/2006/main">
-  <p:cSld>
-    <p:spTree>
-      <p:nvGrpSpPr>
-        <p:cNvPr id="1" name=""/>
-        <p:cNvGrpSpPr/>
-        <p:nvPr/>
-      </p:nvGrpSpPr>
-      <p:grpSpPr>
-        <a:xfrm>
-          <a:off x="0" y="0"/>
-          <a:ext cx="0" cy="0"/>
-          <a:chOff x="0" y="0"/>
-          <a:chExt cx="0" cy="0"/>
-        </a:xfrm>
-      </p:grpSpPr>
-      <p:sp>
-        <p:nvSpPr>
-          <p:cNvPr id="4" name="날짜 개체 틀 3">
-            <a:extLst>
-              <a:ext uri="{FF2B5EF4-FFF2-40B4-BE49-F238E27FC236}">
-                <a16:creationId xmlns:a16="http://schemas.microsoft.com/office/drawing/2014/main" id="{8B49C4C8-3D15-C804-0CF3-ED01E5EAB7B3}"/>
-              </a:ext>
-            </a:extLst>
-          </p:cNvPr>
-          <p:cNvSpPr>
-            <a:spLocks noGrp="1"/>
-          </p:cNvSpPr>
-          <p:nvPr>
-            <p:ph type="dt" sz="half" idx="10"/>
-          </p:nvPr>
-        </p:nvSpPr>
-        <p:spPr/>
-        <p:txBody>
-          <a:bodyPr/>
-          <a:lstStyle/>
-          <a:p>
-            <a:fld id="{0F78D9C4-20C1-4B15-A116-16DC77AD9A1E}" type="datetime1">
-              <a:rPr lang="ko-KR" altLang="en-US" smtClean="0"/>
-              <a:t>2026-02-19</a:t>
-            </a:fld>
-            <a:endParaRPr lang="ko-KR" altLang="en-US"/>
-          </a:p>
-        </p:txBody>
-      </p:sp>
-      <p:sp>
-        <p:nvSpPr>
-          <p:cNvPr id="5" name="슬라이드 번호 개체 틀 4">
-            <a:extLst>
-              <a:ext uri="{FF2B5EF4-FFF2-40B4-BE49-F238E27FC236}">
-                <a16:creationId xmlns:a16="http://schemas.microsoft.com/office/drawing/2014/main" id="{BCB0D294-EE40-E43D-51E3-B9FE1EAF8A4F}"/>
-              </a:ext>
-            </a:extLst>
-          </p:cNvPr>
-          <p:cNvSpPr>
-            <a:spLocks noGrp="1"/>
-          </p:cNvSpPr>
-          <p:nvPr>
-            <p:ph type="sldNum" sz="quarter" idx="12"/>
-          </p:nvPr>
-        </p:nvSpPr>
-        <p:spPr/>
-        <p:txBody>
-          <a:bodyPr/>
-          <a:lstStyle/>
-          <a:p>
-            <a:fld id="{083A2CE0-18CD-4102-B738-4ACFF9E68BA4}" type="slidenum">
-              <a:rPr lang="ko-KR" altLang="en-US" smtClean="0"/>
-              <a:t>2</a:t>
-            </a:fld>
-            <a:endParaRPr lang="ko-KR" altLang="en-US"/>
-          </a:p>
-        </p:txBody>
-      </p:sp>
-      <p:sp>
-        <p:nvSpPr>
-          <p:cNvPr id="7" name="TextBox 6"/>
-          <p:cNvSpPr txBox="1"/>
-          <p:nvPr/>
-        </p:nvSpPr>
-        <p:spPr>
-          <a:xfrm>
-            <a:off x="3196807" y="2600493"/>
-            <a:ext cx="5798382" cy="1015663"/>
-          </a:xfrm>
-          <a:prstGeom prst="rect">
-            <a:avLst/>
-          </a:prstGeom>
-          <a:noFill/>
-        </p:spPr>
-        <p:txBody>
-          <a:bodyPr wrap="none" rtlCol="0">
-            <a:spAutoFit/>
-          </a:bodyPr>
-          <a:lstStyle/>
-          <a:p>
-            <a:pPr algn="ctr"/>
-            <a:r>
-              <a:rPr lang="ko-KR" altLang="en-US" sz="6000" dirty="0">
-                <a:solidFill>
-                  <a:schemeClr val="accent2"/>
-                </a:solidFill>
-                <a:latin typeface="G마켓 산스 TTF Bold" panose="02000000000000000000" pitchFamily="2" charset="-127"/>
-                <a:ea typeface="G마켓 산스 TTF Bold" panose="02000000000000000000" pitchFamily="2" charset="-127"/>
-              </a:rPr>
-              <a:t>딥러닝 </a:t>
-            </a:r>
-            <a:r>
-              <a:rPr lang="ko-KR" altLang="en-US" sz="6000">
-                <a:solidFill>
-                  <a:schemeClr val="accent2"/>
-                </a:solidFill>
-                <a:latin typeface="G마켓 산스 TTF Bold" panose="02000000000000000000" pitchFamily="2" charset="-127"/>
-                <a:ea typeface="G마켓 산스 TTF Bold" panose="02000000000000000000" pitchFamily="2" charset="-127"/>
-              </a:rPr>
-              <a:t>모델 개요</a:t>
-            </a:r>
-            <a:endParaRPr lang="en-US" altLang="ko-KR" sz="6000" dirty="0">
-              <a:solidFill>
-                <a:schemeClr val="accent2"/>
-              </a:solidFill>
-              <a:latin typeface="G마켓 산스 TTF Bold" panose="02000000000000000000" pitchFamily="2" charset="-127"/>
-              <a:ea typeface="G마켓 산스 TTF Bold" panose="02000000000000000000" pitchFamily="2" charset="-127"/>
-            </a:endParaRPr>
-          </a:p>
-        </p:txBody>
-      </p:sp>
-    </p:spTree>
-    <p:extLst>
-      <p:ext uri="{BB962C8B-B14F-4D97-AF65-F5344CB8AC3E}">
-        <p14:creationId xmlns:p14="http://schemas.microsoft.com/office/powerpoint/2010/main" val="946621385"/>
-      </p:ext>
-    </p:extLst>
-  </p:cSld>
-  <p:clrMapOvr>
-    <a:masterClrMapping/>
-  </p:clrMapOvr>
-</p:sld>
-</file>
-
-<file path=ppt/slides/slide3.xml><?xml version="1.0" encoding="utf-8"?>
-<p:sld xmlns:a="http://schemas.openxmlformats.org/drawingml/2006/main" xmlns:r="http://schemas.openxmlformats.org/officeDocument/2006/relationships" xmlns:p="http://schemas.openxmlformats.org/presentationml/2006/main">
-  <p:cSld>
-    <p:spTree>
-      <p:nvGrpSpPr>
-        <p:cNvPr id="1" name=""/>
-        <p:cNvGrpSpPr/>
-        <p:nvPr/>
-      </p:nvGrpSpPr>
-      <p:grpSpPr>
-        <a:xfrm>
-          <a:off x="0" y="0"/>
-          <a:ext cx="0" cy="0"/>
-          <a:chOff x="0" y="0"/>
-          <a:chExt cx="0" cy="0"/>
-        </a:xfrm>
-      </p:grpSpPr>
-      <p:sp>
-        <p:nvSpPr>
-          <p:cNvPr id="2" name="제목 1">
-            <a:extLst>
-              <a:ext uri="{FF2B5EF4-FFF2-40B4-BE49-F238E27FC236}">
-                <a16:creationId xmlns:a16="http://schemas.microsoft.com/office/drawing/2014/main" id="{81A165FA-6F56-C3C7-2403-F9E289E5BAED}"/>
-              </a:ext>
-            </a:extLst>
-          </p:cNvPr>
-          <p:cNvSpPr>
-            <a:spLocks noGrp="1"/>
-          </p:cNvSpPr>
-          <p:nvPr>
-            <p:ph type="title"/>
-          </p:nvPr>
-        </p:nvSpPr>
-        <p:spPr/>
-        <p:txBody>
-          <a:bodyPr/>
-          <a:lstStyle/>
-          <a:p>
-            <a:r>
-              <a:rPr lang="ko-KR" altLang="en-US" b="1" dirty="0"/>
-              <a:t>딥러닝 모델</a:t>
-            </a:r>
-          </a:p>
-        </p:txBody>
-      </p:sp>
-      <p:sp>
-        <p:nvSpPr>
-          <p:cNvPr id="3" name="내용 개체 틀 2">
-            <a:extLst>
-              <a:ext uri="{FF2B5EF4-FFF2-40B4-BE49-F238E27FC236}">
-                <a16:creationId xmlns:a16="http://schemas.microsoft.com/office/drawing/2014/main" id="{17FB50BB-423A-97AC-3219-7C6490CC5243}"/>
-              </a:ext>
-            </a:extLst>
-          </p:cNvPr>
-          <p:cNvSpPr>
-            <a:spLocks noGrp="1"/>
-          </p:cNvSpPr>
-          <p:nvPr>
-            <p:ph idx="1"/>
-          </p:nvPr>
-        </p:nvSpPr>
-        <p:spPr>
-          <a:xfrm>
-            <a:off x="238991" y="1145407"/>
-            <a:ext cx="10515600" cy="4864222"/>
-          </a:xfrm>
-        </p:spPr>
-        <p:txBody>
-          <a:bodyPr>
-            <a:noAutofit/>
-          </a:bodyPr>
-          <a:lstStyle/>
-          <a:p>
-            <a:pPr marL="0" indent="0">
-              <a:lnSpc>
-                <a:spcPct val="150000"/>
-              </a:lnSpc>
-              <a:buNone/>
-            </a:pPr>
-            <a:r>
-              <a:rPr lang="ko-KR" altLang="en-US" dirty="0"/>
-              <a:t>✅ 주요 특징</a:t>
-            </a:r>
-            <a:endParaRPr lang="en-US" altLang="ko-KR" dirty="0"/>
-          </a:p>
-          <a:p>
-            <a:pPr marL="914400" lvl="1" indent="-457200">
-              <a:lnSpc>
-                <a:spcPct val="150000"/>
-              </a:lnSpc>
-              <a:buFont typeface="+mj-lt"/>
-              <a:buAutoNum type="arabicPeriod"/>
-            </a:pPr>
-            <a:r>
-              <a:rPr lang="ko-KR" altLang="en-US" b="1" dirty="0"/>
-              <a:t>계층적인 구조</a:t>
-            </a:r>
-            <a:endParaRPr lang="en-US" altLang="ko-KR" b="1" dirty="0"/>
-          </a:p>
-          <a:p>
-            <a:pPr lvl="2">
-              <a:lnSpc>
-                <a:spcPct val="150000"/>
-              </a:lnSpc>
-            </a:pPr>
-            <a:r>
-              <a:rPr lang="ko-KR" altLang="en-US" dirty="0"/>
-              <a:t>여러 개의 은닉층으로 구성되어 있음</a:t>
-            </a:r>
-            <a:r>
-              <a:rPr lang="en-US" altLang="ko-KR" dirty="0"/>
-              <a:t>. </a:t>
-            </a:r>
-          </a:p>
-          <a:p>
-            <a:pPr lvl="2">
-              <a:lnSpc>
-                <a:spcPct val="150000"/>
-              </a:lnSpc>
-            </a:pPr>
-            <a:r>
-              <a:rPr lang="ko-KR" altLang="en-US" dirty="0"/>
-              <a:t>각 은닉층은 이전 층의 출력을 입력으로 받아 새로운 특징을 학습</a:t>
-            </a:r>
-            <a:r>
-              <a:rPr lang="en-US" altLang="ko-KR" dirty="0"/>
-              <a:t>. </a:t>
-            </a:r>
-          </a:p>
-          <a:p>
-            <a:pPr lvl="2">
-              <a:lnSpc>
-                <a:spcPct val="150000"/>
-              </a:lnSpc>
-            </a:pPr>
-            <a:r>
-              <a:rPr lang="ko-KR" altLang="en-US" dirty="0"/>
-              <a:t>계층적인 구조를 통해서 복잡한 패턴과 추상적인 특징 학습</a:t>
-            </a:r>
-            <a:endParaRPr lang="en-US" altLang="ko-KR" dirty="0"/>
-          </a:p>
-          <a:p>
-            <a:pPr marL="914400" lvl="1" indent="-457200">
-              <a:lnSpc>
-                <a:spcPct val="150000"/>
-              </a:lnSpc>
-              <a:buFont typeface="+mj-lt"/>
-              <a:buAutoNum type="arabicPeriod"/>
-            </a:pPr>
-            <a:r>
-              <a:rPr lang="ko-KR" altLang="en-US" b="1" dirty="0" err="1"/>
-              <a:t>역전파</a:t>
-            </a:r>
-            <a:r>
-              <a:rPr lang="ko-KR" altLang="en-US" b="1" dirty="0"/>
-              <a:t> 알고리즘</a:t>
-            </a:r>
-            <a:endParaRPr lang="en-US" altLang="ko-KR" b="1" dirty="0"/>
-          </a:p>
-          <a:p>
-            <a:pPr lvl="2">
-              <a:lnSpc>
-                <a:spcPct val="150000"/>
-              </a:lnSpc>
-            </a:pPr>
-            <a:r>
-              <a:rPr lang="ko-KR" altLang="en-US" dirty="0" err="1"/>
-              <a:t>역전파</a:t>
-            </a:r>
-            <a:r>
-              <a:rPr lang="ko-KR" altLang="en-US" dirty="0"/>
-              <a:t> 알고리즘을 사용하여 모델의 가중치와 편향을 조정</a:t>
-            </a:r>
-            <a:endParaRPr lang="en-US" altLang="ko-KR" dirty="0"/>
-          </a:p>
-          <a:p>
-            <a:pPr lvl="2">
-              <a:lnSpc>
-                <a:spcPct val="150000"/>
-              </a:lnSpc>
-            </a:pPr>
-            <a:r>
-              <a:rPr lang="ko-KR" altLang="en-US" dirty="0"/>
-              <a:t>출력과 실제 값 사이의 오차를 역으로 전파하여 각층의 가중치를 업데이트하고</a:t>
-            </a:r>
-            <a:r>
-              <a:rPr lang="en-US" altLang="ko-KR" dirty="0"/>
-              <a:t>, </a:t>
-            </a:r>
-            <a:r>
-              <a:rPr lang="ko-KR" altLang="en-US" dirty="0"/>
-              <a:t>이를 반복하여 모델을 학습시킴</a:t>
-            </a:r>
-          </a:p>
-        </p:txBody>
-      </p:sp>
-      <p:sp>
-        <p:nvSpPr>
-          <p:cNvPr id="4" name="날짜 개체 틀 3">
-            <a:extLst>
-              <a:ext uri="{FF2B5EF4-FFF2-40B4-BE49-F238E27FC236}">
-                <a16:creationId xmlns:a16="http://schemas.microsoft.com/office/drawing/2014/main" id="{D09192D6-A651-FA85-BC2D-858B45C9E4DB}"/>
-              </a:ext>
-            </a:extLst>
-          </p:cNvPr>
-          <p:cNvSpPr>
-            <a:spLocks noGrp="1"/>
-          </p:cNvSpPr>
-          <p:nvPr>
-            <p:ph type="dt" sz="half" idx="10"/>
-          </p:nvPr>
-        </p:nvSpPr>
-        <p:spPr/>
-        <p:txBody>
-          <a:bodyPr/>
-          <a:lstStyle/>
-          <a:p>
-            <a:fld id="{0F78D9C4-20C1-4B15-A116-16DC77AD9A1E}" type="datetime1">
-              <a:rPr lang="ko-KR" altLang="en-US" smtClean="0"/>
-              <a:t>2026-02-19</a:t>
-            </a:fld>
-            <a:endParaRPr lang="ko-KR" altLang="en-US"/>
-          </a:p>
-        </p:txBody>
-      </p:sp>
-      <p:sp>
-        <p:nvSpPr>
-          <p:cNvPr id="5" name="슬라이드 번호 개체 틀 4">
-            <a:extLst>
-              <a:ext uri="{FF2B5EF4-FFF2-40B4-BE49-F238E27FC236}">
-                <a16:creationId xmlns:a16="http://schemas.microsoft.com/office/drawing/2014/main" id="{69FA0FF6-92A7-7D16-CDB4-84A3FBC03A4E}"/>
-              </a:ext>
-            </a:extLst>
-          </p:cNvPr>
-          <p:cNvSpPr>
-            <a:spLocks noGrp="1"/>
-          </p:cNvSpPr>
-          <p:nvPr>
-            <p:ph type="sldNum" sz="quarter" idx="12"/>
-          </p:nvPr>
-        </p:nvSpPr>
-        <p:spPr/>
-        <p:txBody>
-          <a:bodyPr/>
-          <a:lstStyle/>
-          <a:p>
-            <a:fld id="{083A2CE0-18CD-4102-B738-4ACFF9E68BA4}" type="slidenum">
-              <a:rPr lang="ko-KR" altLang="en-US" smtClean="0"/>
-              <a:t>3</a:t>
-            </a:fld>
-            <a:endParaRPr lang="ko-KR" altLang="en-US"/>
-          </a:p>
-        </p:txBody>
-      </p:sp>
-    </p:spTree>
-    <p:extLst>
-      <p:ext uri="{BB962C8B-B14F-4D97-AF65-F5344CB8AC3E}">
-        <p14:creationId xmlns:p14="http://schemas.microsoft.com/office/powerpoint/2010/main" val="566233348"/>
-      </p:ext>
-    </p:extLst>
-  </p:cSld>
-  <p:clrMapOvr>
-    <a:masterClrMapping/>
-  </p:clrMapOvr>
-</p:sld>
-</file>
-
-<file path=ppt/slides/slide4.xml><?xml version="1.0" encoding="utf-8"?>
-<p:sld xmlns:a="http://schemas.openxmlformats.org/drawingml/2006/main" xmlns:r="http://schemas.openxmlformats.org/officeDocument/2006/relationships" xmlns:p="http://schemas.openxmlformats.org/presentationml/2006/main">
-  <p:cSld>
-    <p:spTree>
-      <p:nvGrpSpPr>
-        <p:cNvPr id="1" name=""/>
-        <p:cNvGrpSpPr/>
-        <p:nvPr/>
-      </p:nvGrpSpPr>
-      <p:grpSpPr>
-        <a:xfrm>
-          <a:off x="0" y="0"/>
-          <a:ext cx="0" cy="0"/>
-          <a:chOff x="0" y="0"/>
-          <a:chExt cx="0" cy="0"/>
-        </a:xfrm>
-      </p:grpSpPr>
-      <p:sp>
-        <p:nvSpPr>
-          <p:cNvPr id="2" name="제목 1">
-            <a:extLst>
-              <a:ext uri="{FF2B5EF4-FFF2-40B4-BE49-F238E27FC236}">
-                <a16:creationId xmlns:a16="http://schemas.microsoft.com/office/drawing/2014/main" id="{81A165FA-6F56-C3C7-2403-F9E289E5BAED}"/>
-              </a:ext>
-            </a:extLst>
-          </p:cNvPr>
-          <p:cNvSpPr>
-            <a:spLocks noGrp="1"/>
-          </p:cNvSpPr>
-          <p:nvPr>
-            <p:ph type="title"/>
-          </p:nvPr>
-        </p:nvSpPr>
-        <p:spPr/>
-        <p:txBody>
-          <a:bodyPr/>
-          <a:lstStyle/>
-          <a:p>
-            <a:r>
-              <a:rPr lang="ko-KR" altLang="en-US" b="1" dirty="0"/>
-              <a:t>딥러닝 모델</a:t>
-            </a:r>
-          </a:p>
-        </p:txBody>
-      </p:sp>
-      <p:sp>
-        <p:nvSpPr>
-          <p:cNvPr id="3" name="내용 개체 틀 2">
-            <a:extLst>
-              <a:ext uri="{FF2B5EF4-FFF2-40B4-BE49-F238E27FC236}">
-                <a16:creationId xmlns:a16="http://schemas.microsoft.com/office/drawing/2014/main" id="{17FB50BB-423A-97AC-3219-7C6490CC5243}"/>
-              </a:ext>
-            </a:extLst>
-          </p:cNvPr>
-          <p:cNvSpPr>
-            <a:spLocks noGrp="1"/>
-          </p:cNvSpPr>
-          <p:nvPr>
-            <p:ph idx="1"/>
-          </p:nvPr>
-        </p:nvSpPr>
-        <p:spPr>
-          <a:xfrm>
-            <a:off x="238991" y="1145407"/>
-            <a:ext cx="11701221" cy="4665797"/>
-          </a:xfrm>
-        </p:spPr>
-        <p:txBody>
-          <a:bodyPr>
-            <a:normAutofit/>
-          </a:bodyPr>
-          <a:lstStyle/>
-          <a:p>
-            <a:pPr marL="0" indent="0">
-              <a:lnSpc>
-                <a:spcPct val="150000"/>
-              </a:lnSpc>
-              <a:buNone/>
-            </a:pPr>
-            <a:r>
-              <a:rPr lang="ko-KR" altLang="en-US" dirty="0"/>
-              <a:t>✅ 주요 특징</a:t>
-            </a:r>
-            <a:endParaRPr lang="en-US" altLang="ko-KR" dirty="0"/>
-          </a:p>
-          <a:p>
-            <a:pPr marL="914400" lvl="1" indent="-457200">
-              <a:lnSpc>
-                <a:spcPct val="150000"/>
-              </a:lnSpc>
-              <a:buFont typeface="+mj-lt"/>
-              <a:buAutoNum type="arabicPeriod" startAt="3"/>
-            </a:pPr>
-            <a:r>
-              <a:rPr lang="ko-KR" altLang="en-US" b="1" dirty="0"/>
-              <a:t>대량의 데이터와 연산</a:t>
-            </a:r>
-            <a:endParaRPr lang="en-US" altLang="ko-KR" b="1" dirty="0"/>
-          </a:p>
-          <a:p>
-            <a:pPr lvl="2">
-              <a:lnSpc>
-                <a:spcPct val="150000"/>
-              </a:lnSpc>
-            </a:pPr>
-            <a:r>
-              <a:rPr lang="ko-KR" altLang="en-US" dirty="0"/>
-              <a:t>대량의 데이터와 많은 연산이 필요</a:t>
-            </a:r>
-            <a:endParaRPr lang="en-US" altLang="ko-KR" dirty="0"/>
-          </a:p>
-          <a:p>
-            <a:pPr marL="914400" lvl="1" indent="-457200">
-              <a:lnSpc>
-                <a:spcPct val="150000"/>
-              </a:lnSpc>
-              <a:buFont typeface="+mj-lt"/>
-              <a:buAutoNum type="arabicPeriod" startAt="3"/>
-            </a:pPr>
-            <a:r>
-              <a:rPr lang="ko-KR" altLang="en-US" b="1" dirty="0"/>
-              <a:t>종단간 학습</a:t>
-            </a:r>
-            <a:endParaRPr lang="en-US" altLang="ko-KR" b="1" dirty="0"/>
-          </a:p>
-          <a:p>
-            <a:pPr lvl="2">
-              <a:lnSpc>
-                <a:spcPct val="150000"/>
-              </a:lnSpc>
-            </a:pPr>
-            <a:r>
-              <a:rPr lang="ko-KR" altLang="en-US" dirty="0"/>
-              <a:t>입력데이터와 출력 데이터만을 사용하여 모델을 학습시킬 수 있음</a:t>
-            </a:r>
-            <a:r>
-              <a:rPr lang="en-US" altLang="ko-KR" dirty="0"/>
-              <a:t>(end-to-end)</a:t>
-            </a:r>
-          </a:p>
-          <a:p>
-            <a:pPr marL="914400" lvl="2" indent="0">
-              <a:lnSpc>
-                <a:spcPct val="150000"/>
-              </a:lnSpc>
-              <a:buNone/>
-            </a:pPr>
-            <a:endParaRPr lang="ko-KR" altLang="en-US" dirty="0"/>
-          </a:p>
-        </p:txBody>
-      </p:sp>
-      <p:sp>
-        <p:nvSpPr>
-          <p:cNvPr id="4" name="날짜 개체 틀 3">
-            <a:extLst>
-              <a:ext uri="{FF2B5EF4-FFF2-40B4-BE49-F238E27FC236}">
-                <a16:creationId xmlns:a16="http://schemas.microsoft.com/office/drawing/2014/main" id="{D09192D6-A651-FA85-BC2D-858B45C9E4DB}"/>
-              </a:ext>
-            </a:extLst>
-          </p:cNvPr>
-          <p:cNvSpPr>
-            <a:spLocks noGrp="1"/>
-          </p:cNvSpPr>
-          <p:nvPr>
-            <p:ph type="dt" sz="half" idx="10"/>
-          </p:nvPr>
-        </p:nvSpPr>
-        <p:spPr/>
-        <p:txBody>
-          <a:bodyPr/>
-          <a:lstStyle/>
-          <a:p>
-            <a:fld id="{0F78D9C4-20C1-4B15-A116-16DC77AD9A1E}" type="datetime1">
-              <a:rPr lang="ko-KR" altLang="en-US" smtClean="0"/>
-              <a:t>2026-02-19</a:t>
-            </a:fld>
-            <a:endParaRPr lang="ko-KR" altLang="en-US"/>
-          </a:p>
-        </p:txBody>
-      </p:sp>
-      <p:sp>
-        <p:nvSpPr>
-          <p:cNvPr id="5" name="슬라이드 번호 개체 틀 4">
-            <a:extLst>
-              <a:ext uri="{FF2B5EF4-FFF2-40B4-BE49-F238E27FC236}">
-                <a16:creationId xmlns:a16="http://schemas.microsoft.com/office/drawing/2014/main" id="{69FA0FF6-92A7-7D16-CDB4-84A3FBC03A4E}"/>
-              </a:ext>
-            </a:extLst>
-          </p:cNvPr>
-          <p:cNvSpPr>
-            <a:spLocks noGrp="1"/>
-          </p:cNvSpPr>
-          <p:nvPr>
-            <p:ph type="sldNum" sz="quarter" idx="12"/>
-          </p:nvPr>
-        </p:nvSpPr>
-        <p:spPr/>
-        <p:txBody>
-          <a:bodyPr/>
-          <a:lstStyle/>
-          <a:p>
-            <a:fld id="{083A2CE0-18CD-4102-B738-4ACFF9E68BA4}" type="slidenum">
-              <a:rPr lang="ko-KR" altLang="en-US" smtClean="0"/>
-              <a:t>4</a:t>
-            </a:fld>
-            <a:endParaRPr lang="ko-KR" altLang="en-US"/>
-          </a:p>
-        </p:txBody>
-      </p:sp>
-    </p:spTree>
-    <p:extLst>
-      <p:ext uri="{BB962C8B-B14F-4D97-AF65-F5344CB8AC3E}">
-        <p14:creationId xmlns:p14="http://schemas.microsoft.com/office/powerpoint/2010/main" val="2125734418"/>
-      </p:ext>
-    </p:extLst>
-  </p:cSld>
-  <p:clrMapOvr>
-    <a:masterClrMapping/>
-  </p:clrMapOvr>
-</p:sld>
-</file>
-
-<file path=ppt/slides/slide5.xml><?xml version="1.0" encoding="utf-8"?>
-<p:sld xmlns:a="http://schemas.openxmlformats.org/drawingml/2006/main" xmlns:r="http://schemas.openxmlformats.org/officeDocument/2006/relationships" xmlns:p="http://schemas.openxmlformats.org/presentationml/2006/main">
-  <p:cSld>
-    <p:spTree>
-      <p:nvGrpSpPr>
-        <p:cNvPr id="1" name=""/>
-        <p:cNvGrpSpPr/>
-        <p:nvPr/>
-      </p:nvGrpSpPr>
-      <p:grpSpPr>
-        <a:xfrm>
-          <a:off x="0" y="0"/>
-          <a:ext cx="0" cy="0"/>
-          <a:chOff x="0" y="0"/>
-          <a:chExt cx="0" cy="0"/>
-        </a:xfrm>
-      </p:grpSpPr>
-      <p:sp>
-        <p:nvSpPr>
-          <p:cNvPr id="2" name="제목 1">
-            <a:extLst>
-              <a:ext uri="{FF2B5EF4-FFF2-40B4-BE49-F238E27FC236}">
-                <a16:creationId xmlns:a16="http://schemas.microsoft.com/office/drawing/2014/main" id="{F3FB394F-46E9-11B0-D9BF-D8094C4D9464}"/>
-              </a:ext>
-            </a:extLst>
-          </p:cNvPr>
-          <p:cNvSpPr>
-            <a:spLocks noGrp="1"/>
-          </p:cNvSpPr>
-          <p:nvPr>
-            <p:ph type="title"/>
-          </p:nvPr>
-        </p:nvSpPr>
-        <p:spPr/>
-        <p:txBody>
-          <a:bodyPr>
-            <a:normAutofit/>
-          </a:bodyPr>
-          <a:lstStyle/>
-          <a:p>
-            <a:r>
-              <a:rPr lang="en-US" altLang="ko-KR" b="1" dirty="0"/>
-              <a:t>FNN</a:t>
-            </a:r>
-            <a:r>
-              <a:rPr lang="en-US" altLang="ko-KR" sz="4000" b="1" dirty="0"/>
-              <a:t>(</a:t>
-            </a:r>
-            <a:r>
-              <a:rPr lang="en-US" altLang="ko-KR" sz="4000" b="1" dirty="0" err="1"/>
-              <a:t>Feedforward</a:t>
-            </a:r>
-            <a:r>
-              <a:rPr lang="en-US" altLang="ko-KR" sz="4000" b="1" dirty="0"/>
-              <a:t> Neural Network)</a:t>
-            </a:r>
-            <a:endParaRPr lang="ko-KR" altLang="en-US" b="1" dirty="0"/>
-          </a:p>
-        </p:txBody>
-      </p:sp>
-      <p:sp>
-        <p:nvSpPr>
-          <p:cNvPr id="3" name="내용 개체 틀 2">
-            <a:extLst>
-              <a:ext uri="{FF2B5EF4-FFF2-40B4-BE49-F238E27FC236}">
-                <a16:creationId xmlns:a16="http://schemas.microsoft.com/office/drawing/2014/main" id="{DC3820EF-58B1-1360-C320-373184ED8CFC}"/>
-              </a:ext>
-            </a:extLst>
-          </p:cNvPr>
-          <p:cNvSpPr>
-            <a:spLocks noGrp="1"/>
-          </p:cNvSpPr>
-          <p:nvPr>
-            <p:ph idx="1"/>
-          </p:nvPr>
-        </p:nvSpPr>
-        <p:spPr>
-          <a:xfrm>
-            <a:off x="238991" y="1145407"/>
-            <a:ext cx="10983410" cy="2765130"/>
-          </a:xfrm>
-        </p:spPr>
-        <p:txBody>
-          <a:bodyPr>
-            <a:noAutofit/>
-          </a:bodyPr>
-          <a:lstStyle/>
-          <a:p>
-            <a:pPr marL="0" indent="0">
-              <a:lnSpc>
-                <a:spcPct val="150000"/>
-              </a:lnSpc>
-              <a:buNone/>
-            </a:pPr>
-            <a:r>
-              <a:rPr lang="ko-KR" altLang="en-US" sz="2400" dirty="0">
-                <a:latin typeface="+mn-ea"/>
-              </a:rPr>
-              <a:t>💡 </a:t>
-            </a:r>
-            <a:r>
-              <a:rPr lang="ko-KR" altLang="en-US" sz="2400" dirty="0"/>
-              <a:t>입력층에서 출력층으로 신호가 한 방향으로만 전달되는 가장 기본적인 인공 신경망 구조</a:t>
-            </a:r>
-            <a:endParaRPr lang="en-US" altLang="ko-KR" sz="2400" dirty="0">
-              <a:latin typeface="+mn-ea"/>
-            </a:endParaRPr>
-          </a:p>
-          <a:p>
-            <a:pPr lvl="1">
-              <a:lnSpc>
-                <a:spcPct val="150000"/>
-              </a:lnSpc>
-              <a:buFont typeface="Wingdings" panose="05000000000000000000" pitchFamily="2" charset="2"/>
-              <a:buChar char="§"/>
-            </a:pPr>
-            <a:r>
-              <a:rPr lang="ko-KR" altLang="en-US" sz="2000" dirty="0">
-                <a:latin typeface="+mn-ea"/>
-              </a:rPr>
-              <a:t>데이터가 입력층에서 시작해 </a:t>
-            </a:r>
-            <a:r>
-              <a:rPr lang="ko-KR" altLang="en-US" sz="2000" dirty="0" err="1">
-                <a:latin typeface="+mn-ea"/>
-              </a:rPr>
-              <a:t>은닉층</a:t>
-            </a:r>
-            <a:r>
-              <a:rPr lang="en-US" altLang="ko-KR" sz="2000" dirty="0">
-                <a:latin typeface="+mn-ea"/>
-              </a:rPr>
-              <a:t>(hidden layer)</a:t>
-            </a:r>
-            <a:r>
-              <a:rPr lang="ko-KR" altLang="en-US" sz="2000" dirty="0">
-                <a:latin typeface="+mn-ea"/>
-              </a:rPr>
-              <a:t>을 거쳐 </a:t>
-            </a:r>
-            <a:r>
-              <a:rPr lang="ko-KR" altLang="en-US" sz="2000" dirty="0" err="1">
-                <a:latin typeface="+mn-ea"/>
-              </a:rPr>
-              <a:t>출력층으로</a:t>
-            </a:r>
-            <a:r>
-              <a:rPr lang="ko-KR" altLang="en-US" sz="2000" dirty="0">
-                <a:latin typeface="+mn-ea"/>
-              </a:rPr>
-              <a:t> 순차적으로 흐름</a:t>
-            </a:r>
-            <a:r>
-              <a:rPr lang="en-US" altLang="ko-KR" sz="2000" dirty="0">
-                <a:latin typeface="+mn-ea"/>
-              </a:rPr>
-              <a:t>.</a:t>
-            </a:r>
-          </a:p>
-          <a:p>
-            <a:pPr lvl="1">
-              <a:lnSpc>
-                <a:spcPct val="150000"/>
-              </a:lnSpc>
-              <a:buFont typeface="Wingdings" panose="05000000000000000000" pitchFamily="2" charset="2"/>
-              <a:buChar char="§"/>
-            </a:pPr>
-            <a:r>
-              <a:rPr lang="ko-KR" altLang="en-US" sz="2000" dirty="0">
-                <a:latin typeface="+mn-ea"/>
-              </a:rPr>
-              <a:t>가장 기본적인 신경망 구조</a:t>
-            </a:r>
-            <a:r>
-              <a:rPr lang="en-US" altLang="ko-KR" sz="2000" dirty="0">
-                <a:latin typeface="+mn-ea"/>
-              </a:rPr>
-              <a:t>.</a:t>
-            </a:r>
-          </a:p>
-          <a:p>
-            <a:pPr lvl="1">
-              <a:lnSpc>
-                <a:spcPct val="150000"/>
-              </a:lnSpc>
-              <a:buFont typeface="Wingdings" panose="05000000000000000000" pitchFamily="2" charset="2"/>
-              <a:buChar char="§"/>
-            </a:pPr>
-            <a:r>
-              <a:rPr lang="ko-KR" altLang="en-US" sz="2000" dirty="0">
-                <a:latin typeface="+mn-ea"/>
-              </a:rPr>
-              <a:t>주로 분류</a:t>
-            </a:r>
-            <a:r>
-              <a:rPr lang="en-US" altLang="ko-KR" sz="2000" dirty="0">
-                <a:latin typeface="+mn-ea"/>
-              </a:rPr>
-              <a:t>(classification)</a:t>
-            </a:r>
-            <a:r>
-              <a:rPr lang="ko-KR" altLang="en-US" sz="2000" dirty="0">
-                <a:latin typeface="+mn-ea"/>
-              </a:rPr>
-              <a:t>와 회귀</a:t>
-            </a:r>
-            <a:r>
-              <a:rPr lang="en-US" altLang="ko-KR" sz="2000" dirty="0">
-                <a:latin typeface="+mn-ea"/>
-              </a:rPr>
-              <a:t>(regression) </a:t>
-            </a:r>
-            <a:r>
-              <a:rPr lang="ko-KR" altLang="en-US" sz="2000" dirty="0">
-                <a:latin typeface="+mn-ea"/>
-              </a:rPr>
-              <a:t>문제에 사용</a:t>
-            </a:r>
-            <a:r>
-              <a:rPr lang="en-US" altLang="ko-KR" sz="2000" dirty="0">
-                <a:latin typeface="+mn-ea"/>
-              </a:rPr>
-              <a:t>.</a:t>
-            </a:r>
-            <a:endParaRPr lang="ko-KR" altLang="en-US" sz="1400" dirty="0">
-              <a:latin typeface="+mn-ea"/>
-            </a:endParaRPr>
-          </a:p>
-        </p:txBody>
-      </p:sp>
-      <p:sp>
-        <p:nvSpPr>
-          <p:cNvPr id="4" name="날짜 개체 틀 3">
-            <a:extLst>
-              <a:ext uri="{FF2B5EF4-FFF2-40B4-BE49-F238E27FC236}">
-                <a16:creationId xmlns:a16="http://schemas.microsoft.com/office/drawing/2014/main" id="{B8A4E5A7-5FDA-3F64-1B0F-2D7A4CC03D93}"/>
-              </a:ext>
-            </a:extLst>
-          </p:cNvPr>
-          <p:cNvSpPr>
-            <a:spLocks noGrp="1"/>
-          </p:cNvSpPr>
-          <p:nvPr>
-            <p:ph type="dt" sz="half" idx="10"/>
-          </p:nvPr>
-        </p:nvSpPr>
-        <p:spPr/>
-        <p:txBody>
-          <a:bodyPr/>
-          <a:lstStyle/>
-          <a:p>
-            <a:fld id="{0F78D9C4-20C1-4B15-A116-16DC77AD9A1E}" type="datetime1">
-              <a:rPr lang="ko-KR" altLang="en-US" smtClean="0"/>
-              <a:t>2026-02-19</a:t>
-            </a:fld>
-            <a:endParaRPr lang="ko-KR" altLang="en-US"/>
-          </a:p>
-        </p:txBody>
-      </p:sp>
-      <p:sp>
-        <p:nvSpPr>
-          <p:cNvPr id="5" name="슬라이드 번호 개체 틀 4">
-            <a:extLst>
-              <a:ext uri="{FF2B5EF4-FFF2-40B4-BE49-F238E27FC236}">
-                <a16:creationId xmlns:a16="http://schemas.microsoft.com/office/drawing/2014/main" id="{757C3E34-8AF5-3E90-E54D-E6EC32133A3F}"/>
-              </a:ext>
-            </a:extLst>
-          </p:cNvPr>
-          <p:cNvSpPr>
-            <a:spLocks noGrp="1"/>
-          </p:cNvSpPr>
-          <p:nvPr>
-            <p:ph type="sldNum" sz="quarter" idx="12"/>
-          </p:nvPr>
-        </p:nvSpPr>
-        <p:spPr/>
-        <p:txBody>
-          <a:bodyPr/>
-          <a:lstStyle/>
-          <a:p>
-            <a:fld id="{083A2CE0-18CD-4102-B738-4ACFF9E68BA4}" type="slidenum">
-              <a:rPr lang="ko-KR" altLang="en-US" smtClean="0"/>
-              <a:t>5</a:t>
-            </a:fld>
-            <a:endParaRPr lang="ko-KR" altLang="en-US"/>
-          </a:p>
-        </p:txBody>
-      </p:sp>
-      <p:pic>
-        <p:nvPicPr>
-          <p:cNvPr id="5124" name="Picture 4" descr="19. Neural Network — Learning Apache Spark with Python documentation"/>
-          <p:cNvPicPr>
-            <a:picLocks noChangeAspect="1" noChangeArrowheads="1"/>
-          </p:cNvPicPr>
-          <p:nvPr/>
-        </p:nvPicPr>
-        <p:blipFill>
-          <a:blip r:embed="rId3">
-            <a:extLst>
-              <a:ext uri="{28A0092B-C50C-407E-A947-70E740481C1C}">
-                <a14:useLocalDpi xmlns:a14="http://schemas.microsoft.com/office/drawing/2010/main" val="0"/>
-              </a:ext>
-            </a:extLst>
-          </a:blip>
-          <a:srcRect/>
-          <a:stretch>
-            <a:fillRect/>
-          </a:stretch>
-        </p:blipFill>
-        <p:spPr bwMode="auto">
-          <a:xfrm>
-            <a:off x="2816506" y="3586431"/>
-            <a:ext cx="6558988" cy="2582964"/>
-          </a:xfrm>
-          <a:prstGeom prst="rect">
-            <a:avLst/>
-          </a:prstGeom>
-          <a:noFill/>
-          <a:extLst>
-            <a:ext uri="{909E8E84-426E-40DD-AFC4-6F175D3DCCD1}">
-              <a14:hiddenFill xmlns:a14="http://schemas.microsoft.com/office/drawing/2010/main">
-                <a:solidFill>
-                  <a:srgbClr val="FFFFFF"/>
-                </a:solidFill>
-              </a14:hiddenFill>
-            </a:ext>
-          </a:extLst>
-        </p:spPr>
-      </p:pic>
-    </p:spTree>
-    <p:extLst>
-      <p:ext uri="{BB962C8B-B14F-4D97-AF65-F5344CB8AC3E}">
-        <p14:creationId xmlns:p14="http://schemas.microsoft.com/office/powerpoint/2010/main" val="3723366998"/>
-      </p:ext>
-    </p:extLst>
-  </p:cSld>
-  <p:clrMapOvr>
-    <a:masterClrMapping/>
-  </p:clrMapOvr>
-</p:sld>
-</file>
-
-<file path=ppt/slides/slide6.xml><?xml version="1.0" encoding="utf-8"?>
-<p:sld xmlns:a="http://schemas.openxmlformats.org/drawingml/2006/main" xmlns:r="http://schemas.openxmlformats.org/officeDocument/2006/relationships" xmlns:p="http://schemas.openxmlformats.org/presentationml/2006/main">
-  <p:cSld>
-    <p:spTree>
-      <p:nvGrpSpPr>
-        <p:cNvPr id="1" name=""/>
-        <p:cNvGrpSpPr/>
-        <p:nvPr/>
-      </p:nvGrpSpPr>
-      <p:grpSpPr>
-        <a:xfrm>
-          <a:off x="0" y="0"/>
-          <a:ext cx="0" cy="0"/>
-          <a:chOff x="0" y="0"/>
-          <a:chExt cx="0" cy="0"/>
-        </a:xfrm>
-      </p:grpSpPr>
-      <p:pic>
-        <p:nvPicPr>
-          <p:cNvPr id="14338" name="Picture 2">
-            <a:extLst>
-              <a:ext uri="{FF2B5EF4-FFF2-40B4-BE49-F238E27FC236}">
-                <a16:creationId xmlns:a16="http://schemas.microsoft.com/office/drawing/2014/main" id="{4CE4DCDC-6E1D-EDD1-CA51-B6A5E81C190A}"/>
-              </a:ext>
-            </a:extLst>
-          </p:cNvPr>
-          <p:cNvPicPr>
-            <a:picLocks noChangeAspect="1" noChangeArrowheads="1"/>
-          </p:cNvPicPr>
-          <p:nvPr/>
-        </p:nvPicPr>
-        <p:blipFill>
-          <a:blip r:embed="rId3">
-            <a:extLst>
-              <a:ext uri="{28A0092B-C50C-407E-A947-70E740481C1C}">
-                <a14:useLocalDpi xmlns:a14="http://schemas.microsoft.com/office/drawing/2010/main" val="0"/>
-              </a:ext>
-            </a:extLst>
-          </a:blip>
-          <a:srcRect/>
-          <a:stretch>
-            <a:fillRect/>
-          </a:stretch>
-        </p:blipFill>
-        <p:spPr bwMode="auto">
-          <a:xfrm>
-            <a:off x="2435601" y="3668321"/>
-            <a:ext cx="7320793" cy="2252001"/>
-          </a:xfrm>
-          <a:prstGeom prst="rect">
-            <a:avLst/>
-          </a:prstGeom>
-          <a:noFill/>
-          <a:extLst>
-            <a:ext uri="{909E8E84-426E-40DD-AFC4-6F175D3DCCD1}">
-              <a14:hiddenFill xmlns:a14="http://schemas.microsoft.com/office/drawing/2010/main">
-                <a:solidFill>
-                  <a:srgbClr val="FFFFFF"/>
-                </a:solidFill>
-              </a14:hiddenFill>
-            </a:ext>
-          </a:extLst>
-        </p:spPr>
-      </p:pic>
-      <p:sp>
-        <p:nvSpPr>
-          <p:cNvPr id="2" name="제목 1">
-            <a:extLst>
-              <a:ext uri="{FF2B5EF4-FFF2-40B4-BE49-F238E27FC236}">
-                <a16:creationId xmlns:a16="http://schemas.microsoft.com/office/drawing/2014/main" id="{F3FB394F-46E9-11B0-D9BF-D8094C4D9464}"/>
-              </a:ext>
-            </a:extLst>
-          </p:cNvPr>
-          <p:cNvSpPr>
-            <a:spLocks noGrp="1"/>
-          </p:cNvSpPr>
-          <p:nvPr>
-            <p:ph type="title"/>
-          </p:nvPr>
-        </p:nvSpPr>
-        <p:spPr/>
-        <p:txBody>
-          <a:bodyPr>
-            <a:normAutofit/>
-          </a:bodyPr>
-          <a:lstStyle/>
-          <a:p>
-            <a:r>
-              <a:rPr lang="en-US" altLang="ko-KR" b="1" dirty="0"/>
-              <a:t>CNN</a:t>
-            </a:r>
-            <a:r>
-              <a:rPr lang="en-US" altLang="ko-KR" sz="4000" b="1" dirty="0"/>
-              <a:t>(Convolutional Neural Network)</a:t>
-            </a:r>
-            <a:endParaRPr lang="ko-KR" altLang="en-US" b="1" dirty="0"/>
-          </a:p>
-        </p:txBody>
-      </p:sp>
-      <p:sp>
-        <p:nvSpPr>
-          <p:cNvPr id="3" name="내용 개체 틀 2">
-            <a:extLst>
-              <a:ext uri="{FF2B5EF4-FFF2-40B4-BE49-F238E27FC236}">
-                <a16:creationId xmlns:a16="http://schemas.microsoft.com/office/drawing/2014/main" id="{DC3820EF-58B1-1360-C320-373184ED8CFC}"/>
-              </a:ext>
-            </a:extLst>
-          </p:cNvPr>
-          <p:cNvSpPr>
-            <a:spLocks noGrp="1"/>
-          </p:cNvSpPr>
-          <p:nvPr>
-            <p:ph idx="1"/>
-          </p:nvPr>
-        </p:nvSpPr>
-        <p:spPr>
-          <a:xfrm>
-            <a:off x="238990" y="1145407"/>
-            <a:ext cx="11701221" cy="2262588"/>
-          </a:xfrm>
-        </p:spPr>
-        <p:txBody>
-          <a:bodyPr>
-            <a:noAutofit/>
-          </a:bodyPr>
-          <a:lstStyle/>
-          <a:p>
-            <a:pPr marL="0" indent="0">
-              <a:lnSpc>
-                <a:spcPct val="150000"/>
-              </a:lnSpc>
-              <a:buNone/>
-            </a:pPr>
-            <a:r>
-              <a:rPr lang="ko-KR" altLang="en-US" sz="2400" dirty="0">
-                <a:latin typeface="+mn-ea"/>
-              </a:rPr>
-              <a:t>💡 </a:t>
-            </a:r>
-            <a:r>
-              <a:rPr lang="ko-KR" altLang="en-US" sz="2400" dirty="0"/>
-              <a:t>이미지나 시계열 같은 데이터의 특징을 추출하기 위해 </a:t>
-            </a:r>
-            <a:r>
-              <a:rPr lang="ko-KR" altLang="en-US" sz="2400" dirty="0" err="1"/>
-              <a:t>합성곱</a:t>
-            </a:r>
-            <a:r>
-              <a:rPr lang="ko-KR" altLang="en-US" sz="2400" dirty="0"/>
-              <a:t> 연산을 사용하는 인공 신경망</a:t>
-            </a:r>
-            <a:endParaRPr lang="en-US" altLang="ko-KR" sz="2400" dirty="0">
-              <a:latin typeface="+mn-ea"/>
-            </a:endParaRPr>
-          </a:p>
-          <a:p>
-            <a:pPr lvl="1">
-              <a:lnSpc>
-                <a:spcPct val="150000"/>
-              </a:lnSpc>
-              <a:buFont typeface="Wingdings" panose="05000000000000000000" pitchFamily="2" charset="2"/>
-              <a:buChar char="§"/>
-            </a:pPr>
-            <a:r>
-              <a:rPr lang="ko-KR" altLang="en-US" sz="2000" dirty="0">
-                <a:latin typeface="+mn-ea"/>
-              </a:rPr>
-              <a:t>이미지 및 영상 처리에 특화된 신경망</a:t>
-            </a:r>
-            <a:r>
-              <a:rPr lang="en-US" altLang="ko-KR" sz="2000" dirty="0">
-                <a:latin typeface="+mn-ea"/>
-              </a:rPr>
-              <a:t>.</a:t>
-            </a:r>
-          </a:p>
-          <a:p>
-            <a:pPr lvl="1">
-              <a:lnSpc>
-                <a:spcPct val="150000"/>
-              </a:lnSpc>
-              <a:buFont typeface="Wingdings" panose="05000000000000000000" pitchFamily="2" charset="2"/>
-              <a:buChar char="§"/>
-            </a:pPr>
-            <a:r>
-              <a:rPr lang="ko-KR" altLang="en-US" sz="2000" dirty="0" err="1">
-                <a:latin typeface="+mn-ea"/>
-              </a:rPr>
-              <a:t>컨볼루션</a:t>
-            </a:r>
-            <a:r>
-              <a:rPr lang="ko-KR" altLang="en-US" sz="2000" dirty="0">
-                <a:latin typeface="+mn-ea"/>
-              </a:rPr>
-              <a:t> </a:t>
-            </a:r>
-            <a:r>
-              <a:rPr lang="ko-KR" altLang="en-US" sz="2000" dirty="0" err="1">
-                <a:latin typeface="+mn-ea"/>
-              </a:rPr>
-              <a:t>레이어</a:t>
-            </a:r>
-            <a:r>
-              <a:rPr lang="en-US" altLang="ko-KR" sz="2000" dirty="0">
-                <a:latin typeface="+mn-ea"/>
-              </a:rPr>
-              <a:t>(Convolution Layer)</a:t>
-            </a:r>
-            <a:r>
-              <a:rPr lang="ko-KR" altLang="en-US" sz="2000" dirty="0">
-                <a:latin typeface="+mn-ea"/>
-              </a:rPr>
-              <a:t>와 </a:t>
-            </a:r>
-            <a:r>
-              <a:rPr lang="ko-KR" altLang="en-US" sz="2000" dirty="0" err="1">
-                <a:latin typeface="+mn-ea"/>
-              </a:rPr>
-              <a:t>풀링</a:t>
-            </a:r>
-            <a:r>
-              <a:rPr lang="ko-KR" altLang="en-US" sz="2000" dirty="0">
-                <a:latin typeface="+mn-ea"/>
-              </a:rPr>
-              <a:t> </a:t>
-            </a:r>
-            <a:r>
-              <a:rPr lang="ko-KR" altLang="en-US" sz="2000" dirty="0" err="1">
-                <a:latin typeface="+mn-ea"/>
-              </a:rPr>
-              <a:t>레이어</a:t>
-            </a:r>
-            <a:r>
-              <a:rPr lang="en-US" altLang="ko-KR" sz="2000" dirty="0">
-                <a:latin typeface="+mn-ea"/>
-              </a:rPr>
-              <a:t>(Pooling Layer)</a:t>
-            </a:r>
-            <a:r>
-              <a:rPr lang="ko-KR" altLang="en-US" sz="2000" dirty="0">
-                <a:latin typeface="+mn-ea"/>
-              </a:rPr>
-              <a:t>를 통해 특징</a:t>
-            </a:r>
-            <a:r>
-              <a:rPr lang="en-US" altLang="ko-KR" sz="2000" dirty="0">
-                <a:latin typeface="+mn-ea"/>
-              </a:rPr>
-              <a:t>(feature)</a:t>
-            </a:r>
-            <a:r>
-              <a:rPr lang="ko-KR" altLang="en-US" sz="2000" dirty="0">
-                <a:latin typeface="+mn-ea"/>
-              </a:rPr>
-              <a:t>을 추출</a:t>
-            </a:r>
-            <a:r>
-              <a:rPr lang="en-US" altLang="ko-KR" sz="2000" dirty="0">
-                <a:latin typeface="+mn-ea"/>
-              </a:rPr>
-              <a:t>.</a:t>
-            </a:r>
-          </a:p>
-          <a:p>
-            <a:pPr lvl="1">
-              <a:lnSpc>
-                <a:spcPct val="150000"/>
-              </a:lnSpc>
-              <a:buFont typeface="Wingdings" panose="05000000000000000000" pitchFamily="2" charset="2"/>
-              <a:buChar char="§"/>
-            </a:pPr>
-            <a:r>
-              <a:rPr lang="ko-KR" altLang="en-US" sz="2000" dirty="0">
-                <a:latin typeface="+mn-ea"/>
-              </a:rPr>
-              <a:t>대표적으로 이미지 분류</a:t>
-            </a:r>
-            <a:r>
-              <a:rPr lang="en-US" altLang="ko-KR" sz="2000" dirty="0">
-                <a:latin typeface="+mn-ea"/>
-              </a:rPr>
-              <a:t>, </a:t>
-            </a:r>
-            <a:r>
-              <a:rPr lang="ko-KR" altLang="en-US" sz="2000" dirty="0">
-                <a:latin typeface="+mn-ea"/>
-              </a:rPr>
-              <a:t>객체 탐지</a:t>
-            </a:r>
-            <a:r>
-              <a:rPr lang="en-US" altLang="ko-KR" sz="2000" dirty="0">
-                <a:latin typeface="+mn-ea"/>
-              </a:rPr>
-              <a:t>, </a:t>
-            </a:r>
-            <a:r>
-              <a:rPr lang="ko-KR" altLang="en-US" sz="2000" dirty="0">
-                <a:latin typeface="+mn-ea"/>
-              </a:rPr>
-              <a:t>영상 처리 등에서 사용</a:t>
-            </a:r>
-            <a:r>
-              <a:rPr lang="en-US" altLang="ko-KR" sz="2000" dirty="0">
-                <a:latin typeface="+mn-ea"/>
-              </a:rPr>
-              <a:t>.</a:t>
-            </a:r>
-            <a:endParaRPr lang="ko-KR" altLang="en-US" sz="1400" dirty="0">
-              <a:latin typeface="+mn-ea"/>
-            </a:endParaRPr>
-          </a:p>
-        </p:txBody>
-      </p:sp>
-      <p:sp>
-        <p:nvSpPr>
-          <p:cNvPr id="4" name="날짜 개체 틀 3">
-            <a:extLst>
-              <a:ext uri="{FF2B5EF4-FFF2-40B4-BE49-F238E27FC236}">
-                <a16:creationId xmlns:a16="http://schemas.microsoft.com/office/drawing/2014/main" id="{B8A4E5A7-5FDA-3F64-1B0F-2D7A4CC03D93}"/>
-              </a:ext>
-            </a:extLst>
-          </p:cNvPr>
-          <p:cNvSpPr>
-            <a:spLocks noGrp="1"/>
-          </p:cNvSpPr>
-          <p:nvPr>
-            <p:ph type="dt" sz="half" idx="10"/>
-          </p:nvPr>
-        </p:nvSpPr>
-        <p:spPr/>
-        <p:txBody>
-          <a:bodyPr/>
-          <a:lstStyle/>
-          <a:p>
-            <a:fld id="{0F78D9C4-20C1-4B15-A116-16DC77AD9A1E}" type="datetime1">
-              <a:rPr lang="ko-KR" altLang="en-US" smtClean="0"/>
-              <a:t>2026-02-19</a:t>
-            </a:fld>
-            <a:endParaRPr lang="ko-KR" altLang="en-US"/>
-          </a:p>
-        </p:txBody>
-      </p:sp>
-      <p:sp>
-        <p:nvSpPr>
-          <p:cNvPr id="5" name="슬라이드 번호 개체 틀 4">
-            <a:extLst>
-              <a:ext uri="{FF2B5EF4-FFF2-40B4-BE49-F238E27FC236}">
-                <a16:creationId xmlns:a16="http://schemas.microsoft.com/office/drawing/2014/main" id="{757C3E34-8AF5-3E90-E54D-E6EC32133A3F}"/>
-              </a:ext>
-            </a:extLst>
-          </p:cNvPr>
-          <p:cNvSpPr>
-            <a:spLocks noGrp="1"/>
-          </p:cNvSpPr>
-          <p:nvPr>
-            <p:ph type="sldNum" sz="quarter" idx="12"/>
-          </p:nvPr>
-        </p:nvSpPr>
-        <p:spPr/>
-        <p:txBody>
-          <a:bodyPr/>
-          <a:lstStyle/>
-          <a:p>
-            <a:fld id="{083A2CE0-18CD-4102-B738-4ACFF9E68BA4}" type="slidenum">
-              <a:rPr lang="ko-KR" altLang="en-US" smtClean="0"/>
-              <a:t>6</a:t>
-            </a:fld>
-            <a:endParaRPr lang="ko-KR" altLang="en-US"/>
-          </a:p>
-        </p:txBody>
-      </p:sp>
-      <p:sp>
-        <p:nvSpPr>
-          <p:cNvPr id="6" name="TextBox 5">
-            <a:extLst>
-              <a:ext uri="{FF2B5EF4-FFF2-40B4-BE49-F238E27FC236}">
-                <a16:creationId xmlns:a16="http://schemas.microsoft.com/office/drawing/2014/main" id="{0F235C93-842A-E0C4-683B-97C5A60FF9E0}"/>
-              </a:ext>
-            </a:extLst>
-          </p:cNvPr>
-          <p:cNvSpPr txBox="1"/>
-          <p:nvPr/>
-        </p:nvSpPr>
-        <p:spPr>
-          <a:xfrm>
-            <a:off x="4187475" y="6063734"/>
-            <a:ext cx="3804247" cy="246221"/>
-          </a:xfrm>
-          <a:prstGeom prst="rect">
-            <a:avLst/>
-          </a:prstGeom>
-          <a:noFill/>
-        </p:spPr>
-        <p:txBody>
-          <a:bodyPr wrap="none" rtlCol="0">
-            <a:spAutoFit/>
-          </a:bodyPr>
-          <a:lstStyle/>
-          <a:p>
-            <a:pPr algn="ctr"/>
-            <a:r>
-              <a:rPr lang="ko-KR" altLang="en-US" sz="1000" dirty="0">
-                <a:solidFill>
-                  <a:schemeClr val="tx1">
-                    <a:lumMod val="50000"/>
-                    <a:lumOff val="50000"/>
-                  </a:schemeClr>
-                </a:solidFill>
-                <a:latin typeface="Pretendard Light" panose="02000403000000020004" pitchFamily="2" charset="-127"/>
-                <a:ea typeface="Pretendard Light" panose="02000403000000020004" pitchFamily="2" charset="-127"/>
-                <a:cs typeface="Pretendard Light" panose="02000403000000020004" pitchFamily="2" charset="-127"/>
-              </a:rPr>
-              <a:t>출처</a:t>
-            </a:r>
-            <a:r>
-              <a:rPr lang="en-US" altLang="ko-KR" sz="1000" dirty="0">
-                <a:solidFill>
-                  <a:schemeClr val="tx1">
-                    <a:lumMod val="50000"/>
-                    <a:lumOff val="50000"/>
-                  </a:schemeClr>
-                </a:solidFill>
-                <a:latin typeface="Pretendard Light" panose="02000403000000020004" pitchFamily="2" charset="-127"/>
-                <a:ea typeface="Pretendard Light" panose="02000403000000020004" pitchFamily="2" charset="-127"/>
-                <a:cs typeface="Pretendard Light" panose="02000403000000020004" pitchFamily="2" charset="-127"/>
-              </a:rPr>
-              <a:t>:</a:t>
-            </a:r>
-            <a:r>
-              <a:rPr lang="en-US" altLang="ko-KR" sz="1000" b="0" i="0" u="none" strike="noStrike" dirty="0">
-                <a:solidFill>
-                  <a:schemeClr val="tx1">
-                    <a:lumMod val="50000"/>
-                    <a:lumOff val="50000"/>
-                  </a:schemeClr>
-                </a:solidFill>
-                <a:effectLst/>
-                <a:latin typeface="Pretendard Light" panose="02000403000000020004" pitchFamily="2" charset="-127"/>
-                <a:ea typeface="Pretendard Light" panose="02000403000000020004" pitchFamily="2" charset="-127"/>
-                <a:cs typeface="Pretendard Light" panose="02000403000000020004" pitchFamily="2" charset="-127"/>
-                <a:hlinkClick r:id="rId4">
-                  <a:extLst>
-                    <a:ext uri="{A12FA001-AC4F-418D-AE19-62706E023703}">
-                      <ahyp:hlinkClr xmlns:ahyp="http://schemas.microsoft.com/office/drawing/2018/hyperlinkcolor" val="tx"/>
-                    </a:ext>
-                  </a:extLst>
-                </a:hlinkClick>
-              </a:rPr>
-              <a:t>https://en.wikipedia.org/wiki/</a:t>
-            </a:r>
-            <a:r>
-              <a:rPr lang="en-US" altLang="ko-KR" sz="1000" b="0" i="0" u="none" strike="noStrike" dirty="0" err="1">
-                <a:solidFill>
-                  <a:schemeClr val="tx1">
-                    <a:lumMod val="50000"/>
-                    <a:lumOff val="50000"/>
-                  </a:schemeClr>
-                </a:solidFill>
-                <a:effectLst/>
-                <a:latin typeface="Pretendard Light" panose="02000403000000020004" pitchFamily="2" charset="-127"/>
-                <a:ea typeface="Pretendard Light" panose="02000403000000020004" pitchFamily="2" charset="-127"/>
-                <a:cs typeface="Pretendard Light" panose="02000403000000020004" pitchFamily="2" charset="-127"/>
-                <a:hlinkClick r:id="rId4">
-                  <a:extLst>
-                    <a:ext uri="{A12FA001-AC4F-418D-AE19-62706E023703}">
-                      <ahyp:hlinkClr xmlns:ahyp="http://schemas.microsoft.com/office/drawing/2018/hyperlinkcolor" val="tx"/>
-                    </a:ext>
-                  </a:extLst>
-                </a:hlinkClick>
-              </a:rPr>
-              <a:t>Convolutional_neural_network</a:t>
-            </a:r>
-            <a:endParaRPr lang="ko-KR" altLang="en-US" sz="1000" dirty="0">
-              <a:solidFill>
-                <a:schemeClr val="tx1">
-                  <a:lumMod val="50000"/>
-                  <a:lumOff val="50000"/>
-                </a:schemeClr>
-              </a:solidFill>
-              <a:latin typeface="Pretendard Light" panose="02000403000000020004" pitchFamily="2" charset="-127"/>
-              <a:ea typeface="Pretendard Light" panose="02000403000000020004" pitchFamily="2" charset="-127"/>
-              <a:cs typeface="Pretendard Light" panose="02000403000000020004" pitchFamily="2" charset="-127"/>
-            </a:endParaRPr>
-          </a:p>
-        </p:txBody>
-      </p:sp>
-    </p:spTree>
-    <p:extLst>
-      <p:ext uri="{BB962C8B-B14F-4D97-AF65-F5344CB8AC3E}">
-        <p14:creationId xmlns:p14="http://schemas.microsoft.com/office/powerpoint/2010/main" val="3243970451"/>
-      </p:ext>
-    </p:extLst>
-  </p:cSld>
-  <p:clrMapOvr>
-    <a:masterClrMapping/>
-  </p:clrMapOvr>
-</p:sld>
-</file>
-
-<file path=ppt/slides/slide7.xml><?xml version="1.0" encoding="utf-8"?>
-<p:sld xmlns:a="http://schemas.openxmlformats.org/drawingml/2006/main" xmlns:r="http://schemas.openxmlformats.org/officeDocument/2006/relationships" xmlns:p="http://schemas.openxmlformats.org/presentationml/2006/main">
-  <p:cSld>
-    <p:spTree>
-      <p:nvGrpSpPr>
-        <p:cNvPr id="1" name=""/>
-        <p:cNvGrpSpPr/>
-        <p:nvPr/>
-      </p:nvGrpSpPr>
-      <p:grpSpPr>
-        <a:xfrm>
-          <a:off x="0" y="0"/>
-          <a:ext cx="0" cy="0"/>
-          <a:chOff x="0" y="0"/>
-          <a:chExt cx="0" cy="0"/>
-        </a:xfrm>
-      </p:grpSpPr>
-      <p:sp>
-        <p:nvSpPr>
-          <p:cNvPr id="2" name="제목 1">
-            <a:extLst>
-              <a:ext uri="{FF2B5EF4-FFF2-40B4-BE49-F238E27FC236}">
-                <a16:creationId xmlns:a16="http://schemas.microsoft.com/office/drawing/2014/main" id="{29017EEA-1700-68A7-6D01-92F3863263E2}"/>
-              </a:ext>
-            </a:extLst>
-          </p:cNvPr>
-          <p:cNvSpPr>
-            <a:spLocks noGrp="1"/>
-          </p:cNvSpPr>
-          <p:nvPr>
-            <p:ph type="title"/>
-          </p:nvPr>
-        </p:nvSpPr>
-        <p:spPr/>
-        <p:txBody>
-          <a:bodyPr>
-            <a:normAutofit/>
-          </a:bodyPr>
-          <a:lstStyle/>
-          <a:p>
-            <a:r>
-              <a:rPr lang="en-US" altLang="ko-KR" b="1" dirty="0"/>
-              <a:t>RNN(Recurrent Neural Network)</a:t>
-            </a:r>
-            <a:endParaRPr lang="ko-KR" altLang="en-US" b="1" dirty="0"/>
-          </a:p>
-        </p:txBody>
-      </p:sp>
-      <p:sp>
-        <p:nvSpPr>
-          <p:cNvPr id="3" name="내용 개체 틀 2">
-            <a:extLst>
-              <a:ext uri="{FF2B5EF4-FFF2-40B4-BE49-F238E27FC236}">
-                <a16:creationId xmlns:a16="http://schemas.microsoft.com/office/drawing/2014/main" id="{7427EE51-6539-C4E3-E901-BA804AE94D29}"/>
-              </a:ext>
-            </a:extLst>
-          </p:cNvPr>
-          <p:cNvSpPr>
-            <a:spLocks noGrp="1"/>
-          </p:cNvSpPr>
-          <p:nvPr>
-            <p:ph idx="1"/>
-          </p:nvPr>
-        </p:nvSpPr>
-        <p:spPr>
-          <a:xfrm>
-            <a:off x="238991" y="1145407"/>
-            <a:ext cx="11701221" cy="3902081"/>
-          </a:xfrm>
-        </p:spPr>
-        <p:txBody>
-          <a:bodyPr>
-            <a:noAutofit/>
-          </a:bodyPr>
-          <a:lstStyle/>
-          <a:p>
-            <a:pPr marL="0" indent="0">
-              <a:lnSpc>
-                <a:spcPct val="150000"/>
-              </a:lnSpc>
-              <a:buNone/>
-            </a:pPr>
-            <a:r>
-              <a:rPr lang="ko-KR" altLang="en-US" sz="2400" dirty="0"/>
-              <a:t>💡 순차적인 데이터의 이전 정보를 기억하여 현재 입력 처리에 반영하는 순환 구조의 인공 신경망</a:t>
-            </a:r>
-            <a:endParaRPr lang="en-US" altLang="ko-KR" sz="2400" dirty="0"/>
-          </a:p>
-          <a:p>
-            <a:pPr lvl="1">
-              <a:lnSpc>
-                <a:spcPct val="150000"/>
-              </a:lnSpc>
-              <a:buFont typeface="Wingdings" pitchFamily="2" charset="2"/>
-              <a:buChar char="§"/>
-            </a:pPr>
-            <a:r>
-              <a:rPr lang="ko-KR" altLang="en-US" sz="2000" dirty="0"/>
-              <a:t>시간적 데이터</a:t>
-            </a:r>
-            <a:r>
-              <a:rPr lang="en-US" altLang="ko-KR" sz="2000" dirty="0"/>
-              <a:t>(</a:t>
-            </a:r>
-            <a:r>
-              <a:rPr lang="ko-KR" altLang="en-US" sz="2000" dirty="0" err="1"/>
-              <a:t>시계열</a:t>
-            </a:r>
-            <a:r>
-              <a:rPr lang="en-US" altLang="ko-KR" sz="2000" dirty="0"/>
-              <a:t>, </a:t>
-            </a:r>
-            <a:r>
-              <a:rPr lang="ko-KR" altLang="en-US" sz="2000" dirty="0"/>
-              <a:t>언어 데이터</a:t>
-            </a:r>
-            <a:r>
-              <a:rPr lang="en-US" altLang="ko-KR" sz="2000" dirty="0"/>
-              <a:t>) </a:t>
-            </a:r>
-            <a:r>
-              <a:rPr lang="ko-KR" altLang="en-US" sz="2000" dirty="0"/>
-              <a:t>처리에 특화된 신경망</a:t>
-            </a:r>
-            <a:r>
-              <a:rPr lang="en-US" altLang="ko-KR" sz="2000" dirty="0"/>
-              <a:t>.</a:t>
-            </a:r>
-          </a:p>
-          <a:p>
-            <a:pPr lvl="1">
-              <a:lnSpc>
-                <a:spcPct val="150000"/>
-              </a:lnSpc>
-              <a:buFont typeface="Wingdings" pitchFamily="2" charset="2"/>
-              <a:buChar char="§"/>
-            </a:pPr>
-            <a:r>
-              <a:rPr lang="ko-KR" altLang="en-US" sz="2000" dirty="0"/>
-              <a:t>이전 단계의 출력을 다음 단계의 입력으로 사용하여 데이터 간 </a:t>
-            </a:r>
-            <a:r>
-              <a:rPr lang="ko-KR" altLang="en-US" sz="2000" b="1" dirty="0"/>
-              <a:t>연속성</a:t>
-            </a:r>
-            <a:r>
-              <a:rPr lang="ko-KR" altLang="en-US" sz="2000" dirty="0"/>
-              <a:t> 반영</a:t>
-            </a:r>
-            <a:r>
-              <a:rPr lang="en-US" altLang="ko-KR" sz="2000" dirty="0"/>
-              <a:t>.</a:t>
-            </a:r>
-          </a:p>
-        </p:txBody>
-      </p:sp>
-      <p:sp>
-        <p:nvSpPr>
-          <p:cNvPr id="4" name="날짜 개체 틀 3">
-            <a:extLst>
-              <a:ext uri="{FF2B5EF4-FFF2-40B4-BE49-F238E27FC236}">
-                <a16:creationId xmlns:a16="http://schemas.microsoft.com/office/drawing/2014/main" id="{B436F977-2F80-A369-4870-4CFEEDC26E7F}"/>
-              </a:ext>
-            </a:extLst>
-          </p:cNvPr>
-          <p:cNvSpPr>
-            <a:spLocks noGrp="1"/>
-          </p:cNvSpPr>
-          <p:nvPr>
-            <p:ph type="dt" sz="half" idx="10"/>
-          </p:nvPr>
-        </p:nvSpPr>
-        <p:spPr/>
-        <p:txBody>
-          <a:bodyPr/>
-          <a:lstStyle/>
-          <a:p>
-            <a:fld id="{0F78D9C4-20C1-4B15-A116-16DC77AD9A1E}" type="datetime1">
-              <a:rPr lang="ko-KR" altLang="en-US" smtClean="0"/>
-              <a:t>2026-02-19</a:t>
-            </a:fld>
-            <a:endParaRPr lang="ko-KR" altLang="en-US"/>
-          </a:p>
-        </p:txBody>
-      </p:sp>
-      <p:sp>
-        <p:nvSpPr>
-          <p:cNvPr id="5" name="슬라이드 번호 개체 틀 4">
-            <a:extLst>
-              <a:ext uri="{FF2B5EF4-FFF2-40B4-BE49-F238E27FC236}">
-                <a16:creationId xmlns:a16="http://schemas.microsoft.com/office/drawing/2014/main" id="{58AE5165-246F-D448-ADAB-3B880493009B}"/>
-              </a:ext>
-            </a:extLst>
-          </p:cNvPr>
-          <p:cNvSpPr>
-            <a:spLocks noGrp="1"/>
-          </p:cNvSpPr>
-          <p:nvPr>
-            <p:ph type="sldNum" sz="quarter" idx="12"/>
-          </p:nvPr>
-        </p:nvSpPr>
-        <p:spPr/>
-        <p:txBody>
-          <a:bodyPr/>
-          <a:lstStyle/>
-          <a:p>
-            <a:fld id="{083A2CE0-18CD-4102-B738-4ACFF9E68BA4}" type="slidenum">
-              <a:rPr lang="ko-KR" altLang="en-US" smtClean="0"/>
-              <a:t>7</a:t>
-            </a:fld>
-            <a:endParaRPr lang="ko-KR" altLang="en-US"/>
-          </a:p>
-        </p:txBody>
-      </p:sp>
-      <p:grpSp>
-        <p:nvGrpSpPr>
-          <p:cNvPr id="10" name="그룹 9"/>
-          <p:cNvGrpSpPr/>
-          <p:nvPr/>
-        </p:nvGrpSpPr>
-        <p:grpSpPr>
-          <a:xfrm>
-            <a:off x="1776906" y="3028713"/>
-            <a:ext cx="8625389" cy="2976910"/>
-            <a:chOff x="1636211" y="2752560"/>
-            <a:chExt cx="8625389" cy="2976910"/>
-          </a:xfrm>
-        </p:grpSpPr>
-        <p:pic>
-          <p:nvPicPr>
-            <p:cNvPr id="6146" name="Picture 2" descr="Deep Learning] RNN 알고리즘 개념 이해"/>
-            <p:cNvPicPr>
-              <a:picLocks noChangeAspect="1" noChangeArrowheads="1"/>
-            </p:cNvPicPr>
-            <p:nvPr/>
-          </p:nvPicPr>
-          <p:blipFill rotWithShape="1">
-            <a:blip r:embed="rId2">
-              <a:extLst>
-                <a:ext uri="{28A0092B-C50C-407E-A947-70E740481C1C}">
-                  <a14:useLocalDpi xmlns:a14="http://schemas.microsoft.com/office/drawing/2010/main" val="0"/>
-                </a:ext>
-              </a:extLst>
-            </a:blip>
-            <a:srcRect r="3298"/>
-            <a:stretch>
-              <a:fillRect/>
-            </a:stretch>
-          </p:blipFill>
-          <p:spPr bwMode="auto">
-            <a:xfrm>
-              <a:off x="1636211" y="2752560"/>
-              <a:ext cx="8625389" cy="2976910"/>
-            </a:xfrm>
-            <a:prstGeom prst="rect">
-              <a:avLst/>
-            </a:prstGeom>
-            <a:noFill/>
-            <a:extLst>
-              <a:ext uri="{909E8E84-426E-40DD-AFC4-6F175D3DCCD1}">
-                <a14:hiddenFill xmlns:a14="http://schemas.microsoft.com/office/drawing/2010/main">
-                  <a:solidFill>
-                    <a:srgbClr val="FFFFFF"/>
-                  </a:solidFill>
-                </a14:hiddenFill>
-              </a:ext>
-            </a:extLst>
-          </p:spPr>
-        </p:pic>
-        <p:sp>
-          <p:nvSpPr>
-            <p:cNvPr id="9" name="직사각형 8"/>
-            <p:cNvSpPr/>
-            <p:nvPr/>
-          </p:nvSpPr>
-          <p:spPr>
-            <a:xfrm>
-              <a:off x="4735285" y="5483249"/>
-              <a:ext cx="2414443" cy="246221"/>
-            </a:xfrm>
-            <a:prstGeom prst="rect">
-              <a:avLst/>
-            </a:prstGeom>
-          </p:spPr>
-          <p:txBody>
-            <a:bodyPr wrap="none">
-              <a:spAutoFit/>
-            </a:bodyPr>
-            <a:lstStyle/>
-            <a:p>
-              <a:pPr algn="ctr"/>
-              <a:r>
-                <a:rPr lang="en-US" altLang="ko-KR" sz="1000" dirty="0">
-                  <a:solidFill>
-                    <a:schemeClr val="tx1">
-                      <a:lumMod val="50000"/>
-                      <a:lumOff val="50000"/>
-                    </a:schemeClr>
-                  </a:solidFill>
-                  <a:latin typeface="Pretendard Light" panose="02000403000000020004" pitchFamily="2" charset="-127"/>
-                  <a:ea typeface="Pretendard Light" panose="02000403000000020004" pitchFamily="2" charset="-127"/>
-                  <a:cs typeface="Pretendard Light" panose="02000403000000020004" pitchFamily="2" charset="-127"/>
-                </a:rPr>
-                <a:t>[</a:t>
-              </a:r>
-              <a:r>
-                <a:rPr lang="ko-KR" altLang="en-US" sz="1000" dirty="0">
-                  <a:solidFill>
-                    <a:schemeClr val="tx1">
-                      <a:lumMod val="50000"/>
-                      <a:lumOff val="50000"/>
-                    </a:schemeClr>
-                  </a:solidFill>
-                  <a:latin typeface="Pretendard Light" panose="02000403000000020004" pitchFamily="2" charset="-127"/>
-                  <a:ea typeface="Pretendard Light" panose="02000403000000020004" pitchFamily="2" charset="-127"/>
-                  <a:cs typeface="Pretendard Light" panose="02000403000000020004" pitchFamily="2" charset="-127"/>
-                </a:rPr>
-                <a:t>출처</a:t>
-              </a:r>
-              <a:r>
-                <a:rPr lang="en-US" altLang="ko-KR" sz="1000" dirty="0">
-                  <a:solidFill>
-                    <a:schemeClr val="tx1">
-                      <a:lumMod val="50000"/>
-                      <a:lumOff val="50000"/>
-                    </a:schemeClr>
-                  </a:solidFill>
-                  <a:latin typeface="Pretendard Light" panose="02000403000000020004" pitchFamily="2" charset="-127"/>
-                  <a:ea typeface="Pretendard Light" panose="02000403000000020004" pitchFamily="2" charset="-127"/>
-                  <a:cs typeface="Pretendard Light" panose="02000403000000020004" pitchFamily="2" charset="-127"/>
-                </a:rPr>
-                <a:t>] https://heytech.tistory.com/440</a:t>
-              </a:r>
-              <a:endParaRPr lang="ko-KR" altLang="en-US" sz="1000" dirty="0">
-                <a:solidFill>
-                  <a:schemeClr val="tx1">
-                    <a:lumMod val="50000"/>
-                    <a:lumOff val="50000"/>
-                  </a:schemeClr>
-                </a:solidFill>
-                <a:latin typeface="Pretendard Light" panose="02000403000000020004" pitchFamily="2" charset="-127"/>
-                <a:ea typeface="Pretendard Light" panose="02000403000000020004" pitchFamily="2" charset="-127"/>
-                <a:cs typeface="Pretendard Light" panose="02000403000000020004" pitchFamily="2" charset="-127"/>
-              </a:endParaRPr>
-            </a:p>
-          </p:txBody>
-        </p:sp>
-      </p:grpSp>
-    </p:spTree>
-    <p:extLst>
-      <p:ext uri="{BB962C8B-B14F-4D97-AF65-F5344CB8AC3E}">
-        <p14:creationId xmlns:p14="http://schemas.microsoft.com/office/powerpoint/2010/main" val="1742215221"/>
-      </p:ext>
-    </p:extLst>
-  </p:cSld>
-  <p:clrMapOvr>
-    <a:masterClrMapping/>
-  </p:clrMapOvr>
-</p:sld>
-</file>
-
-<file path=ppt/slides/slide8.xml><?xml version="1.0" encoding="utf-8"?>
-<p:sld xmlns:a="http://schemas.openxmlformats.org/drawingml/2006/main" xmlns:r="http://schemas.openxmlformats.org/officeDocument/2006/relationships" xmlns:p="http://schemas.openxmlformats.org/presentationml/2006/main">
-  <p:cSld>
-    <p:spTree>
-      <p:nvGrpSpPr>
-        <p:cNvPr id="1" name=""/>
-        <p:cNvGrpSpPr/>
-        <p:nvPr/>
-      </p:nvGrpSpPr>
-      <p:grpSpPr>
-        <a:xfrm>
-          <a:off x="0" y="0"/>
-          <a:ext cx="0" cy="0"/>
-          <a:chOff x="0" y="0"/>
-          <a:chExt cx="0" cy="0"/>
-        </a:xfrm>
-      </p:grpSpPr>
-      <p:sp>
-        <p:nvSpPr>
-          <p:cNvPr id="2" name="제목 1">
-            <a:extLst>
-              <a:ext uri="{FF2B5EF4-FFF2-40B4-BE49-F238E27FC236}">
-                <a16:creationId xmlns:a16="http://schemas.microsoft.com/office/drawing/2014/main" id="{29017EEA-1700-68A7-6D01-92F3863263E2}"/>
-              </a:ext>
-            </a:extLst>
-          </p:cNvPr>
-          <p:cNvSpPr>
-            <a:spLocks noGrp="1"/>
-          </p:cNvSpPr>
-          <p:nvPr>
-            <p:ph type="title"/>
-          </p:nvPr>
-        </p:nvSpPr>
-        <p:spPr/>
-        <p:txBody>
-          <a:bodyPr>
-            <a:normAutofit/>
-          </a:bodyPr>
-          <a:lstStyle/>
-          <a:p>
-            <a:r>
-              <a:rPr lang="en-US" altLang="ko-KR" b="1" dirty="0"/>
-              <a:t>RNN(Recurrent Neural Network)</a:t>
-            </a:r>
-            <a:endParaRPr lang="ko-KR" altLang="en-US" b="1" dirty="0"/>
-          </a:p>
-        </p:txBody>
-      </p:sp>
-      <p:sp>
-        <p:nvSpPr>
-          <p:cNvPr id="3" name="내용 개체 틀 2">
-            <a:extLst>
-              <a:ext uri="{FF2B5EF4-FFF2-40B4-BE49-F238E27FC236}">
-                <a16:creationId xmlns:a16="http://schemas.microsoft.com/office/drawing/2014/main" id="{7427EE51-6539-C4E3-E901-BA804AE94D29}"/>
-              </a:ext>
-            </a:extLst>
-          </p:cNvPr>
-          <p:cNvSpPr>
-            <a:spLocks noGrp="1"/>
-          </p:cNvSpPr>
-          <p:nvPr>
-            <p:ph idx="1"/>
-          </p:nvPr>
-        </p:nvSpPr>
-        <p:spPr>
-          <a:xfrm>
-            <a:off x="251788" y="1234121"/>
-            <a:ext cx="5513745" cy="4389757"/>
-          </a:xfrm>
-        </p:spPr>
-        <p:txBody>
-          <a:bodyPr>
-            <a:noAutofit/>
-          </a:bodyPr>
-          <a:lstStyle/>
-          <a:p>
-            <a:pPr marL="0" indent="0">
-              <a:lnSpc>
-                <a:spcPct val="150000"/>
-              </a:lnSpc>
-              <a:buNone/>
-            </a:pPr>
-            <a:r>
-              <a:rPr lang="ko-KR" altLang="en-US" sz="2400" dirty="0"/>
-              <a:t>✅ 활용</a:t>
-            </a:r>
-            <a:endParaRPr lang="en-US" altLang="ko-KR" sz="2400" dirty="0"/>
-          </a:p>
-          <a:p>
-            <a:pPr lvl="1">
-              <a:lnSpc>
-                <a:spcPct val="150000"/>
-              </a:lnSpc>
-            </a:pPr>
-            <a:r>
-              <a:rPr lang="ko-KR" altLang="en-US" sz="2000" dirty="0"/>
-              <a:t>자연어 처리</a:t>
-            </a:r>
-            <a:r>
-              <a:rPr lang="en-US" altLang="ko-KR" sz="2000" dirty="0"/>
-              <a:t>, </a:t>
-            </a:r>
-            <a:r>
-              <a:rPr lang="ko-KR" altLang="en-US" sz="2000" dirty="0"/>
-              <a:t>신호 분류</a:t>
-            </a:r>
-            <a:r>
-              <a:rPr lang="en-US" altLang="ko-KR" sz="2000" dirty="0"/>
-              <a:t>, </a:t>
-            </a:r>
-            <a:r>
-              <a:rPr lang="ko-KR" altLang="en-US" sz="2000" dirty="0"/>
-              <a:t>비디오 분석등에 사용</a:t>
-            </a:r>
-            <a:endParaRPr lang="en-US" altLang="ko-KR" sz="2000" dirty="0"/>
-          </a:p>
-          <a:p>
-            <a:pPr lvl="1">
-              <a:lnSpc>
-                <a:spcPct val="150000"/>
-              </a:lnSpc>
-            </a:pPr>
-            <a:r>
-              <a:rPr lang="ko-KR" altLang="en-US" sz="2000" dirty="0"/>
-              <a:t>일대다 </a:t>
-            </a:r>
-            <a:r>
-              <a:rPr lang="en-US" altLang="ko-KR" sz="2000" dirty="0"/>
-              <a:t>: image</a:t>
-            </a:r>
-            <a:r>
-              <a:rPr lang="ko-KR" altLang="en-US" sz="2000" dirty="0"/>
-              <a:t> </a:t>
-            </a:r>
-            <a:r>
-              <a:rPr lang="en-US" altLang="ko-KR" sz="2000" dirty="0"/>
-              <a:t>to</a:t>
-            </a:r>
-            <a:r>
-              <a:rPr lang="ko-KR" altLang="en-US" sz="2000" dirty="0"/>
-              <a:t> </a:t>
-            </a:r>
-            <a:r>
-              <a:rPr lang="en-US" altLang="ko-KR" sz="2000" dirty="0"/>
-              <a:t>text</a:t>
-            </a:r>
-          </a:p>
-          <a:p>
-            <a:pPr lvl="1">
-              <a:lnSpc>
-                <a:spcPct val="150000"/>
-              </a:lnSpc>
-            </a:pPr>
-            <a:r>
-              <a:rPr lang="ko-KR" altLang="en-US" sz="2000" dirty="0"/>
-              <a:t>다대일 </a:t>
-            </a:r>
-            <a:r>
-              <a:rPr lang="en-US" altLang="ko-KR" sz="2000" dirty="0"/>
-              <a:t>: </a:t>
-            </a:r>
-            <a:r>
-              <a:rPr lang="ko-KR" altLang="en-US" sz="2000" dirty="0"/>
-              <a:t>문장 감정 분류</a:t>
-            </a:r>
-            <a:r>
-              <a:rPr lang="en-US" altLang="ko-KR" sz="2000" dirty="0"/>
-              <a:t>, </a:t>
-            </a:r>
-            <a:r>
-              <a:rPr lang="ko-KR" altLang="en-US" sz="2000" dirty="0"/>
-              <a:t>스팸 메일 분류</a:t>
-            </a:r>
-            <a:endParaRPr lang="en-US" altLang="ko-KR" sz="2000" dirty="0"/>
-          </a:p>
-          <a:p>
-            <a:pPr lvl="1">
-              <a:lnSpc>
-                <a:spcPct val="150000"/>
-              </a:lnSpc>
-            </a:pPr>
-            <a:r>
-              <a:rPr lang="ko-KR" altLang="en-US" sz="2000" dirty="0"/>
-              <a:t>다대다 </a:t>
-            </a:r>
-            <a:r>
-              <a:rPr lang="en-US" altLang="ko-KR" sz="2000" dirty="0"/>
-              <a:t>: </a:t>
-            </a:r>
-            <a:r>
-              <a:rPr lang="ko-KR" altLang="en-US" sz="2000" dirty="0" err="1"/>
-              <a:t>챗봇</a:t>
-            </a:r>
-            <a:r>
-              <a:rPr lang="en-US" altLang="ko-KR" sz="2000" dirty="0"/>
-              <a:t>, </a:t>
-            </a:r>
-            <a:r>
-              <a:rPr lang="ko-KR" altLang="en-US" sz="2000" dirty="0"/>
-              <a:t>번역기</a:t>
-            </a:r>
-            <a:endParaRPr lang="en-US" altLang="ko-KR" sz="2000" dirty="0"/>
-          </a:p>
-          <a:p>
-            <a:pPr marL="0" indent="0">
-              <a:lnSpc>
-                <a:spcPct val="150000"/>
-              </a:lnSpc>
-              <a:buNone/>
-            </a:pPr>
-            <a:r>
-              <a:rPr lang="ko-KR" altLang="en-US" sz="2400" dirty="0"/>
-              <a:t>📌 한계 </a:t>
-            </a:r>
-            <a:endParaRPr lang="en-US" altLang="ko-KR" sz="2400" dirty="0"/>
-          </a:p>
-          <a:p>
-            <a:pPr lvl="1">
-              <a:lnSpc>
-                <a:spcPct val="150000"/>
-              </a:lnSpc>
-            </a:pPr>
-            <a:r>
-              <a:rPr lang="ko-KR" altLang="en-US" sz="2000" dirty="0"/>
-              <a:t>길어질수록 앞의 정보가 뒤로 충분히 전달되지 못함</a:t>
-            </a:r>
-            <a:r>
-              <a:rPr lang="en-US" altLang="ko-KR" sz="2000" dirty="0"/>
-              <a:t>(</a:t>
-            </a:r>
-            <a:r>
-              <a:rPr lang="ko-KR" altLang="en-US" sz="2000" dirty="0"/>
-              <a:t>장기 의존성 문제</a:t>
-            </a:r>
-            <a:r>
-              <a:rPr lang="en-US" altLang="ko-KR" sz="2000" dirty="0"/>
-              <a:t>)</a:t>
-            </a:r>
-            <a:endParaRPr lang="ko-KR" altLang="en-US" sz="2000" dirty="0"/>
-          </a:p>
-        </p:txBody>
-      </p:sp>
-      <p:sp>
-        <p:nvSpPr>
-          <p:cNvPr id="4" name="날짜 개체 틀 3">
-            <a:extLst>
-              <a:ext uri="{FF2B5EF4-FFF2-40B4-BE49-F238E27FC236}">
-                <a16:creationId xmlns:a16="http://schemas.microsoft.com/office/drawing/2014/main" id="{B436F977-2F80-A369-4870-4CFEEDC26E7F}"/>
-              </a:ext>
-            </a:extLst>
-          </p:cNvPr>
-          <p:cNvSpPr>
-            <a:spLocks noGrp="1"/>
-          </p:cNvSpPr>
-          <p:nvPr>
-            <p:ph type="dt" sz="half" idx="10"/>
-          </p:nvPr>
-        </p:nvSpPr>
-        <p:spPr/>
-        <p:txBody>
-          <a:bodyPr/>
-          <a:lstStyle/>
-          <a:p>
-            <a:fld id="{0F78D9C4-20C1-4B15-A116-16DC77AD9A1E}" type="datetime1">
-              <a:rPr lang="ko-KR" altLang="en-US" smtClean="0"/>
-              <a:t>2026-02-19</a:t>
-            </a:fld>
-            <a:endParaRPr lang="ko-KR" altLang="en-US"/>
-          </a:p>
-        </p:txBody>
-      </p:sp>
-      <p:sp>
-        <p:nvSpPr>
-          <p:cNvPr id="5" name="슬라이드 번호 개체 틀 4">
-            <a:extLst>
-              <a:ext uri="{FF2B5EF4-FFF2-40B4-BE49-F238E27FC236}">
-                <a16:creationId xmlns:a16="http://schemas.microsoft.com/office/drawing/2014/main" id="{58AE5165-246F-D448-ADAB-3B880493009B}"/>
-              </a:ext>
-            </a:extLst>
-          </p:cNvPr>
-          <p:cNvSpPr>
-            <a:spLocks noGrp="1"/>
-          </p:cNvSpPr>
-          <p:nvPr>
-            <p:ph type="sldNum" sz="quarter" idx="12"/>
-          </p:nvPr>
-        </p:nvSpPr>
-        <p:spPr/>
-        <p:txBody>
-          <a:bodyPr/>
-          <a:lstStyle/>
-          <a:p>
-            <a:fld id="{083A2CE0-18CD-4102-B738-4ACFF9E68BA4}" type="slidenum">
-              <a:rPr lang="ko-KR" altLang="en-US" smtClean="0"/>
-              <a:t>8</a:t>
+              <a:t>10</a:t>
             </a:fld>
             <a:endParaRPr lang="ko-KR" altLang="en-US"/>
           </a:p>
@@ -7861,7 +6196,7 @@
 </p:sld>
 </file>
 
-<file path=ppt/slides/slide9.xml><?xml version="1.0" encoding="utf-8"?>
+<file path=ppt/slides/slide11.xml><?xml version="1.0" encoding="utf-8"?>
 <p:sld xmlns:a="http://schemas.openxmlformats.org/drawingml/2006/main" xmlns:r="http://schemas.openxmlformats.org/officeDocument/2006/relationships" xmlns:p="http://schemas.openxmlformats.org/presentationml/2006/main">
   <p:cSld>
     <p:spTree>
@@ -8028,20 +6363,20 @@
               </a:lnSpc>
             </a:pPr>
             <a:r>
-              <a:rPr lang="en-US" altLang="ko-KR" sz="2000" dirty="0"/>
-              <a:t>RNN</a:t>
-            </a:r>
-            <a:r>
               <a:rPr lang="ko-KR" altLang="en-US" sz="2000" dirty="0"/>
-              <a:t>과 </a:t>
-            </a:r>
-            <a:r>
-              <a:rPr lang="en-US" altLang="ko-KR" sz="2000" dirty="0"/>
-              <a:t>CNN</a:t>
-            </a:r>
+              <a:t>많은 분야에서 표준 구조로 자리 잡음 </a:t>
+            </a:r>
+            <a:endParaRPr lang="en-US" altLang="ko-KR" sz="2000" dirty="0"/>
+          </a:p>
+          <a:p>
+            <a:pPr lvl="1">
+              <a:lnSpc>
+                <a:spcPct val="150000"/>
+              </a:lnSpc>
+            </a:pPr>
             <a:r>
               <a:rPr lang="ko-KR" altLang="en-US" sz="2000" dirty="0"/>
-              <a:t>을 대체하며 높은 성능과 병렬 처리 효율성 제공</a:t>
+              <a:t>높은 성능과 병렬 처리 효율성 제공</a:t>
             </a:r>
             <a:r>
               <a:rPr lang="en-US" altLang="ko-KR" sz="2000" dirty="0"/>
@@ -8073,7 +6408,7 @@
           <a:p>
             <a:fld id="{0F78D9C4-20C1-4B15-A116-16DC77AD9A1E}" type="datetime1">
               <a:rPr lang="ko-KR" altLang="en-US" smtClean="0"/>
-              <a:t>2026-02-19</a:t>
+              <a:t>2026-02-20</a:t>
             </a:fld>
             <a:endParaRPr lang="ko-KR" altLang="en-US"/>
           </a:p>
@@ -8102,7 +6437,7 @@
           <a:p>
             <a:fld id="{083A2CE0-18CD-4102-B738-4ACFF9E68BA4}" type="slidenum">
               <a:rPr lang="ko-KR" altLang="en-US" smtClean="0"/>
-              <a:t>9</a:t>
+              <a:t>11</a:t>
             </a:fld>
             <a:endParaRPr lang="ko-KR" altLang="en-US"/>
           </a:p>
@@ -8137,7 +6472,7 @@
             <p:nvPr/>
           </p:nvPicPr>
           <p:blipFill>
-            <a:blip r:embed="rId2" cstate="print">
+            <a:blip r:embed="rId3" cstate="print">
               <a:extLst>
                 <a:ext uri="{28A0092B-C50C-407E-A947-70E740481C1C}">
                   <a14:useLocalDpi xmlns:a14="http://schemas.microsoft.com/office/drawing/2010/main" val="0"/>
@@ -8252,6 +6587,4153 @@
     <p:extLst>
       <p:ext uri="{BB962C8B-B14F-4D97-AF65-F5344CB8AC3E}">
         <p14:creationId xmlns:p14="http://schemas.microsoft.com/office/powerpoint/2010/main" val="2461278268"/>
+      </p:ext>
+    </p:extLst>
+  </p:cSld>
+  <p:clrMapOvr>
+    <a:masterClrMapping/>
+  </p:clrMapOvr>
+</p:sld>
+</file>
+
+<file path=ppt/slides/slide12.xml><?xml version="1.0" encoding="utf-8"?>
+<p:sld xmlns:a="http://schemas.openxmlformats.org/drawingml/2006/main" xmlns:r="http://schemas.openxmlformats.org/officeDocument/2006/relationships" xmlns:p="http://schemas.openxmlformats.org/presentationml/2006/main">
+  <p:cSld>
+    <p:spTree>
+      <p:nvGrpSpPr>
+        <p:cNvPr id="1" name=""/>
+        <p:cNvGrpSpPr/>
+        <p:nvPr/>
+      </p:nvGrpSpPr>
+      <p:grpSpPr>
+        <a:xfrm>
+          <a:off x="0" y="0"/>
+          <a:ext cx="0" cy="0"/>
+          <a:chOff x="0" y="0"/>
+          <a:chExt cx="0" cy="0"/>
+        </a:xfrm>
+      </p:grpSpPr>
+      <p:sp>
+        <p:nvSpPr>
+          <p:cNvPr id="2" name="제목 1">
+            <a:extLst>
+              <a:ext uri="{FF2B5EF4-FFF2-40B4-BE49-F238E27FC236}">
+                <a16:creationId xmlns:a16="http://schemas.microsoft.com/office/drawing/2014/main" id="{29017EEA-1700-68A7-6D01-92F3863263E2}"/>
+              </a:ext>
+            </a:extLst>
+          </p:cNvPr>
+          <p:cNvSpPr>
+            <a:spLocks noGrp="1"/>
+          </p:cNvSpPr>
+          <p:nvPr>
+            <p:ph type="title"/>
+          </p:nvPr>
+        </p:nvSpPr>
+        <p:spPr/>
+        <p:txBody>
+          <a:bodyPr>
+            <a:normAutofit/>
+          </a:bodyPr>
+          <a:lstStyle/>
+          <a:p>
+            <a:r>
+              <a:rPr lang="ko-KR" altLang="en-US" b="1" dirty="0"/>
+              <a:t>트랜스포머</a:t>
+            </a:r>
+            <a:r>
+              <a:rPr lang="en-US" altLang="ko-KR" b="1" dirty="0"/>
+              <a:t>(Transformer)</a:t>
+            </a:r>
+            <a:r>
+              <a:rPr lang="ko-KR" altLang="en-US" b="1" dirty="0"/>
+              <a:t> </a:t>
+            </a:r>
+          </a:p>
+        </p:txBody>
+      </p:sp>
+      <p:sp>
+        <p:nvSpPr>
+          <p:cNvPr id="3" name="내용 개체 틀 2">
+            <a:extLst>
+              <a:ext uri="{FF2B5EF4-FFF2-40B4-BE49-F238E27FC236}">
+                <a16:creationId xmlns:a16="http://schemas.microsoft.com/office/drawing/2014/main" id="{7427EE51-6539-C4E3-E901-BA804AE94D29}"/>
+              </a:ext>
+            </a:extLst>
+          </p:cNvPr>
+          <p:cNvSpPr>
+            <a:spLocks noGrp="1"/>
+          </p:cNvSpPr>
+          <p:nvPr>
+            <p:ph idx="1"/>
+          </p:nvPr>
+        </p:nvSpPr>
+        <p:spPr>
+          <a:xfrm>
+            <a:off x="251788" y="1145407"/>
+            <a:ext cx="11458937" cy="5248857"/>
+          </a:xfrm>
+        </p:spPr>
+        <p:txBody>
+          <a:bodyPr>
+            <a:noAutofit/>
+          </a:bodyPr>
+          <a:lstStyle/>
+          <a:p>
+            <a:pPr marL="0" indent="0">
+              <a:lnSpc>
+                <a:spcPct val="150000"/>
+              </a:lnSpc>
+              <a:buNone/>
+            </a:pPr>
+            <a:r>
+              <a:rPr lang="ko-KR" altLang="en-US" sz="2400" b="1" dirty="0"/>
+              <a:t>💡 </a:t>
+            </a:r>
+            <a:r>
+              <a:rPr lang="ko-KR" altLang="en-US" sz="2400" b="1" dirty="0" err="1"/>
+              <a:t>어텐션</a:t>
+            </a:r>
+            <a:r>
+              <a:rPr lang="ko-KR" altLang="en-US" sz="2400" b="1" dirty="0"/>
+              <a:t> 메커니즘</a:t>
+            </a:r>
+            <a:endParaRPr lang="en-US" altLang="ko-KR" sz="2400" b="1" dirty="0"/>
+          </a:p>
+          <a:p>
+            <a:pPr lvl="1">
+              <a:lnSpc>
+                <a:spcPct val="150000"/>
+              </a:lnSpc>
+              <a:buFont typeface="Wingdings" panose="05000000000000000000" pitchFamily="2" charset="2"/>
+              <a:buChar char="§"/>
+            </a:pPr>
+            <a:r>
+              <a:rPr lang="ko-KR" altLang="en-US" sz="2000" dirty="0"/>
+              <a:t>입력 요소들 중 중요한 부분에 더 큰 가중치를 부여해 정보를 선택적으로 집중하는 기법</a:t>
+            </a:r>
+            <a:endParaRPr lang="en-US" altLang="ko-KR" sz="2000" b="1" dirty="0"/>
+          </a:p>
+          <a:p>
+            <a:pPr lvl="1">
+              <a:lnSpc>
+                <a:spcPct val="150000"/>
+              </a:lnSpc>
+              <a:buFont typeface="Wingdings" panose="05000000000000000000" pitchFamily="2" charset="2"/>
+              <a:buChar char="§"/>
+            </a:pPr>
+            <a:r>
+              <a:rPr lang="ko-KR" altLang="en-US" sz="2000" dirty="0"/>
+              <a:t>트랜스포머는 </a:t>
+            </a:r>
+            <a:r>
+              <a:rPr lang="ko-KR" altLang="en-US" sz="2000" b="1" dirty="0" err="1"/>
+              <a:t>어텐션</a:t>
+            </a:r>
+            <a:r>
+              <a:rPr lang="ko-KR" altLang="en-US" sz="2000" b="1" dirty="0"/>
+              <a:t> 메커니즘</a:t>
+            </a:r>
+            <a:r>
+              <a:rPr lang="ko-KR" altLang="en-US" sz="2000" dirty="0"/>
+              <a:t>을 </a:t>
+            </a:r>
+            <a:r>
+              <a:rPr lang="ko-KR" altLang="en-US" sz="2000" b="1" dirty="0"/>
+              <a:t>기반으로 설계</a:t>
+            </a:r>
+            <a:r>
+              <a:rPr lang="ko-KR" altLang="en-US" sz="2000" dirty="0"/>
+              <a:t>된 모델</a:t>
+            </a:r>
+            <a:r>
+              <a:rPr lang="en-US" altLang="ko-KR" sz="2000" dirty="0"/>
+              <a:t>.</a:t>
+            </a:r>
+          </a:p>
+          <a:p>
+            <a:pPr lvl="1">
+              <a:lnSpc>
+                <a:spcPct val="150000"/>
+              </a:lnSpc>
+              <a:buFont typeface="Wingdings" panose="05000000000000000000" pitchFamily="2" charset="2"/>
+              <a:buChar char="§"/>
+            </a:pPr>
+            <a:r>
+              <a:rPr lang="ko-KR" altLang="en-US" sz="2000" dirty="0"/>
+              <a:t>자연어 처리</a:t>
+            </a:r>
+            <a:r>
+              <a:rPr lang="en-US" altLang="ko-KR" sz="2000" dirty="0"/>
+              <a:t>(NLP)</a:t>
+            </a:r>
+            <a:r>
+              <a:rPr lang="ko-KR" altLang="en-US" sz="2000" dirty="0"/>
+              <a:t>와 컴퓨터 비전</a:t>
+            </a:r>
+            <a:r>
+              <a:rPr lang="en-US" altLang="ko-KR" sz="2000" dirty="0"/>
+              <a:t>(CV) </a:t>
+            </a:r>
+            <a:r>
+              <a:rPr lang="ko-KR" altLang="en-US" sz="2000" dirty="0"/>
+              <a:t>등 다양한 분야에서 사용</a:t>
+            </a:r>
+            <a:r>
+              <a:rPr lang="en-US" altLang="ko-KR" sz="2000" dirty="0"/>
+              <a:t>.</a:t>
+            </a:r>
+            <a:endParaRPr lang="en-US" altLang="ko-KR" sz="2400" dirty="0"/>
+          </a:p>
+          <a:p>
+            <a:pPr marL="0" indent="0">
+              <a:lnSpc>
+                <a:spcPct val="150000"/>
+              </a:lnSpc>
+              <a:buNone/>
+            </a:pPr>
+            <a:r>
+              <a:rPr lang="ko-KR" altLang="en-US" sz="2400" b="1" dirty="0"/>
+              <a:t>✅ </a:t>
+            </a:r>
+            <a:r>
+              <a:rPr lang="ko-KR" altLang="en-US" sz="2400" b="1" dirty="0" err="1"/>
+              <a:t>어텐션이</a:t>
+            </a:r>
+            <a:r>
+              <a:rPr lang="ko-KR" altLang="en-US" sz="2400" b="1" dirty="0"/>
+              <a:t> 트랜스포머의 핵심인 이유</a:t>
+            </a:r>
+          </a:p>
+          <a:p>
+            <a:pPr lvl="1">
+              <a:lnSpc>
+                <a:spcPct val="150000"/>
+              </a:lnSpc>
+              <a:buFont typeface="Wingdings" panose="05000000000000000000" pitchFamily="2" charset="2"/>
+              <a:buChar char="§"/>
+            </a:pPr>
+            <a:r>
+              <a:rPr lang="en-US" altLang="ko-KR" sz="2000" b="1" dirty="0"/>
+              <a:t>RNN/CNN</a:t>
+            </a:r>
+            <a:r>
+              <a:rPr lang="ko-KR" altLang="en-US" sz="2000" b="1" dirty="0"/>
+              <a:t>의 한계 극복</a:t>
+            </a:r>
+            <a:endParaRPr lang="ko-KR" altLang="en-US" sz="2000" dirty="0"/>
+          </a:p>
+          <a:p>
+            <a:pPr lvl="2">
+              <a:lnSpc>
+                <a:spcPct val="150000"/>
+              </a:lnSpc>
+            </a:pPr>
+            <a:r>
+              <a:rPr lang="en-US" altLang="ko-KR" sz="1800" dirty="0"/>
+              <a:t>RNN</a:t>
+            </a:r>
+            <a:r>
+              <a:rPr lang="ko-KR" altLang="en-US" sz="1800" dirty="0"/>
+              <a:t>의 느린 학습과 장기 의존성 문제 해결</a:t>
+            </a:r>
+            <a:r>
+              <a:rPr lang="en-US" altLang="ko-KR" sz="1800" dirty="0"/>
+              <a:t>, CNN</a:t>
+            </a:r>
+            <a:r>
+              <a:rPr lang="ko-KR" altLang="en-US" sz="1800" dirty="0"/>
+              <a:t>의 국소적 한계를 넘어 전역 문맥 학습 가능</a:t>
+            </a:r>
+            <a:r>
+              <a:rPr lang="en-US" altLang="ko-KR" sz="1800" dirty="0"/>
+              <a:t>.</a:t>
+            </a:r>
+          </a:p>
+          <a:p>
+            <a:pPr lvl="1">
+              <a:lnSpc>
+                <a:spcPct val="150000"/>
+              </a:lnSpc>
+              <a:buFont typeface="Wingdings" panose="05000000000000000000" pitchFamily="2" charset="2"/>
+              <a:buChar char="§"/>
+            </a:pPr>
+            <a:r>
+              <a:rPr lang="en-US" altLang="ko-KR" sz="2000" b="1" dirty="0"/>
+              <a:t>Self-Attention</a:t>
+            </a:r>
+            <a:r>
+              <a:rPr lang="ko-KR" altLang="en-US" sz="2000" b="1" dirty="0"/>
+              <a:t>의 역할</a:t>
+            </a:r>
+            <a:endParaRPr lang="ko-KR" altLang="en-US" sz="2000" dirty="0"/>
+          </a:p>
+          <a:p>
+            <a:pPr lvl="2">
+              <a:lnSpc>
+                <a:spcPct val="150000"/>
+              </a:lnSpc>
+            </a:pPr>
+            <a:r>
+              <a:rPr lang="ko-KR" altLang="en-US" sz="1800" dirty="0"/>
+              <a:t>입력 데이터 간의 관계를 한 번에 계산</a:t>
+            </a:r>
+            <a:r>
+              <a:rPr lang="en-US" altLang="ko-KR" sz="1800" dirty="0"/>
+              <a:t>, </a:t>
+            </a:r>
+            <a:r>
+              <a:rPr lang="ko-KR" altLang="en-US" sz="1800" dirty="0"/>
+              <a:t>문맥 정보를 정확히 이해</a:t>
+            </a:r>
+            <a:r>
+              <a:rPr lang="en-US" altLang="ko-KR" sz="1800" dirty="0"/>
+              <a:t>.</a:t>
+            </a:r>
+          </a:p>
+          <a:p>
+            <a:pPr>
+              <a:lnSpc>
+                <a:spcPct val="150000"/>
+              </a:lnSpc>
+            </a:pPr>
+            <a:endParaRPr lang="en-US" altLang="ko-KR" sz="2400" dirty="0"/>
+          </a:p>
+        </p:txBody>
+      </p:sp>
+      <p:sp>
+        <p:nvSpPr>
+          <p:cNvPr id="4" name="날짜 개체 틀 3">
+            <a:extLst>
+              <a:ext uri="{FF2B5EF4-FFF2-40B4-BE49-F238E27FC236}">
+                <a16:creationId xmlns:a16="http://schemas.microsoft.com/office/drawing/2014/main" id="{B436F977-2F80-A369-4870-4CFEEDC26E7F}"/>
+              </a:ext>
+            </a:extLst>
+          </p:cNvPr>
+          <p:cNvSpPr>
+            <a:spLocks noGrp="1"/>
+          </p:cNvSpPr>
+          <p:nvPr>
+            <p:ph type="dt" sz="half" idx="10"/>
+          </p:nvPr>
+        </p:nvSpPr>
+        <p:spPr/>
+        <p:txBody>
+          <a:bodyPr/>
+          <a:lstStyle/>
+          <a:p>
+            <a:fld id="{0F78D9C4-20C1-4B15-A116-16DC77AD9A1E}" type="datetime1">
+              <a:rPr lang="ko-KR" altLang="en-US" smtClean="0"/>
+              <a:t>2026-02-20</a:t>
+            </a:fld>
+            <a:endParaRPr lang="ko-KR" altLang="en-US"/>
+          </a:p>
+        </p:txBody>
+      </p:sp>
+      <p:sp>
+        <p:nvSpPr>
+          <p:cNvPr id="5" name="슬라이드 번호 개체 틀 4">
+            <a:extLst>
+              <a:ext uri="{FF2B5EF4-FFF2-40B4-BE49-F238E27FC236}">
+                <a16:creationId xmlns:a16="http://schemas.microsoft.com/office/drawing/2014/main" id="{58AE5165-246F-D448-ADAB-3B880493009B}"/>
+              </a:ext>
+            </a:extLst>
+          </p:cNvPr>
+          <p:cNvSpPr>
+            <a:spLocks noGrp="1"/>
+          </p:cNvSpPr>
+          <p:nvPr>
+            <p:ph type="sldNum" sz="quarter" idx="12"/>
+          </p:nvPr>
+        </p:nvSpPr>
+        <p:spPr/>
+        <p:txBody>
+          <a:bodyPr/>
+          <a:lstStyle/>
+          <a:p>
+            <a:fld id="{083A2CE0-18CD-4102-B738-4ACFF9E68BA4}" type="slidenum">
+              <a:rPr lang="ko-KR" altLang="en-US" smtClean="0"/>
+              <a:t>12</a:t>
+            </a:fld>
+            <a:endParaRPr lang="ko-KR" altLang="en-US"/>
+          </a:p>
+        </p:txBody>
+      </p:sp>
+    </p:spTree>
+    <p:extLst>
+      <p:ext uri="{BB962C8B-B14F-4D97-AF65-F5344CB8AC3E}">
+        <p14:creationId xmlns:p14="http://schemas.microsoft.com/office/powerpoint/2010/main" val="2564618452"/>
+      </p:ext>
+    </p:extLst>
+  </p:cSld>
+  <p:clrMapOvr>
+    <a:masterClrMapping/>
+  </p:clrMapOvr>
+</p:sld>
+</file>
+
+<file path=ppt/slides/slide13.xml><?xml version="1.0" encoding="utf-8"?>
+<p:sld xmlns:a="http://schemas.openxmlformats.org/drawingml/2006/main" xmlns:r="http://schemas.openxmlformats.org/officeDocument/2006/relationships" xmlns:p="http://schemas.openxmlformats.org/presentationml/2006/main">
+  <p:cSld>
+    <p:spTree>
+      <p:nvGrpSpPr>
+        <p:cNvPr id="1" name=""/>
+        <p:cNvGrpSpPr/>
+        <p:nvPr/>
+      </p:nvGrpSpPr>
+      <p:grpSpPr>
+        <a:xfrm>
+          <a:off x="0" y="0"/>
+          <a:ext cx="0" cy="0"/>
+          <a:chOff x="0" y="0"/>
+          <a:chExt cx="0" cy="0"/>
+        </a:xfrm>
+      </p:grpSpPr>
+      <p:sp>
+        <p:nvSpPr>
+          <p:cNvPr id="2" name="제목 1">
+            <a:extLst>
+              <a:ext uri="{FF2B5EF4-FFF2-40B4-BE49-F238E27FC236}">
+                <a16:creationId xmlns:a16="http://schemas.microsoft.com/office/drawing/2014/main" id="{29017EEA-1700-68A7-6D01-92F3863263E2}"/>
+              </a:ext>
+            </a:extLst>
+          </p:cNvPr>
+          <p:cNvSpPr>
+            <a:spLocks noGrp="1"/>
+          </p:cNvSpPr>
+          <p:nvPr>
+            <p:ph type="title"/>
+          </p:nvPr>
+        </p:nvSpPr>
+        <p:spPr/>
+        <p:txBody>
+          <a:bodyPr>
+            <a:normAutofit/>
+          </a:bodyPr>
+          <a:lstStyle/>
+          <a:p>
+            <a:r>
+              <a:rPr lang="ko-KR" altLang="en-US" b="1" dirty="0"/>
+              <a:t>트랜스포머</a:t>
+            </a:r>
+            <a:r>
+              <a:rPr lang="en-US" altLang="ko-KR" b="1" dirty="0"/>
+              <a:t>(Transformer)</a:t>
+            </a:r>
+            <a:r>
+              <a:rPr lang="ko-KR" altLang="en-US" b="1" dirty="0"/>
+              <a:t> </a:t>
+            </a:r>
+          </a:p>
+        </p:txBody>
+      </p:sp>
+      <p:sp>
+        <p:nvSpPr>
+          <p:cNvPr id="3" name="내용 개체 틀 2">
+            <a:extLst>
+              <a:ext uri="{FF2B5EF4-FFF2-40B4-BE49-F238E27FC236}">
+                <a16:creationId xmlns:a16="http://schemas.microsoft.com/office/drawing/2014/main" id="{7427EE51-6539-C4E3-E901-BA804AE94D29}"/>
+              </a:ext>
+            </a:extLst>
+          </p:cNvPr>
+          <p:cNvSpPr>
+            <a:spLocks noGrp="1"/>
+          </p:cNvSpPr>
+          <p:nvPr>
+            <p:ph idx="1"/>
+          </p:nvPr>
+        </p:nvSpPr>
+        <p:spPr>
+          <a:xfrm>
+            <a:off x="251788" y="1145407"/>
+            <a:ext cx="11458937" cy="5248857"/>
+          </a:xfrm>
+        </p:spPr>
+        <p:txBody>
+          <a:bodyPr>
+            <a:noAutofit/>
+          </a:bodyPr>
+          <a:lstStyle/>
+          <a:p>
+            <a:pPr marL="0" indent="0">
+              <a:lnSpc>
+                <a:spcPct val="150000"/>
+              </a:lnSpc>
+              <a:buNone/>
+            </a:pPr>
+            <a:r>
+              <a:rPr lang="ko-KR" altLang="en-US" sz="2400" b="1" dirty="0"/>
+              <a:t>✅ 작동 원리</a:t>
+            </a:r>
+          </a:p>
+          <a:p>
+            <a:pPr lvl="1">
+              <a:lnSpc>
+                <a:spcPct val="150000"/>
+              </a:lnSpc>
+              <a:buFont typeface="Wingdings" pitchFamily="2" charset="2"/>
+              <a:buChar char="§"/>
+            </a:pPr>
+            <a:r>
+              <a:rPr lang="ko-KR" altLang="en-US" sz="2000" b="1" dirty="0"/>
+              <a:t>관련성 계산</a:t>
+            </a:r>
+          </a:p>
+          <a:p>
+            <a:pPr lvl="2">
+              <a:lnSpc>
+                <a:spcPct val="150000"/>
+              </a:lnSpc>
+            </a:pPr>
+            <a:r>
+              <a:rPr lang="ko-KR" altLang="en-US" sz="1800" dirty="0"/>
+              <a:t>입력 데이터</a:t>
+            </a:r>
+            <a:r>
+              <a:rPr lang="en-US" altLang="ko-KR" sz="1800" dirty="0"/>
+              <a:t>(</a:t>
+            </a:r>
+            <a:r>
+              <a:rPr lang="ko-KR" altLang="en-US" sz="1800" dirty="0"/>
+              <a:t>예</a:t>
+            </a:r>
+            <a:r>
+              <a:rPr lang="en-US" altLang="ko-KR" sz="1800" dirty="0"/>
+              <a:t>: </a:t>
+            </a:r>
+            <a:r>
+              <a:rPr lang="ko-KR" altLang="en-US" sz="1800" dirty="0"/>
+              <a:t>단어</a:t>
+            </a:r>
+            <a:r>
+              <a:rPr lang="en-US" altLang="ko-KR" sz="1800" dirty="0"/>
+              <a:t>) </a:t>
+            </a:r>
+            <a:r>
+              <a:rPr lang="ko-KR" altLang="en-US" sz="1800" dirty="0"/>
+              <a:t>간의 관계를 점수로 매김</a:t>
+            </a:r>
+            <a:r>
+              <a:rPr lang="en-US" altLang="ko-KR" sz="1800" dirty="0"/>
+              <a:t>.</a:t>
+            </a:r>
+          </a:p>
+          <a:p>
+            <a:pPr lvl="2">
+              <a:lnSpc>
+                <a:spcPct val="150000"/>
+              </a:lnSpc>
+            </a:pPr>
+            <a:r>
+              <a:rPr lang="ko-KR" altLang="en-US" sz="1800" dirty="0"/>
+              <a:t>예</a:t>
+            </a:r>
+            <a:r>
+              <a:rPr lang="en-US" altLang="ko-KR" sz="1800" dirty="0"/>
+              <a:t>: "</a:t>
+            </a:r>
+            <a:r>
+              <a:rPr lang="ko-KR" altLang="en-US" sz="1800" dirty="0"/>
+              <a:t>고양이</a:t>
+            </a:r>
+            <a:r>
+              <a:rPr lang="en-US" altLang="ko-KR" sz="1800" dirty="0"/>
+              <a:t>" ↔ "</a:t>
+            </a:r>
+            <a:r>
+              <a:rPr lang="ko-KR" altLang="en-US" sz="1800" dirty="0"/>
+              <a:t>올라갔다</a:t>
+            </a:r>
+            <a:r>
+              <a:rPr lang="en-US" altLang="ko-KR" sz="1800" dirty="0"/>
+              <a:t>"</a:t>
+            </a:r>
+            <a:r>
+              <a:rPr lang="ko-KR" altLang="en-US" sz="1800" dirty="0"/>
+              <a:t>는 관련성 높음</a:t>
+            </a:r>
+            <a:r>
+              <a:rPr lang="en-US" altLang="ko-KR" sz="1800" dirty="0"/>
+              <a:t>.</a:t>
+            </a:r>
+          </a:p>
+          <a:p>
+            <a:pPr lvl="1">
+              <a:lnSpc>
+                <a:spcPct val="150000"/>
+              </a:lnSpc>
+              <a:buFont typeface="Wingdings" pitchFamily="2" charset="2"/>
+              <a:buChar char="§"/>
+            </a:pPr>
+            <a:r>
+              <a:rPr lang="ko-KR" altLang="en-US" sz="2000" b="1" dirty="0"/>
+              <a:t>가중치 부여</a:t>
+            </a:r>
+          </a:p>
+          <a:p>
+            <a:pPr lvl="2">
+              <a:lnSpc>
+                <a:spcPct val="150000"/>
+              </a:lnSpc>
+            </a:pPr>
+            <a:r>
+              <a:rPr lang="ko-KR" altLang="en-US" sz="1800" dirty="0"/>
+              <a:t>점수를 기반으로 각 단어의 중요도를 결정</a:t>
+            </a:r>
+            <a:r>
+              <a:rPr lang="en-US" altLang="ko-KR" sz="1800" dirty="0"/>
+              <a:t>.</a:t>
+            </a:r>
+          </a:p>
+          <a:p>
+            <a:pPr lvl="1">
+              <a:lnSpc>
+                <a:spcPct val="150000"/>
+              </a:lnSpc>
+              <a:buFont typeface="Wingdings" pitchFamily="2" charset="2"/>
+              <a:buChar char="§"/>
+            </a:pPr>
+            <a:r>
+              <a:rPr lang="ko-KR" altLang="en-US" sz="2000" b="1" dirty="0"/>
+              <a:t>정보 재조합</a:t>
+            </a:r>
+          </a:p>
+          <a:p>
+            <a:pPr lvl="2">
+              <a:lnSpc>
+                <a:spcPct val="150000"/>
+              </a:lnSpc>
+            </a:pPr>
+            <a:r>
+              <a:rPr lang="ko-KR" altLang="en-US" sz="1800" dirty="0"/>
+              <a:t>중요한 데이터에 더 집중해 전체 문맥 이해</a:t>
+            </a:r>
+            <a:r>
+              <a:rPr lang="en-US" altLang="ko-KR" sz="1800" dirty="0"/>
+              <a:t>.</a:t>
+            </a:r>
+            <a:endParaRPr lang="en-US" altLang="ko-KR" sz="1400" dirty="0"/>
+          </a:p>
+        </p:txBody>
+      </p:sp>
+      <p:sp>
+        <p:nvSpPr>
+          <p:cNvPr id="4" name="날짜 개체 틀 3">
+            <a:extLst>
+              <a:ext uri="{FF2B5EF4-FFF2-40B4-BE49-F238E27FC236}">
+                <a16:creationId xmlns:a16="http://schemas.microsoft.com/office/drawing/2014/main" id="{B436F977-2F80-A369-4870-4CFEEDC26E7F}"/>
+              </a:ext>
+            </a:extLst>
+          </p:cNvPr>
+          <p:cNvSpPr>
+            <a:spLocks noGrp="1"/>
+          </p:cNvSpPr>
+          <p:nvPr>
+            <p:ph type="dt" sz="half" idx="10"/>
+          </p:nvPr>
+        </p:nvSpPr>
+        <p:spPr/>
+        <p:txBody>
+          <a:bodyPr/>
+          <a:lstStyle/>
+          <a:p>
+            <a:fld id="{0F78D9C4-20C1-4B15-A116-16DC77AD9A1E}" type="datetime1">
+              <a:rPr lang="ko-KR" altLang="en-US" smtClean="0"/>
+              <a:t>2026-02-20</a:t>
+            </a:fld>
+            <a:endParaRPr lang="ko-KR" altLang="en-US"/>
+          </a:p>
+        </p:txBody>
+      </p:sp>
+      <p:sp>
+        <p:nvSpPr>
+          <p:cNvPr id="5" name="슬라이드 번호 개체 틀 4">
+            <a:extLst>
+              <a:ext uri="{FF2B5EF4-FFF2-40B4-BE49-F238E27FC236}">
+                <a16:creationId xmlns:a16="http://schemas.microsoft.com/office/drawing/2014/main" id="{58AE5165-246F-D448-ADAB-3B880493009B}"/>
+              </a:ext>
+            </a:extLst>
+          </p:cNvPr>
+          <p:cNvSpPr>
+            <a:spLocks noGrp="1"/>
+          </p:cNvSpPr>
+          <p:nvPr>
+            <p:ph type="sldNum" sz="quarter" idx="12"/>
+          </p:nvPr>
+        </p:nvSpPr>
+        <p:spPr/>
+        <p:txBody>
+          <a:bodyPr/>
+          <a:lstStyle/>
+          <a:p>
+            <a:fld id="{083A2CE0-18CD-4102-B738-4ACFF9E68BA4}" type="slidenum">
+              <a:rPr lang="ko-KR" altLang="en-US" smtClean="0"/>
+              <a:t>13</a:t>
+            </a:fld>
+            <a:endParaRPr lang="ko-KR" altLang="en-US"/>
+          </a:p>
+        </p:txBody>
+      </p:sp>
+    </p:spTree>
+    <p:extLst>
+      <p:ext uri="{BB962C8B-B14F-4D97-AF65-F5344CB8AC3E}">
+        <p14:creationId xmlns:p14="http://schemas.microsoft.com/office/powerpoint/2010/main" val="832573128"/>
+      </p:ext>
+    </p:extLst>
+  </p:cSld>
+  <p:clrMapOvr>
+    <a:masterClrMapping/>
+  </p:clrMapOvr>
+</p:sld>
+</file>
+
+<file path=ppt/slides/slide14.xml><?xml version="1.0" encoding="utf-8"?>
+<p:sld xmlns:a="http://schemas.openxmlformats.org/drawingml/2006/main" xmlns:r="http://schemas.openxmlformats.org/officeDocument/2006/relationships" xmlns:p="http://schemas.openxmlformats.org/presentationml/2006/main">
+  <p:cSld>
+    <p:spTree>
+      <p:nvGrpSpPr>
+        <p:cNvPr id="1" name=""/>
+        <p:cNvGrpSpPr/>
+        <p:nvPr/>
+      </p:nvGrpSpPr>
+      <p:grpSpPr>
+        <a:xfrm>
+          <a:off x="0" y="0"/>
+          <a:ext cx="0" cy="0"/>
+          <a:chOff x="0" y="0"/>
+          <a:chExt cx="0" cy="0"/>
+        </a:xfrm>
+      </p:grpSpPr>
+      <p:sp>
+        <p:nvSpPr>
+          <p:cNvPr id="2" name="제목 1">
+            <a:extLst>
+              <a:ext uri="{FF2B5EF4-FFF2-40B4-BE49-F238E27FC236}">
+                <a16:creationId xmlns:a16="http://schemas.microsoft.com/office/drawing/2014/main" id="{29017EEA-1700-68A7-6D01-92F3863263E2}"/>
+              </a:ext>
+            </a:extLst>
+          </p:cNvPr>
+          <p:cNvSpPr>
+            <a:spLocks noGrp="1"/>
+          </p:cNvSpPr>
+          <p:nvPr>
+            <p:ph type="title"/>
+          </p:nvPr>
+        </p:nvSpPr>
+        <p:spPr/>
+        <p:txBody>
+          <a:bodyPr>
+            <a:normAutofit/>
+          </a:bodyPr>
+          <a:lstStyle/>
+          <a:p>
+            <a:r>
+              <a:rPr lang="ko-KR" altLang="en-US" b="1" dirty="0"/>
+              <a:t>트랜스포머</a:t>
+            </a:r>
+            <a:r>
+              <a:rPr lang="en-US" altLang="ko-KR" b="1" dirty="0"/>
+              <a:t>(Transformer)</a:t>
+            </a:r>
+            <a:r>
+              <a:rPr lang="ko-KR" altLang="en-US" b="1" dirty="0"/>
+              <a:t> </a:t>
+            </a:r>
+          </a:p>
+        </p:txBody>
+      </p:sp>
+      <p:sp>
+        <p:nvSpPr>
+          <p:cNvPr id="3" name="내용 개체 틀 2">
+            <a:extLst>
+              <a:ext uri="{FF2B5EF4-FFF2-40B4-BE49-F238E27FC236}">
+                <a16:creationId xmlns:a16="http://schemas.microsoft.com/office/drawing/2014/main" id="{7427EE51-6539-C4E3-E901-BA804AE94D29}"/>
+              </a:ext>
+            </a:extLst>
+          </p:cNvPr>
+          <p:cNvSpPr>
+            <a:spLocks noGrp="1"/>
+          </p:cNvSpPr>
+          <p:nvPr>
+            <p:ph idx="1"/>
+          </p:nvPr>
+        </p:nvSpPr>
+        <p:spPr>
+          <a:xfrm>
+            <a:off x="238991" y="1145407"/>
+            <a:ext cx="11551534" cy="3095965"/>
+          </a:xfrm>
+        </p:spPr>
+        <p:txBody>
+          <a:bodyPr>
+            <a:noAutofit/>
+          </a:bodyPr>
+          <a:lstStyle/>
+          <a:p>
+            <a:pPr marL="0" indent="0">
+              <a:lnSpc>
+                <a:spcPct val="150000"/>
+              </a:lnSpc>
+              <a:buNone/>
+            </a:pPr>
+            <a:r>
+              <a:rPr lang="ko-KR" altLang="en-US" sz="2400" b="1" dirty="0"/>
+              <a:t>📌 특징</a:t>
+            </a:r>
+          </a:p>
+          <a:p>
+            <a:pPr lvl="1">
+              <a:lnSpc>
+                <a:spcPct val="150000"/>
+              </a:lnSpc>
+            </a:pPr>
+            <a:r>
+              <a:rPr lang="ko-KR" altLang="en-US" sz="2000" dirty="0"/>
+              <a:t>병렬 처리 가능</a:t>
+            </a:r>
+            <a:r>
+              <a:rPr lang="en-US" altLang="ko-KR" sz="2000" dirty="0"/>
+              <a:t>: GPU </a:t>
+            </a:r>
+            <a:r>
+              <a:rPr lang="ko-KR" altLang="en-US" sz="2000" dirty="0"/>
+              <a:t>활용 효율성 극대화</a:t>
+            </a:r>
+            <a:r>
+              <a:rPr lang="en-US" altLang="ko-KR" sz="2000" dirty="0"/>
+              <a:t>.</a:t>
+            </a:r>
+          </a:p>
+          <a:p>
+            <a:pPr lvl="1">
+              <a:lnSpc>
+                <a:spcPct val="150000"/>
+              </a:lnSpc>
+            </a:pPr>
+            <a:r>
+              <a:rPr lang="ko-KR" altLang="en-US" sz="2000" dirty="0" err="1"/>
+              <a:t>확장성</a:t>
+            </a:r>
+            <a:r>
+              <a:rPr lang="en-US" altLang="ko-KR" sz="2000" dirty="0"/>
+              <a:t>: </a:t>
+            </a:r>
+            <a:r>
+              <a:rPr lang="ko-KR" altLang="en-US" sz="2000" dirty="0"/>
+              <a:t>매우 큰 모델로 확장 가능 </a:t>
+            </a:r>
+            <a:r>
+              <a:rPr lang="en-US" altLang="ko-KR" sz="2000" dirty="0"/>
+              <a:t>(BERT, GPT </a:t>
+            </a:r>
+            <a:r>
+              <a:rPr lang="ko-KR" altLang="en-US" sz="2000" dirty="0"/>
+              <a:t>등</a:t>
+            </a:r>
+            <a:r>
+              <a:rPr lang="en-US" altLang="ko-KR" sz="2000" dirty="0"/>
+              <a:t>).</a:t>
+            </a:r>
+          </a:p>
+          <a:p>
+            <a:pPr lvl="1">
+              <a:lnSpc>
+                <a:spcPct val="150000"/>
+              </a:lnSpc>
+            </a:pPr>
+            <a:r>
+              <a:rPr lang="ko-KR" altLang="en-US" sz="2000" dirty="0" err="1"/>
+              <a:t>범용성</a:t>
+            </a:r>
+            <a:r>
+              <a:rPr lang="en-US" altLang="ko-KR" sz="2000" dirty="0"/>
+              <a:t>: </a:t>
+            </a:r>
+            <a:r>
+              <a:rPr lang="ko-KR" altLang="en-US" sz="2000" dirty="0"/>
+              <a:t>언어뿐 아니라 이미지</a:t>
+            </a:r>
+            <a:r>
+              <a:rPr lang="en-US" altLang="ko-KR" sz="2000" dirty="0"/>
+              <a:t>, </a:t>
+            </a:r>
+            <a:r>
+              <a:rPr lang="ko-KR" altLang="en-US" sz="2000" dirty="0"/>
+              <a:t>음성 등 다양한 분야에 활용</a:t>
+            </a:r>
+            <a:r>
+              <a:rPr lang="en-US" altLang="ko-KR" sz="2000" dirty="0"/>
+              <a:t>.</a:t>
+            </a:r>
+          </a:p>
+        </p:txBody>
+      </p:sp>
+      <p:sp>
+        <p:nvSpPr>
+          <p:cNvPr id="4" name="날짜 개체 틀 3">
+            <a:extLst>
+              <a:ext uri="{FF2B5EF4-FFF2-40B4-BE49-F238E27FC236}">
+                <a16:creationId xmlns:a16="http://schemas.microsoft.com/office/drawing/2014/main" id="{B436F977-2F80-A369-4870-4CFEEDC26E7F}"/>
+              </a:ext>
+            </a:extLst>
+          </p:cNvPr>
+          <p:cNvSpPr>
+            <a:spLocks noGrp="1"/>
+          </p:cNvSpPr>
+          <p:nvPr>
+            <p:ph type="dt" sz="half" idx="10"/>
+          </p:nvPr>
+        </p:nvSpPr>
+        <p:spPr/>
+        <p:txBody>
+          <a:bodyPr/>
+          <a:lstStyle/>
+          <a:p>
+            <a:fld id="{0F78D9C4-20C1-4B15-A116-16DC77AD9A1E}" type="datetime1">
+              <a:rPr lang="ko-KR" altLang="en-US" smtClean="0"/>
+              <a:t>2026-02-20</a:t>
+            </a:fld>
+            <a:endParaRPr lang="ko-KR" altLang="en-US"/>
+          </a:p>
+        </p:txBody>
+      </p:sp>
+      <p:sp>
+        <p:nvSpPr>
+          <p:cNvPr id="5" name="슬라이드 번호 개체 틀 4">
+            <a:extLst>
+              <a:ext uri="{FF2B5EF4-FFF2-40B4-BE49-F238E27FC236}">
+                <a16:creationId xmlns:a16="http://schemas.microsoft.com/office/drawing/2014/main" id="{58AE5165-246F-D448-ADAB-3B880493009B}"/>
+              </a:ext>
+            </a:extLst>
+          </p:cNvPr>
+          <p:cNvSpPr>
+            <a:spLocks noGrp="1"/>
+          </p:cNvSpPr>
+          <p:nvPr>
+            <p:ph type="sldNum" sz="quarter" idx="12"/>
+          </p:nvPr>
+        </p:nvSpPr>
+        <p:spPr/>
+        <p:txBody>
+          <a:bodyPr/>
+          <a:lstStyle/>
+          <a:p>
+            <a:fld id="{083A2CE0-18CD-4102-B738-4ACFF9E68BA4}" type="slidenum">
+              <a:rPr lang="ko-KR" altLang="en-US" smtClean="0"/>
+              <a:t>14</a:t>
+            </a:fld>
+            <a:endParaRPr lang="ko-KR" altLang="en-US"/>
+          </a:p>
+        </p:txBody>
+      </p:sp>
+    </p:spTree>
+    <p:extLst>
+      <p:ext uri="{BB962C8B-B14F-4D97-AF65-F5344CB8AC3E}">
+        <p14:creationId xmlns:p14="http://schemas.microsoft.com/office/powerpoint/2010/main" val="40459043"/>
+      </p:ext>
+    </p:extLst>
+  </p:cSld>
+  <p:clrMapOvr>
+    <a:masterClrMapping/>
+  </p:clrMapOvr>
+</p:sld>
+</file>
+
+<file path=ppt/slides/slide15.xml><?xml version="1.0" encoding="utf-8"?>
+<p:sld xmlns:a="http://schemas.openxmlformats.org/drawingml/2006/main" xmlns:r="http://schemas.openxmlformats.org/officeDocument/2006/relationships" xmlns:p="http://schemas.openxmlformats.org/presentationml/2006/main">
+  <p:cSld>
+    <p:spTree>
+      <p:nvGrpSpPr>
+        <p:cNvPr id="1" name=""/>
+        <p:cNvGrpSpPr/>
+        <p:nvPr/>
+      </p:nvGrpSpPr>
+      <p:grpSpPr>
+        <a:xfrm>
+          <a:off x="0" y="0"/>
+          <a:ext cx="0" cy="0"/>
+          <a:chOff x="0" y="0"/>
+          <a:chExt cx="0" cy="0"/>
+        </a:xfrm>
+      </p:grpSpPr>
+      <p:sp>
+        <p:nvSpPr>
+          <p:cNvPr id="2" name="제목 1">
+            <a:extLst>
+              <a:ext uri="{FF2B5EF4-FFF2-40B4-BE49-F238E27FC236}">
+                <a16:creationId xmlns:a16="http://schemas.microsoft.com/office/drawing/2014/main" id="{BD4F02B3-117A-2CA2-63CD-815D13E47749}"/>
+              </a:ext>
+            </a:extLst>
+          </p:cNvPr>
+          <p:cNvSpPr>
+            <a:spLocks noGrp="1"/>
+          </p:cNvSpPr>
+          <p:nvPr>
+            <p:ph type="title"/>
+          </p:nvPr>
+        </p:nvSpPr>
+        <p:spPr/>
+        <p:txBody>
+          <a:bodyPr/>
+          <a:lstStyle/>
+          <a:p>
+            <a:r>
+              <a:rPr lang="ko-KR" altLang="en-US" dirty="0"/>
+              <a:t>모델</a:t>
+            </a:r>
+            <a:r>
+              <a:rPr lang="en-US" altLang="ko-KR" dirty="0"/>
+              <a:t> </a:t>
+            </a:r>
+            <a:r>
+              <a:rPr lang="ko-KR" altLang="en-US" dirty="0"/>
+              <a:t>발전 흐름 정리</a:t>
+            </a:r>
+          </a:p>
+        </p:txBody>
+      </p:sp>
+      <p:sp>
+        <p:nvSpPr>
+          <p:cNvPr id="3" name="내용 개체 틀 2">
+            <a:extLst>
+              <a:ext uri="{FF2B5EF4-FFF2-40B4-BE49-F238E27FC236}">
+                <a16:creationId xmlns:a16="http://schemas.microsoft.com/office/drawing/2014/main" id="{F8143530-248A-7C48-DD82-CAA0CAEABC3F}"/>
+              </a:ext>
+            </a:extLst>
+          </p:cNvPr>
+          <p:cNvSpPr>
+            <a:spLocks noGrp="1"/>
+          </p:cNvSpPr>
+          <p:nvPr>
+            <p:ph idx="1"/>
+          </p:nvPr>
+        </p:nvSpPr>
+        <p:spPr/>
+        <p:txBody>
+          <a:bodyPr/>
+          <a:lstStyle/>
+          <a:p>
+            <a:r>
+              <a:rPr lang="ko-KR" altLang="en-US" dirty="0"/>
+              <a:t>선형 모델</a:t>
+            </a:r>
+            <a:endParaRPr lang="en-US" altLang="ko-KR" dirty="0"/>
+          </a:p>
+          <a:p>
+            <a:pPr lvl="1">
+              <a:buFont typeface="Pretendard Light" panose="02000403000000020004" pitchFamily="50" charset="-127"/>
+              <a:buChar char="→"/>
+            </a:pPr>
+            <a:r>
+              <a:rPr lang="ko-KR" altLang="en-US" dirty="0"/>
+              <a:t>다층 구조 </a:t>
+            </a:r>
+            <a:r>
+              <a:rPr lang="en-US" altLang="ko-KR" dirty="0"/>
+              <a:t>(FNN)</a:t>
+            </a:r>
+          </a:p>
+          <a:p>
+            <a:pPr lvl="1">
+              <a:buFont typeface="Pretendard Light" panose="02000403000000020004" pitchFamily="50" charset="-127"/>
+              <a:buChar char="→"/>
+            </a:pPr>
+            <a:r>
+              <a:rPr lang="ko-KR" altLang="en-US" dirty="0"/>
+              <a:t>공간 구조 </a:t>
+            </a:r>
+            <a:r>
+              <a:rPr lang="en-US" altLang="ko-KR" dirty="0"/>
+              <a:t>(CNN)</a:t>
+            </a:r>
+          </a:p>
+          <a:p>
+            <a:pPr lvl="1">
+              <a:buFont typeface="Pretendard Light" panose="02000403000000020004" pitchFamily="50" charset="-127"/>
+              <a:buChar char="→"/>
+            </a:pPr>
+            <a:r>
+              <a:rPr lang="ko-KR" altLang="en-US" dirty="0"/>
+              <a:t>순차 구조 </a:t>
+            </a:r>
+            <a:r>
+              <a:rPr lang="en-US" altLang="ko-KR" dirty="0"/>
+              <a:t>(RNN)</a:t>
+            </a:r>
+          </a:p>
+          <a:p>
+            <a:pPr lvl="1">
+              <a:buFont typeface="Pretendard Light" panose="02000403000000020004" pitchFamily="50" charset="-127"/>
+              <a:buChar char="→"/>
+            </a:pPr>
+            <a:r>
+              <a:rPr lang="ko-KR" altLang="en-US" dirty="0"/>
+              <a:t>전역 관계 학습 </a:t>
+            </a:r>
+            <a:r>
+              <a:rPr lang="en-US" altLang="ko-KR" dirty="0"/>
+              <a:t>(Transformer)</a:t>
+            </a:r>
+          </a:p>
+          <a:p>
+            <a:pPr marL="0" indent="0">
+              <a:buNone/>
+            </a:pPr>
+            <a:endParaRPr lang="en-US" altLang="ko-KR" dirty="0"/>
+          </a:p>
+          <a:p>
+            <a:pPr marL="0" indent="0">
+              <a:buNone/>
+            </a:pPr>
+            <a:r>
+              <a:rPr lang="ko-KR" altLang="en-US" dirty="0"/>
+              <a:t>하나를 선택하거나 이미 학습된 모델을 활용하여 프로젝트 진행</a:t>
+            </a:r>
+            <a:r>
+              <a:rPr lang="en-US" altLang="ko-KR" dirty="0"/>
+              <a:t>!</a:t>
+            </a:r>
+          </a:p>
+        </p:txBody>
+      </p:sp>
+      <p:sp>
+        <p:nvSpPr>
+          <p:cNvPr id="4" name="날짜 개체 틀 3">
+            <a:extLst>
+              <a:ext uri="{FF2B5EF4-FFF2-40B4-BE49-F238E27FC236}">
+                <a16:creationId xmlns:a16="http://schemas.microsoft.com/office/drawing/2014/main" id="{247C512A-141B-DFCF-0765-9B0A4D27C07D}"/>
+              </a:ext>
+            </a:extLst>
+          </p:cNvPr>
+          <p:cNvSpPr>
+            <a:spLocks noGrp="1"/>
+          </p:cNvSpPr>
+          <p:nvPr>
+            <p:ph type="dt" sz="half" idx="10"/>
+          </p:nvPr>
+        </p:nvSpPr>
+        <p:spPr/>
+        <p:txBody>
+          <a:bodyPr/>
+          <a:lstStyle/>
+          <a:p>
+            <a:fld id="{0F78D9C4-20C1-4B15-A116-16DC77AD9A1E}" type="datetime1">
+              <a:rPr lang="ko-KR" altLang="en-US" smtClean="0"/>
+              <a:t>2026-02-20</a:t>
+            </a:fld>
+            <a:endParaRPr lang="ko-KR" altLang="en-US"/>
+          </a:p>
+        </p:txBody>
+      </p:sp>
+      <p:sp>
+        <p:nvSpPr>
+          <p:cNvPr id="5" name="슬라이드 번호 개체 틀 4">
+            <a:extLst>
+              <a:ext uri="{FF2B5EF4-FFF2-40B4-BE49-F238E27FC236}">
+                <a16:creationId xmlns:a16="http://schemas.microsoft.com/office/drawing/2014/main" id="{673687B8-4BC7-B39D-CD9B-CB35BE35BB4C}"/>
+              </a:ext>
+            </a:extLst>
+          </p:cNvPr>
+          <p:cNvSpPr>
+            <a:spLocks noGrp="1"/>
+          </p:cNvSpPr>
+          <p:nvPr>
+            <p:ph type="sldNum" sz="quarter" idx="12"/>
+          </p:nvPr>
+        </p:nvSpPr>
+        <p:spPr/>
+        <p:txBody>
+          <a:bodyPr/>
+          <a:lstStyle/>
+          <a:p>
+            <a:fld id="{083A2CE0-18CD-4102-B738-4ACFF9E68BA4}" type="slidenum">
+              <a:rPr lang="ko-KR" altLang="en-US" smtClean="0"/>
+              <a:t>15</a:t>
+            </a:fld>
+            <a:endParaRPr lang="ko-KR" altLang="en-US"/>
+          </a:p>
+        </p:txBody>
+      </p:sp>
+    </p:spTree>
+    <p:extLst>
+      <p:ext uri="{BB962C8B-B14F-4D97-AF65-F5344CB8AC3E}">
+        <p14:creationId xmlns:p14="http://schemas.microsoft.com/office/powerpoint/2010/main" val="1024899056"/>
+      </p:ext>
+    </p:extLst>
+  </p:cSld>
+  <p:clrMapOvr>
+    <a:masterClrMapping/>
+  </p:clrMapOvr>
+</p:sld>
+</file>
+
+<file path=ppt/slides/slide16.xml><?xml version="1.0" encoding="utf-8"?>
+<p:sld xmlns:a="http://schemas.openxmlformats.org/drawingml/2006/main" xmlns:r="http://schemas.openxmlformats.org/officeDocument/2006/relationships" xmlns:p="http://schemas.openxmlformats.org/presentationml/2006/main">
+  <p:cSld>
+    <p:spTree>
+      <p:nvGrpSpPr>
+        <p:cNvPr id="1" name=""/>
+        <p:cNvGrpSpPr/>
+        <p:nvPr/>
+      </p:nvGrpSpPr>
+      <p:grpSpPr>
+        <a:xfrm>
+          <a:off x="0" y="0"/>
+          <a:ext cx="0" cy="0"/>
+          <a:chOff x="0" y="0"/>
+          <a:chExt cx="0" cy="0"/>
+        </a:xfrm>
+      </p:grpSpPr>
+      <p:sp>
+        <p:nvSpPr>
+          <p:cNvPr id="2" name="제목 1">
+            <a:extLst>
+              <a:ext uri="{FF2B5EF4-FFF2-40B4-BE49-F238E27FC236}">
+                <a16:creationId xmlns:a16="http://schemas.microsoft.com/office/drawing/2014/main" id="{29017EEA-1700-68A7-6D01-92F3863263E2}"/>
+              </a:ext>
+            </a:extLst>
+          </p:cNvPr>
+          <p:cNvSpPr>
+            <a:spLocks noGrp="1"/>
+          </p:cNvSpPr>
+          <p:nvPr>
+            <p:ph type="title"/>
+          </p:nvPr>
+        </p:nvSpPr>
+        <p:spPr/>
+        <p:txBody>
+          <a:bodyPr>
+            <a:normAutofit/>
+          </a:bodyPr>
+          <a:lstStyle/>
+          <a:p>
+            <a:r>
+              <a:rPr lang="ko-KR" altLang="en-US" b="1" dirty="0"/>
+              <a:t>트랜스포머</a:t>
+            </a:r>
+            <a:r>
+              <a:rPr lang="en-US" altLang="ko-KR" b="1" dirty="0"/>
+              <a:t>(Transformer)</a:t>
+            </a:r>
+            <a:r>
+              <a:rPr lang="ko-KR" altLang="en-US" b="1" dirty="0"/>
+              <a:t> </a:t>
+            </a:r>
+          </a:p>
+        </p:txBody>
+      </p:sp>
+      <p:sp>
+        <p:nvSpPr>
+          <p:cNvPr id="3" name="내용 개체 틀 2">
+            <a:extLst>
+              <a:ext uri="{FF2B5EF4-FFF2-40B4-BE49-F238E27FC236}">
+                <a16:creationId xmlns:a16="http://schemas.microsoft.com/office/drawing/2014/main" id="{7427EE51-6539-C4E3-E901-BA804AE94D29}"/>
+              </a:ext>
+            </a:extLst>
+          </p:cNvPr>
+          <p:cNvSpPr>
+            <a:spLocks noGrp="1"/>
+          </p:cNvSpPr>
+          <p:nvPr>
+            <p:ph idx="1"/>
+          </p:nvPr>
+        </p:nvSpPr>
+        <p:spPr>
+          <a:xfrm>
+            <a:off x="238991" y="1145407"/>
+            <a:ext cx="11551534" cy="3095965"/>
+          </a:xfrm>
+        </p:spPr>
+        <p:txBody>
+          <a:bodyPr>
+            <a:noAutofit/>
+          </a:bodyPr>
+          <a:lstStyle/>
+          <a:p>
+            <a:pPr marL="0" indent="0">
+              <a:lnSpc>
+                <a:spcPct val="150000"/>
+              </a:lnSpc>
+              <a:buNone/>
+            </a:pPr>
+            <a:r>
+              <a:rPr lang="ko-KR" altLang="en-US" sz="2400" b="1" dirty="0"/>
+              <a:t>✅ 활용</a:t>
+            </a:r>
+          </a:p>
+          <a:p>
+            <a:pPr lvl="1">
+              <a:lnSpc>
+                <a:spcPct val="150000"/>
+              </a:lnSpc>
+            </a:pPr>
+            <a:r>
+              <a:rPr lang="ko-KR" altLang="en-US" sz="2000" dirty="0"/>
+              <a:t>자연어 처리</a:t>
+            </a:r>
+            <a:r>
+              <a:rPr lang="en-US" altLang="ko-KR" sz="2000" dirty="0"/>
+              <a:t>: </a:t>
+            </a:r>
+            <a:r>
+              <a:rPr lang="ko-KR" altLang="en-US" sz="2000" dirty="0"/>
+              <a:t>번역</a:t>
+            </a:r>
+            <a:r>
+              <a:rPr lang="en-US" altLang="ko-KR" sz="2000" dirty="0"/>
+              <a:t>, </a:t>
+            </a:r>
+            <a:r>
+              <a:rPr lang="ko-KR" altLang="en-US" sz="2000" dirty="0"/>
+              <a:t>요약</a:t>
+            </a:r>
+            <a:r>
+              <a:rPr lang="en-US" altLang="ko-KR" sz="2000" dirty="0"/>
+              <a:t>, </a:t>
+            </a:r>
+            <a:r>
+              <a:rPr lang="ko-KR" altLang="en-US" sz="2000" dirty="0"/>
+              <a:t>질문 응답 </a:t>
+            </a:r>
+            <a:r>
+              <a:rPr lang="en-US" altLang="ko-KR" sz="2000" dirty="0"/>
+              <a:t>(</a:t>
+            </a:r>
+            <a:r>
+              <a:rPr lang="ko-KR" altLang="en-US" sz="2000" dirty="0"/>
+              <a:t>예</a:t>
+            </a:r>
+            <a:r>
+              <a:rPr lang="en-US" altLang="ko-KR" sz="2000" dirty="0"/>
+              <a:t>: </a:t>
+            </a:r>
+            <a:r>
+              <a:rPr lang="en-US" altLang="ko-KR" sz="2000" dirty="0" err="1"/>
+              <a:t>ChatGPT</a:t>
+            </a:r>
+            <a:r>
+              <a:rPr lang="en-US" altLang="ko-KR" sz="2000" dirty="0"/>
+              <a:t>, BERT)</a:t>
+            </a:r>
+          </a:p>
+          <a:p>
+            <a:pPr lvl="1">
+              <a:lnSpc>
+                <a:spcPct val="150000"/>
+              </a:lnSpc>
+            </a:pPr>
+            <a:r>
+              <a:rPr lang="ko-KR" altLang="en-US" sz="2000" dirty="0"/>
+              <a:t>컴퓨터 비전</a:t>
+            </a:r>
+            <a:r>
+              <a:rPr lang="en-US" altLang="ko-KR" sz="2000" dirty="0"/>
+              <a:t>: </a:t>
+            </a:r>
+            <a:r>
+              <a:rPr lang="ko-KR" altLang="en-US" sz="2000" dirty="0"/>
+              <a:t>이미지 분류</a:t>
+            </a:r>
+            <a:r>
+              <a:rPr lang="en-US" altLang="ko-KR" sz="2000" dirty="0"/>
+              <a:t>, </a:t>
+            </a:r>
+            <a:r>
+              <a:rPr lang="ko-KR" altLang="en-US" sz="2000" dirty="0"/>
+              <a:t>생성 </a:t>
+            </a:r>
+            <a:r>
+              <a:rPr lang="en-US" altLang="ko-KR" sz="2000" dirty="0"/>
+              <a:t>(</a:t>
+            </a:r>
+            <a:r>
+              <a:rPr lang="ko-KR" altLang="en-US" sz="2000" dirty="0"/>
+              <a:t>예</a:t>
+            </a:r>
+            <a:r>
+              <a:rPr lang="en-US" altLang="ko-KR" sz="2000" dirty="0"/>
+              <a:t>: Vision Transformer, DALL-E)</a:t>
+            </a:r>
+          </a:p>
+          <a:p>
+            <a:pPr marL="457200" lvl="1" indent="0">
+              <a:lnSpc>
+                <a:spcPct val="150000"/>
+              </a:lnSpc>
+              <a:buNone/>
+            </a:pPr>
+            <a:r>
+              <a:rPr lang="ko-KR" altLang="en-US" sz="2000" b="1" dirty="0">
+                <a:solidFill>
+                  <a:srgbClr val="FF3399"/>
+                </a:solidFill>
+              </a:rPr>
+              <a:t>→ 표준으로 자리 잡음</a:t>
+            </a:r>
+            <a:endParaRPr lang="en-US" altLang="ko-KR" sz="2000" b="1" dirty="0">
+              <a:solidFill>
+                <a:srgbClr val="FF3399"/>
+              </a:solidFill>
+            </a:endParaRPr>
+          </a:p>
+        </p:txBody>
+      </p:sp>
+      <p:sp>
+        <p:nvSpPr>
+          <p:cNvPr id="4" name="날짜 개체 틀 3">
+            <a:extLst>
+              <a:ext uri="{FF2B5EF4-FFF2-40B4-BE49-F238E27FC236}">
+                <a16:creationId xmlns:a16="http://schemas.microsoft.com/office/drawing/2014/main" id="{B436F977-2F80-A369-4870-4CFEEDC26E7F}"/>
+              </a:ext>
+            </a:extLst>
+          </p:cNvPr>
+          <p:cNvSpPr>
+            <a:spLocks noGrp="1"/>
+          </p:cNvSpPr>
+          <p:nvPr>
+            <p:ph type="dt" sz="half" idx="10"/>
+          </p:nvPr>
+        </p:nvSpPr>
+        <p:spPr/>
+        <p:txBody>
+          <a:bodyPr/>
+          <a:lstStyle/>
+          <a:p>
+            <a:fld id="{0F78D9C4-20C1-4B15-A116-16DC77AD9A1E}" type="datetime1">
+              <a:rPr lang="ko-KR" altLang="en-US" smtClean="0"/>
+              <a:t>2026-02-20</a:t>
+            </a:fld>
+            <a:endParaRPr lang="ko-KR" altLang="en-US"/>
+          </a:p>
+        </p:txBody>
+      </p:sp>
+      <p:sp>
+        <p:nvSpPr>
+          <p:cNvPr id="5" name="슬라이드 번호 개체 틀 4">
+            <a:extLst>
+              <a:ext uri="{FF2B5EF4-FFF2-40B4-BE49-F238E27FC236}">
+                <a16:creationId xmlns:a16="http://schemas.microsoft.com/office/drawing/2014/main" id="{58AE5165-246F-D448-ADAB-3B880493009B}"/>
+              </a:ext>
+            </a:extLst>
+          </p:cNvPr>
+          <p:cNvSpPr>
+            <a:spLocks noGrp="1"/>
+          </p:cNvSpPr>
+          <p:nvPr>
+            <p:ph type="sldNum" sz="quarter" idx="12"/>
+          </p:nvPr>
+        </p:nvSpPr>
+        <p:spPr/>
+        <p:txBody>
+          <a:bodyPr/>
+          <a:lstStyle/>
+          <a:p>
+            <a:fld id="{083A2CE0-18CD-4102-B738-4ACFF9E68BA4}" type="slidenum">
+              <a:rPr lang="ko-KR" altLang="en-US" smtClean="0"/>
+              <a:t>16</a:t>
+            </a:fld>
+            <a:endParaRPr lang="ko-KR" altLang="en-US"/>
+          </a:p>
+        </p:txBody>
+      </p:sp>
+    </p:spTree>
+    <p:extLst>
+      <p:ext uri="{BB962C8B-B14F-4D97-AF65-F5344CB8AC3E}">
+        <p14:creationId xmlns:p14="http://schemas.microsoft.com/office/powerpoint/2010/main" val="1400025861"/>
+      </p:ext>
+    </p:extLst>
+  </p:cSld>
+  <p:clrMapOvr>
+    <a:masterClrMapping/>
+  </p:clrMapOvr>
+</p:sld>
+</file>
+
+<file path=ppt/slides/slide17.xml><?xml version="1.0" encoding="utf-8"?>
+<p:sld xmlns:a="http://schemas.openxmlformats.org/drawingml/2006/main" xmlns:r="http://schemas.openxmlformats.org/officeDocument/2006/relationships" xmlns:p="http://schemas.openxmlformats.org/presentationml/2006/main">
+  <p:cSld>
+    <p:bg>
+      <p:bgRef idx="1001">
+        <a:schemeClr val="bg1"/>
+      </p:bgRef>
+    </p:bg>
+    <p:spTree>
+      <p:nvGrpSpPr>
+        <p:cNvPr id="1" name="">
+          <a:extLst>
+            <a:ext uri="{FF2B5EF4-FFF2-40B4-BE49-F238E27FC236}">
+              <a16:creationId xmlns:a16="http://schemas.microsoft.com/office/drawing/2014/main" id="{B7171936-481C-71EB-7D96-6C9DFC6F979D}"/>
+            </a:ext>
+          </a:extLst>
+        </p:cNvPr>
+        <p:cNvGrpSpPr/>
+        <p:nvPr/>
+      </p:nvGrpSpPr>
+      <p:grpSpPr>
+        <a:xfrm>
+          <a:off x="0" y="0"/>
+          <a:ext cx="0" cy="0"/>
+          <a:chOff x="0" y="0"/>
+          <a:chExt cx="0" cy="0"/>
+        </a:xfrm>
+      </p:grpSpPr>
+      <p:sp>
+        <p:nvSpPr>
+          <p:cNvPr id="4" name="제목 1">
+            <a:extLst>
+              <a:ext uri="{FF2B5EF4-FFF2-40B4-BE49-F238E27FC236}">
+                <a16:creationId xmlns:a16="http://schemas.microsoft.com/office/drawing/2014/main" id="{100005ED-53E3-BFC8-AFAA-7BAFFA3752AB}"/>
+              </a:ext>
+            </a:extLst>
+          </p:cNvPr>
+          <p:cNvSpPr txBox="1">
+            <a:spLocks/>
+          </p:cNvSpPr>
+          <p:nvPr/>
+        </p:nvSpPr>
+        <p:spPr>
+          <a:xfrm>
+            <a:off x="1524000" y="2555530"/>
+            <a:ext cx="9144000" cy="1116107"/>
+          </a:xfrm>
+          <a:prstGeom prst="rect">
+            <a:avLst/>
+          </a:prstGeom>
+        </p:spPr>
+        <p:txBody>
+          <a:bodyPr vert="horz" lIns="91440" tIns="45720" rIns="91440" bIns="45720" rtlCol="0" anchor="b">
+            <a:normAutofit/>
+          </a:bodyPr>
+          <a:lstStyle>
+            <a:lvl1pPr algn="ctr" defTabSz="914400" rtl="0" eaLnBrk="1" latinLnBrk="1" hangingPunct="1">
+              <a:lnSpc>
+                <a:spcPct val="90000"/>
+              </a:lnSpc>
+              <a:spcBef>
+                <a:spcPct val="0"/>
+              </a:spcBef>
+              <a:buNone/>
+              <a:defRPr sz="6000" kern="1200">
+                <a:solidFill>
+                  <a:schemeClr val="tx1"/>
+                </a:solidFill>
+                <a:latin typeface="+mj-lt"/>
+                <a:ea typeface="+mj-ea"/>
+                <a:cs typeface="+mj-cs"/>
+              </a:defRPr>
+            </a:lvl1pPr>
+          </a:lstStyle>
+          <a:p>
+            <a:r>
+              <a:rPr lang="ko-KR" altLang="en-US" dirty="0">
+                <a:solidFill>
+                  <a:schemeClr val="accent2"/>
+                </a:solidFill>
+                <a:latin typeface="G마켓 산스 TTF Bold" panose="02000000000000000000" pitchFamily="2" charset="-127"/>
+                <a:ea typeface="G마켓 산스 TTF Bold" panose="02000000000000000000" pitchFamily="2" charset="-127"/>
+              </a:rPr>
+              <a:t>감사합니다</a:t>
+            </a:r>
+          </a:p>
+        </p:txBody>
+      </p:sp>
+    </p:spTree>
+    <p:extLst>
+      <p:ext uri="{BB962C8B-B14F-4D97-AF65-F5344CB8AC3E}">
+        <p14:creationId xmlns:p14="http://schemas.microsoft.com/office/powerpoint/2010/main" val="1364201993"/>
+      </p:ext>
+    </p:extLst>
+  </p:cSld>
+  <p:clrMapOvr>
+    <a:overrideClrMapping bg1="lt1" tx1="dk1" bg2="lt2" tx2="dk2" accent1="accent1" accent2="accent2" accent3="accent3" accent4="accent4" accent5="accent5" accent6="accent6" hlink="hlink" folHlink="folHlink"/>
+  </p:clrMapOvr>
+</p:sld>
+</file>
+
+<file path=ppt/slides/slide2.xml><?xml version="1.0" encoding="utf-8"?>
+<p:sld xmlns:a="http://schemas.openxmlformats.org/drawingml/2006/main" xmlns:r="http://schemas.openxmlformats.org/officeDocument/2006/relationships" xmlns:p="http://schemas.openxmlformats.org/presentationml/2006/main">
+  <p:cSld>
+    <p:spTree>
+      <p:nvGrpSpPr>
+        <p:cNvPr id="1" name=""/>
+        <p:cNvGrpSpPr/>
+        <p:nvPr/>
+      </p:nvGrpSpPr>
+      <p:grpSpPr>
+        <a:xfrm>
+          <a:off x="0" y="0"/>
+          <a:ext cx="0" cy="0"/>
+          <a:chOff x="0" y="0"/>
+          <a:chExt cx="0" cy="0"/>
+        </a:xfrm>
+      </p:grpSpPr>
+      <p:sp>
+        <p:nvSpPr>
+          <p:cNvPr id="4" name="날짜 개체 틀 3">
+            <a:extLst>
+              <a:ext uri="{FF2B5EF4-FFF2-40B4-BE49-F238E27FC236}">
+                <a16:creationId xmlns:a16="http://schemas.microsoft.com/office/drawing/2014/main" id="{8B49C4C8-3D15-C804-0CF3-ED01E5EAB7B3}"/>
+              </a:ext>
+            </a:extLst>
+          </p:cNvPr>
+          <p:cNvSpPr>
+            <a:spLocks noGrp="1"/>
+          </p:cNvSpPr>
+          <p:nvPr>
+            <p:ph type="dt" sz="half" idx="10"/>
+          </p:nvPr>
+        </p:nvSpPr>
+        <p:spPr/>
+        <p:txBody>
+          <a:bodyPr/>
+          <a:lstStyle/>
+          <a:p>
+            <a:fld id="{0F78D9C4-20C1-4B15-A116-16DC77AD9A1E}" type="datetime1">
+              <a:rPr lang="ko-KR" altLang="en-US" smtClean="0"/>
+              <a:t>2026-02-20</a:t>
+            </a:fld>
+            <a:endParaRPr lang="ko-KR" altLang="en-US"/>
+          </a:p>
+        </p:txBody>
+      </p:sp>
+      <p:sp>
+        <p:nvSpPr>
+          <p:cNvPr id="5" name="슬라이드 번호 개체 틀 4">
+            <a:extLst>
+              <a:ext uri="{FF2B5EF4-FFF2-40B4-BE49-F238E27FC236}">
+                <a16:creationId xmlns:a16="http://schemas.microsoft.com/office/drawing/2014/main" id="{BCB0D294-EE40-E43D-51E3-B9FE1EAF8A4F}"/>
+              </a:ext>
+            </a:extLst>
+          </p:cNvPr>
+          <p:cNvSpPr>
+            <a:spLocks noGrp="1"/>
+          </p:cNvSpPr>
+          <p:nvPr>
+            <p:ph type="sldNum" sz="quarter" idx="12"/>
+          </p:nvPr>
+        </p:nvSpPr>
+        <p:spPr/>
+        <p:txBody>
+          <a:bodyPr/>
+          <a:lstStyle/>
+          <a:p>
+            <a:fld id="{083A2CE0-18CD-4102-B738-4ACFF9E68BA4}" type="slidenum">
+              <a:rPr lang="ko-KR" altLang="en-US" smtClean="0"/>
+              <a:t>2</a:t>
+            </a:fld>
+            <a:endParaRPr lang="ko-KR" altLang="en-US"/>
+          </a:p>
+        </p:txBody>
+      </p:sp>
+      <p:sp>
+        <p:nvSpPr>
+          <p:cNvPr id="7" name="TextBox 6"/>
+          <p:cNvSpPr txBox="1"/>
+          <p:nvPr/>
+        </p:nvSpPr>
+        <p:spPr>
+          <a:xfrm>
+            <a:off x="3196807" y="2600493"/>
+            <a:ext cx="5798382" cy="1015663"/>
+          </a:xfrm>
+          <a:prstGeom prst="rect">
+            <a:avLst/>
+          </a:prstGeom>
+          <a:noFill/>
+        </p:spPr>
+        <p:txBody>
+          <a:bodyPr wrap="none" rtlCol="0">
+            <a:spAutoFit/>
+          </a:bodyPr>
+          <a:lstStyle/>
+          <a:p>
+            <a:pPr algn="ctr"/>
+            <a:r>
+              <a:rPr lang="ko-KR" altLang="en-US" sz="6000" dirty="0">
+                <a:solidFill>
+                  <a:schemeClr val="accent2"/>
+                </a:solidFill>
+                <a:latin typeface="G마켓 산스 TTF Bold" panose="02000000000000000000" pitchFamily="2" charset="-127"/>
+                <a:ea typeface="G마켓 산스 TTF Bold" panose="02000000000000000000" pitchFamily="2" charset="-127"/>
+              </a:rPr>
+              <a:t>딥러닝 </a:t>
+            </a:r>
+            <a:r>
+              <a:rPr lang="ko-KR" altLang="en-US" sz="6000">
+                <a:solidFill>
+                  <a:schemeClr val="accent2"/>
+                </a:solidFill>
+                <a:latin typeface="G마켓 산스 TTF Bold" panose="02000000000000000000" pitchFamily="2" charset="-127"/>
+                <a:ea typeface="G마켓 산스 TTF Bold" panose="02000000000000000000" pitchFamily="2" charset="-127"/>
+              </a:rPr>
+              <a:t>모델 개요</a:t>
+            </a:r>
+            <a:endParaRPr lang="en-US" altLang="ko-KR" sz="6000" dirty="0">
+              <a:solidFill>
+                <a:schemeClr val="accent2"/>
+              </a:solidFill>
+              <a:latin typeface="G마켓 산스 TTF Bold" panose="02000000000000000000" pitchFamily="2" charset="-127"/>
+              <a:ea typeface="G마켓 산스 TTF Bold" panose="02000000000000000000" pitchFamily="2" charset="-127"/>
+            </a:endParaRPr>
+          </a:p>
+        </p:txBody>
+      </p:sp>
+    </p:spTree>
+    <p:extLst>
+      <p:ext uri="{BB962C8B-B14F-4D97-AF65-F5344CB8AC3E}">
+        <p14:creationId xmlns:p14="http://schemas.microsoft.com/office/powerpoint/2010/main" val="946621385"/>
+      </p:ext>
+    </p:extLst>
+  </p:cSld>
+  <p:clrMapOvr>
+    <a:masterClrMapping/>
+  </p:clrMapOvr>
+</p:sld>
+</file>
+
+<file path=ppt/slides/slide3.xml><?xml version="1.0" encoding="utf-8"?>
+<p:sld xmlns:a="http://schemas.openxmlformats.org/drawingml/2006/main" xmlns:r="http://schemas.openxmlformats.org/officeDocument/2006/relationships" xmlns:p="http://schemas.openxmlformats.org/presentationml/2006/main">
+  <p:cSld>
+    <p:spTree>
+      <p:nvGrpSpPr>
+        <p:cNvPr id="1" name=""/>
+        <p:cNvGrpSpPr/>
+        <p:nvPr/>
+      </p:nvGrpSpPr>
+      <p:grpSpPr>
+        <a:xfrm>
+          <a:off x="0" y="0"/>
+          <a:ext cx="0" cy="0"/>
+          <a:chOff x="0" y="0"/>
+          <a:chExt cx="0" cy="0"/>
+        </a:xfrm>
+      </p:grpSpPr>
+      <p:sp>
+        <p:nvSpPr>
+          <p:cNvPr id="2" name="제목 1">
+            <a:extLst>
+              <a:ext uri="{FF2B5EF4-FFF2-40B4-BE49-F238E27FC236}">
+                <a16:creationId xmlns:a16="http://schemas.microsoft.com/office/drawing/2014/main" id="{E437D2CC-43C4-4426-25BF-F9C728F50607}"/>
+              </a:ext>
+            </a:extLst>
+          </p:cNvPr>
+          <p:cNvSpPr>
+            <a:spLocks noGrp="1"/>
+          </p:cNvSpPr>
+          <p:nvPr>
+            <p:ph type="title"/>
+          </p:nvPr>
+        </p:nvSpPr>
+        <p:spPr/>
+        <p:txBody>
+          <a:bodyPr/>
+          <a:lstStyle/>
+          <a:p>
+            <a:r>
+              <a:rPr lang="ko-KR" altLang="en-US" dirty="0"/>
+              <a:t>우리가 구현한 모델과 </a:t>
+            </a:r>
+            <a:r>
+              <a:rPr lang="ko-KR" altLang="en-US" dirty="0" err="1"/>
+              <a:t>딥러닝의</a:t>
+            </a:r>
+            <a:r>
+              <a:rPr lang="ko-KR" altLang="en-US" dirty="0"/>
+              <a:t> 관계</a:t>
+            </a:r>
+          </a:p>
+        </p:txBody>
+      </p:sp>
+      <p:sp>
+        <p:nvSpPr>
+          <p:cNvPr id="3" name="내용 개체 틀 2">
+            <a:extLst>
+              <a:ext uri="{FF2B5EF4-FFF2-40B4-BE49-F238E27FC236}">
+                <a16:creationId xmlns:a16="http://schemas.microsoft.com/office/drawing/2014/main" id="{35E4D3AA-115F-BA8A-8269-4067DBBC70CD}"/>
+              </a:ext>
+            </a:extLst>
+          </p:cNvPr>
+          <p:cNvSpPr>
+            <a:spLocks noGrp="1"/>
+          </p:cNvSpPr>
+          <p:nvPr>
+            <p:ph idx="1"/>
+          </p:nvPr>
+        </p:nvSpPr>
+        <p:spPr/>
+        <p:txBody>
+          <a:bodyPr/>
+          <a:lstStyle/>
+          <a:p>
+            <a:r>
+              <a:rPr lang="ko-KR" altLang="en-US" dirty="0"/>
+              <a:t>선형 회귀 </a:t>
+            </a:r>
+            <a:r>
+              <a:rPr lang="en-US" altLang="ko-KR" dirty="0"/>
+              <a:t>= </a:t>
+            </a:r>
+            <a:r>
+              <a:rPr lang="ko-KR" altLang="en-US" dirty="0"/>
+              <a:t>단일 뉴런 </a:t>
+            </a:r>
+            <a:r>
+              <a:rPr lang="en-US" altLang="ko-KR" dirty="0"/>
+              <a:t>(</a:t>
+            </a:r>
+            <a:r>
+              <a:rPr lang="ko-KR" altLang="en-US" dirty="0"/>
+              <a:t>입력 </a:t>
+            </a:r>
+            <a:r>
+              <a:rPr lang="en-US" altLang="ko-KR" dirty="0"/>
+              <a:t>-&gt; </a:t>
+            </a:r>
+            <a:r>
+              <a:rPr lang="ko-KR" altLang="en-US" dirty="0" err="1"/>
+              <a:t>가중합</a:t>
+            </a:r>
+            <a:r>
+              <a:rPr lang="ko-KR" altLang="en-US" dirty="0"/>
+              <a:t> </a:t>
+            </a:r>
+            <a:r>
+              <a:rPr lang="en-US" altLang="ko-KR" dirty="0"/>
+              <a:t>-&gt; </a:t>
+            </a:r>
+            <a:r>
+              <a:rPr lang="ko-KR" altLang="en-US" dirty="0"/>
+              <a:t>출력</a:t>
+            </a:r>
+            <a:r>
+              <a:rPr lang="en-US" altLang="ko-KR" dirty="0"/>
+              <a:t>)</a:t>
+            </a:r>
+          </a:p>
+          <a:p>
+            <a:r>
+              <a:rPr lang="ko-KR" altLang="en-US" dirty="0"/>
+              <a:t>로지스틱 회귀 </a:t>
+            </a:r>
+            <a:r>
+              <a:rPr lang="en-US" altLang="ko-KR" dirty="0"/>
+              <a:t>= </a:t>
+            </a:r>
+            <a:r>
+              <a:rPr lang="ko-KR" altLang="en-US" dirty="0"/>
+              <a:t>단일 뉴런 </a:t>
+            </a:r>
+            <a:r>
+              <a:rPr lang="en-US" altLang="ko-KR" dirty="0"/>
+              <a:t>+ </a:t>
+            </a:r>
+            <a:r>
+              <a:rPr lang="ko-KR" altLang="en-US" dirty="0"/>
+              <a:t>활성화 </a:t>
+            </a:r>
+            <a:r>
+              <a:rPr lang="en-US" altLang="ko-KR" dirty="0"/>
+              <a:t>(</a:t>
+            </a:r>
+            <a:r>
+              <a:rPr lang="ko-KR" altLang="en-US" dirty="0"/>
+              <a:t>입력 </a:t>
+            </a:r>
+            <a:r>
+              <a:rPr lang="en-US" altLang="ko-KR" dirty="0"/>
+              <a:t>-&gt; </a:t>
+            </a:r>
+            <a:r>
+              <a:rPr lang="ko-KR" altLang="en-US" dirty="0" err="1"/>
+              <a:t>가중합</a:t>
+            </a:r>
+            <a:r>
+              <a:rPr lang="ko-KR" altLang="en-US" dirty="0"/>
+              <a:t> </a:t>
+            </a:r>
+            <a:r>
+              <a:rPr lang="en-US" altLang="ko-KR" dirty="0"/>
+              <a:t>-&gt; </a:t>
+            </a:r>
+            <a:r>
+              <a:rPr lang="ko-KR" altLang="en-US" dirty="0" err="1"/>
+              <a:t>시그모이드</a:t>
+            </a:r>
+            <a:r>
+              <a:rPr lang="ko-KR" altLang="en-US" dirty="0"/>
+              <a:t> </a:t>
+            </a:r>
+            <a:r>
+              <a:rPr lang="en-US" altLang="ko-KR" dirty="0"/>
+              <a:t>-&gt; </a:t>
+            </a:r>
+            <a:r>
+              <a:rPr lang="ko-KR" altLang="en-US" dirty="0"/>
+              <a:t>출력</a:t>
+            </a:r>
+            <a:r>
+              <a:rPr lang="en-US" altLang="ko-KR" dirty="0"/>
+              <a:t>)</a:t>
+            </a:r>
+          </a:p>
+          <a:p>
+            <a:r>
+              <a:rPr lang="ko-KR" altLang="en-US" dirty="0"/>
+              <a:t>단층 신경망을 구현한 것</a:t>
+            </a:r>
+          </a:p>
+        </p:txBody>
+      </p:sp>
+      <p:sp>
+        <p:nvSpPr>
+          <p:cNvPr id="4" name="날짜 개체 틀 3">
+            <a:extLst>
+              <a:ext uri="{FF2B5EF4-FFF2-40B4-BE49-F238E27FC236}">
+                <a16:creationId xmlns:a16="http://schemas.microsoft.com/office/drawing/2014/main" id="{F936610C-6ED6-C3DB-CC25-4EAABF7ED1FA}"/>
+              </a:ext>
+            </a:extLst>
+          </p:cNvPr>
+          <p:cNvSpPr>
+            <a:spLocks noGrp="1"/>
+          </p:cNvSpPr>
+          <p:nvPr>
+            <p:ph type="dt" sz="half" idx="10"/>
+          </p:nvPr>
+        </p:nvSpPr>
+        <p:spPr/>
+        <p:txBody>
+          <a:bodyPr/>
+          <a:lstStyle/>
+          <a:p>
+            <a:fld id="{0F78D9C4-20C1-4B15-A116-16DC77AD9A1E}" type="datetime1">
+              <a:rPr lang="ko-KR" altLang="en-US" smtClean="0"/>
+              <a:t>2026-02-20</a:t>
+            </a:fld>
+            <a:endParaRPr lang="ko-KR" altLang="en-US"/>
+          </a:p>
+        </p:txBody>
+      </p:sp>
+      <p:sp>
+        <p:nvSpPr>
+          <p:cNvPr id="5" name="슬라이드 번호 개체 틀 4">
+            <a:extLst>
+              <a:ext uri="{FF2B5EF4-FFF2-40B4-BE49-F238E27FC236}">
+                <a16:creationId xmlns:a16="http://schemas.microsoft.com/office/drawing/2014/main" id="{D825E44F-A27E-B4C4-C406-76E6E0D2116A}"/>
+              </a:ext>
+            </a:extLst>
+          </p:cNvPr>
+          <p:cNvSpPr>
+            <a:spLocks noGrp="1"/>
+          </p:cNvSpPr>
+          <p:nvPr>
+            <p:ph type="sldNum" sz="quarter" idx="12"/>
+          </p:nvPr>
+        </p:nvSpPr>
+        <p:spPr/>
+        <p:txBody>
+          <a:bodyPr/>
+          <a:lstStyle/>
+          <a:p>
+            <a:fld id="{083A2CE0-18CD-4102-B738-4ACFF9E68BA4}" type="slidenum">
+              <a:rPr lang="ko-KR" altLang="en-US" smtClean="0"/>
+              <a:t>3</a:t>
+            </a:fld>
+            <a:endParaRPr lang="ko-KR" altLang="en-US"/>
+          </a:p>
+        </p:txBody>
+      </p:sp>
+    </p:spTree>
+    <p:extLst>
+      <p:ext uri="{BB962C8B-B14F-4D97-AF65-F5344CB8AC3E}">
+        <p14:creationId xmlns:p14="http://schemas.microsoft.com/office/powerpoint/2010/main" val="2965957656"/>
+      </p:ext>
+    </p:extLst>
+  </p:cSld>
+  <p:clrMapOvr>
+    <a:masterClrMapping/>
+  </p:clrMapOvr>
+</p:sld>
+</file>
+
+<file path=ppt/slides/slide4.xml><?xml version="1.0" encoding="utf-8"?>
+<p:sld xmlns:a="http://schemas.openxmlformats.org/drawingml/2006/main" xmlns:r="http://schemas.openxmlformats.org/officeDocument/2006/relationships" xmlns:p="http://schemas.openxmlformats.org/presentationml/2006/main">
+  <p:cSld>
+    <p:spTree>
+      <p:nvGrpSpPr>
+        <p:cNvPr id="1" name=""/>
+        <p:cNvGrpSpPr/>
+        <p:nvPr/>
+      </p:nvGrpSpPr>
+      <p:grpSpPr>
+        <a:xfrm>
+          <a:off x="0" y="0"/>
+          <a:ext cx="0" cy="0"/>
+          <a:chOff x="0" y="0"/>
+          <a:chExt cx="0" cy="0"/>
+        </a:xfrm>
+      </p:grpSpPr>
+      <p:sp>
+        <p:nvSpPr>
+          <p:cNvPr id="2" name="제목 1">
+            <a:extLst>
+              <a:ext uri="{FF2B5EF4-FFF2-40B4-BE49-F238E27FC236}">
+                <a16:creationId xmlns:a16="http://schemas.microsoft.com/office/drawing/2014/main" id="{81A165FA-6F56-C3C7-2403-F9E289E5BAED}"/>
+              </a:ext>
+            </a:extLst>
+          </p:cNvPr>
+          <p:cNvSpPr>
+            <a:spLocks noGrp="1"/>
+          </p:cNvSpPr>
+          <p:nvPr>
+            <p:ph type="title"/>
+          </p:nvPr>
+        </p:nvSpPr>
+        <p:spPr/>
+        <p:txBody>
+          <a:bodyPr/>
+          <a:lstStyle/>
+          <a:p>
+            <a:r>
+              <a:rPr lang="ko-KR" altLang="en-US" b="1" dirty="0"/>
+              <a:t>딥러닝 모델</a:t>
+            </a:r>
+          </a:p>
+        </p:txBody>
+      </p:sp>
+      <p:sp>
+        <p:nvSpPr>
+          <p:cNvPr id="3" name="내용 개체 틀 2">
+            <a:extLst>
+              <a:ext uri="{FF2B5EF4-FFF2-40B4-BE49-F238E27FC236}">
+                <a16:creationId xmlns:a16="http://schemas.microsoft.com/office/drawing/2014/main" id="{17FB50BB-423A-97AC-3219-7C6490CC5243}"/>
+              </a:ext>
+            </a:extLst>
+          </p:cNvPr>
+          <p:cNvSpPr>
+            <a:spLocks noGrp="1"/>
+          </p:cNvSpPr>
+          <p:nvPr>
+            <p:ph idx="1"/>
+          </p:nvPr>
+        </p:nvSpPr>
+        <p:spPr>
+          <a:xfrm>
+            <a:off x="238991" y="1145407"/>
+            <a:ext cx="10515600" cy="4864222"/>
+          </a:xfrm>
+        </p:spPr>
+        <p:txBody>
+          <a:bodyPr>
+            <a:noAutofit/>
+          </a:bodyPr>
+          <a:lstStyle/>
+          <a:p>
+            <a:pPr marL="0" indent="0">
+              <a:lnSpc>
+                <a:spcPct val="150000"/>
+              </a:lnSpc>
+              <a:buNone/>
+            </a:pPr>
+            <a:r>
+              <a:rPr lang="ko-KR" altLang="en-US" dirty="0"/>
+              <a:t>✅ 주요 특징</a:t>
+            </a:r>
+            <a:endParaRPr lang="en-US" altLang="ko-KR" dirty="0"/>
+          </a:p>
+          <a:p>
+            <a:pPr marL="914400" lvl="1" indent="-457200">
+              <a:lnSpc>
+                <a:spcPct val="150000"/>
+              </a:lnSpc>
+              <a:buFont typeface="+mj-lt"/>
+              <a:buAutoNum type="arabicPeriod"/>
+            </a:pPr>
+            <a:r>
+              <a:rPr lang="ko-KR" altLang="en-US" b="1" dirty="0"/>
+              <a:t>계층적인 구조</a:t>
+            </a:r>
+            <a:endParaRPr lang="en-US" altLang="ko-KR" b="1" dirty="0"/>
+          </a:p>
+          <a:p>
+            <a:pPr lvl="2">
+              <a:lnSpc>
+                <a:spcPct val="150000"/>
+              </a:lnSpc>
+            </a:pPr>
+            <a:r>
+              <a:rPr lang="ko-KR" altLang="en-US" dirty="0"/>
+              <a:t>여러 개의 은닉층으로 구성되어 있음</a:t>
+            </a:r>
+            <a:r>
+              <a:rPr lang="en-US" altLang="ko-KR" dirty="0"/>
+              <a:t>. </a:t>
+            </a:r>
+          </a:p>
+          <a:p>
+            <a:pPr lvl="2">
+              <a:lnSpc>
+                <a:spcPct val="150000"/>
+              </a:lnSpc>
+            </a:pPr>
+            <a:r>
+              <a:rPr lang="ko-KR" altLang="en-US" dirty="0"/>
+              <a:t>각 은닉층은 이전 층의 출력을 입력으로 받아 새로운 특징을 학습</a:t>
+            </a:r>
+            <a:r>
+              <a:rPr lang="en-US" altLang="ko-KR" dirty="0"/>
+              <a:t>. </a:t>
+            </a:r>
+          </a:p>
+          <a:p>
+            <a:pPr lvl="2">
+              <a:lnSpc>
+                <a:spcPct val="150000"/>
+              </a:lnSpc>
+            </a:pPr>
+            <a:r>
+              <a:rPr lang="ko-KR" altLang="en-US" dirty="0"/>
+              <a:t>계층적인 구조를 통해서 복잡한 패턴과 추상적인 특징 학습</a:t>
+            </a:r>
+            <a:endParaRPr lang="en-US" altLang="ko-KR" dirty="0"/>
+          </a:p>
+          <a:p>
+            <a:pPr marL="914400" lvl="1" indent="-457200">
+              <a:lnSpc>
+                <a:spcPct val="150000"/>
+              </a:lnSpc>
+              <a:buFont typeface="+mj-lt"/>
+              <a:buAutoNum type="arabicPeriod"/>
+            </a:pPr>
+            <a:r>
+              <a:rPr lang="ko-KR" altLang="en-US" b="1" dirty="0" err="1"/>
+              <a:t>역전파</a:t>
+            </a:r>
+            <a:r>
+              <a:rPr lang="ko-KR" altLang="en-US" b="1" dirty="0"/>
+              <a:t> 알고리즘</a:t>
+            </a:r>
+            <a:endParaRPr lang="en-US" altLang="ko-KR" b="1" dirty="0"/>
+          </a:p>
+          <a:p>
+            <a:pPr lvl="2">
+              <a:lnSpc>
+                <a:spcPct val="150000"/>
+              </a:lnSpc>
+            </a:pPr>
+            <a:r>
+              <a:rPr lang="ko-KR" altLang="en-US" dirty="0" err="1"/>
+              <a:t>역전파</a:t>
+            </a:r>
+            <a:r>
+              <a:rPr lang="ko-KR" altLang="en-US" dirty="0"/>
+              <a:t> 알고리즘을 사용하여 모델의 가중치와 편향을 조정</a:t>
+            </a:r>
+            <a:endParaRPr lang="en-US" altLang="ko-KR" dirty="0"/>
+          </a:p>
+          <a:p>
+            <a:pPr lvl="2">
+              <a:lnSpc>
+                <a:spcPct val="150000"/>
+              </a:lnSpc>
+            </a:pPr>
+            <a:r>
+              <a:rPr lang="ko-KR" altLang="en-US" dirty="0"/>
+              <a:t>출력과 실제 값 사이의 오차를 역으로 전파하여 각층의 가중치를 업데이트하고</a:t>
+            </a:r>
+            <a:r>
+              <a:rPr lang="en-US" altLang="ko-KR" dirty="0"/>
+              <a:t>, </a:t>
+            </a:r>
+            <a:r>
+              <a:rPr lang="ko-KR" altLang="en-US" dirty="0"/>
+              <a:t>이를 반복하여 모델을 학습시킴</a:t>
+            </a:r>
+          </a:p>
+        </p:txBody>
+      </p:sp>
+      <p:sp>
+        <p:nvSpPr>
+          <p:cNvPr id="4" name="날짜 개체 틀 3">
+            <a:extLst>
+              <a:ext uri="{FF2B5EF4-FFF2-40B4-BE49-F238E27FC236}">
+                <a16:creationId xmlns:a16="http://schemas.microsoft.com/office/drawing/2014/main" id="{D09192D6-A651-FA85-BC2D-858B45C9E4DB}"/>
+              </a:ext>
+            </a:extLst>
+          </p:cNvPr>
+          <p:cNvSpPr>
+            <a:spLocks noGrp="1"/>
+          </p:cNvSpPr>
+          <p:nvPr>
+            <p:ph type="dt" sz="half" idx="10"/>
+          </p:nvPr>
+        </p:nvSpPr>
+        <p:spPr/>
+        <p:txBody>
+          <a:bodyPr/>
+          <a:lstStyle/>
+          <a:p>
+            <a:fld id="{0F78D9C4-20C1-4B15-A116-16DC77AD9A1E}" type="datetime1">
+              <a:rPr lang="ko-KR" altLang="en-US" smtClean="0"/>
+              <a:t>2026-02-20</a:t>
+            </a:fld>
+            <a:endParaRPr lang="ko-KR" altLang="en-US"/>
+          </a:p>
+        </p:txBody>
+      </p:sp>
+      <p:sp>
+        <p:nvSpPr>
+          <p:cNvPr id="5" name="슬라이드 번호 개체 틀 4">
+            <a:extLst>
+              <a:ext uri="{FF2B5EF4-FFF2-40B4-BE49-F238E27FC236}">
+                <a16:creationId xmlns:a16="http://schemas.microsoft.com/office/drawing/2014/main" id="{69FA0FF6-92A7-7D16-CDB4-84A3FBC03A4E}"/>
+              </a:ext>
+            </a:extLst>
+          </p:cNvPr>
+          <p:cNvSpPr>
+            <a:spLocks noGrp="1"/>
+          </p:cNvSpPr>
+          <p:nvPr>
+            <p:ph type="sldNum" sz="quarter" idx="12"/>
+          </p:nvPr>
+        </p:nvSpPr>
+        <p:spPr/>
+        <p:txBody>
+          <a:bodyPr/>
+          <a:lstStyle/>
+          <a:p>
+            <a:fld id="{083A2CE0-18CD-4102-B738-4ACFF9E68BA4}" type="slidenum">
+              <a:rPr lang="ko-KR" altLang="en-US" smtClean="0"/>
+              <a:t>4</a:t>
+            </a:fld>
+            <a:endParaRPr lang="ko-KR" altLang="en-US"/>
+          </a:p>
+        </p:txBody>
+      </p:sp>
+    </p:spTree>
+    <p:extLst>
+      <p:ext uri="{BB962C8B-B14F-4D97-AF65-F5344CB8AC3E}">
+        <p14:creationId xmlns:p14="http://schemas.microsoft.com/office/powerpoint/2010/main" val="566233348"/>
+      </p:ext>
+    </p:extLst>
+  </p:cSld>
+  <p:clrMapOvr>
+    <a:masterClrMapping/>
+  </p:clrMapOvr>
+</p:sld>
+</file>
+
+<file path=ppt/slides/slide5.xml><?xml version="1.0" encoding="utf-8"?>
+<p:sld xmlns:a="http://schemas.openxmlformats.org/drawingml/2006/main" xmlns:r="http://schemas.openxmlformats.org/officeDocument/2006/relationships" xmlns:p="http://schemas.openxmlformats.org/presentationml/2006/main">
+  <p:cSld>
+    <p:spTree>
+      <p:nvGrpSpPr>
+        <p:cNvPr id="1" name=""/>
+        <p:cNvGrpSpPr/>
+        <p:nvPr/>
+      </p:nvGrpSpPr>
+      <p:grpSpPr>
+        <a:xfrm>
+          <a:off x="0" y="0"/>
+          <a:ext cx="0" cy="0"/>
+          <a:chOff x="0" y="0"/>
+          <a:chExt cx="0" cy="0"/>
+        </a:xfrm>
+      </p:grpSpPr>
+      <p:sp>
+        <p:nvSpPr>
+          <p:cNvPr id="2" name="제목 1">
+            <a:extLst>
+              <a:ext uri="{FF2B5EF4-FFF2-40B4-BE49-F238E27FC236}">
+                <a16:creationId xmlns:a16="http://schemas.microsoft.com/office/drawing/2014/main" id="{81A165FA-6F56-C3C7-2403-F9E289E5BAED}"/>
+              </a:ext>
+            </a:extLst>
+          </p:cNvPr>
+          <p:cNvSpPr>
+            <a:spLocks noGrp="1"/>
+          </p:cNvSpPr>
+          <p:nvPr>
+            <p:ph type="title"/>
+          </p:nvPr>
+        </p:nvSpPr>
+        <p:spPr/>
+        <p:txBody>
+          <a:bodyPr/>
+          <a:lstStyle/>
+          <a:p>
+            <a:r>
+              <a:rPr lang="ko-KR" altLang="en-US" b="1" dirty="0"/>
+              <a:t>딥러닝 모델</a:t>
+            </a:r>
+          </a:p>
+        </p:txBody>
+      </p:sp>
+      <p:sp>
+        <p:nvSpPr>
+          <p:cNvPr id="3" name="내용 개체 틀 2">
+            <a:extLst>
+              <a:ext uri="{FF2B5EF4-FFF2-40B4-BE49-F238E27FC236}">
+                <a16:creationId xmlns:a16="http://schemas.microsoft.com/office/drawing/2014/main" id="{17FB50BB-423A-97AC-3219-7C6490CC5243}"/>
+              </a:ext>
+            </a:extLst>
+          </p:cNvPr>
+          <p:cNvSpPr>
+            <a:spLocks noGrp="1"/>
+          </p:cNvSpPr>
+          <p:nvPr>
+            <p:ph idx="1"/>
+          </p:nvPr>
+        </p:nvSpPr>
+        <p:spPr>
+          <a:xfrm>
+            <a:off x="238991" y="1145407"/>
+            <a:ext cx="11701221" cy="4665797"/>
+          </a:xfrm>
+        </p:spPr>
+        <p:txBody>
+          <a:bodyPr>
+            <a:normAutofit/>
+          </a:bodyPr>
+          <a:lstStyle/>
+          <a:p>
+            <a:pPr marL="0" indent="0">
+              <a:lnSpc>
+                <a:spcPct val="150000"/>
+              </a:lnSpc>
+              <a:buNone/>
+            </a:pPr>
+            <a:r>
+              <a:rPr lang="ko-KR" altLang="en-US" dirty="0"/>
+              <a:t>✅ 주요 특징</a:t>
+            </a:r>
+            <a:endParaRPr lang="en-US" altLang="ko-KR" dirty="0"/>
+          </a:p>
+          <a:p>
+            <a:pPr marL="914400" lvl="1" indent="-457200">
+              <a:lnSpc>
+                <a:spcPct val="150000"/>
+              </a:lnSpc>
+              <a:buFont typeface="+mj-lt"/>
+              <a:buAutoNum type="arabicPeriod" startAt="3"/>
+            </a:pPr>
+            <a:r>
+              <a:rPr lang="ko-KR" altLang="en-US" b="1" dirty="0"/>
+              <a:t>대량의 데이터와 연산</a:t>
+            </a:r>
+            <a:endParaRPr lang="en-US" altLang="ko-KR" b="1" dirty="0"/>
+          </a:p>
+          <a:p>
+            <a:pPr lvl="2">
+              <a:lnSpc>
+                <a:spcPct val="150000"/>
+              </a:lnSpc>
+            </a:pPr>
+            <a:r>
+              <a:rPr lang="ko-KR" altLang="en-US" dirty="0"/>
+              <a:t>대량의 데이터와 많은 연산이 필요</a:t>
+            </a:r>
+            <a:endParaRPr lang="en-US" altLang="ko-KR" dirty="0"/>
+          </a:p>
+          <a:p>
+            <a:pPr marL="914400" lvl="1" indent="-457200">
+              <a:lnSpc>
+                <a:spcPct val="150000"/>
+              </a:lnSpc>
+              <a:buFont typeface="+mj-lt"/>
+              <a:buAutoNum type="arabicPeriod" startAt="3"/>
+            </a:pPr>
+            <a:r>
+              <a:rPr lang="ko-KR" altLang="en-US" b="1" dirty="0"/>
+              <a:t>종단간 학습</a:t>
+            </a:r>
+            <a:endParaRPr lang="en-US" altLang="ko-KR" b="1" dirty="0"/>
+          </a:p>
+          <a:p>
+            <a:pPr lvl="2">
+              <a:lnSpc>
+                <a:spcPct val="150000"/>
+              </a:lnSpc>
+            </a:pPr>
+            <a:r>
+              <a:rPr lang="ko-KR" altLang="en-US" dirty="0"/>
+              <a:t>입력데이터와 출력 데이터만을 사용하여 모델을 학습시킬 수 있음</a:t>
+            </a:r>
+            <a:r>
+              <a:rPr lang="en-US" altLang="ko-KR" dirty="0"/>
+              <a:t>(end-to-end)</a:t>
+            </a:r>
+          </a:p>
+          <a:p>
+            <a:pPr marL="914400" lvl="2" indent="0">
+              <a:lnSpc>
+                <a:spcPct val="150000"/>
+              </a:lnSpc>
+              <a:buNone/>
+            </a:pPr>
+            <a:endParaRPr lang="ko-KR" altLang="en-US" dirty="0"/>
+          </a:p>
+        </p:txBody>
+      </p:sp>
+      <p:sp>
+        <p:nvSpPr>
+          <p:cNvPr id="4" name="날짜 개체 틀 3">
+            <a:extLst>
+              <a:ext uri="{FF2B5EF4-FFF2-40B4-BE49-F238E27FC236}">
+                <a16:creationId xmlns:a16="http://schemas.microsoft.com/office/drawing/2014/main" id="{D09192D6-A651-FA85-BC2D-858B45C9E4DB}"/>
+              </a:ext>
+            </a:extLst>
+          </p:cNvPr>
+          <p:cNvSpPr>
+            <a:spLocks noGrp="1"/>
+          </p:cNvSpPr>
+          <p:nvPr>
+            <p:ph type="dt" sz="half" idx="10"/>
+          </p:nvPr>
+        </p:nvSpPr>
+        <p:spPr/>
+        <p:txBody>
+          <a:bodyPr/>
+          <a:lstStyle/>
+          <a:p>
+            <a:fld id="{0F78D9C4-20C1-4B15-A116-16DC77AD9A1E}" type="datetime1">
+              <a:rPr lang="ko-KR" altLang="en-US" smtClean="0"/>
+              <a:t>2026-02-20</a:t>
+            </a:fld>
+            <a:endParaRPr lang="ko-KR" altLang="en-US"/>
+          </a:p>
+        </p:txBody>
+      </p:sp>
+      <p:sp>
+        <p:nvSpPr>
+          <p:cNvPr id="5" name="슬라이드 번호 개체 틀 4">
+            <a:extLst>
+              <a:ext uri="{FF2B5EF4-FFF2-40B4-BE49-F238E27FC236}">
+                <a16:creationId xmlns:a16="http://schemas.microsoft.com/office/drawing/2014/main" id="{69FA0FF6-92A7-7D16-CDB4-84A3FBC03A4E}"/>
+              </a:ext>
+            </a:extLst>
+          </p:cNvPr>
+          <p:cNvSpPr>
+            <a:spLocks noGrp="1"/>
+          </p:cNvSpPr>
+          <p:nvPr>
+            <p:ph type="sldNum" sz="quarter" idx="12"/>
+          </p:nvPr>
+        </p:nvSpPr>
+        <p:spPr/>
+        <p:txBody>
+          <a:bodyPr/>
+          <a:lstStyle/>
+          <a:p>
+            <a:fld id="{083A2CE0-18CD-4102-B738-4ACFF9E68BA4}" type="slidenum">
+              <a:rPr lang="ko-KR" altLang="en-US" smtClean="0"/>
+              <a:t>5</a:t>
+            </a:fld>
+            <a:endParaRPr lang="ko-KR" altLang="en-US"/>
+          </a:p>
+        </p:txBody>
+      </p:sp>
+    </p:spTree>
+    <p:extLst>
+      <p:ext uri="{BB962C8B-B14F-4D97-AF65-F5344CB8AC3E}">
+        <p14:creationId xmlns:p14="http://schemas.microsoft.com/office/powerpoint/2010/main" val="2125734418"/>
+      </p:ext>
+    </p:extLst>
+  </p:cSld>
+  <p:clrMapOvr>
+    <a:masterClrMapping/>
+  </p:clrMapOvr>
+</p:sld>
+</file>
+
+<file path=ppt/slides/slide6.xml><?xml version="1.0" encoding="utf-8"?>
+<p:sld xmlns:a="http://schemas.openxmlformats.org/drawingml/2006/main" xmlns:r="http://schemas.openxmlformats.org/officeDocument/2006/relationships" xmlns:p="http://schemas.openxmlformats.org/presentationml/2006/main">
+  <p:cSld>
+    <p:spTree>
+      <p:nvGrpSpPr>
+        <p:cNvPr id="1" name=""/>
+        <p:cNvGrpSpPr/>
+        <p:nvPr/>
+      </p:nvGrpSpPr>
+      <p:grpSpPr>
+        <a:xfrm>
+          <a:off x="0" y="0"/>
+          <a:ext cx="0" cy="0"/>
+          <a:chOff x="0" y="0"/>
+          <a:chExt cx="0" cy="0"/>
+        </a:xfrm>
+      </p:grpSpPr>
+      <p:sp>
+        <p:nvSpPr>
+          <p:cNvPr id="2" name="제목 1">
+            <a:extLst>
+              <a:ext uri="{FF2B5EF4-FFF2-40B4-BE49-F238E27FC236}">
+                <a16:creationId xmlns:a16="http://schemas.microsoft.com/office/drawing/2014/main" id="{F3FB394F-46E9-11B0-D9BF-D8094C4D9464}"/>
+              </a:ext>
+            </a:extLst>
+          </p:cNvPr>
+          <p:cNvSpPr>
+            <a:spLocks noGrp="1"/>
+          </p:cNvSpPr>
+          <p:nvPr>
+            <p:ph type="title"/>
+          </p:nvPr>
+        </p:nvSpPr>
+        <p:spPr/>
+        <p:txBody>
+          <a:bodyPr>
+            <a:normAutofit/>
+          </a:bodyPr>
+          <a:lstStyle/>
+          <a:p>
+            <a:r>
+              <a:rPr lang="en-US" altLang="ko-KR" b="1" dirty="0"/>
+              <a:t>FNN</a:t>
+            </a:r>
+            <a:r>
+              <a:rPr lang="en-US" altLang="ko-KR" sz="4000" b="1" dirty="0"/>
+              <a:t>(</a:t>
+            </a:r>
+            <a:r>
+              <a:rPr lang="en-US" altLang="ko-KR" sz="4000" b="1" dirty="0" err="1"/>
+              <a:t>Feedforward</a:t>
+            </a:r>
+            <a:r>
+              <a:rPr lang="en-US" altLang="ko-KR" sz="4000" b="1" dirty="0"/>
+              <a:t> Neural Network)</a:t>
+            </a:r>
+            <a:endParaRPr lang="ko-KR" altLang="en-US" b="1" dirty="0"/>
+          </a:p>
+        </p:txBody>
+      </p:sp>
+      <p:sp>
+        <p:nvSpPr>
+          <p:cNvPr id="3" name="내용 개체 틀 2">
+            <a:extLst>
+              <a:ext uri="{FF2B5EF4-FFF2-40B4-BE49-F238E27FC236}">
+                <a16:creationId xmlns:a16="http://schemas.microsoft.com/office/drawing/2014/main" id="{DC3820EF-58B1-1360-C320-373184ED8CFC}"/>
+              </a:ext>
+            </a:extLst>
+          </p:cNvPr>
+          <p:cNvSpPr>
+            <a:spLocks noGrp="1"/>
+          </p:cNvSpPr>
+          <p:nvPr>
+            <p:ph idx="1"/>
+          </p:nvPr>
+        </p:nvSpPr>
+        <p:spPr>
+          <a:xfrm>
+            <a:off x="238991" y="1145407"/>
+            <a:ext cx="10983410" cy="2765130"/>
+          </a:xfrm>
+        </p:spPr>
+        <p:txBody>
+          <a:bodyPr>
+            <a:noAutofit/>
+          </a:bodyPr>
+          <a:lstStyle/>
+          <a:p>
+            <a:pPr marL="0" indent="0">
+              <a:lnSpc>
+                <a:spcPct val="150000"/>
+              </a:lnSpc>
+              <a:buNone/>
+            </a:pPr>
+            <a:r>
+              <a:rPr lang="ko-KR" altLang="en-US" sz="2400" dirty="0">
+                <a:latin typeface="+mn-ea"/>
+              </a:rPr>
+              <a:t>💡 </a:t>
+            </a:r>
+            <a:r>
+              <a:rPr lang="ko-KR" altLang="en-US" sz="2400" dirty="0"/>
+              <a:t>입력층에서 출력층으로 신호가 한 방향으로만 전달되는 가장 기본적인 인공 신경망 구조</a:t>
+            </a:r>
+            <a:endParaRPr lang="en-US" altLang="ko-KR" sz="2400" dirty="0">
+              <a:latin typeface="+mn-ea"/>
+            </a:endParaRPr>
+          </a:p>
+          <a:p>
+            <a:pPr lvl="1">
+              <a:lnSpc>
+                <a:spcPct val="150000"/>
+              </a:lnSpc>
+              <a:buFont typeface="Wingdings" panose="05000000000000000000" pitchFamily="2" charset="2"/>
+              <a:buChar char="§"/>
+            </a:pPr>
+            <a:r>
+              <a:rPr lang="ko-KR" altLang="en-US" sz="2000" dirty="0">
+                <a:latin typeface="+mn-ea"/>
+              </a:rPr>
+              <a:t>데이터가 입력층에서 시작해 </a:t>
+            </a:r>
+            <a:r>
+              <a:rPr lang="ko-KR" altLang="en-US" sz="2000" dirty="0" err="1">
+                <a:latin typeface="+mn-ea"/>
+              </a:rPr>
+              <a:t>은닉층</a:t>
+            </a:r>
+            <a:r>
+              <a:rPr lang="en-US" altLang="ko-KR" sz="2000" dirty="0">
+                <a:latin typeface="+mn-ea"/>
+              </a:rPr>
+              <a:t>(hidden layer)</a:t>
+            </a:r>
+            <a:r>
+              <a:rPr lang="ko-KR" altLang="en-US" sz="2000" dirty="0">
+                <a:latin typeface="+mn-ea"/>
+              </a:rPr>
+              <a:t>을 거쳐 </a:t>
+            </a:r>
+            <a:r>
+              <a:rPr lang="ko-KR" altLang="en-US" sz="2000" dirty="0" err="1">
+                <a:latin typeface="+mn-ea"/>
+              </a:rPr>
+              <a:t>출력층으로</a:t>
+            </a:r>
+            <a:r>
+              <a:rPr lang="ko-KR" altLang="en-US" sz="2000" dirty="0">
+                <a:latin typeface="+mn-ea"/>
+              </a:rPr>
+              <a:t> 순차적으로 흐름</a:t>
+            </a:r>
+            <a:r>
+              <a:rPr lang="en-US" altLang="ko-KR" sz="2000" dirty="0">
+                <a:latin typeface="+mn-ea"/>
+              </a:rPr>
+              <a:t>.</a:t>
+            </a:r>
+          </a:p>
+          <a:p>
+            <a:pPr lvl="1">
+              <a:lnSpc>
+                <a:spcPct val="150000"/>
+              </a:lnSpc>
+              <a:buFont typeface="Wingdings" panose="05000000000000000000" pitchFamily="2" charset="2"/>
+              <a:buChar char="§"/>
+            </a:pPr>
+            <a:r>
+              <a:rPr lang="ko-KR" altLang="en-US" sz="2000" dirty="0">
+                <a:latin typeface="+mn-ea"/>
+              </a:rPr>
+              <a:t>가장 기본적인 신경망 구조</a:t>
+            </a:r>
+            <a:r>
+              <a:rPr lang="en-US" altLang="ko-KR" sz="2000" dirty="0">
+                <a:latin typeface="+mn-ea"/>
+              </a:rPr>
+              <a:t>.</a:t>
+            </a:r>
+          </a:p>
+          <a:p>
+            <a:pPr lvl="1">
+              <a:lnSpc>
+                <a:spcPct val="150000"/>
+              </a:lnSpc>
+              <a:buFont typeface="Wingdings" panose="05000000000000000000" pitchFamily="2" charset="2"/>
+              <a:buChar char="§"/>
+            </a:pPr>
+            <a:r>
+              <a:rPr lang="ko-KR" altLang="en-US" sz="2000" dirty="0">
+                <a:latin typeface="+mn-ea"/>
+              </a:rPr>
+              <a:t>주로 분류</a:t>
+            </a:r>
+            <a:r>
+              <a:rPr lang="en-US" altLang="ko-KR" sz="2000" dirty="0">
+                <a:latin typeface="+mn-ea"/>
+              </a:rPr>
+              <a:t>(classification)</a:t>
+            </a:r>
+            <a:r>
+              <a:rPr lang="ko-KR" altLang="en-US" sz="2000" dirty="0">
+                <a:latin typeface="+mn-ea"/>
+              </a:rPr>
+              <a:t>와 회귀</a:t>
+            </a:r>
+            <a:r>
+              <a:rPr lang="en-US" altLang="ko-KR" sz="2000" dirty="0">
+                <a:latin typeface="+mn-ea"/>
+              </a:rPr>
+              <a:t>(regression) </a:t>
+            </a:r>
+            <a:r>
+              <a:rPr lang="ko-KR" altLang="en-US" sz="2000" dirty="0">
+                <a:latin typeface="+mn-ea"/>
+              </a:rPr>
+              <a:t>문제에 사용</a:t>
+            </a:r>
+            <a:r>
+              <a:rPr lang="en-US" altLang="ko-KR" sz="2000" dirty="0">
+                <a:latin typeface="+mn-ea"/>
+              </a:rPr>
+              <a:t>.</a:t>
+            </a:r>
+            <a:endParaRPr lang="ko-KR" altLang="en-US" sz="1400" dirty="0">
+              <a:latin typeface="+mn-ea"/>
+            </a:endParaRPr>
+          </a:p>
+        </p:txBody>
+      </p:sp>
+      <p:sp>
+        <p:nvSpPr>
+          <p:cNvPr id="4" name="날짜 개체 틀 3">
+            <a:extLst>
+              <a:ext uri="{FF2B5EF4-FFF2-40B4-BE49-F238E27FC236}">
+                <a16:creationId xmlns:a16="http://schemas.microsoft.com/office/drawing/2014/main" id="{B8A4E5A7-5FDA-3F64-1B0F-2D7A4CC03D93}"/>
+              </a:ext>
+            </a:extLst>
+          </p:cNvPr>
+          <p:cNvSpPr>
+            <a:spLocks noGrp="1"/>
+          </p:cNvSpPr>
+          <p:nvPr>
+            <p:ph type="dt" sz="half" idx="10"/>
+          </p:nvPr>
+        </p:nvSpPr>
+        <p:spPr/>
+        <p:txBody>
+          <a:bodyPr/>
+          <a:lstStyle/>
+          <a:p>
+            <a:fld id="{0F78D9C4-20C1-4B15-A116-16DC77AD9A1E}" type="datetime1">
+              <a:rPr lang="ko-KR" altLang="en-US" smtClean="0"/>
+              <a:t>2026-02-20</a:t>
+            </a:fld>
+            <a:endParaRPr lang="ko-KR" altLang="en-US"/>
+          </a:p>
+        </p:txBody>
+      </p:sp>
+      <p:sp>
+        <p:nvSpPr>
+          <p:cNvPr id="5" name="슬라이드 번호 개체 틀 4">
+            <a:extLst>
+              <a:ext uri="{FF2B5EF4-FFF2-40B4-BE49-F238E27FC236}">
+                <a16:creationId xmlns:a16="http://schemas.microsoft.com/office/drawing/2014/main" id="{757C3E34-8AF5-3E90-E54D-E6EC32133A3F}"/>
+              </a:ext>
+            </a:extLst>
+          </p:cNvPr>
+          <p:cNvSpPr>
+            <a:spLocks noGrp="1"/>
+          </p:cNvSpPr>
+          <p:nvPr>
+            <p:ph type="sldNum" sz="quarter" idx="12"/>
+          </p:nvPr>
+        </p:nvSpPr>
+        <p:spPr/>
+        <p:txBody>
+          <a:bodyPr/>
+          <a:lstStyle/>
+          <a:p>
+            <a:fld id="{083A2CE0-18CD-4102-B738-4ACFF9E68BA4}" type="slidenum">
+              <a:rPr lang="ko-KR" altLang="en-US" smtClean="0"/>
+              <a:t>6</a:t>
+            </a:fld>
+            <a:endParaRPr lang="ko-KR" altLang="en-US"/>
+          </a:p>
+        </p:txBody>
+      </p:sp>
+      <p:pic>
+        <p:nvPicPr>
+          <p:cNvPr id="5124" name="Picture 4" descr="19. Neural Network — Learning Apache Spark with Python documentation"/>
+          <p:cNvPicPr>
+            <a:picLocks noChangeAspect="1" noChangeArrowheads="1"/>
+          </p:cNvPicPr>
+          <p:nvPr/>
+        </p:nvPicPr>
+        <p:blipFill>
+          <a:blip r:embed="rId3">
+            <a:extLst>
+              <a:ext uri="{28A0092B-C50C-407E-A947-70E740481C1C}">
+                <a14:useLocalDpi xmlns:a14="http://schemas.microsoft.com/office/drawing/2010/main" val="0"/>
+              </a:ext>
+            </a:extLst>
+          </a:blip>
+          <a:srcRect/>
+          <a:stretch>
+            <a:fillRect/>
+          </a:stretch>
+        </p:blipFill>
+        <p:spPr bwMode="auto">
+          <a:xfrm>
+            <a:off x="2816506" y="3586431"/>
+            <a:ext cx="6558988" cy="2582964"/>
+          </a:xfrm>
+          <a:prstGeom prst="rect">
+            <a:avLst/>
+          </a:prstGeom>
+          <a:noFill/>
+          <a:extLst>
+            <a:ext uri="{909E8E84-426E-40DD-AFC4-6F175D3DCCD1}">
+              <a14:hiddenFill xmlns:a14="http://schemas.microsoft.com/office/drawing/2010/main">
+                <a:solidFill>
+                  <a:srgbClr val="FFFFFF"/>
+                </a:solidFill>
+              </a14:hiddenFill>
+            </a:ext>
+          </a:extLst>
+        </p:spPr>
+      </p:pic>
+    </p:spTree>
+    <p:extLst>
+      <p:ext uri="{BB962C8B-B14F-4D97-AF65-F5344CB8AC3E}">
+        <p14:creationId xmlns:p14="http://schemas.microsoft.com/office/powerpoint/2010/main" val="3723366998"/>
+      </p:ext>
+    </p:extLst>
+  </p:cSld>
+  <p:clrMapOvr>
+    <a:masterClrMapping/>
+  </p:clrMapOvr>
+</p:sld>
+</file>
+
+<file path=ppt/slides/slide7.xml><?xml version="1.0" encoding="utf-8"?>
+<p:sld xmlns:a="http://schemas.openxmlformats.org/drawingml/2006/main" xmlns:r="http://schemas.openxmlformats.org/officeDocument/2006/relationships" xmlns:p="http://schemas.openxmlformats.org/presentationml/2006/main">
+  <p:cSld>
+    <p:spTree>
+      <p:nvGrpSpPr>
+        <p:cNvPr id="1" name=""/>
+        <p:cNvGrpSpPr/>
+        <p:nvPr/>
+      </p:nvGrpSpPr>
+      <p:grpSpPr>
+        <a:xfrm>
+          <a:off x="0" y="0"/>
+          <a:ext cx="0" cy="0"/>
+          <a:chOff x="0" y="0"/>
+          <a:chExt cx="0" cy="0"/>
+        </a:xfrm>
+      </p:grpSpPr>
+      <p:sp>
+        <p:nvSpPr>
+          <p:cNvPr id="2" name="제목 1">
+            <a:extLst>
+              <a:ext uri="{FF2B5EF4-FFF2-40B4-BE49-F238E27FC236}">
+                <a16:creationId xmlns:a16="http://schemas.microsoft.com/office/drawing/2014/main" id="{D40CEB13-D565-E48A-6FB3-59B36CCB247E}"/>
+              </a:ext>
+            </a:extLst>
+          </p:cNvPr>
+          <p:cNvSpPr>
+            <a:spLocks noGrp="1"/>
+          </p:cNvSpPr>
+          <p:nvPr>
+            <p:ph type="title"/>
+          </p:nvPr>
+        </p:nvSpPr>
+        <p:spPr/>
+        <p:txBody>
+          <a:bodyPr/>
+          <a:lstStyle/>
+          <a:p>
+            <a:r>
+              <a:rPr lang="ko-KR" altLang="en-US" dirty="0"/>
+              <a:t>모델 발전</a:t>
+            </a:r>
+          </a:p>
+        </p:txBody>
+      </p:sp>
+      <p:graphicFrame>
+        <p:nvGraphicFramePr>
+          <p:cNvPr id="6" name="내용 개체 틀 5">
+            <a:extLst>
+              <a:ext uri="{FF2B5EF4-FFF2-40B4-BE49-F238E27FC236}">
+                <a16:creationId xmlns:a16="http://schemas.microsoft.com/office/drawing/2014/main" id="{E6F3F2AA-B83D-D1EB-53BE-888F6D795009}"/>
+              </a:ext>
+            </a:extLst>
+          </p:cNvPr>
+          <p:cNvGraphicFramePr>
+            <a:graphicFrameLocks noGrp="1"/>
+          </p:cNvGraphicFramePr>
+          <p:nvPr>
+            <p:ph idx="1"/>
+            <p:extLst>
+              <p:ext uri="{D42A27DB-BD31-4B8C-83A1-F6EECF244321}">
+                <p14:modId xmlns:p14="http://schemas.microsoft.com/office/powerpoint/2010/main" val="2176504567"/>
+              </p:ext>
+            </p:extLst>
+          </p:nvPr>
+        </p:nvGraphicFramePr>
+        <p:xfrm>
+          <a:off x="675737" y="2514600"/>
+          <a:ext cx="10515600" cy="1981200"/>
+        </p:xfrm>
+        <a:graphic>
+          <a:graphicData uri="http://schemas.openxmlformats.org/drawingml/2006/table">
+            <a:tbl>
+              <a:tblPr firstRow="1">
+                <a:tableStyleId>{93296810-A885-4BE3-A3E7-6D5BEEA58F35}</a:tableStyleId>
+              </a:tblPr>
+              <a:tblGrid>
+                <a:gridCol w="3505200">
+                  <a:extLst>
+                    <a:ext uri="{9D8B030D-6E8A-4147-A177-3AD203B41FA5}">
+                      <a16:colId xmlns:a16="http://schemas.microsoft.com/office/drawing/2014/main" val="4154536503"/>
+                    </a:ext>
+                  </a:extLst>
+                </a:gridCol>
+                <a:gridCol w="3505200">
+                  <a:extLst>
+                    <a:ext uri="{9D8B030D-6E8A-4147-A177-3AD203B41FA5}">
+                      <a16:colId xmlns:a16="http://schemas.microsoft.com/office/drawing/2014/main" val="3318898249"/>
+                    </a:ext>
+                  </a:extLst>
+                </a:gridCol>
+                <a:gridCol w="3505200">
+                  <a:extLst>
+                    <a:ext uri="{9D8B030D-6E8A-4147-A177-3AD203B41FA5}">
+                      <a16:colId xmlns:a16="http://schemas.microsoft.com/office/drawing/2014/main" val="990014493"/>
+                    </a:ext>
+                  </a:extLst>
+                </a:gridCol>
+              </a:tblGrid>
+              <a:tr h="0">
+                <a:tc>
+                  <a:txBody>
+                    <a:bodyPr/>
+                    <a:lstStyle/>
+                    <a:p>
+                      <a:pPr>
+                        <a:buNone/>
+                      </a:pPr>
+                      <a:r>
+                        <a:rPr lang="ko-KR" altLang="en-US" sz="2000" dirty="0"/>
+                        <a:t>모델</a:t>
+                      </a:r>
+                    </a:p>
+                  </a:txBody>
+                  <a:tcPr anchor="ctr"/>
+                </a:tc>
+                <a:tc>
+                  <a:txBody>
+                    <a:bodyPr/>
+                    <a:lstStyle/>
+                    <a:p>
+                      <a:pPr>
+                        <a:buNone/>
+                      </a:pPr>
+                      <a:r>
+                        <a:rPr lang="ko-KR" altLang="en-US" sz="2000"/>
+                        <a:t>해결하려던 문제</a:t>
+                      </a:r>
+                    </a:p>
+                  </a:txBody>
+                  <a:tcPr anchor="ctr"/>
+                </a:tc>
+                <a:tc>
+                  <a:txBody>
+                    <a:bodyPr/>
+                    <a:lstStyle/>
+                    <a:p>
+                      <a:pPr>
+                        <a:buNone/>
+                      </a:pPr>
+                      <a:r>
+                        <a:rPr lang="ko-KR" altLang="en-US" sz="2000"/>
+                        <a:t>한계</a:t>
+                      </a:r>
+                    </a:p>
+                  </a:txBody>
+                  <a:tcPr anchor="ctr"/>
+                </a:tc>
+                <a:extLst>
+                  <a:ext uri="{0D108BD9-81ED-4DB2-BD59-A6C34878D82A}">
+                    <a16:rowId xmlns:a16="http://schemas.microsoft.com/office/drawing/2014/main" val="410254197"/>
+                  </a:ext>
+                </a:extLst>
+              </a:tr>
+              <a:tr h="0">
+                <a:tc>
+                  <a:txBody>
+                    <a:bodyPr/>
+                    <a:lstStyle/>
+                    <a:p>
+                      <a:pPr>
+                        <a:buNone/>
+                      </a:pPr>
+                      <a:r>
+                        <a:rPr lang="en-US" sz="2000"/>
+                        <a:t>FNN</a:t>
+                      </a:r>
+                    </a:p>
+                  </a:txBody>
+                  <a:tcPr anchor="ctr"/>
+                </a:tc>
+                <a:tc>
+                  <a:txBody>
+                    <a:bodyPr/>
+                    <a:lstStyle/>
+                    <a:p>
+                      <a:pPr>
+                        <a:buNone/>
+                      </a:pPr>
+                      <a:r>
+                        <a:rPr lang="ko-KR" altLang="en-US" sz="2000" dirty="0"/>
+                        <a:t>일반 패턴 학습</a:t>
+                      </a:r>
+                    </a:p>
+                  </a:txBody>
+                  <a:tcPr anchor="ctr"/>
+                </a:tc>
+                <a:tc>
+                  <a:txBody>
+                    <a:bodyPr/>
+                    <a:lstStyle/>
+                    <a:p>
+                      <a:pPr>
+                        <a:buNone/>
+                      </a:pPr>
+                      <a:r>
+                        <a:rPr lang="ko-KR" altLang="en-US" sz="2000" dirty="0"/>
+                        <a:t>공간</a:t>
+                      </a:r>
+                      <a:r>
+                        <a:rPr lang="en-US" altLang="ko-KR" sz="2000" dirty="0"/>
+                        <a:t>/</a:t>
+                      </a:r>
+                      <a:r>
+                        <a:rPr lang="ko-KR" altLang="en-US" sz="2000" dirty="0"/>
+                        <a:t>순차 구조 반영 어려움</a:t>
+                      </a:r>
+                      <a:endParaRPr lang="en-US" sz="2000" dirty="0"/>
+                    </a:p>
+                  </a:txBody>
+                  <a:tcPr anchor="ctr"/>
+                </a:tc>
+                <a:extLst>
+                  <a:ext uri="{0D108BD9-81ED-4DB2-BD59-A6C34878D82A}">
+                    <a16:rowId xmlns:a16="http://schemas.microsoft.com/office/drawing/2014/main" val="1507975714"/>
+                  </a:ext>
+                </a:extLst>
+              </a:tr>
+              <a:tr h="0">
+                <a:tc>
+                  <a:txBody>
+                    <a:bodyPr/>
+                    <a:lstStyle/>
+                    <a:p>
+                      <a:pPr>
+                        <a:buNone/>
+                      </a:pPr>
+                      <a:r>
+                        <a:rPr lang="en-US" sz="2000"/>
+                        <a:t>CNN</a:t>
+                      </a:r>
+                    </a:p>
+                  </a:txBody>
+                  <a:tcPr anchor="ctr"/>
+                </a:tc>
+                <a:tc>
+                  <a:txBody>
+                    <a:bodyPr/>
+                    <a:lstStyle/>
+                    <a:p>
+                      <a:pPr>
+                        <a:buNone/>
+                      </a:pPr>
+                      <a:r>
+                        <a:rPr lang="ko-KR" altLang="en-US" sz="2000" dirty="0"/>
+                        <a:t>이미지 공간 구조</a:t>
+                      </a:r>
+                    </a:p>
+                  </a:txBody>
+                  <a:tcPr anchor="ctr"/>
+                </a:tc>
+                <a:tc>
+                  <a:txBody>
+                    <a:bodyPr/>
+                    <a:lstStyle/>
+                    <a:p>
+                      <a:pPr>
+                        <a:buNone/>
+                      </a:pPr>
+                      <a:r>
+                        <a:rPr lang="ko-KR" altLang="en-US" sz="2000" dirty="0"/>
+                        <a:t>긴 순차 처리 어려움</a:t>
+                      </a:r>
+                      <a:endParaRPr lang="en-US" sz="2000" dirty="0"/>
+                    </a:p>
+                  </a:txBody>
+                  <a:tcPr anchor="ctr"/>
+                </a:tc>
+                <a:extLst>
+                  <a:ext uri="{0D108BD9-81ED-4DB2-BD59-A6C34878D82A}">
+                    <a16:rowId xmlns:a16="http://schemas.microsoft.com/office/drawing/2014/main" val="3261682063"/>
+                  </a:ext>
+                </a:extLst>
+              </a:tr>
+              <a:tr h="0">
+                <a:tc>
+                  <a:txBody>
+                    <a:bodyPr/>
+                    <a:lstStyle/>
+                    <a:p>
+                      <a:pPr>
+                        <a:buNone/>
+                      </a:pPr>
+                      <a:r>
+                        <a:rPr lang="en-US" sz="2000"/>
+                        <a:t>RNN</a:t>
+                      </a:r>
+                    </a:p>
+                  </a:txBody>
+                  <a:tcPr anchor="ctr"/>
+                </a:tc>
+                <a:tc>
+                  <a:txBody>
+                    <a:bodyPr/>
+                    <a:lstStyle/>
+                    <a:p>
+                      <a:pPr>
+                        <a:buNone/>
+                      </a:pPr>
+                      <a:r>
+                        <a:rPr lang="ko-KR" altLang="en-US" sz="2000" dirty="0"/>
+                        <a:t>순차 </a:t>
+                      </a:r>
+                      <a:r>
+                        <a:rPr lang="en-US" altLang="ko-KR" sz="2000" dirty="0"/>
+                        <a:t>(</a:t>
+                      </a:r>
+                      <a:r>
+                        <a:rPr lang="ko-KR" altLang="en-US" sz="2000" dirty="0"/>
+                        <a:t>시계열</a:t>
+                      </a:r>
+                      <a:r>
+                        <a:rPr lang="en-US" altLang="ko-KR" sz="2000" dirty="0"/>
+                        <a:t>/</a:t>
+                      </a:r>
+                      <a:r>
+                        <a:rPr lang="ko-KR" altLang="en-US" sz="2000" dirty="0"/>
+                        <a:t>언어</a:t>
+                      </a:r>
+                      <a:r>
+                        <a:rPr lang="en-US" altLang="ko-KR" sz="2000" dirty="0"/>
+                        <a:t>)</a:t>
+                      </a:r>
+                      <a:endParaRPr lang="ko-KR" altLang="en-US" sz="2000" dirty="0"/>
+                    </a:p>
+                  </a:txBody>
+                  <a:tcPr anchor="ctr"/>
+                </a:tc>
+                <a:tc>
+                  <a:txBody>
+                    <a:bodyPr/>
+                    <a:lstStyle/>
+                    <a:p>
+                      <a:pPr>
+                        <a:buNone/>
+                      </a:pPr>
+                      <a:r>
+                        <a:rPr lang="ko-KR" altLang="en-US" sz="2000" dirty="0"/>
+                        <a:t>장기 의존성</a:t>
+                      </a:r>
+                    </a:p>
+                  </a:txBody>
+                  <a:tcPr anchor="ctr"/>
+                </a:tc>
+                <a:extLst>
+                  <a:ext uri="{0D108BD9-81ED-4DB2-BD59-A6C34878D82A}">
+                    <a16:rowId xmlns:a16="http://schemas.microsoft.com/office/drawing/2014/main" val="4269501519"/>
+                  </a:ext>
+                </a:extLst>
+              </a:tr>
+              <a:tr h="0">
+                <a:tc>
+                  <a:txBody>
+                    <a:bodyPr/>
+                    <a:lstStyle/>
+                    <a:p>
+                      <a:pPr>
+                        <a:buNone/>
+                      </a:pPr>
+                      <a:r>
+                        <a:rPr lang="en-US" sz="2000"/>
+                        <a:t>Transformer</a:t>
+                      </a:r>
+                    </a:p>
+                  </a:txBody>
+                  <a:tcPr anchor="ctr"/>
+                </a:tc>
+                <a:tc>
+                  <a:txBody>
+                    <a:bodyPr/>
+                    <a:lstStyle/>
+                    <a:p>
+                      <a:pPr>
+                        <a:buNone/>
+                      </a:pPr>
+                      <a:r>
+                        <a:rPr lang="ko-KR" altLang="en-US" sz="2000"/>
+                        <a:t>장기 의존성 </a:t>
+                      </a:r>
+                      <a:r>
+                        <a:rPr lang="en-US" altLang="ko-KR" sz="2000"/>
+                        <a:t>+ </a:t>
+                      </a:r>
+                      <a:r>
+                        <a:rPr lang="ko-KR" altLang="en-US" sz="2000"/>
+                        <a:t>병렬</a:t>
+                      </a:r>
+                    </a:p>
+                  </a:txBody>
+                  <a:tcPr anchor="ctr"/>
+                </a:tc>
+                <a:tc>
+                  <a:txBody>
+                    <a:bodyPr/>
+                    <a:lstStyle/>
+                    <a:p>
+                      <a:pPr>
+                        <a:buNone/>
+                      </a:pPr>
+                      <a:endParaRPr lang="ko-KR" altLang="en-US" sz="2000" dirty="0"/>
+                    </a:p>
+                  </a:txBody>
+                  <a:tcPr anchor="ctr"/>
+                </a:tc>
+                <a:extLst>
+                  <a:ext uri="{0D108BD9-81ED-4DB2-BD59-A6C34878D82A}">
+                    <a16:rowId xmlns:a16="http://schemas.microsoft.com/office/drawing/2014/main" val="722901168"/>
+                  </a:ext>
+                </a:extLst>
+              </a:tr>
+            </a:tbl>
+          </a:graphicData>
+        </a:graphic>
+      </p:graphicFrame>
+      <p:sp>
+        <p:nvSpPr>
+          <p:cNvPr id="4" name="날짜 개체 틀 3">
+            <a:extLst>
+              <a:ext uri="{FF2B5EF4-FFF2-40B4-BE49-F238E27FC236}">
+                <a16:creationId xmlns:a16="http://schemas.microsoft.com/office/drawing/2014/main" id="{3ECA06D2-5D2F-4B07-38DD-B36FFBBE127B}"/>
+              </a:ext>
+            </a:extLst>
+          </p:cNvPr>
+          <p:cNvSpPr>
+            <a:spLocks noGrp="1"/>
+          </p:cNvSpPr>
+          <p:nvPr>
+            <p:ph type="dt" sz="half" idx="10"/>
+          </p:nvPr>
+        </p:nvSpPr>
+        <p:spPr/>
+        <p:txBody>
+          <a:bodyPr/>
+          <a:lstStyle/>
+          <a:p>
+            <a:fld id="{0F78D9C4-20C1-4B15-A116-16DC77AD9A1E}" type="datetime1">
+              <a:rPr lang="ko-KR" altLang="en-US" smtClean="0"/>
+              <a:t>2026-02-20</a:t>
+            </a:fld>
+            <a:endParaRPr lang="ko-KR" altLang="en-US"/>
+          </a:p>
+        </p:txBody>
+      </p:sp>
+      <p:sp>
+        <p:nvSpPr>
+          <p:cNvPr id="5" name="슬라이드 번호 개체 틀 4">
+            <a:extLst>
+              <a:ext uri="{FF2B5EF4-FFF2-40B4-BE49-F238E27FC236}">
+                <a16:creationId xmlns:a16="http://schemas.microsoft.com/office/drawing/2014/main" id="{F78E3E66-3E4F-75AF-35E6-E6ADC97D493A}"/>
+              </a:ext>
+            </a:extLst>
+          </p:cNvPr>
+          <p:cNvSpPr>
+            <a:spLocks noGrp="1"/>
+          </p:cNvSpPr>
+          <p:nvPr>
+            <p:ph type="sldNum" sz="quarter" idx="12"/>
+          </p:nvPr>
+        </p:nvSpPr>
+        <p:spPr/>
+        <p:txBody>
+          <a:bodyPr/>
+          <a:lstStyle/>
+          <a:p>
+            <a:fld id="{083A2CE0-18CD-4102-B738-4ACFF9E68BA4}" type="slidenum">
+              <a:rPr lang="ko-KR" altLang="en-US" smtClean="0"/>
+              <a:t>7</a:t>
+            </a:fld>
+            <a:endParaRPr lang="ko-KR" altLang="en-US"/>
+          </a:p>
+        </p:txBody>
+      </p:sp>
+    </p:spTree>
+    <p:extLst>
+      <p:ext uri="{BB962C8B-B14F-4D97-AF65-F5344CB8AC3E}">
+        <p14:creationId xmlns:p14="http://schemas.microsoft.com/office/powerpoint/2010/main" val="152346716"/>
+      </p:ext>
+    </p:extLst>
+  </p:cSld>
+  <p:clrMapOvr>
+    <a:masterClrMapping/>
+  </p:clrMapOvr>
+</p:sld>
+</file>
+
+<file path=ppt/slides/slide8.xml><?xml version="1.0" encoding="utf-8"?>
+<p:sld xmlns:a="http://schemas.openxmlformats.org/drawingml/2006/main" xmlns:r="http://schemas.openxmlformats.org/officeDocument/2006/relationships" xmlns:p="http://schemas.openxmlformats.org/presentationml/2006/main">
+  <p:cSld>
+    <p:spTree>
+      <p:nvGrpSpPr>
+        <p:cNvPr id="1" name=""/>
+        <p:cNvGrpSpPr/>
+        <p:nvPr/>
+      </p:nvGrpSpPr>
+      <p:grpSpPr>
+        <a:xfrm>
+          <a:off x="0" y="0"/>
+          <a:ext cx="0" cy="0"/>
+          <a:chOff x="0" y="0"/>
+          <a:chExt cx="0" cy="0"/>
+        </a:xfrm>
+      </p:grpSpPr>
+      <p:pic>
+        <p:nvPicPr>
+          <p:cNvPr id="14338" name="Picture 2">
+            <a:extLst>
+              <a:ext uri="{FF2B5EF4-FFF2-40B4-BE49-F238E27FC236}">
+                <a16:creationId xmlns:a16="http://schemas.microsoft.com/office/drawing/2014/main" id="{4CE4DCDC-6E1D-EDD1-CA51-B6A5E81C190A}"/>
+              </a:ext>
+            </a:extLst>
+          </p:cNvPr>
+          <p:cNvPicPr>
+            <a:picLocks noChangeAspect="1" noChangeArrowheads="1"/>
+          </p:cNvPicPr>
+          <p:nvPr/>
+        </p:nvPicPr>
+        <p:blipFill>
+          <a:blip r:embed="rId3">
+            <a:extLst>
+              <a:ext uri="{28A0092B-C50C-407E-A947-70E740481C1C}">
+                <a14:useLocalDpi xmlns:a14="http://schemas.microsoft.com/office/drawing/2010/main" val="0"/>
+              </a:ext>
+            </a:extLst>
+          </a:blip>
+          <a:srcRect/>
+          <a:stretch>
+            <a:fillRect/>
+          </a:stretch>
+        </p:blipFill>
+        <p:spPr bwMode="auto">
+          <a:xfrm>
+            <a:off x="2435601" y="3668321"/>
+            <a:ext cx="7320793" cy="2252001"/>
+          </a:xfrm>
+          <a:prstGeom prst="rect">
+            <a:avLst/>
+          </a:prstGeom>
+          <a:noFill/>
+          <a:extLst>
+            <a:ext uri="{909E8E84-426E-40DD-AFC4-6F175D3DCCD1}">
+              <a14:hiddenFill xmlns:a14="http://schemas.microsoft.com/office/drawing/2010/main">
+                <a:solidFill>
+                  <a:srgbClr val="FFFFFF"/>
+                </a:solidFill>
+              </a14:hiddenFill>
+            </a:ext>
+          </a:extLst>
+        </p:spPr>
+      </p:pic>
+      <p:sp>
+        <p:nvSpPr>
+          <p:cNvPr id="2" name="제목 1">
+            <a:extLst>
+              <a:ext uri="{FF2B5EF4-FFF2-40B4-BE49-F238E27FC236}">
+                <a16:creationId xmlns:a16="http://schemas.microsoft.com/office/drawing/2014/main" id="{F3FB394F-46E9-11B0-D9BF-D8094C4D9464}"/>
+              </a:ext>
+            </a:extLst>
+          </p:cNvPr>
+          <p:cNvSpPr>
+            <a:spLocks noGrp="1"/>
+          </p:cNvSpPr>
+          <p:nvPr>
+            <p:ph type="title"/>
+          </p:nvPr>
+        </p:nvSpPr>
+        <p:spPr/>
+        <p:txBody>
+          <a:bodyPr>
+            <a:normAutofit/>
+          </a:bodyPr>
+          <a:lstStyle/>
+          <a:p>
+            <a:r>
+              <a:rPr lang="en-US" altLang="ko-KR" b="1" dirty="0"/>
+              <a:t>CNN</a:t>
+            </a:r>
+            <a:r>
+              <a:rPr lang="en-US" altLang="ko-KR" sz="4000" b="1" dirty="0"/>
+              <a:t>(Convolutional Neural Network)</a:t>
+            </a:r>
+            <a:endParaRPr lang="ko-KR" altLang="en-US" b="1" dirty="0"/>
+          </a:p>
+        </p:txBody>
+      </p:sp>
+      <p:sp>
+        <p:nvSpPr>
+          <p:cNvPr id="3" name="내용 개체 틀 2">
+            <a:extLst>
+              <a:ext uri="{FF2B5EF4-FFF2-40B4-BE49-F238E27FC236}">
+                <a16:creationId xmlns:a16="http://schemas.microsoft.com/office/drawing/2014/main" id="{DC3820EF-58B1-1360-C320-373184ED8CFC}"/>
+              </a:ext>
+            </a:extLst>
+          </p:cNvPr>
+          <p:cNvSpPr>
+            <a:spLocks noGrp="1"/>
+          </p:cNvSpPr>
+          <p:nvPr>
+            <p:ph idx="1"/>
+          </p:nvPr>
+        </p:nvSpPr>
+        <p:spPr>
+          <a:xfrm>
+            <a:off x="238990" y="1145407"/>
+            <a:ext cx="11701221" cy="2262588"/>
+          </a:xfrm>
+        </p:spPr>
+        <p:txBody>
+          <a:bodyPr>
+            <a:noAutofit/>
+          </a:bodyPr>
+          <a:lstStyle/>
+          <a:p>
+            <a:pPr marL="0" indent="0">
+              <a:lnSpc>
+                <a:spcPct val="150000"/>
+              </a:lnSpc>
+              <a:buNone/>
+            </a:pPr>
+            <a:r>
+              <a:rPr lang="ko-KR" altLang="en-US" sz="2400" dirty="0">
+                <a:latin typeface="+mn-ea"/>
+              </a:rPr>
+              <a:t>💡 </a:t>
+            </a:r>
+            <a:r>
+              <a:rPr lang="ko-KR" altLang="en-US" sz="2400" dirty="0"/>
+              <a:t>이미지나 시계열 같은 데이터의 특징을 추출하기 위해 </a:t>
+            </a:r>
+            <a:r>
+              <a:rPr lang="ko-KR" altLang="en-US" sz="2400" dirty="0" err="1"/>
+              <a:t>합성곱</a:t>
+            </a:r>
+            <a:r>
+              <a:rPr lang="ko-KR" altLang="en-US" sz="2400" dirty="0"/>
+              <a:t> 연산을 사용하는 인공 신경망</a:t>
+            </a:r>
+            <a:endParaRPr lang="en-US" altLang="ko-KR" sz="2400" dirty="0">
+              <a:latin typeface="+mn-ea"/>
+            </a:endParaRPr>
+          </a:p>
+          <a:p>
+            <a:pPr lvl="1">
+              <a:lnSpc>
+                <a:spcPct val="150000"/>
+              </a:lnSpc>
+              <a:buFont typeface="Wingdings" panose="05000000000000000000" pitchFamily="2" charset="2"/>
+              <a:buChar char="§"/>
+            </a:pPr>
+            <a:r>
+              <a:rPr lang="ko-KR" altLang="en-US" sz="2000" dirty="0">
+                <a:latin typeface="+mn-ea"/>
+              </a:rPr>
+              <a:t>이미지 및 영상 처리에 특화된 신경망</a:t>
+            </a:r>
+            <a:r>
+              <a:rPr lang="en-US" altLang="ko-KR" sz="2000" dirty="0">
+                <a:latin typeface="+mn-ea"/>
+              </a:rPr>
+              <a:t>.</a:t>
+            </a:r>
+          </a:p>
+          <a:p>
+            <a:pPr lvl="1">
+              <a:lnSpc>
+                <a:spcPct val="150000"/>
+              </a:lnSpc>
+              <a:buFont typeface="Wingdings" panose="05000000000000000000" pitchFamily="2" charset="2"/>
+              <a:buChar char="§"/>
+            </a:pPr>
+            <a:r>
+              <a:rPr lang="ko-KR" altLang="en-US" sz="2000" dirty="0" err="1">
+                <a:latin typeface="+mn-ea"/>
+              </a:rPr>
+              <a:t>컨볼루션</a:t>
+            </a:r>
+            <a:r>
+              <a:rPr lang="ko-KR" altLang="en-US" sz="2000" dirty="0">
+                <a:latin typeface="+mn-ea"/>
+              </a:rPr>
+              <a:t> </a:t>
+            </a:r>
+            <a:r>
+              <a:rPr lang="ko-KR" altLang="en-US" sz="2000" dirty="0" err="1">
+                <a:latin typeface="+mn-ea"/>
+              </a:rPr>
+              <a:t>레이어</a:t>
+            </a:r>
+            <a:r>
+              <a:rPr lang="en-US" altLang="ko-KR" sz="2000" dirty="0">
+                <a:latin typeface="+mn-ea"/>
+              </a:rPr>
+              <a:t>(Convolution Layer)</a:t>
+            </a:r>
+            <a:r>
+              <a:rPr lang="ko-KR" altLang="en-US" sz="2000" dirty="0">
+                <a:latin typeface="+mn-ea"/>
+              </a:rPr>
+              <a:t>와 </a:t>
+            </a:r>
+            <a:r>
+              <a:rPr lang="ko-KR" altLang="en-US" sz="2000" dirty="0" err="1">
+                <a:latin typeface="+mn-ea"/>
+              </a:rPr>
+              <a:t>풀링</a:t>
+            </a:r>
+            <a:r>
+              <a:rPr lang="ko-KR" altLang="en-US" sz="2000" dirty="0">
+                <a:latin typeface="+mn-ea"/>
+              </a:rPr>
+              <a:t> </a:t>
+            </a:r>
+            <a:r>
+              <a:rPr lang="ko-KR" altLang="en-US" sz="2000" dirty="0" err="1">
+                <a:latin typeface="+mn-ea"/>
+              </a:rPr>
+              <a:t>레이어</a:t>
+            </a:r>
+            <a:r>
+              <a:rPr lang="en-US" altLang="ko-KR" sz="2000" dirty="0">
+                <a:latin typeface="+mn-ea"/>
+              </a:rPr>
+              <a:t>(Pooling Layer)</a:t>
+            </a:r>
+            <a:r>
+              <a:rPr lang="ko-KR" altLang="en-US" sz="2000" dirty="0">
+                <a:latin typeface="+mn-ea"/>
+              </a:rPr>
+              <a:t>를 통해 </a:t>
+            </a:r>
+            <a:r>
+              <a:rPr lang="ko-KR" altLang="en-US" sz="2000" dirty="0">
+                <a:solidFill>
+                  <a:srgbClr val="FF0000"/>
+                </a:solidFill>
+                <a:latin typeface="+mn-ea"/>
+              </a:rPr>
+              <a:t>특징</a:t>
+            </a:r>
+            <a:r>
+              <a:rPr lang="en-US" altLang="ko-KR" sz="2000" dirty="0">
+                <a:latin typeface="+mn-ea"/>
+              </a:rPr>
+              <a:t>(feature)</a:t>
+            </a:r>
+            <a:r>
+              <a:rPr lang="ko-KR" altLang="en-US" sz="2000" dirty="0">
+                <a:latin typeface="+mn-ea"/>
+              </a:rPr>
+              <a:t>을 추출</a:t>
+            </a:r>
+            <a:r>
+              <a:rPr lang="en-US" altLang="ko-KR" sz="2000" dirty="0">
+                <a:latin typeface="+mn-ea"/>
+              </a:rPr>
+              <a:t>.</a:t>
+            </a:r>
+          </a:p>
+          <a:p>
+            <a:pPr lvl="1">
+              <a:lnSpc>
+                <a:spcPct val="150000"/>
+              </a:lnSpc>
+              <a:buFont typeface="Wingdings" panose="05000000000000000000" pitchFamily="2" charset="2"/>
+              <a:buChar char="§"/>
+            </a:pPr>
+            <a:r>
+              <a:rPr lang="ko-KR" altLang="en-US" sz="2000" dirty="0">
+                <a:latin typeface="+mn-ea"/>
+              </a:rPr>
+              <a:t>대표적으로 이미지 분류</a:t>
+            </a:r>
+            <a:r>
+              <a:rPr lang="en-US" altLang="ko-KR" sz="2000" dirty="0">
+                <a:latin typeface="+mn-ea"/>
+              </a:rPr>
+              <a:t>, </a:t>
+            </a:r>
+            <a:r>
+              <a:rPr lang="ko-KR" altLang="en-US" sz="2000" dirty="0">
+                <a:latin typeface="+mn-ea"/>
+              </a:rPr>
+              <a:t>객체 탐지</a:t>
+            </a:r>
+            <a:r>
+              <a:rPr lang="en-US" altLang="ko-KR" sz="2000" dirty="0">
+                <a:latin typeface="+mn-ea"/>
+              </a:rPr>
+              <a:t>, </a:t>
+            </a:r>
+            <a:r>
+              <a:rPr lang="ko-KR" altLang="en-US" sz="2000" dirty="0">
+                <a:latin typeface="+mn-ea"/>
+              </a:rPr>
+              <a:t>영상 처리 등에서 사용</a:t>
+            </a:r>
+            <a:r>
+              <a:rPr lang="en-US" altLang="ko-KR" sz="2000" dirty="0">
+                <a:latin typeface="+mn-ea"/>
+              </a:rPr>
+              <a:t>.</a:t>
+            </a:r>
+            <a:endParaRPr lang="ko-KR" altLang="en-US" sz="1400" dirty="0">
+              <a:latin typeface="+mn-ea"/>
+            </a:endParaRPr>
+          </a:p>
+        </p:txBody>
+      </p:sp>
+      <p:sp>
+        <p:nvSpPr>
+          <p:cNvPr id="4" name="날짜 개체 틀 3">
+            <a:extLst>
+              <a:ext uri="{FF2B5EF4-FFF2-40B4-BE49-F238E27FC236}">
+                <a16:creationId xmlns:a16="http://schemas.microsoft.com/office/drawing/2014/main" id="{B8A4E5A7-5FDA-3F64-1B0F-2D7A4CC03D93}"/>
+              </a:ext>
+            </a:extLst>
+          </p:cNvPr>
+          <p:cNvSpPr>
+            <a:spLocks noGrp="1"/>
+          </p:cNvSpPr>
+          <p:nvPr>
+            <p:ph type="dt" sz="half" idx="10"/>
+          </p:nvPr>
+        </p:nvSpPr>
+        <p:spPr/>
+        <p:txBody>
+          <a:bodyPr/>
+          <a:lstStyle/>
+          <a:p>
+            <a:fld id="{0F78D9C4-20C1-4B15-A116-16DC77AD9A1E}" type="datetime1">
+              <a:rPr lang="ko-KR" altLang="en-US" smtClean="0"/>
+              <a:t>2026-02-20</a:t>
+            </a:fld>
+            <a:endParaRPr lang="ko-KR" altLang="en-US"/>
+          </a:p>
+        </p:txBody>
+      </p:sp>
+      <p:sp>
+        <p:nvSpPr>
+          <p:cNvPr id="5" name="슬라이드 번호 개체 틀 4">
+            <a:extLst>
+              <a:ext uri="{FF2B5EF4-FFF2-40B4-BE49-F238E27FC236}">
+                <a16:creationId xmlns:a16="http://schemas.microsoft.com/office/drawing/2014/main" id="{757C3E34-8AF5-3E90-E54D-E6EC32133A3F}"/>
+              </a:ext>
+            </a:extLst>
+          </p:cNvPr>
+          <p:cNvSpPr>
+            <a:spLocks noGrp="1"/>
+          </p:cNvSpPr>
+          <p:nvPr>
+            <p:ph type="sldNum" sz="quarter" idx="12"/>
+          </p:nvPr>
+        </p:nvSpPr>
+        <p:spPr/>
+        <p:txBody>
+          <a:bodyPr/>
+          <a:lstStyle/>
+          <a:p>
+            <a:fld id="{083A2CE0-18CD-4102-B738-4ACFF9E68BA4}" type="slidenum">
+              <a:rPr lang="ko-KR" altLang="en-US" smtClean="0"/>
+              <a:t>8</a:t>
+            </a:fld>
+            <a:endParaRPr lang="ko-KR" altLang="en-US"/>
+          </a:p>
+        </p:txBody>
+      </p:sp>
+      <p:sp>
+        <p:nvSpPr>
+          <p:cNvPr id="6" name="TextBox 5">
+            <a:extLst>
+              <a:ext uri="{FF2B5EF4-FFF2-40B4-BE49-F238E27FC236}">
+                <a16:creationId xmlns:a16="http://schemas.microsoft.com/office/drawing/2014/main" id="{0F235C93-842A-E0C4-683B-97C5A60FF9E0}"/>
+              </a:ext>
+            </a:extLst>
+          </p:cNvPr>
+          <p:cNvSpPr txBox="1"/>
+          <p:nvPr/>
+        </p:nvSpPr>
+        <p:spPr>
+          <a:xfrm>
+            <a:off x="4187475" y="6063734"/>
+            <a:ext cx="3804247" cy="246221"/>
+          </a:xfrm>
+          <a:prstGeom prst="rect">
+            <a:avLst/>
+          </a:prstGeom>
+          <a:noFill/>
+        </p:spPr>
+        <p:txBody>
+          <a:bodyPr wrap="none" rtlCol="0">
+            <a:spAutoFit/>
+          </a:bodyPr>
+          <a:lstStyle/>
+          <a:p>
+            <a:pPr algn="ctr"/>
+            <a:r>
+              <a:rPr lang="ko-KR" altLang="en-US" sz="1000" dirty="0">
+                <a:solidFill>
+                  <a:schemeClr val="tx1">
+                    <a:lumMod val="50000"/>
+                    <a:lumOff val="50000"/>
+                  </a:schemeClr>
+                </a:solidFill>
+                <a:latin typeface="Pretendard Light" panose="02000403000000020004" pitchFamily="2" charset="-127"/>
+                <a:ea typeface="Pretendard Light" panose="02000403000000020004" pitchFamily="2" charset="-127"/>
+                <a:cs typeface="Pretendard Light" panose="02000403000000020004" pitchFamily="2" charset="-127"/>
+              </a:rPr>
+              <a:t>출처</a:t>
+            </a:r>
+            <a:r>
+              <a:rPr lang="en-US" altLang="ko-KR" sz="1000" dirty="0">
+                <a:solidFill>
+                  <a:schemeClr val="tx1">
+                    <a:lumMod val="50000"/>
+                    <a:lumOff val="50000"/>
+                  </a:schemeClr>
+                </a:solidFill>
+                <a:latin typeface="Pretendard Light" panose="02000403000000020004" pitchFamily="2" charset="-127"/>
+                <a:ea typeface="Pretendard Light" panose="02000403000000020004" pitchFamily="2" charset="-127"/>
+                <a:cs typeface="Pretendard Light" panose="02000403000000020004" pitchFamily="2" charset="-127"/>
+              </a:rPr>
+              <a:t>:</a:t>
+            </a:r>
+            <a:r>
+              <a:rPr lang="en-US" altLang="ko-KR" sz="1000" b="0" i="0" u="none" strike="noStrike" dirty="0">
+                <a:solidFill>
+                  <a:schemeClr val="tx1">
+                    <a:lumMod val="50000"/>
+                    <a:lumOff val="50000"/>
+                  </a:schemeClr>
+                </a:solidFill>
+                <a:effectLst/>
+                <a:latin typeface="Pretendard Light" panose="02000403000000020004" pitchFamily="2" charset="-127"/>
+                <a:ea typeface="Pretendard Light" panose="02000403000000020004" pitchFamily="2" charset="-127"/>
+                <a:cs typeface="Pretendard Light" panose="02000403000000020004" pitchFamily="2" charset="-127"/>
+                <a:hlinkClick r:id="rId4">
+                  <a:extLst>
+                    <a:ext uri="{A12FA001-AC4F-418D-AE19-62706E023703}">
+                      <ahyp:hlinkClr xmlns:ahyp="http://schemas.microsoft.com/office/drawing/2018/hyperlinkcolor" val="tx"/>
+                    </a:ext>
+                  </a:extLst>
+                </a:hlinkClick>
+              </a:rPr>
+              <a:t>https://en.wikipedia.org/wiki/</a:t>
+            </a:r>
+            <a:r>
+              <a:rPr lang="en-US" altLang="ko-KR" sz="1000" b="0" i="0" u="none" strike="noStrike" dirty="0" err="1">
+                <a:solidFill>
+                  <a:schemeClr val="tx1">
+                    <a:lumMod val="50000"/>
+                    <a:lumOff val="50000"/>
+                  </a:schemeClr>
+                </a:solidFill>
+                <a:effectLst/>
+                <a:latin typeface="Pretendard Light" panose="02000403000000020004" pitchFamily="2" charset="-127"/>
+                <a:ea typeface="Pretendard Light" panose="02000403000000020004" pitchFamily="2" charset="-127"/>
+                <a:cs typeface="Pretendard Light" panose="02000403000000020004" pitchFamily="2" charset="-127"/>
+                <a:hlinkClick r:id="rId4">
+                  <a:extLst>
+                    <a:ext uri="{A12FA001-AC4F-418D-AE19-62706E023703}">
+                      <ahyp:hlinkClr xmlns:ahyp="http://schemas.microsoft.com/office/drawing/2018/hyperlinkcolor" val="tx"/>
+                    </a:ext>
+                  </a:extLst>
+                </a:hlinkClick>
+              </a:rPr>
+              <a:t>Convolutional_neural_network</a:t>
+            </a:r>
+            <a:endParaRPr lang="ko-KR" altLang="en-US" sz="1000" dirty="0">
+              <a:solidFill>
+                <a:schemeClr val="tx1">
+                  <a:lumMod val="50000"/>
+                  <a:lumOff val="50000"/>
+                </a:schemeClr>
+              </a:solidFill>
+              <a:latin typeface="Pretendard Light" panose="02000403000000020004" pitchFamily="2" charset="-127"/>
+              <a:ea typeface="Pretendard Light" panose="02000403000000020004" pitchFamily="2" charset="-127"/>
+              <a:cs typeface="Pretendard Light" panose="02000403000000020004" pitchFamily="2" charset="-127"/>
+            </a:endParaRPr>
+          </a:p>
+        </p:txBody>
+      </p:sp>
+    </p:spTree>
+    <p:extLst>
+      <p:ext uri="{BB962C8B-B14F-4D97-AF65-F5344CB8AC3E}">
+        <p14:creationId xmlns:p14="http://schemas.microsoft.com/office/powerpoint/2010/main" val="3243970451"/>
+      </p:ext>
+    </p:extLst>
+  </p:cSld>
+  <p:clrMapOvr>
+    <a:masterClrMapping/>
+  </p:clrMapOvr>
+</p:sld>
+</file>
+
+<file path=ppt/slides/slide9.xml><?xml version="1.0" encoding="utf-8"?>
+<p:sld xmlns:a="http://schemas.openxmlformats.org/drawingml/2006/main" xmlns:r="http://schemas.openxmlformats.org/officeDocument/2006/relationships" xmlns:p="http://schemas.openxmlformats.org/presentationml/2006/main">
+  <p:cSld>
+    <p:spTree>
+      <p:nvGrpSpPr>
+        <p:cNvPr id="1" name=""/>
+        <p:cNvGrpSpPr/>
+        <p:nvPr/>
+      </p:nvGrpSpPr>
+      <p:grpSpPr>
+        <a:xfrm>
+          <a:off x="0" y="0"/>
+          <a:ext cx="0" cy="0"/>
+          <a:chOff x="0" y="0"/>
+          <a:chExt cx="0" cy="0"/>
+        </a:xfrm>
+      </p:grpSpPr>
+      <p:sp>
+        <p:nvSpPr>
+          <p:cNvPr id="2" name="제목 1">
+            <a:extLst>
+              <a:ext uri="{FF2B5EF4-FFF2-40B4-BE49-F238E27FC236}">
+                <a16:creationId xmlns:a16="http://schemas.microsoft.com/office/drawing/2014/main" id="{29017EEA-1700-68A7-6D01-92F3863263E2}"/>
+              </a:ext>
+            </a:extLst>
+          </p:cNvPr>
+          <p:cNvSpPr>
+            <a:spLocks noGrp="1"/>
+          </p:cNvSpPr>
+          <p:nvPr>
+            <p:ph type="title"/>
+          </p:nvPr>
+        </p:nvSpPr>
+        <p:spPr/>
+        <p:txBody>
+          <a:bodyPr>
+            <a:normAutofit/>
+          </a:bodyPr>
+          <a:lstStyle/>
+          <a:p>
+            <a:r>
+              <a:rPr lang="en-US" altLang="ko-KR" b="1" dirty="0"/>
+              <a:t>RNN(Recurrent Neural Network)</a:t>
+            </a:r>
+            <a:endParaRPr lang="ko-KR" altLang="en-US" b="1" dirty="0"/>
+          </a:p>
+        </p:txBody>
+      </p:sp>
+      <p:sp>
+        <p:nvSpPr>
+          <p:cNvPr id="3" name="내용 개체 틀 2">
+            <a:extLst>
+              <a:ext uri="{FF2B5EF4-FFF2-40B4-BE49-F238E27FC236}">
+                <a16:creationId xmlns:a16="http://schemas.microsoft.com/office/drawing/2014/main" id="{7427EE51-6539-C4E3-E901-BA804AE94D29}"/>
+              </a:ext>
+            </a:extLst>
+          </p:cNvPr>
+          <p:cNvSpPr>
+            <a:spLocks noGrp="1"/>
+          </p:cNvSpPr>
+          <p:nvPr>
+            <p:ph idx="1"/>
+          </p:nvPr>
+        </p:nvSpPr>
+        <p:spPr>
+          <a:xfrm>
+            <a:off x="238991" y="1145407"/>
+            <a:ext cx="11701221" cy="3902081"/>
+          </a:xfrm>
+        </p:spPr>
+        <p:txBody>
+          <a:bodyPr>
+            <a:noAutofit/>
+          </a:bodyPr>
+          <a:lstStyle/>
+          <a:p>
+            <a:pPr marL="0" indent="0">
+              <a:lnSpc>
+                <a:spcPct val="150000"/>
+              </a:lnSpc>
+              <a:buNone/>
+            </a:pPr>
+            <a:r>
+              <a:rPr lang="ko-KR" altLang="en-US" sz="2400" dirty="0"/>
+              <a:t>💡 순차적인 데이터의 이전 정보를 기억하여 현재 입력 처리에 반영하는 순환 구조의 인공 신경망</a:t>
+            </a:r>
+            <a:endParaRPr lang="en-US" altLang="ko-KR" sz="2400" dirty="0"/>
+          </a:p>
+          <a:p>
+            <a:pPr lvl="1">
+              <a:lnSpc>
+                <a:spcPct val="150000"/>
+              </a:lnSpc>
+              <a:buFont typeface="Wingdings" pitchFamily="2" charset="2"/>
+              <a:buChar char="§"/>
+            </a:pPr>
+            <a:r>
+              <a:rPr lang="ko-KR" altLang="en-US" sz="2000" dirty="0"/>
+              <a:t>시간적 데이터</a:t>
+            </a:r>
+            <a:r>
+              <a:rPr lang="en-US" altLang="ko-KR" sz="2000" dirty="0"/>
+              <a:t>(</a:t>
+            </a:r>
+            <a:r>
+              <a:rPr lang="ko-KR" altLang="en-US" sz="2000" dirty="0" err="1"/>
+              <a:t>시계열</a:t>
+            </a:r>
+            <a:r>
+              <a:rPr lang="en-US" altLang="ko-KR" sz="2000" dirty="0"/>
+              <a:t>, </a:t>
+            </a:r>
+            <a:r>
+              <a:rPr lang="ko-KR" altLang="en-US" sz="2000" dirty="0"/>
+              <a:t>언어 데이터</a:t>
+            </a:r>
+            <a:r>
+              <a:rPr lang="en-US" altLang="ko-KR" sz="2000" dirty="0"/>
+              <a:t>) </a:t>
+            </a:r>
+            <a:r>
+              <a:rPr lang="ko-KR" altLang="en-US" sz="2000" dirty="0"/>
+              <a:t>처리에 특화된 신경망</a:t>
+            </a:r>
+            <a:r>
+              <a:rPr lang="en-US" altLang="ko-KR" sz="2000" dirty="0"/>
+              <a:t>.</a:t>
+            </a:r>
+          </a:p>
+          <a:p>
+            <a:pPr lvl="1">
+              <a:lnSpc>
+                <a:spcPct val="150000"/>
+              </a:lnSpc>
+              <a:buFont typeface="Wingdings" pitchFamily="2" charset="2"/>
+              <a:buChar char="§"/>
+            </a:pPr>
+            <a:r>
+              <a:rPr lang="ko-KR" altLang="en-US" sz="2000" dirty="0"/>
+              <a:t>이전 단계의 출력을 다음 단계의 입력으로 사용하여 데이터 간 </a:t>
+            </a:r>
+            <a:r>
+              <a:rPr lang="ko-KR" altLang="en-US" sz="2000" b="1" dirty="0">
+                <a:solidFill>
+                  <a:srgbClr val="FF0000"/>
+                </a:solidFill>
+              </a:rPr>
+              <a:t>연속성</a:t>
+            </a:r>
+            <a:r>
+              <a:rPr lang="ko-KR" altLang="en-US" sz="2000" dirty="0"/>
+              <a:t> 반영</a:t>
+            </a:r>
+            <a:r>
+              <a:rPr lang="en-US" altLang="ko-KR" sz="2000" dirty="0"/>
+              <a:t>.</a:t>
+            </a:r>
+          </a:p>
+        </p:txBody>
+      </p:sp>
+      <p:sp>
+        <p:nvSpPr>
+          <p:cNvPr id="4" name="날짜 개체 틀 3">
+            <a:extLst>
+              <a:ext uri="{FF2B5EF4-FFF2-40B4-BE49-F238E27FC236}">
+                <a16:creationId xmlns:a16="http://schemas.microsoft.com/office/drawing/2014/main" id="{B436F977-2F80-A369-4870-4CFEEDC26E7F}"/>
+              </a:ext>
+            </a:extLst>
+          </p:cNvPr>
+          <p:cNvSpPr>
+            <a:spLocks noGrp="1"/>
+          </p:cNvSpPr>
+          <p:nvPr>
+            <p:ph type="dt" sz="half" idx="10"/>
+          </p:nvPr>
+        </p:nvSpPr>
+        <p:spPr/>
+        <p:txBody>
+          <a:bodyPr/>
+          <a:lstStyle/>
+          <a:p>
+            <a:fld id="{0F78D9C4-20C1-4B15-A116-16DC77AD9A1E}" type="datetime1">
+              <a:rPr lang="ko-KR" altLang="en-US" smtClean="0"/>
+              <a:t>2026-02-20</a:t>
+            </a:fld>
+            <a:endParaRPr lang="ko-KR" altLang="en-US"/>
+          </a:p>
+        </p:txBody>
+      </p:sp>
+      <p:sp>
+        <p:nvSpPr>
+          <p:cNvPr id="5" name="슬라이드 번호 개체 틀 4">
+            <a:extLst>
+              <a:ext uri="{FF2B5EF4-FFF2-40B4-BE49-F238E27FC236}">
+                <a16:creationId xmlns:a16="http://schemas.microsoft.com/office/drawing/2014/main" id="{58AE5165-246F-D448-ADAB-3B880493009B}"/>
+              </a:ext>
+            </a:extLst>
+          </p:cNvPr>
+          <p:cNvSpPr>
+            <a:spLocks noGrp="1"/>
+          </p:cNvSpPr>
+          <p:nvPr>
+            <p:ph type="sldNum" sz="quarter" idx="12"/>
+          </p:nvPr>
+        </p:nvSpPr>
+        <p:spPr/>
+        <p:txBody>
+          <a:bodyPr/>
+          <a:lstStyle/>
+          <a:p>
+            <a:fld id="{083A2CE0-18CD-4102-B738-4ACFF9E68BA4}" type="slidenum">
+              <a:rPr lang="ko-KR" altLang="en-US" smtClean="0"/>
+              <a:t>9</a:t>
+            </a:fld>
+            <a:endParaRPr lang="ko-KR" altLang="en-US"/>
+          </a:p>
+        </p:txBody>
+      </p:sp>
+      <p:grpSp>
+        <p:nvGrpSpPr>
+          <p:cNvPr id="10" name="그룹 9"/>
+          <p:cNvGrpSpPr/>
+          <p:nvPr/>
+        </p:nvGrpSpPr>
+        <p:grpSpPr>
+          <a:xfrm>
+            <a:off x="1776906" y="3028713"/>
+            <a:ext cx="8625389" cy="2976910"/>
+            <a:chOff x="1636211" y="2752560"/>
+            <a:chExt cx="8625389" cy="2976910"/>
+          </a:xfrm>
+        </p:grpSpPr>
+        <p:pic>
+          <p:nvPicPr>
+            <p:cNvPr id="6146" name="Picture 2" descr="Deep Learning] RNN 알고리즘 개념 이해"/>
+            <p:cNvPicPr>
+              <a:picLocks noChangeAspect="1" noChangeArrowheads="1"/>
+            </p:cNvPicPr>
+            <p:nvPr/>
+          </p:nvPicPr>
+          <p:blipFill rotWithShape="1">
+            <a:blip r:embed="rId3">
+              <a:extLst>
+                <a:ext uri="{28A0092B-C50C-407E-A947-70E740481C1C}">
+                  <a14:useLocalDpi xmlns:a14="http://schemas.microsoft.com/office/drawing/2010/main" val="0"/>
+                </a:ext>
+              </a:extLst>
+            </a:blip>
+            <a:srcRect r="3298"/>
+            <a:stretch>
+              <a:fillRect/>
+            </a:stretch>
+          </p:blipFill>
+          <p:spPr bwMode="auto">
+            <a:xfrm>
+              <a:off x="1636211" y="2752560"/>
+              <a:ext cx="8625389" cy="2976910"/>
+            </a:xfrm>
+            <a:prstGeom prst="rect">
+              <a:avLst/>
+            </a:prstGeom>
+            <a:noFill/>
+            <a:extLst>
+              <a:ext uri="{909E8E84-426E-40DD-AFC4-6F175D3DCCD1}">
+                <a14:hiddenFill xmlns:a14="http://schemas.microsoft.com/office/drawing/2010/main">
+                  <a:solidFill>
+                    <a:srgbClr val="FFFFFF"/>
+                  </a:solidFill>
+                </a14:hiddenFill>
+              </a:ext>
+            </a:extLst>
+          </p:spPr>
+        </p:pic>
+        <p:sp>
+          <p:nvSpPr>
+            <p:cNvPr id="9" name="직사각형 8"/>
+            <p:cNvSpPr/>
+            <p:nvPr/>
+          </p:nvSpPr>
+          <p:spPr>
+            <a:xfrm>
+              <a:off x="4735285" y="5483249"/>
+              <a:ext cx="2414443" cy="246221"/>
+            </a:xfrm>
+            <a:prstGeom prst="rect">
+              <a:avLst/>
+            </a:prstGeom>
+          </p:spPr>
+          <p:txBody>
+            <a:bodyPr wrap="none">
+              <a:spAutoFit/>
+            </a:bodyPr>
+            <a:lstStyle/>
+            <a:p>
+              <a:pPr algn="ctr"/>
+              <a:r>
+                <a:rPr lang="en-US" altLang="ko-KR" sz="1000" dirty="0">
+                  <a:solidFill>
+                    <a:schemeClr val="tx1">
+                      <a:lumMod val="50000"/>
+                      <a:lumOff val="50000"/>
+                    </a:schemeClr>
+                  </a:solidFill>
+                  <a:latin typeface="Pretendard Light" panose="02000403000000020004" pitchFamily="2" charset="-127"/>
+                  <a:ea typeface="Pretendard Light" panose="02000403000000020004" pitchFamily="2" charset="-127"/>
+                  <a:cs typeface="Pretendard Light" panose="02000403000000020004" pitchFamily="2" charset="-127"/>
+                </a:rPr>
+                <a:t>[</a:t>
+              </a:r>
+              <a:r>
+                <a:rPr lang="ko-KR" altLang="en-US" sz="1000" dirty="0">
+                  <a:solidFill>
+                    <a:schemeClr val="tx1">
+                      <a:lumMod val="50000"/>
+                      <a:lumOff val="50000"/>
+                    </a:schemeClr>
+                  </a:solidFill>
+                  <a:latin typeface="Pretendard Light" panose="02000403000000020004" pitchFamily="2" charset="-127"/>
+                  <a:ea typeface="Pretendard Light" panose="02000403000000020004" pitchFamily="2" charset="-127"/>
+                  <a:cs typeface="Pretendard Light" panose="02000403000000020004" pitchFamily="2" charset="-127"/>
+                </a:rPr>
+                <a:t>출처</a:t>
+              </a:r>
+              <a:r>
+                <a:rPr lang="en-US" altLang="ko-KR" sz="1000" dirty="0">
+                  <a:solidFill>
+                    <a:schemeClr val="tx1">
+                      <a:lumMod val="50000"/>
+                      <a:lumOff val="50000"/>
+                    </a:schemeClr>
+                  </a:solidFill>
+                  <a:latin typeface="Pretendard Light" panose="02000403000000020004" pitchFamily="2" charset="-127"/>
+                  <a:ea typeface="Pretendard Light" panose="02000403000000020004" pitchFamily="2" charset="-127"/>
+                  <a:cs typeface="Pretendard Light" panose="02000403000000020004" pitchFamily="2" charset="-127"/>
+                </a:rPr>
+                <a:t>] https://heytech.tistory.com/440</a:t>
+              </a:r>
+              <a:endParaRPr lang="ko-KR" altLang="en-US" sz="1000" dirty="0">
+                <a:solidFill>
+                  <a:schemeClr val="tx1">
+                    <a:lumMod val="50000"/>
+                    <a:lumOff val="50000"/>
+                  </a:schemeClr>
+                </a:solidFill>
+                <a:latin typeface="Pretendard Light" panose="02000403000000020004" pitchFamily="2" charset="-127"/>
+                <a:ea typeface="Pretendard Light" panose="02000403000000020004" pitchFamily="2" charset="-127"/>
+                <a:cs typeface="Pretendard Light" panose="02000403000000020004" pitchFamily="2" charset="-127"/>
+              </a:endParaRPr>
+            </a:p>
+          </p:txBody>
+        </p:sp>
+      </p:grpSp>
+    </p:spTree>
+    <p:extLst>
+      <p:ext uri="{BB962C8B-B14F-4D97-AF65-F5344CB8AC3E}">
+        <p14:creationId xmlns:p14="http://schemas.microsoft.com/office/powerpoint/2010/main" val="1742215221"/>
       </p:ext>
     </p:extLst>
   </p:cSld>
